--- a/documents/doc-3-feature_proposal.pptx
+++ b/documents/doc-3-feature_proposal.pptx
@@ -23,9 +23,10 @@
     <p:sldId id="271" r:id="rId17"/>
     <p:sldId id="272" r:id="rId18"/>
     <p:sldId id="273" r:id="rId19"/>
+    <p:sldId id="274" r:id="rId20"/>
   </p:sldIdLst>
   <p:notesMasterIdLst>
-    <p:notesMasterId r:id="rId20"/>
+    <p:notesMasterId r:id="rId21"/>
   </p:notesMasterIdLst>
   <p:sldSz cx="12192000" cy="6858000"/>
   <p:notesSz cx="6858000" cy="12192000"/>
@@ -1335,6 +1336,94 @@
             <a:fld id="{F7021451-1387-4CA6-816F-3879F97B5CBC}" type="slidenum">
               <a:rPr lang="en-US"/>
               <a:t>18</a:t>
+            </a:fld>
+            <a:endParaRPr lang="en-US"/>
+          </a:p>
+        </p:txBody>
+      </p:sp>
+    </p:spTree>
+    <p:extLst>
+      <p:ext uri="{BB962C8B-B14F-4D97-AF65-F5344CB8AC3E}">
+        <p14:creationId xmlns:p14="http://schemas.microsoft.com/office/powerpoint/2010/main" val="1024086991"/>
+      </p:ext>
+    </p:extLst>
+  </p:cSld>
+  <p:clrMapOvr>
+    <a:masterClrMapping/>
+  </p:clrMapOvr>
+</p:notes>
+</file>
+
+<file path=ppt/notesSlides/notesSlide19.xml><?xml version="1.0" encoding="utf-8"?>
+<p:notes xmlns:a="http://schemas.openxmlformats.org/drawingml/2006/main" xmlns:r="http://schemas.openxmlformats.org/officeDocument/2006/relationships" xmlns:p="http://schemas.openxmlformats.org/presentationml/2006/main">
+  <p:cSld>
+    <p:spTree>
+      <p:nvGrpSpPr>
+        <p:cNvPr id="1" name=""/>
+        <p:cNvGrpSpPr/>
+        <p:nvPr/>
+      </p:nvGrpSpPr>
+      <p:grpSpPr>
+        <a:xfrm>
+          <a:off x="0" y="0"/>
+          <a:ext cx="0" cy="0"/>
+          <a:chOff x="0" y="0"/>
+          <a:chExt cx="0" cy="0"/>
+        </a:xfrm>
+      </p:grpSpPr>
+      <p:sp>
+        <p:nvSpPr>
+          <p:cNvPr id="2" name="Slide Image Placeholder 1"/>
+          <p:cNvSpPr>
+            <a:spLocks noGrp="1" noRot="1" noChangeAspect="1"/>
+          </p:cNvSpPr>
+          <p:nvPr>
+            <p:ph type="sldImg"/>
+          </p:nvPr>
+        </p:nvSpPr>
+        <p:spPr/>
+      </p:sp>
+      <p:sp>
+        <p:nvSpPr>
+          <p:cNvPr id="3" name="Notes Placeholder 2"/>
+          <p:cNvSpPr>
+            <a:spLocks noGrp="1"/>
+          </p:cNvSpPr>
+          <p:nvPr>
+            <p:ph type="body" idx="1"/>
+          </p:nvPr>
+        </p:nvSpPr>
+        <p:spPr/>
+        <p:txBody>
+          <a:bodyPr/>
+          <a:lstStyle/>
+          <a:p>
+            <a:r>
+              <a:rPr lang="en-US" dirty="0"/>
+              <a:t/>
+            </a:r>
+            <a:endParaRPr lang="en-US" dirty="0"/>
+          </a:p>
+        </p:txBody>
+      </p:sp>
+      <p:sp>
+        <p:nvSpPr>
+          <p:cNvPr id="4" name="Slide Number Placeholder 3"/>
+          <p:cNvSpPr>
+            <a:spLocks noGrp="1"/>
+          </p:cNvSpPr>
+          <p:nvPr>
+            <p:ph type="sldNum" sz="quarter" idx="10"/>
+          </p:nvPr>
+        </p:nvSpPr>
+        <p:spPr/>
+        <p:txBody>
+          <a:bodyPr/>
+          <a:lstStyle/>
+          <a:p>
+            <a:fld id="{F7021451-1387-4CA6-816F-3879F97B5CBC}" type="slidenum">
+              <a:rPr lang="en-US"/>
+              <a:t>19</a:t>
             </a:fld>
             <a:endParaRPr lang="en-US"/>
           </a:p>
@@ -2487,7 +2576,7 @@
                   <a:srgbClr val="FFFFFF"/>
                 </a:solidFill>
               </a:rPr>
-              <a:t>会議AIサマリー基盤 機能提案</a:t>
+              <a:t>会議サマリー自動化機能提案</a:t>
             </a:r>
             <a:endParaRPr lang="en-US" sz="3600" dirty="0"/>
           </a:p>
@@ -2523,7 +2612,7 @@
                   <a:srgbClr val="CCCCCC"/>
                 </a:solidFill>
               </a:rPr>
-              <a:t>音声入力・資料自動生成・RAG統合で会議から実行までを高速化</a:t>
+              <a:t>音声入力・RAG統合・資料自動生成を核にしたMVP構想</a:t>
             </a:r>
             <a:endParaRPr lang="en-US" sz="1800" dirty="0"/>
           </a:p>
@@ -2689,7 +2778,7 @@
                   <a:srgbClr val="2D3748"/>
                 </a:solidFill>
               </a:rPr>
-              <a:t>👤 提案資料</a:t>
+              <a:t>👤 Feature Proposal</a:t>
             </a:r>
             <a:endParaRPr lang="en-US" sz="1300" dirty="0"/>
           </a:p>
@@ -2757,7 +2846,7 @@
                   <a:srgbClr val="FFFFFF"/>
                 </a:solidFill>
               </a:rPr>
-              <a:t>Success Criteria</a:t>
+              <a:t>3. 品質・成立条件</a:t>
             </a:r>
             <a:endParaRPr lang="en-US" sz="2800" dirty="0"/>
           </a:p>
@@ -2796,7 +2885,7 @@
                   <a:srgbClr val="FFFFFF"/>
                 </a:solidFill>
               </a:rPr>
-              <a:t>MVPは速度・復元性・統合品質・認識精度で評価する</a:t>
+              <a:t>受け入れ基準・依存関係・リスクを可視化</a:t>
             </a:r>
             <a:endParaRPr lang="en-US" sz="1400" dirty="0"/>
           </a:p>
@@ -2857,7 +2946,7 @@
                   <a:srgbClr val="2D3748"/>
                 </a:solidFill>
               </a:rPr>
-              <a:t>📊 受け入れ基準 KPI</a:t>
+              <a:t>📊 受け入れ基準KPI</a:t>
             </a:r>
             <a:endParaRPr lang="en-US" sz="2800" dirty="0"/>
           </a:p>
@@ -2865,61 +2954,14 @@
       </p:sp>
       <p:sp>
         <p:nvSpPr>
-          <p:cNvPr id="3" name="Shape 1"/>
+          <p:cNvPr id="3" name="Text 1"/>
           <p:cNvSpPr/>
           <p:nvPr/>
         </p:nvSpPr>
         <p:spPr>
           <a:xfrm>
-            <a:off x="457200" y="1188720"/>
-            <a:ext cx="5500116" cy="1463040"/>
-          </a:xfrm>
-          <a:prstGeom prst="roundRect">
-            <a:avLst>
-              <a:gd name="adj" fmla="val 6250"/>
-            </a:avLst>
-          </a:prstGeom>
-          <a:solidFill>
-            <a:srgbClr val="F7FAFC"/>
-          </a:solidFill>
-          <a:ln w="12700">
-            <a:solidFill>
-              <a:srgbClr val="667EEA"/>
-            </a:solidFill>
-            <a:prstDash val="solid"/>
-          </a:ln>
-        </p:spPr>
-      </p:sp>
-      <p:sp>
-        <p:nvSpPr>
-          <p:cNvPr id="4" name="Shape 2"/>
-          <p:cNvSpPr/>
-          <p:nvPr/>
-        </p:nvSpPr>
-        <p:spPr>
-          <a:xfrm>
-            <a:off x="457200" y="1188720"/>
-            <a:ext cx="54864" cy="1463040"/>
-          </a:xfrm>
-          <a:prstGeom prst="rect">
-            <a:avLst/>
-          </a:prstGeom>
-          <a:solidFill>
-            <a:srgbClr val="667EEA"/>
-          </a:solidFill>
-          <a:ln/>
-        </p:spPr>
-      </p:sp>
-      <p:sp>
-        <p:nvSpPr>
-          <p:cNvPr id="5" name="Text 3"/>
-          <p:cNvSpPr/>
-          <p:nvPr/>
-        </p:nvSpPr>
-        <p:spPr>
-          <a:xfrm>
-            <a:off x="594360" y="1280160"/>
-            <a:ext cx="5225796" cy="365760"/>
+            <a:off x="731520" y="1188720"/>
+            <a:ext cx="10725912" cy="3383280"/>
           </a:xfrm>
           <a:prstGeom prst="rect">
             <a:avLst/>
@@ -2932,100 +2974,1169 @@
           <a:lstStyle/>
           <a:p>
             <a:pPr indent="0" marL="0">
-              <a:buNone/>
-            </a:pPr>
-            <a:r>
-              <a:rPr lang="en-US" sz="1300" b="1" dirty="0">
-                <a:solidFill>
-                  <a:srgbClr val="2D3748"/>
-                </a:solidFill>
-              </a:rPr>
-              <a:t>章構成 正常生成</a:t>
-            </a:r>
-            <a:endParaRPr lang="en-US" sz="1300" dirty="0"/>
-          </a:p>
-        </p:txBody>
-      </p:sp>
-      <p:sp>
-        <p:nvSpPr>
-          <p:cNvPr id="6" name="Shape 4"/>
-          <p:cNvSpPr/>
-          <p:nvPr/>
-        </p:nvSpPr>
-        <p:spPr>
-          <a:xfrm>
-            <a:off x="6231636" y="1188720"/>
-            <a:ext cx="5500116" cy="1463040"/>
-          </a:xfrm>
-          <a:prstGeom prst="roundRect">
-            <a:avLst>
-              <a:gd name="adj" fmla="val 6250"/>
-            </a:avLst>
-          </a:prstGeom>
-          <a:solidFill>
-            <a:srgbClr val="F7FAFC"/>
-          </a:solidFill>
-          <a:ln w="12700">
-            <a:solidFill>
-              <a:srgbClr val="48BB78"/>
-            </a:solidFill>
-            <a:prstDash val="solid"/>
-          </a:ln>
-        </p:spPr>
-      </p:sp>
-      <p:sp>
-        <p:nvSpPr>
-          <p:cNvPr id="7" name="Shape 5"/>
-          <p:cNvSpPr/>
-          <p:nvPr/>
-        </p:nvSpPr>
-        <p:spPr>
-          <a:xfrm>
-            <a:off x="6231636" y="1188720"/>
-            <a:ext cx="54864" cy="1463040"/>
-          </a:xfrm>
-          <a:prstGeom prst="rect">
-            <a:avLst/>
-          </a:prstGeom>
-          <a:solidFill>
-            <a:srgbClr val="48BB78"/>
-          </a:solidFill>
-          <a:ln/>
-        </p:spPr>
-      </p:sp>
-      <p:sp>
-        <p:nvSpPr>
-          <p:cNvPr id="8" name="Text 6"/>
-          <p:cNvSpPr/>
-          <p:nvPr/>
-        </p:nvSpPr>
-        <p:spPr>
-          <a:xfrm>
-            <a:off x="6368796" y="1280160"/>
-            <a:ext cx="5225796" cy="365760"/>
-          </a:xfrm>
-          <a:prstGeom prst="rect">
-            <a:avLst/>
-          </a:prstGeom>
-          <a:noFill/>
-          <a:ln/>
-        </p:spPr>
-        <p:txBody>
-          <a:bodyPr wrap="square" rtlCol="0" anchor="t"/>
-          <a:lstStyle/>
-          <a:p>
-            <a:pPr indent="0" marL="0">
-              <a:buNone/>
-            </a:pPr>
-            <a:r>
-              <a:rPr lang="en-US" sz="1300" b="1" dirty="0">
-                <a:solidFill>
-                  <a:srgbClr val="2D3748"/>
-                </a:solidFill>
-              </a:rPr>
-              <a:t>統合要約で担保</a:t>
-            </a:r>
-            <a:endParaRPr lang="en-US" sz="1300" dirty="0"/>
+              <a:lnSpc>
+                <a:spcPct val="140000"/>
+              </a:lnSpc>
+              <a:buNone/>
+            </a:pPr>
+            <a:r>
+              <a:rPr lang="en-US" sz="1400" dirty="0">
+                <a:solidFill>
+                  <a:srgbClr val="2D3748"/>
+                </a:solidFill>
+              </a:rPr>
+              <a:t>≤1分</a:t>
+            </a:r>
+            <a:endParaRPr lang="en-US" sz="1400" dirty="0"/>
+          </a:p>
+          <a:p>
+            <a:pPr indent="0" marL="0">
+              <a:lnSpc>
+                <a:spcPct val="140000"/>
+              </a:lnSpc>
+              <a:buNone/>
+            </a:pPr>
+            <a:endParaRPr lang="en-US" sz="1400" dirty="0"/>
+          </a:p>
+          <a:p>
+            <a:pPr indent="0" marL="0">
+              <a:lnSpc>
+                <a:spcPct val="140000"/>
+              </a:lnSpc>
+              <a:buNone/>
+            </a:pPr>
+            <a:r>
+              <a:rPr lang="en-US" sz="1400" dirty="0">
+                <a:solidFill>
+                  <a:srgbClr val="2D3748"/>
+                </a:solidFill>
+              </a:rPr>
+              <a:t>      </a:t>
+            </a:r>
+            <a:endParaRPr lang="en-US" sz="1400" dirty="0"/>
+          </a:p>
+          <a:p>
+            <a:pPr indent="0" marL="0">
+              <a:lnSpc>
+                <a:spcPct val="140000"/>
+              </a:lnSpc>
+              <a:buNone/>
+            </a:pPr>
+            <a:endParaRPr lang="en-US" sz="1400" dirty="0"/>
+          </a:p>
+          <a:p>
+            <a:pPr indent="0" marL="0">
+              <a:lnSpc>
+                <a:spcPct val="140000"/>
+              </a:lnSpc>
+              <a:buNone/>
+            </a:pPr>
+            <a:r>
+              <a:rPr lang="en-US" sz="1400" dirty="0">
+                <a:solidFill>
+                  <a:srgbClr val="2D3748"/>
+                </a:solidFill>
+              </a:rPr>
+              <a:t>      </a:t>
+            </a:r>
+            <a:endParaRPr lang="en-US" sz="1400" dirty="0"/>
+          </a:p>
+          <a:p>
+            <a:pPr indent="0" marL="0">
+              <a:lnSpc>
+                <a:spcPct val="140000"/>
+              </a:lnSpc>
+              <a:buNone/>
+            </a:pPr>
+            <a:r>
+              <a:rPr lang="en-US" sz="1400" dirty="0">
+                <a:solidFill>
+                  <a:srgbClr val="2D3748"/>
+                </a:solidFill>
+              </a:rPr>
+              <a:t>サマリー生成速度</a:t>
+            </a:r>
+            <a:endParaRPr lang="en-US" sz="1400" dirty="0"/>
+          </a:p>
+          <a:p>
+            <a:pPr indent="0" marL="0">
+              <a:lnSpc>
+                <a:spcPct val="140000"/>
+              </a:lnSpc>
+              <a:buNone/>
+            </a:pPr>
+            <a:endParaRPr lang="en-US" sz="1400" dirty="0"/>
+          </a:p>
+          <a:p>
+            <a:pPr indent="0" marL="0">
+              <a:lnSpc>
+                <a:spcPct val="140000"/>
+              </a:lnSpc>
+              <a:buNone/>
+            </a:pPr>
+            <a:r>
+              <a:rPr lang="en-US" sz="1400" dirty="0">
+                <a:solidFill>
+                  <a:srgbClr val="2D3748"/>
+                </a:solidFill>
+              </a:rPr>
+              <a:t>    </a:t>
+            </a:r>
+            <a:endParaRPr lang="en-US" sz="1400" dirty="0"/>
+          </a:p>
+          <a:p>
+            <a:pPr indent="0" marL="0">
+              <a:lnSpc>
+                <a:spcPct val="140000"/>
+              </a:lnSpc>
+              <a:buNone/>
+            </a:pPr>
+            <a:endParaRPr lang="en-US" sz="1400" dirty="0"/>
+          </a:p>
+          <a:p>
+            <a:pPr indent="0" marL="0">
+              <a:lnSpc>
+                <a:spcPct val="140000"/>
+              </a:lnSpc>
+              <a:buNone/>
+            </a:pPr>
+            <a:r>
+              <a:rPr lang="en-US" sz="1400" dirty="0">
+                <a:solidFill>
+                  <a:srgbClr val="2D3748"/>
+                </a:solidFill>
+              </a:rPr>
+              <a:t>    </a:t>
+            </a:r>
+            <a:endParaRPr lang="en-US" sz="1400" dirty="0"/>
+          </a:p>
+          <a:p>
+            <a:pPr indent="0" marL="0">
+              <a:lnSpc>
+                <a:spcPct val="140000"/>
+              </a:lnSpc>
+              <a:buNone/>
+            </a:pPr>
+            <a:endParaRPr lang="en-US" sz="1400" dirty="0"/>
+          </a:p>
+          <a:p>
+            <a:pPr indent="0" marL="0">
+              <a:lnSpc>
+                <a:spcPct val="140000"/>
+              </a:lnSpc>
+              <a:buNone/>
+            </a:pPr>
+            <a:r>
+              <a:rPr lang="en-US" sz="1400" dirty="0">
+                <a:solidFill>
+                  <a:srgbClr val="2D3748"/>
+                </a:solidFill>
+              </a:rPr>
+              <a:t>      </a:t>
+            </a:r>
+            <a:endParaRPr lang="en-US" sz="1400" dirty="0"/>
+          </a:p>
+          <a:p>
+            <a:pPr indent="0" marL="0">
+              <a:lnSpc>
+                <a:spcPct val="140000"/>
+              </a:lnSpc>
+              <a:buNone/>
+            </a:pPr>
+            <a:endParaRPr lang="en-US" sz="1400" dirty="0"/>
+          </a:p>
+          <a:p>
+            <a:pPr indent="0" marL="0">
+              <a:lnSpc>
+                <a:spcPct val="140000"/>
+              </a:lnSpc>
+              <a:buNone/>
+            </a:pPr>
+            <a:r>
+              <a:rPr lang="en-US" sz="1400" dirty="0">
+                <a:solidFill>
+                  <a:srgbClr val="2D3748"/>
+                </a:solidFill>
+              </a:rPr>
+              <a:t>        </a:t>
+            </a:r>
+            <a:endParaRPr lang="en-US" sz="1400" dirty="0"/>
+          </a:p>
+          <a:p>
+            <a:pPr indent="0" marL="0">
+              <a:lnSpc>
+                <a:spcPct val="140000"/>
+              </a:lnSpc>
+              <a:buNone/>
+            </a:pPr>
+            <a:r>
+              <a:rPr lang="en-US" sz="1400" dirty="0">
+                <a:solidFill>
+                  <a:srgbClr val="2D3748"/>
+                </a:solidFill>
+              </a:rPr>
+              <a:t>90%+</a:t>
+            </a:r>
+            <a:endParaRPr lang="en-US" sz="1400" dirty="0"/>
+          </a:p>
+          <a:p>
+            <a:pPr indent="0" marL="0">
+              <a:lnSpc>
+                <a:spcPct val="140000"/>
+              </a:lnSpc>
+              <a:buNone/>
+            </a:pPr>
+            <a:endParaRPr lang="en-US" sz="1400" dirty="0"/>
+          </a:p>
+          <a:p>
+            <a:pPr indent="0" marL="0">
+              <a:lnSpc>
+                <a:spcPct val="140000"/>
+              </a:lnSpc>
+              <a:buNone/>
+            </a:pPr>
+            <a:r>
+              <a:rPr lang="en-US" sz="1400" dirty="0">
+                <a:solidFill>
+                  <a:srgbClr val="2D3748"/>
+                </a:solidFill>
+              </a:rPr>
+              <a:t>      </a:t>
+            </a:r>
+            <a:endParaRPr lang="en-US" sz="1400" dirty="0"/>
+          </a:p>
+          <a:p>
+            <a:pPr indent="0" marL="0">
+              <a:lnSpc>
+                <a:spcPct val="140000"/>
+              </a:lnSpc>
+              <a:buNone/>
+            </a:pPr>
+            <a:endParaRPr lang="en-US" sz="1400" dirty="0"/>
+          </a:p>
+          <a:p>
+            <a:pPr indent="0" marL="0">
+              <a:lnSpc>
+                <a:spcPct val="140000"/>
+              </a:lnSpc>
+              <a:buNone/>
+            </a:pPr>
+            <a:r>
+              <a:rPr lang="en-US" sz="1400" dirty="0">
+                <a:solidFill>
+                  <a:srgbClr val="2D3748"/>
+                </a:solidFill>
+              </a:rPr>
+              <a:t>      </a:t>
+            </a:r>
+            <a:endParaRPr lang="en-US" sz="1400" dirty="0"/>
+          </a:p>
+          <a:p>
+            <a:pPr indent="0" marL="0">
+              <a:lnSpc>
+                <a:spcPct val="140000"/>
+              </a:lnSpc>
+              <a:buNone/>
+            </a:pPr>
+            <a:r>
+              <a:rPr lang="en-US" sz="1400" dirty="0">
+                <a:solidFill>
+                  <a:srgbClr val="2D3748"/>
+                </a:solidFill>
+              </a:rPr>
+              <a:t>ライブ字幕精度</a:t>
+            </a:r>
+            <a:endParaRPr lang="en-US" sz="1400" dirty="0"/>
+          </a:p>
+          <a:p>
+            <a:pPr indent="0" marL="0">
+              <a:lnSpc>
+                <a:spcPct val="140000"/>
+              </a:lnSpc>
+              <a:buNone/>
+            </a:pPr>
+            <a:endParaRPr lang="en-US" sz="1400" dirty="0"/>
+          </a:p>
+          <a:p>
+            <a:pPr indent="0" marL="0">
+              <a:lnSpc>
+                <a:spcPct val="140000"/>
+              </a:lnSpc>
+              <a:buNone/>
+            </a:pPr>
+            <a:r>
+              <a:rPr lang="en-US" sz="1400" dirty="0">
+                <a:solidFill>
+                  <a:srgbClr val="2D3748"/>
+                </a:solidFill>
+              </a:rPr>
+              <a:t>    </a:t>
+            </a:r>
+            <a:endParaRPr lang="en-US" sz="1400" dirty="0"/>
+          </a:p>
+          <a:p>
+            <a:pPr indent="0" marL="0">
+              <a:lnSpc>
+                <a:spcPct val="140000"/>
+              </a:lnSpc>
+              <a:buNone/>
+            </a:pPr>
+            <a:endParaRPr lang="en-US" sz="1400" dirty="0"/>
+          </a:p>
+          <a:p>
+            <a:pPr indent="0" marL="0">
+              <a:lnSpc>
+                <a:spcPct val="140000"/>
+              </a:lnSpc>
+              <a:buNone/>
+            </a:pPr>
+            <a:r>
+              <a:rPr lang="en-US" sz="1400" dirty="0">
+                <a:solidFill>
+                  <a:srgbClr val="2D3748"/>
+                </a:solidFill>
+              </a:rPr>
+              <a:t>    </a:t>
+            </a:r>
+            <a:endParaRPr lang="en-US" sz="1400" dirty="0"/>
+          </a:p>
+          <a:p>
+            <a:pPr indent="0" marL="0">
+              <a:lnSpc>
+                <a:spcPct val="140000"/>
+              </a:lnSpc>
+              <a:buNone/>
+            </a:pPr>
+            <a:endParaRPr lang="en-US" sz="1400" dirty="0"/>
+          </a:p>
+          <a:p>
+            <a:pPr indent="0" marL="0">
+              <a:lnSpc>
+                <a:spcPct val="140000"/>
+              </a:lnSpc>
+              <a:buNone/>
+            </a:pPr>
+            <a:r>
+              <a:rPr lang="en-US" sz="1400" dirty="0">
+                <a:solidFill>
+                  <a:srgbClr val="2D3748"/>
+                </a:solidFill>
+              </a:rPr>
+              <a:t>      </a:t>
+            </a:r>
+            <a:endParaRPr lang="en-US" sz="1400" dirty="0"/>
+          </a:p>
+          <a:p>
+            <a:pPr indent="0" marL="0">
+              <a:lnSpc>
+                <a:spcPct val="140000"/>
+              </a:lnSpc>
+              <a:buNone/>
+            </a:pPr>
+            <a:endParaRPr lang="en-US" sz="1400" dirty="0"/>
+          </a:p>
+          <a:p>
+            <a:pPr indent="0" marL="0">
+              <a:lnSpc>
+                <a:spcPct val="140000"/>
+              </a:lnSpc>
+              <a:buNone/>
+            </a:pPr>
+            <a:r>
+              <a:rPr lang="en-US" sz="1400" dirty="0">
+                <a:solidFill>
+                  <a:srgbClr val="2D3748"/>
+                </a:solidFill>
+              </a:rPr>
+              <a:t>        </a:t>
+            </a:r>
+            <a:endParaRPr lang="en-US" sz="1400" dirty="0"/>
+          </a:p>
+          <a:p>
+            <a:pPr indent="0" marL="0">
+              <a:lnSpc>
+                <a:spcPct val="140000"/>
+              </a:lnSpc>
+              <a:buNone/>
+            </a:pPr>
+            <a:r>
+              <a:rPr lang="en-US" sz="1400" dirty="0">
+                <a:solidFill>
+                  <a:srgbClr val="2D3748"/>
+                </a:solidFill>
+              </a:rPr>
+              <a:t>3回+</a:t>
+            </a:r>
+            <a:endParaRPr lang="en-US" sz="1400" dirty="0"/>
+          </a:p>
+          <a:p>
+            <a:pPr indent="0" marL="0">
+              <a:lnSpc>
+                <a:spcPct val="140000"/>
+              </a:lnSpc>
+              <a:buNone/>
+            </a:pPr>
+            <a:endParaRPr lang="en-US" sz="1400" dirty="0"/>
+          </a:p>
+          <a:p>
+            <a:pPr indent="0" marL="0">
+              <a:lnSpc>
+                <a:spcPct val="140000"/>
+              </a:lnSpc>
+              <a:buNone/>
+            </a:pPr>
+            <a:r>
+              <a:rPr lang="en-US" sz="1400" dirty="0">
+                <a:solidFill>
+                  <a:srgbClr val="2D3748"/>
+                </a:solidFill>
+              </a:rPr>
+              <a:t>      </a:t>
+            </a:r>
+            <a:endParaRPr lang="en-US" sz="1400" dirty="0"/>
+          </a:p>
+          <a:p>
+            <a:pPr indent="0" marL="0">
+              <a:lnSpc>
+                <a:spcPct val="140000"/>
+              </a:lnSpc>
+              <a:buNone/>
+            </a:pPr>
+            <a:endParaRPr lang="en-US" sz="1400" dirty="0"/>
+          </a:p>
+          <a:p>
+            <a:pPr indent="0" marL="0">
+              <a:lnSpc>
+                <a:spcPct val="140000"/>
+              </a:lnSpc>
+              <a:buNone/>
+            </a:pPr>
+            <a:r>
+              <a:rPr lang="en-US" sz="1400" dirty="0">
+                <a:solidFill>
+                  <a:srgbClr val="2D3748"/>
+                </a:solidFill>
+              </a:rPr>
+              <a:t>      </a:t>
+            </a:r>
+            <a:endParaRPr lang="en-US" sz="1400" dirty="0"/>
+          </a:p>
+          <a:p>
+            <a:pPr indent="0" marL="0">
+              <a:lnSpc>
+                <a:spcPct val="140000"/>
+              </a:lnSpc>
+              <a:buNone/>
+            </a:pPr>
+            <a:r>
+              <a:rPr lang="en-US" sz="1400" dirty="0">
+                <a:solidFill>
+                  <a:srgbClr val="2D3748"/>
+                </a:solidFill>
+              </a:rPr>
+              <a:t>統合対象会議数</a:t>
+            </a:r>
+            <a:endParaRPr lang="en-US" sz="1400" dirty="0"/>
+          </a:p>
+          <a:p>
+            <a:pPr indent="0" marL="0">
+              <a:lnSpc>
+                <a:spcPct val="140000"/>
+              </a:lnSpc>
+              <a:buNone/>
+            </a:pPr>
+            <a:endParaRPr lang="en-US" sz="1400" dirty="0"/>
+          </a:p>
+          <a:p>
+            <a:pPr indent="0" marL="0">
+              <a:lnSpc>
+                <a:spcPct val="140000"/>
+              </a:lnSpc>
+              <a:buNone/>
+            </a:pPr>
+            <a:r>
+              <a:rPr lang="en-US" sz="1400" dirty="0">
+                <a:solidFill>
+                  <a:srgbClr val="2D3748"/>
+                </a:solidFill>
+              </a:rPr>
+              <a:t>    </a:t>
+            </a:r>
+            <a:endParaRPr lang="en-US" sz="1400" dirty="0"/>
+          </a:p>
+          <a:p>
+            <a:pPr indent="0" marL="0">
+              <a:lnSpc>
+                <a:spcPct val="140000"/>
+              </a:lnSpc>
+              <a:buNone/>
+            </a:pPr>
+            <a:endParaRPr lang="en-US" sz="1400" dirty="0"/>
+          </a:p>
+          <a:p>
+            <a:pPr indent="0" marL="0">
+              <a:lnSpc>
+                <a:spcPct val="140000"/>
+              </a:lnSpc>
+              <a:buNone/>
+            </a:pPr>
+            <a:r>
+              <a:rPr lang="en-US" sz="1400" dirty="0">
+                <a:solidFill>
+                  <a:srgbClr val="2D3748"/>
+                </a:solidFill>
+              </a:rPr>
+              <a:t>  </a:t>
+            </a:r>
+            <a:endParaRPr lang="en-US" sz="1400" dirty="0"/>
+          </a:p>
+          <a:p>
+            <a:pPr indent="0" marL="0">
+              <a:lnSpc>
+                <a:spcPct val="140000"/>
+              </a:lnSpc>
+              <a:buNone/>
+            </a:pPr>
+            <a:endParaRPr lang="en-US" sz="1400" dirty="0"/>
+          </a:p>
+          <a:p>
+            <a:pPr indent="0" marL="0">
+              <a:lnSpc>
+                <a:spcPct val="140000"/>
+              </a:lnSpc>
+              <a:buNone/>
+            </a:pPr>
+            <a:r>
+              <a:rPr lang="en-US" sz="1400" dirty="0">
+                <a:solidFill>
+                  <a:srgbClr val="2D3748"/>
+                </a:solidFill>
+              </a:rPr>
+              <a:t>  </a:t>
+            </a:r>
+            <a:endParaRPr lang="en-US" sz="1400" dirty="0"/>
+          </a:p>
+          <a:p>
+            <a:pPr indent="0" marL="0">
+              <a:lnSpc>
+                <a:spcPct val="140000"/>
+              </a:lnSpc>
+              <a:buNone/>
+            </a:pPr>
+            <a:endParaRPr lang="en-US" sz="1400" dirty="0"/>
+          </a:p>
+          <a:p>
+            <a:pPr indent="0" marL="0">
+              <a:lnSpc>
+                <a:spcPct val="140000"/>
+              </a:lnSpc>
+              <a:buNone/>
+            </a:pPr>
+            <a:r>
+              <a:rPr lang="en-US" sz="1400" dirty="0">
+                <a:solidFill>
+                  <a:srgbClr val="2D3748"/>
+                </a:solidFill>
+              </a:rPr>
+              <a:t>    </a:t>
+            </a:r>
+            <a:endParaRPr lang="en-US" sz="1400" dirty="0"/>
+          </a:p>
+          <a:p>
+            <a:pPr indent="0" marL="0">
+              <a:lnSpc>
+                <a:spcPct val="140000"/>
+              </a:lnSpc>
+              <a:buNone/>
+            </a:pPr>
+            <a:endParaRPr lang="en-US" sz="1400" dirty="0"/>
+          </a:p>
+          <a:p>
+            <a:pPr indent="0" marL="0">
+              <a:lnSpc>
+                <a:spcPct val="140000"/>
+              </a:lnSpc>
+              <a:buNone/>
+            </a:pPr>
+            <a:r>
+              <a:rPr lang="en-US" sz="1400" dirty="0">
+                <a:solidFill>
+                  <a:srgbClr val="2D3748"/>
+                </a:solidFill>
+              </a:rPr>
+              <a:t>      </a:t>
+            </a:r>
+            <a:endParaRPr lang="en-US" sz="1400" dirty="0"/>
+          </a:p>
+          <a:p>
+            <a:pPr indent="0" marL="0">
+              <a:lnSpc>
+                <a:spcPct val="140000"/>
+              </a:lnSpc>
+              <a:buNone/>
+            </a:pPr>
+            <a:r>
+              <a:rPr lang="en-US" sz="1400" dirty="0">
+                <a:solidFill>
+                  <a:srgbClr val="2D3748"/>
+                </a:solidFill>
+              </a:rPr>
+              <a:t>テンプレート準拠</a:t>
+            </a:r>
+            <a:endParaRPr lang="en-US" sz="1400" dirty="0"/>
+          </a:p>
+          <a:p>
+            <a:pPr indent="0" marL="0">
+              <a:lnSpc>
+                <a:spcPct val="140000"/>
+              </a:lnSpc>
+              <a:buNone/>
+            </a:pPr>
+            <a:endParaRPr lang="en-US" sz="1400" dirty="0"/>
+          </a:p>
+          <a:p>
+            <a:pPr indent="0" marL="0">
+              <a:lnSpc>
+                <a:spcPct val="140000"/>
+              </a:lnSpc>
+              <a:buNone/>
+            </a:pPr>
+            <a:r>
+              <a:rPr lang="en-US" sz="1400" dirty="0">
+                <a:solidFill>
+                  <a:srgbClr val="2D3748"/>
+                </a:solidFill>
+              </a:rPr>
+              <a:t>      </a:t>
+            </a:r>
+            <a:endParaRPr lang="en-US" sz="1400" dirty="0"/>
+          </a:p>
+          <a:p>
+            <a:pPr indent="0" marL="0">
+              <a:lnSpc>
+                <a:spcPct val="140000"/>
+              </a:lnSpc>
+              <a:buNone/>
+            </a:pPr>
+            <a:endParaRPr lang="en-US" sz="1400" dirty="0"/>
+          </a:p>
+          <a:p>
+            <a:pPr indent="0" marL="0">
+              <a:lnSpc>
+                <a:spcPct val="140000"/>
+              </a:lnSpc>
+              <a:buNone/>
+            </a:pPr>
+            <a:r>
+              <a:rPr lang="en-US" sz="1400" dirty="0">
+                <a:solidFill>
+                  <a:srgbClr val="2D3748"/>
+                </a:solidFill>
+              </a:rPr>
+              <a:t>        </a:t>
+            </a:r>
+            <a:endParaRPr lang="en-US" sz="1400" dirty="0"/>
+          </a:p>
+          <a:p>
+            <a:pPr indent="0" marL="0">
+              <a:lnSpc>
+                <a:spcPct val="140000"/>
+              </a:lnSpc>
+              <a:buNone/>
+            </a:pPr>
+            <a:endParaRPr lang="en-US" sz="1400" dirty="0"/>
+          </a:p>
+          <a:p>
+            <a:pPr indent="0" marL="0">
+              <a:lnSpc>
+                <a:spcPct val="140000"/>
+              </a:lnSpc>
+              <a:buNone/>
+            </a:pPr>
+            <a:r>
+              <a:rPr lang="en-US" sz="1400" dirty="0">
+                <a:solidFill>
+                  <a:srgbClr val="2D3748"/>
+                </a:solidFill>
+              </a:rPr>
+              <a:t>      </a:t>
+            </a:r>
+            <a:endParaRPr lang="en-US" sz="1400" dirty="0"/>
+          </a:p>
+          <a:p>
+            <a:pPr indent="0" marL="0">
+              <a:lnSpc>
+                <a:spcPct val="140000"/>
+              </a:lnSpc>
+              <a:buNone/>
+            </a:pPr>
+            <a:endParaRPr lang="en-US" sz="1400" dirty="0"/>
+          </a:p>
+          <a:p>
+            <a:pPr indent="0" marL="0">
+              <a:lnSpc>
+                <a:spcPct val="140000"/>
+              </a:lnSpc>
+              <a:buNone/>
+            </a:pPr>
+            <a:r>
+              <a:rPr lang="en-US" sz="1400" dirty="0">
+                <a:solidFill>
+                  <a:srgbClr val="2D3748"/>
+                </a:solidFill>
+              </a:rPr>
+              <a:t>      </a:t>
+            </a:r>
+            <a:endParaRPr lang="en-US" sz="1400" dirty="0"/>
+          </a:p>
+          <a:p>
+            <a:pPr indent="0" marL="0">
+              <a:lnSpc>
+                <a:spcPct val="140000"/>
+              </a:lnSpc>
+              <a:buNone/>
+            </a:pPr>
+            <a:r>
+              <a:rPr lang="en-US" sz="1400" dirty="0">
+                <a:solidFill>
+                  <a:srgbClr val="2D3748"/>
+                </a:solidFill>
+              </a:rPr>
+              <a:t>必須</a:t>
+            </a:r>
+            <a:endParaRPr lang="en-US" sz="1400" dirty="0"/>
+          </a:p>
+          <a:p>
+            <a:pPr indent="0" marL="0">
+              <a:lnSpc>
+                <a:spcPct val="140000"/>
+              </a:lnSpc>
+              <a:buNone/>
+            </a:pPr>
+            <a:endParaRPr lang="en-US" sz="1400" dirty="0"/>
+          </a:p>
+          <a:p>
+            <a:pPr indent="0" marL="0">
+              <a:lnSpc>
+                <a:spcPct val="140000"/>
+              </a:lnSpc>
+              <a:buNone/>
+            </a:pPr>
+            <a:r>
+              <a:rPr lang="en-US" sz="1400" dirty="0">
+                <a:solidFill>
+                  <a:srgbClr val="2D3748"/>
+                </a:solidFill>
+              </a:rPr>
+              <a:t>    </a:t>
+            </a:r>
+            <a:endParaRPr lang="en-US" sz="1400" dirty="0"/>
+          </a:p>
+          <a:p>
+            <a:pPr indent="0" marL="0">
+              <a:lnSpc>
+                <a:spcPct val="140000"/>
+              </a:lnSpc>
+              <a:buNone/>
+            </a:pPr>
+            <a:endParaRPr lang="en-US" sz="1400" dirty="0"/>
+          </a:p>
+          <a:p>
+            <a:pPr indent="0" marL="0">
+              <a:lnSpc>
+                <a:spcPct val="140000"/>
+              </a:lnSpc>
+              <a:buNone/>
+            </a:pPr>
+            <a:r>
+              <a:rPr lang="en-US" sz="1400" dirty="0">
+                <a:solidFill>
+                  <a:srgbClr val="2D3748"/>
+                </a:solidFill>
+              </a:rPr>
+              <a:t>    </a:t>
+            </a:r>
+            <a:endParaRPr lang="en-US" sz="1400" dirty="0"/>
+          </a:p>
+          <a:p>
+            <a:pPr indent="0" marL="0">
+              <a:lnSpc>
+                <a:spcPct val="140000"/>
+              </a:lnSpc>
+              <a:buNone/>
+            </a:pPr>
+            <a:endParaRPr lang="en-US" sz="1400" dirty="0"/>
+          </a:p>
+          <a:p>
+            <a:pPr indent="0" marL="0">
+              <a:lnSpc>
+                <a:spcPct val="140000"/>
+              </a:lnSpc>
+              <a:buNone/>
+            </a:pPr>
+            <a:r>
+              <a:rPr lang="en-US" sz="1400" dirty="0">
+                <a:solidFill>
+                  <a:srgbClr val="2D3748"/>
+                </a:solidFill>
+              </a:rPr>
+              <a:t>      </a:t>
+            </a:r>
+            <a:endParaRPr lang="en-US" sz="1400" dirty="0"/>
+          </a:p>
+          <a:p>
+            <a:pPr indent="0" marL="0">
+              <a:lnSpc>
+                <a:spcPct val="140000"/>
+              </a:lnSpc>
+              <a:buNone/>
+            </a:pPr>
+            <a:r>
+              <a:rPr lang="en-US" sz="1400" dirty="0">
+                <a:solidFill>
+                  <a:srgbClr val="2D3748"/>
+                </a:solidFill>
+              </a:rPr>
+              <a:t>ローカル録音作成</a:t>
+            </a:r>
+            <a:endParaRPr lang="en-US" sz="1400" dirty="0"/>
+          </a:p>
+          <a:p>
+            <a:pPr indent="0" marL="0">
+              <a:lnSpc>
+                <a:spcPct val="140000"/>
+              </a:lnSpc>
+              <a:buNone/>
+            </a:pPr>
+            <a:endParaRPr lang="en-US" sz="1400" dirty="0"/>
+          </a:p>
+          <a:p>
+            <a:pPr indent="0" marL="0">
+              <a:lnSpc>
+                <a:spcPct val="140000"/>
+              </a:lnSpc>
+              <a:buNone/>
+            </a:pPr>
+            <a:r>
+              <a:rPr lang="en-US" sz="1400" dirty="0">
+                <a:solidFill>
+                  <a:srgbClr val="2D3748"/>
+                </a:solidFill>
+              </a:rPr>
+              <a:t>      </a:t>
+            </a:r>
+            <a:endParaRPr lang="en-US" sz="1400" dirty="0"/>
+          </a:p>
+          <a:p>
+            <a:pPr indent="0" marL="0">
+              <a:lnSpc>
+                <a:spcPct val="140000"/>
+              </a:lnSpc>
+              <a:buNone/>
+            </a:pPr>
+            <a:endParaRPr lang="en-US" sz="1400" dirty="0"/>
+          </a:p>
+          <a:p>
+            <a:pPr indent="0" marL="0">
+              <a:lnSpc>
+                <a:spcPct val="140000"/>
+              </a:lnSpc>
+              <a:buNone/>
+            </a:pPr>
+            <a:r>
+              <a:rPr lang="en-US" sz="1400" dirty="0">
+                <a:solidFill>
+                  <a:srgbClr val="2D3748"/>
+                </a:solidFill>
+              </a:rPr>
+              <a:t>        </a:t>
+            </a:r>
+            <a:endParaRPr lang="en-US" sz="1400" dirty="0"/>
+          </a:p>
+          <a:p>
+            <a:pPr indent="0" marL="0">
+              <a:lnSpc>
+                <a:spcPct val="140000"/>
+              </a:lnSpc>
+              <a:buNone/>
+            </a:pPr>
+            <a:endParaRPr lang="en-US" sz="1400" dirty="0"/>
+          </a:p>
+          <a:p>
+            <a:pPr indent="0" marL="0">
+              <a:lnSpc>
+                <a:spcPct val="140000"/>
+              </a:lnSpc>
+              <a:buNone/>
+            </a:pPr>
+            <a:r>
+              <a:rPr lang="en-US" sz="1400" dirty="0">
+                <a:solidFill>
+                  <a:srgbClr val="2D3748"/>
+                </a:solidFill>
+              </a:rPr>
+              <a:t>      </a:t>
+            </a:r>
+            <a:endParaRPr lang="en-US" sz="1400" dirty="0"/>
+          </a:p>
+          <a:p>
+            <a:pPr indent="0" marL="0">
+              <a:lnSpc>
+                <a:spcPct val="140000"/>
+              </a:lnSpc>
+              <a:buNone/>
+            </a:pPr>
+            <a:endParaRPr lang="en-US" sz="1400" dirty="0"/>
+          </a:p>
+          <a:p>
+            <a:pPr indent="0" marL="0">
+              <a:lnSpc>
+                <a:spcPct val="140000"/>
+              </a:lnSpc>
+              <a:buNone/>
+            </a:pPr>
+            <a:r>
+              <a:rPr lang="en-US" sz="1400" dirty="0">
+                <a:solidFill>
+                  <a:srgbClr val="2D3748"/>
+                </a:solidFill>
+              </a:rPr>
+              <a:t>      </a:t>
+            </a:r>
+            <a:endParaRPr lang="en-US" sz="1400" dirty="0"/>
+          </a:p>
+          <a:p>
+            <a:pPr indent="0" marL="0">
+              <a:lnSpc>
+                <a:spcPct val="140000"/>
+              </a:lnSpc>
+              <a:buNone/>
+            </a:pPr>
+            <a:r>
+              <a:rPr lang="en-US" sz="1400" dirty="0">
+                <a:solidFill>
+                  <a:srgbClr val="2D3748"/>
+                </a:solidFill>
+              </a:rPr>
+              <a:t>全件</a:t>
+            </a:r>
+            <a:endParaRPr lang="en-US" sz="1400" dirty="0"/>
+          </a:p>
+          <a:p>
+            <a:pPr indent="0" marL="0">
+              <a:lnSpc>
+                <a:spcPct val="140000"/>
+              </a:lnSpc>
+              <a:buNone/>
+            </a:pPr>
+            <a:endParaRPr lang="en-US" sz="1400" dirty="0"/>
+          </a:p>
+          <a:p>
+            <a:pPr indent="0" marL="0">
+              <a:lnSpc>
+                <a:spcPct val="140000"/>
+              </a:lnSpc>
+              <a:buNone/>
+            </a:pPr>
+            <a:r>
+              <a:rPr lang="en-US" sz="1400" dirty="0">
+                <a:solidFill>
+                  <a:srgbClr val="2D3748"/>
+                </a:solidFill>
+              </a:rPr>
+              <a:t>    </a:t>
+            </a:r>
+            <a:endParaRPr lang="en-US" sz="1400" dirty="0"/>
+          </a:p>
+          <a:p>
+            <a:pPr indent="0" marL="0">
+              <a:lnSpc>
+                <a:spcPct val="140000"/>
+              </a:lnSpc>
+              <a:buNone/>
+            </a:pPr>
+            <a:endParaRPr lang="en-US" sz="1400" dirty="0"/>
+          </a:p>
+          <a:p>
+            <a:pPr indent="0" marL="0">
+              <a:lnSpc>
+                <a:spcPct val="140000"/>
+              </a:lnSpc>
+              <a:buNone/>
+            </a:pPr>
+            <a:r>
+              <a:rPr lang="en-US" sz="1400" dirty="0">
+                <a:solidFill>
+                  <a:srgbClr val="2D3748"/>
+                </a:solidFill>
+              </a:rPr>
+              <a:t>    </a:t>
+            </a:r>
+            <a:endParaRPr lang="en-US" sz="1400" dirty="0"/>
+          </a:p>
+          <a:p>
+            <a:pPr indent="0" marL="0">
+              <a:lnSpc>
+                <a:spcPct val="140000"/>
+              </a:lnSpc>
+              <a:buNone/>
+            </a:pPr>
+            <a:endParaRPr lang="en-US" sz="1400" dirty="0"/>
+          </a:p>
+          <a:p>
+            <a:pPr indent="0" marL="0">
+              <a:lnSpc>
+                <a:spcPct val="140000"/>
+              </a:lnSpc>
+              <a:buNone/>
+            </a:pPr>
+            <a:r>
+              <a:rPr lang="en-US" sz="1400" dirty="0">
+                <a:solidFill>
+                  <a:srgbClr val="2D3748"/>
+                </a:solidFill>
+              </a:rPr>
+              <a:t>      </a:t>
+            </a:r>
+            <a:endParaRPr lang="en-US" sz="1400" dirty="0"/>
+          </a:p>
+          <a:p>
+            <a:pPr indent="0" marL="0">
+              <a:lnSpc>
+                <a:spcPct val="140000"/>
+              </a:lnSpc>
+              <a:buNone/>
+            </a:pPr>
+            <a:r>
+              <a:rPr lang="en-US" sz="1400" dirty="0">
+                <a:solidFill>
+                  <a:srgbClr val="2D3748"/>
+                </a:solidFill>
+              </a:rPr>
+              <a:t>文脈保持統合</a:t>
+            </a:r>
+            <a:endParaRPr lang="en-US" sz="1400" dirty="0"/>
+          </a:p>
+          <a:p>
+            <a:pPr indent="0" marL="0">
+              <a:lnSpc>
+                <a:spcPct val="140000"/>
+              </a:lnSpc>
+              <a:buNone/>
+            </a:pPr>
+            <a:endParaRPr lang="en-US" sz="1400" dirty="0"/>
+          </a:p>
+          <a:p>
+            <a:pPr indent="0" marL="0">
+              <a:lnSpc>
+                <a:spcPct val="140000"/>
+              </a:lnSpc>
+              <a:buNone/>
+            </a:pPr>
+            <a:r>
+              <a:rPr lang="en-US" sz="1400" dirty="0">
+                <a:solidFill>
+                  <a:srgbClr val="2D3748"/>
+                </a:solidFill>
+              </a:rPr>
+              <a:t>      </a:t>
+            </a:r>
+            <a:endParaRPr lang="en-US" sz="1400" dirty="0"/>
+          </a:p>
+          <a:p>
+            <a:pPr indent="0" marL="0">
+              <a:lnSpc>
+                <a:spcPct val="140000"/>
+              </a:lnSpc>
+              <a:buNone/>
+            </a:pPr>
+            <a:endParaRPr lang="en-US" sz="1400" dirty="0"/>
+          </a:p>
+          <a:p>
+            <a:pPr indent="0" marL="0">
+              <a:lnSpc>
+                <a:spcPct val="140000"/>
+              </a:lnSpc>
+              <a:buNone/>
+            </a:pPr>
+            <a:r>
+              <a:rPr lang="en-US" sz="1400" dirty="0">
+                <a:solidFill>
+                  <a:srgbClr val="2D3748"/>
+                </a:solidFill>
+              </a:rPr>
+              <a:t>        </a:t>
+            </a:r>
+            <a:endParaRPr lang="en-US" sz="1400" dirty="0"/>
+          </a:p>
+          <a:p>
+            <a:pPr indent="0" marL="0">
+              <a:lnSpc>
+                <a:spcPct val="140000"/>
+              </a:lnSpc>
+              <a:buNone/>
+            </a:pPr>
+            <a:endParaRPr lang="en-US" sz="1400" dirty="0"/>
+          </a:p>
+          <a:p>
+            <a:pPr indent="0" marL="0">
+              <a:lnSpc>
+                <a:spcPct val="140000"/>
+              </a:lnSpc>
+              <a:buNone/>
+            </a:pPr>
+            <a:r>
+              <a:rPr lang="en-US" sz="1400" dirty="0">
+                <a:solidFill>
+                  <a:srgbClr val="2D3748"/>
+                </a:solidFill>
+              </a:rPr>
+              <a:t>      </a:t>
+            </a:r>
+            <a:endParaRPr lang="en-US" sz="1400" dirty="0"/>
+          </a:p>
+          <a:p>
+            <a:pPr indent="0" marL="0">
+              <a:lnSpc>
+                <a:spcPct val="140000"/>
+              </a:lnSpc>
+              <a:buNone/>
+            </a:pPr>
+            <a:endParaRPr lang="en-US" sz="1400" dirty="0"/>
+          </a:p>
+          <a:p>
+            <a:pPr indent="0" marL="0">
+              <a:lnSpc>
+                <a:spcPct val="140000"/>
+              </a:lnSpc>
+              <a:buNone/>
+            </a:pPr>
+            <a:r>
+              <a:rPr lang="en-US" sz="1400" dirty="0">
+                <a:solidFill>
+                  <a:srgbClr val="2D3748"/>
+                </a:solidFill>
+              </a:rPr>
+              <a:t>      </a:t>
+            </a:r>
+            <a:endParaRPr lang="en-US" sz="1400" dirty="0"/>
+          </a:p>
+          <a:p>
+            <a:pPr indent="0" marL="0">
+              <a:lnSpc>
+                <a:spcPct val="140000"/>
+              </a:lnSpc>
+              <a:buNone/>
+            </a:pPr>
+            <a:r>
+              <a:rPr lang="en-US" sz="1400" dirty="0">
+                <a:solidFill>
+                  <a:srgbClr val="2D3748"/>
+                </a:solidFill>
+              </a:rPr>
+              <a:t>高</a:t>
+            </a:r>
+            <a:endParaRPr lang="en-US" sz="1400" dirty="0"/>
           </a:p>
         </p:txBody>
       </p:sp>
@@ -3084,7 +4195,7 @@
                   <a:srgbClr val="2D3748"/>
                 </a:solidFill>
               </a:rPr>
-              <a:t>📅 MVPロードマップ</a:t>
+              <a:t>🔗 依存関係マップ</a:t>
             </a:r>
             <a:endParaRPr lang="en-US" sz="2800" dirty="0"/>
           </a:p>
@@ -3092,14 +4203,61 @@
       </p:sp>
       <p:sp>
         <p:nvSpPr>
-          <p:cNvPr id="3" name="Text 1"/>
+          <p:cNvPr id="3" name="Shape 1"/>
           <p:cNvSpPr/>
           <p:nvPr/>
         </p:nvSpPr>
         <p:spPr>
           <a:xfrm>
-            <a:off x="731520" y="1188720"/>
-            <a:ext cx="10725912" cy="3383280"/>
+            <a:off x="457200" y="1188720"/>
+            <a:ext cx="3575304" cy="1463040"/>
+          </a:xfrm>
+          <a:prstGeom prst="roundRect">
+            <a:avLst>
+              <a:gd name="adj" fmla="val 6250"/>
+            </a:avLst>
+          </a:prstGeom>
+          <a:solidFill>
+            <a:srgbClr val="F7FAFC"/>
+          </a:solidFill>
+          <a:ln w="12700">
+            <a:solidFill>
+              <a:srgbClr val="667EEA"/>
+            </a:solidFill>
+            <a:prstDash val="solid"/>
+          </a:ln>
+        </p:spPr>
+      </p:sp>
+      <p:sp>
+        <p:nvSpPr>
+          <p:cNvPr id="4" name="Shape 2"/>
+          <p:cNvSpPr/>
+          <p:nvPr/>
+        </p:nvSpPr>
+        <p:spPr>
+          <a:xfrm>
+            <a:off x="457200" y="1188720"/>
+            <a:ext cx="54864" cy="1463040"/>
+          </a:xfrm>
+          <a:prstGeom prst="rect">
+            <a:avLst/>
+          </a:prstGeom>
+          <a:solidFill>
+            <a:srgbClr val="667EEA"/>
+          </a:solidFill>
+          <a:ln/>
+        </p:spPr>
+      </p:sp>
+      <p:sp>
+        <p:nvSpPr>
+          <p:cNvPr id="5" name="Text 3"/>
+          <p:cNvSpPr/>
+          <p:nvPr/>
+        </p:nvSpPr>
+        <p:spPr>
+          <a:xfrm>
+            <a:off x="594360" y="1280160"/>
+            <a:ext cx="3300984" cy="365760"/>
           </a:xfrm>
           <a:prstGeom prst="rect">
             <a:avLst/>
@@ -3112,649 +4270,183 @@
           <a:lstStyle/>
           <a:p>
             <a:pPr indent="0" marL="0">
-              <a:lnSpc>
-                <a:spcPct val="140000"/>
-              </a:lnSpc>
-              <a:buNone/>
-            </a:pPr>
-            <a:r>
-              <a:rPr lang="en-US" sz="1400" dirty="0">
-                <a:solidFill>
-                  <a:srgbClr val="2D3748"/>
-                </a:solidFill>
-              </a:rPr>
-              <a:t>1</a:t>
-            </a:r>
-            <a:endParaRPr lang="en-US" sz="1400" dirty="0"/>
-          </a:p>
-          <a:p>
-            <a:pPr indent="0" marL="0">
-              <a:lnSpc>
-                <a:spcPct val="140000"/>
-              </a:lnSpc>
-              <a:buNone/>
-            </a:pPr>
-            <a:endParaRPr lang="en-US" sz="1400" dirty="0"/>
-          </a:p>
-          <a:p>
-            <a:pPr indent="0" marL="0">
-              <a:lnSpc>
-                <a:spcPct val="140000"/>
-              </a:lnSpc>
-              <a:buNone/>
-            </a:pPr>
-            <a:r>
-              <a:rPr lang="en-US" sz="1400" dirty="0">
-                <a:solidFill>
-                  <a:srgbClr val="2D3748"/>
-                </a:solidFill>
-              </a:rPr>
-              <a:t>        </a:t>
-            </a:r>
-            <a:endParaRPr lang="en-US" sz="1400" dirty="0"/>
-          </a:p>
-          <a:p>
-            <a:pPr indent="0" marL="0">
-              <a:lnSpc>
-                <a:spcPct val="140000"/>
-              </a:lnSpc>
-              <a:buNone/>
-            </a:pPr>
-            <a:r>
-              <a:rPr lang="en-US" sz="1400" dirty="0">
-                <a:solidFill>
-                  <a:srgbClr val="2D3748"/>
-                </a:solidFill>
-              </a:rPr>
-              <a:t>音声基盤</a:t>
-            </a:r>
-            <a:endParaRPr lang="en-US" sz="1400" dirty="0"/>
-          </a:p>
-          <a:p>
-            <a:pPr indent="0" marL="0">
-              <a:lnSpc>
-                <a:spcPct val="140000"/>
-              </a:lnSpc>
-              <a:buNone/>
-            </a:pPr>
-            <a:endParaRPr lang="en-US" sz="1400" dirty="0"/>
-          </a:p>
-          <a:p>
-            <a:pPr indent="0" marL="0">
-              <a:lnSpc>
-                <a:spcPct val="140000"/>
-              </a:lnSpc>
-              <a:buNone/>
-            </a:pPr>
-            <a:r>
-              <a:rPr lang="en-US" sz="1400" dirty="0">
-                <a:solidFill>
-                  <a:srgbClr val="2D3748"/>
-                </a:solidFill>
-              </a:rPr>
-              <a:t>        </a:t>
-            </a:r>
-            <a:endParaRPr lang="en-US" sz="1400" dirty="0"/>
-          </a:p>
-          <a:p>
-            <a:pPr indent="0" marL="0">
-              <a:lnSpc>
-                <a:spcPct val="140000"/>
-              </a:lnSpc>
-              <a:buNone/>
-            </a:pPr>
-            <a:r>
-              <a:rPr lang="en-US" sz="1400" dirty="0">
-                <a:solidFill>
-                  <a:srgbClr val="2D3748"/>
-                </a:solidFill>
-              </a:rPr>
-              <a:t>取得 / アップロード / 保管</a:t>
-            </a:r>
-            <a:endParaRPr lang="en-US" sz="1400" dirty="0"/>
-          </a:p>
-          <a:p>
-            <a:pPr indent="0" marL="0">
-              <a:lnSpc>
-                <a:spcPct val="140000"/>
-              </a:lnSpc>
-              <a:buNone/>
-            </a:pPr>
-            <a:endParaRPr lang="en-US" sz="1400" dirty="0"/>
-          </a:p>
-          <a:p>
-            <a:pPr indent="0" marL="0">
-              <a:lnSpc>
-                <a:spcPct val="140000"/>
-              </a:lnSpc>
-              <a:buNone/>
-            </a:pPr>
-            <a:r>
-              <a:rPr lang="en-US" sz="1400" dirty="0">
-                <a:solidFill>
-                  <a:srgbClr val="2D3748"/>
-                </a:solidFill>
-              </a:rPr>
-              <a:t>      </a:t>
-            </a:r>
-            <a:endParaRPr lang="en-US" sz="1400" dirty="0"/>
-          </a:p>
-          <a:p>
-            <a:pPr indent="0" marL="0">
-              <a:lnSpc>
-                <a:spcPct val="140000"/>
-              </a:lnSpc>
-              <a:buNone/>
-            </a:pPr>
-            <a:endParaRPr lang="en-US" sz="1400" dirty="0"/>
-          </a:p>
-          <a:p>
-            <a:pPr indent="0" marL="0">
-              <a:lnSpc>
-                <a:spcPct val="140000"/>
-              </a:lnSpc>
-              <a:buNone/>
-            </a:pPr>
-            <a:r>
-              <a:rPr lang="en-US" sz="1400" dirty="0">
-                <a:solidFill>
-                  <a:srgbClr val="2D3748"/>
-                </a:solidFill>
-              </a:rPr>
-              <a:t>      </a:t>
-            </a:r>
-            <a:endParaRPr lang="en-US" sz="1400" dirty="0"/>
-          </a:p>
-          <a:p>
-            <a:pPr indent="0" marL="0">
-              <a:lnSpc>
-                <a:spcPct val="140000"/>
-              </a:lnSpc>
-              <a:buNone/>
-            </a:pPr>
-            <a:endParaRPr lang="en-US" sz="1400" dirty="0"/>
-          </a:p>
-          <a:p>
-            <a:pPr indent="0" marL="0">
-              <a:lnSpc>
-                <a:spcPct val="140000"/>
-              </a:lnSpc>
-              <a:buNone/>
-            </a:pPr>
-            <a:r>
-              <a:rPr lang="en-US" sz="1400" dirty="0">
-                <a:solidFill>
-                  <a:srgbClr val="2D3748"/>
-                </a:solidFill>
-              </a:rPr>
-              <a:t>        </a:t>
-            </a:r>
-            <a:endParaRPr lang="en-US" sz="1400" dirty="0"/>
-          </a:p>
-          <a:p>
-            <a:pPr indent="0" marL="0">
-              <a:lnSpc>
-                <a:spcPct val="140000"/>
-              </a:lnSpc>
-              <a:buNone/>
-            </a:pPr>
-            <a:r>
-              <a:rPr lang="en-US" sz="1400" dirty="0">
-                <a:solidFill>
-                  <a:srgbClr val="2D3748"/>
-                </a:solidFill>
-              </a:rPr>
-              <a:t>2</a:t>
-            </a:r>
-            <a:endParaRPr lang="en-US" sz="1400" dirty="0"/>
-          </a:p>
-          <a:p>
-            <a:pPr indent="0" marL="0">
-              <a:lnSpc>
-                <a:spcPct val="140000"/>
-              </a:lnSpc>
-              <a:buNone/>
-            </a:pPr>
-            <a:endParaRPr lang="en-US" sz="1400" dirty="0"/>
-          </a:p>
-          <a:p>
-            <a:pPr indent="0" marL="0">
-              <a:lnSpc>
-                <a:spcPct val="140000"/>
-              </a:lnSpc>
-              <a:buNone/>
-            </a:pPr>
-            <a:r>
-              <a:rPr lang="en-US" sz="1400" dirty="0">
-                <a:solidFill>
-                  <a:srgbClr val="2D3748"/>
-                </a:solidFill>
-              </a:rPr>
-              <a:t>        </a:t>
-            </a:r>
-            <a:endParaRPr lang="en-US" sz="1400" dirty="0"/>
-          </a:p>
-          <a:p>
-            <a:pPr indent="0" marL="0">
-              <a:lnSpc>
-                <a:spcPct val="140000"/>
-              </a:lnSpc>
-              <a:buNone/>
-            </a:pPr>
-            <a:r>
-              <a:rPr lang="en-US" sz="1400" dirty="0">
-                <a:solidFill>
-                  <a:srgbClr val="2D3748"/>
-                </a:solidFill>
-              </a:rPr>
-              <a:t>Must機能</a:t>
-            </a:r>
-            <a:endParaRPr lang="en-US" sz="1400" dirty="0"/>
-          </a:p>
-          <a:p>
-            <a:pPr indent="0" marL="0">
-              <a:lnSpc>
-                <a:spcPct val="140000"/>
-              </a:lnSpc>
-              <a:buNone/>
-            </a:pPr>
-            <a:endParaRPr lang="en-US" sz="1400" dirty="0"/>
-          </a:p>
-          <a:p>
-            <a:pPr indent="0" marL="0">
-              <a:lnSpc>
-                <a:spcPct val="140000"/>
-              </a:lnSpc>
-              <a:buNone/>
-            </a:pPr>
-            <a:r>
-              <a:rPr lang="en-US" sz="1400" dirty="0">
-                <a:solidFill>
-                  <a:srgbClr val="2D3748"/>
-                </a:solidFill>
-              </a:rPr>
-              <a:t>        </a:t>
-            </a:r>
-            <a:endParaRPr lang="en-US" sz="1400" dirty="0"/>
-          </a:p>
-          <a:p>
-            <a:pPr indent="0" marL="0">
-              <a:lnSpc>
-                <a:spcPct val="140000"/>
-              </a:lnSpc>
-              <a:buNone/>
-            </a:pPr>
-            <a:r>
-              <a:rPr lang="en-US" sz="1400" dirty="0">
-                <a:solidFill>
-                  <a:srgbClr val="2D3748"/>
-                </a:solidFill>
-              </a:rPr>
-              <a:t>サマリー / 統合 / 資料生成</a:t>
-            </a:r>
-            <a:endParaRPr lang="en-US" sz="1400" dirty="0"/>
-          </a:p>
-          <a:p>
-            <a:pPr indent="0" marL="0">
-              <a:lnSpc>
-                <a:spcPct val="140000"/>
-              </a:lnSpc>
-              <a:buNone/>
-            </a:pPr>
-            <a:endParaRPr lang="en-US" sz="1400" dirty="0"/>
-          </a:p>
-          <a:p>
-            <a:pPr indent="0" marL="0">
-              <a:lnSpc>
-                <a:spcPct val="140000"/>
-              </a:lnSpc>
-              <a:buNone/>
-            </a:pPr>
-            <a:r>
-              <a:rPr lang="en-US" sz="1400" dirty="0">
-                <a:solidFill>
-                  <a:srgbClr val="2D3748"/>
-                </a:solidFill>
-              </a:rPr>
-              <a:t>      </a:t>
-            </a:r>
-            <a:endParaRPr lang="en-US" sz="1400" dirty="0"/>
-          </a:p>
-          <a:p>
-            <a:pPr indent="0" marL="0">
-              <a:lnSpc>
-                <a:spcPct val="140000"/>
-              </a:lnSpc>
-              <a:buNone/>
-            </a:pPr>
-            <a:endParaRPr lang="en-US" sz="1400" dirty="0"/>
-          </a:p>
-          <a:p>
-            <a:pPr indent="0" marL="0">
-              <a:lnSpc>
-                <a:spcPct val="140000"/>
-              </a:lnSpc>
-              <a:buNone/>
-            </a:pPr>
-            <a:r>
-              <a:rPr lang="en-US" sz="1400" dirty="0">
-                <a:solidFill>
-                  <a:srgbClr val="2D3748"/>
-                </a:solidFill>
-              </a:rPr>
-              <a:t>      </a:t>
-            </a:r>
-            <a:endParaRPr lang="en-US" sz="1400" dirty="0"/>
-          </a:p>
-          <a:p>
-            <a:pPr indent="0" marL="0">
-              <a:lnSpc>
-                <a:spcPct val="140000"/>
-              </a:lnSpc>
-              <a:buNone/>
-            </a:pPr>
-            <a:endParaRPr lang="en-US" sz="1400" dirty="0"/>
-          </a:p>
-          <a:p>
-            <a:pPr indent="0" marL="0">
-              <a:lnSpc>
-                <a:spcPct val="140000"/>
-              </a:lnSpc>
-              <a:buNone/>
-            </a:pPr>
-            <a:r>
-              <a:rPr lang="en-US" sz="1400" dirty="0">
-                <a:solidFill>
-                  <a:srgbClr val="2D3748"/>
-                </a:solidFill>
-              </a:rPr>
-              <a:t>        </a:t>
-            </a:r>
-            <a:endParaRPr lang="en-US" sz="1400" dirty="0"/>
-          </a:p>
-          <a:p>
-            <a:pPr indent="0" marL="0">
-              <a:lnSpc>
-                <a:spcPct val="140000"/>
-              </a:lnSpc>
-              <a:buNone/>
-            </a:pPr>
-            <a:r>
-              <a:rPr lang="en-US" sz="1400" dirty="0">
-                <a:solidFill>
-                  <a:srgbClr val="2D3748"/>
-                </a:solidFill>
-              </a:rPr>
-              <a:t>3</a:t>
-            </a:r>
-            <a:endParaRPr lang="en-US" sz="1400" dirty="0"/>
-          </a:p>
-          <a:p>
-            <a:pPr indent="0" marL="0">
-              <a:lnSpc>
-                <a:spcPct val="140000"/>
-              </a:lnSpc>
-              <a:buNone/>
-            </a:pPr>
-            <a:endParaRPr lang="en-US" sz="1400" dirty="0"/>
-          </a:p>
-          <a:p>
-            <a:pPr indent="0" marL="0">
-              <a:lnSpc>
-                <a:spcPct val="140000"/>
-              </a:lnSpc>
-              <a:buNone/>
-            </a:pPr>
-            <a:r>
-              <a:rPr lang="en-US" sz="1400" dirty="0">
-                <a:solidFill>
-                  <a:srgbClr val="2D3748"/>
-                </a:solidFill>
-              </a:rPr>
-              <a:t>        </a:t>
-            </a:r>
-            <a:endParaRPr lang="en-US" sz="1400" dirty="0"/>
-          </a:p>
-          <a:p>
-            <a:pPr indent="0" marL="0">
-              <a:lnSpc>
-                <a:spcPct val="140000"/>
-              </a:lnSpc>
-              <a:buNone/>
-            </a:pPr>
-            <a:r>
-              <a:rPr lang="en-US" sz="1400" dirty="0">
-                <a:solidFill>
-                  <a:srgbClr val="2D3748"/>
-                </a:solidFill>
-              </a:rPr>
-              <a:t>Should検証</a:t>
-            </a:r>
-            <a:endParaRPr lang="en-US" sz="1400" dirty="0"/>
-          </a:p>
-          <a:p>
-            <a:pPr indent="0" marL="0">
-              <a:lnSpc>
-                <a:spcPct val="140000"/>
-              </a:lnSpc>
-              <a:buNone/>
-            </a:pPr>
-            <a:endParaRPr lang="en-US" sz="1400" dirty="0"/>
-          </a:p>
-          <a:p>
-            <a:pPr indent="0" marL="0">
-              <a:lnSpc>
-                <a:spcPct val="140000"/>
-              </a:lnSpc>
-              <a:buNone/>
-            </a:pPr>
-            <a:r>
-              <a:rPr lang="en-US" sz="1400" dirty="0">
-                <a:solidFill>
-                  <a:srgbClr val="2D3748"/>
-                </a:solidFill>
-              </a:rPr>
-              <a:t>        </a:t>
-            </a:r>
-            <a:endParaRPr lang="en-US" sz="1400" dirty="0"/>
-          </a:p>
-          <a:p>
-            <a:pPr indent="0" marL="0">
-              <a:lnSpc>
-                <a:spcPct val="140000"/>
-              </a:lnSpc>
-              <a:buNone/>
-            </a:pPr>
-            <a:r>
-              <a:rPr lang="en-US" sz="1400" dirty="0">
-                <a:solidFill>
-                  <a:srgbClr val="2D3748"/>
-                </a:solidFill>
-              </a:rPr>
-              <a:t>字幕精度 / APIコスト</a:t>
-            </a:r>
-            <a:endParaRPr lang="en-US" sz="1400" dirty="0"/>
-          </a:p>
-          <a:p>
-            <a:pPr indent="0" marL="0">
-              <a:lnSpc>
-                <a:spcPct val="140000"/>
-              </a:lnSpc>
-              <a:buNone/>
-            </a:pPr>
-            <a:endParaRPr lang="en-US" sz="1400" dirty="0"/>
-          </a:p>
-          <a:p>
-            <a:pPr indent="0" marL="0">
-              <a:lnSpc>
-                <a:spcPct val="140000"/>
-              </a:lnSpc>
-              <a:buNone/>
-            </a:pPr>
-            <a:r>
-              <a:rPr lang="en-US" sz="1400" dirty="0">
-                <a:solidFill>
-                  <a:srgbClr val="2D3748"/>
-                </a:solidFill>
-              </a:rPr>
-              <a:t>      </a:t>
-            </a:r>
-            <a:endParaRPr lang="en-US" sz="1400" dirty="0"/>
-          </a:p>
-          <a:p>
-            <a:pPr indent="0" marL="0">
-              <a:lnSpc>
-                <a:spcPct val="140000"/>
-              </a:lnSpc>
-              <a:buNone/>
-            </a:pPr>
-            <a:endParaRPr lang="en-US" sz="1400" dirty="0"/>
-          </a:p>
-          <a:p>
-            <a:pPr indent="0" marL="0">
-              <a:lnSpc>
-                <a:spcPct val="140000"/>
-              </a:lnSpc>
-              <a:buNone/>
-            </a:pPr>
-            <a:r>
-              <a:rPr lang="en-US" sz="1400" dirty="0">
-                <a:solidFill>
-                  <a:srgbClr val="2D3748"/>
-                </a:solidFill>
-              </a:rPr>
-              <a:t>      </a:t>
-            </a:r>
-            <a:endParaRPr lang="en-US" sz="1400" dirty="0"/>
-          </a:p>
-          <a:p>
-            <a:pPr indent="0" marL="0">
-              <a:lnSpc>
-                <a:spcPct val="140000"/>
-              </a:lnSpc>
-              <a:buNone/>
-            </a:pPr>
-            <a:endParaRPr lang="en-US" sz="1400" dirty="0"/>
-          </a:p>
-          <a:p>
-            <a:pPr indent="0" marL="0">
-              <a:lnSpc>
-                <a:spcPct val="140000"/>
-              </a:lnSpc>
-              <a:buNone/>
-            </a:pPr>
-            <a:r>
-              <a:rPr lang="en-US" sz="1400" dirty="0">
-                <a:solidFill>
-                  <a:srgbClr val="2D3748"/>
-                </a:solidFill>
-              </a:rPr>
-              <a:t>        </a:t>
-            </a:r>
-            <a:endParaRPr lang="en-US" sz="1400" dirty="0"/>
-          </a:p>
-          <a:p>
-            <a:pPr indent="0" marL="0">
-              <a:lnSpc>
-                <a:spcPct val="140000"/>
-              </a:lnSpc>
-              <a:buNone/>
-            </a:pPr>
-            <a:r>
-              <a:rPr lang="en-US" sz="1400" dirty="0">
-                <a:solidFill>
-                  <a:srgbClr val="2D3748"/>
-                </a:solidFill>
-              </a:rPr>
-              <a:t>4</a:t>
-            </a:r>
-            <a:endParaRPr lang="en-US" sz="1400" dirty="0"/>
-          </a:p>
-          <a:p>
-            <a:pPr indent="0" marL="0">
-              <a:lnSpc>
-                <a:spcPct val="140000"/>
-              </a:lnSpc>
-              <a:buNone/>
-            </a:pPr>
-            <a:endParaRPr lang="en-US" sz="1400" dirty="0"/>
-          </a:p>
-          <a:p>
-            <a:pPr indent="0" marL="0">
-              <a:lnSpc>
-                <a:spcPct val="140000"/>
-              </a:lnSpc>
-              <a:buNone/>
-            </a:pPr>
-            <a:r>
-              <a:rPr lang="en-US" sz="1400" dirty="0">
-                <a:solidFill>
-                  <a:srgbClr val="2D3748"/>
-                </a:solidFill>
-              </a:rPr>
-              <a:t>        </a:t>
-            </a:r>
-            <a:endParaRPr lang="en-US" sz="1400" dirty="0"/>
-          </a:p>
-          <a:p>
-            <a:pPr indent="0" marL="0">
-              <a:lnSpc>
-                <a:spcPct val="140000"/>
-              </a:lnSpc>
-              <a:buNone/>
-            </a:pPr>
-            <a:r>
-              <a:rPr lang="en-US" sz="1400" dirty="0">
-                <a:solidFill>
-                  <a:srgbClr val="2D3748"/>
-                </a:solidFill>
-              </a:rPr>
-              <a:t>Phase 2候補</a:t>
-            </a:r>
-            <a:endParaRPr lang="en-US" sz="1400" dirty="0"/>
-          </a:p>
-          <a:p>
-            <a:pPr indent="0" marL="0">
-              <a:lnSpc>
-                <a:spcPct val="140000"/>
-              </a:lnSpc>
-              <a:buNone/>
-            </a:pPr>
-            <a:endParaRPr lang="en-US" sz="1400" dirty="0"/>
-          </a:p>
-          <a:p>
-            <a:pPr indent="0" marL="0">
-              <a:lnSpc>
-                <a:spcPct val="140000"/>
-              </a:lnSpc>
-              <a:buNone/>
-            </a:pPr>
-            <a:r>
-              <a:rPr lang="en-US" sz="1400" dirty="0">
-                <a:solidFill>
-                  <a:srgbClr val="2D3748"/>
-                </a:solidFill>
-              </a:rPr>
-              <a:t>        </a:t>
-            </a:r>
-            <a:endParaRPr lang="en-US" sz="1400" dirty="0"/>
-          </a:p>
-          <a:p>
-            <a:pPr indent="0" marL="0">
-              <a:lnSpc>
-                <a:spcPct val="140000"/>
-              </a:lnSpc>
-              <a:buNone/>
-            </a:pPr>
-            <a:r>
-              <a:rPr lang="en-US" sz="1400" dirty="0">
-                <a:solidFill>
-                  <a:srgbClr val="2D3748"/>
-                </a:solidFill>
-              </a:rPr>
-              <a:t>外部連携 / 会議ツール連携</a:t>
-            </a:r>
-            <a:endParaRPr lang="en-US" sz="1400" dirty="0"/>
+              <a:buNone/>
+            </a:pPr>
+            <a:r>
+              <a:rPr lang="en-US" sz="1300" b="1" dirty="0">
+                <a:solidFill>
+                  <a:srgbClr val="2D3748"/>
+                </a:solidFill>
+              </a:rPr>
+              <a:t>Ready</a:t>
+            </a:r>
+            <a:endParaRPr lang="en-US" sz="1300" dirty="0"/>
+          </a:p>
+        </p:txBody>
+      </p:sp>
+      <p:sp>
+        <p:nvSpPr>
+          <p:cNvPr id="6" name="Shape 4"/>
+          <p:cNvSpPr/>
+          <p:nvPr/>
+        </p:nvSpPr>
+        <p:spPr>
+          <a:xfrm>
+            <a:off x="4306824" y="1188720"/>
+            <a:ext cx="3575304" cy="1463040"/>
+          </a:xfrm>
+          <a:prstGeom prst="roundRect">
+            <a:avLst>
+              <a:gd name="adj" fmla="val 6250"/>
+            </a:avLst>
+          </a:prstGeom>
+          <a:solidFill>
+            <a:srgbClr val="F7FAFC"/>
+          </a:solidFill>
+          <a:ln w="12700">
+            <a:solidFill>
+              <a:srgbClr val="48BB78"/>
+            </a:solidFill>
+            <a:prstDash val="solid"/>
+          </a:ln>
+        </p:spPr>
+      </p:sp>
+      <p:sp>
+        <p:nvSpPr>
+          <p:cNvPr id="7" name="Shape 5"/>
+          <p:cNvSpPr/>
+          <p:nvPr/>
+        </p:nvSpPr>
+        <p:spPr>
+          <a:xfrm>
+            <a:off x="4306824" y="1188720"/>
+            <a:ext cx="54864" cy="1463040"/>
+          </a:xfrm>
+          <a:prstGeom prst="rect">
+            <a:avLst/>
+          </a:prstGeom>
+          <a:solidFill>
+            <a:srgbClr val="48BB78"/>
+          </a:solidFill>
+          <a:ln/>
+        </p:spPr>
+      </p:sp>
+      <p:sp>
+        <p:nvSpPr>
+          <p:cNvPr id="8" name="Text 6"/>
+          <p:cNvSpPr/>
+          <p:nvPr/>
+        </p:nvSpPr>
+        <p:spPr>
+          <a:xfrm>
+            <a:off x="4443984" y="1280160"/>
+            <a:ext cx="3300984" cy="365760"/>
+          </a:xfrm>
+          <a:prstGeom prst="rect">
+            <a:avLst/>
+          </a:prstGeom>
+          <a:noFill/>
+          <a:ln/>
+        </p:spPr>
+        <p:txBody>
+          <a:bodyPr wrap="square" rtlCol="0" anchor="t"/>
+          <a:lstStyle/>
+          <a:p>
+            <a:pPr indent="0" marL="0">
+              <a:buNone/>
+            </a:pPr>
+            <a:r>
+              <a:rPr lang="en-US" sz="1300" b="1" dirty="0">
+                <a:solidFill>
+                  <a:srgbClr val="2D3748"/>
+                </a:solidFill>
+              </a:rPr>
+              <a:t>Pending</a:t>
+            </a:r>
+            <a:endParaRPr lang="en-US" sz="1300" dirty="0"/>
+          </a:p>
+        </p:txBody>
+      </p:sp>
+      <p:sp>
+        <p:nvSpPr>
+          <p:cNvPr id="9" name="Shape 7"/>
+          <p:cNvSpPr/>
+          <p:nvPr/>
+        </p:nvSpPr>
+        <p:spPr>
+          <a:xfrm>
+            <a:off x="8156448" y="1188720"/>
+            <a:ext cx="3575304" cy="1463040"/>
+          </a:xfrm>
+          <a:prstGeom prst="roundRect">
+            <a:avLst>
+              <a:gd name="adj" fmla="val 6250"/>
+            </a:avLst>
+          </a:prstGeom>
+          <a:solidFill>
+            <a:srgbClr val="F7FAFC"/>
+          </a:solidFill>
+          <a:ln w="12700">
+            <a:solidFill>
+              <a:srgbClr val="ED8936"/>
+            </a:solidFill>
+            <a:prstDash val="solid"/>
+          </a:ln>
+        </p:spPr>
+      </p:sp>
+      <p:sp>
+        <p:nvSpPr>
+          <p:cNvPr id="10" name="Shape 8"/>
+          <p:cNvSpPr/>
+          <p:nvPr/>
+        </p:nvSpPr>
+        <p:spPr>
+          <a:xfrm>
+            <a:off x="8156448" y="1188720"/>
+            <a:ext cx="54864" cy="1463040"/>
+          </a:xfrm>
+          <a:prstGeom prst="rect">
+            <a:avLst/>
+          </a:prstGeom>
+          <a:solidFill>
+            <a:srgbClr val="ED8936"/>
+          </a:solidFill>
+          <a:ln/>
+        </p:spPr>
+      </p:sp>
+      <p:sp>
+        <p:nvSpPr>
+          <p:cNvPr id="11" name="Text 9"/>
+          <p:cNvSpPr/>
+          <p:nvPr/>
+        </p:nvSpPr>
+        <p:spPr>
+          <a:xfrm>
+            <a:off x="8293608" y="1280160"/>
+            <a:ext cx="3300984" cy="365760"/>
+          </a:xfrm>
+          <a:prstGeom prst="rect">
+            <a:avLst/>
+          </a:prstGeom>
+          <a:noFill/>
+          <a:ln/>
+        </p:spPr>
+        <p:txBody>
+          <a:bodyPr wrap="square" rtlCol="0" anchor="t"/>
+          <a:lstStyle/>
+          <a:p>
+            <a:pPr indent="0" marL="0">
+              <a:buNone/>
+            </a:pPr>
+            <a:r>
+              <a:rPr lang="en-US" sz="1300" b="1" dirty="0">
+                <a:solidFill>
+                  <a:srgbClr val="2D3748"/>
+                </a:solidFill>
+              </a:rPr>
+              <a:t>Open</a:t>
+            </a:r>
+            <a:endParaRPr lang="en-US" sz="1300" dirty="0"/>
           </a:p>
         </p:txBody>
       </p:sp>
@@ -3769,6 +4461,673 @@
 <file path=ppt/slides/slide13.xml><?xml version="1.0" encoding="utf-8"?>
 <p:sld xmlns:a="http://schemas.openxmlformats.org/drawingml/2006/main" xmlns:r="http://schemas.openxmlformats.org/officeDocument/2006/relationships" xmlns:p="http://schemas.openxmlformats.org/presentationml/2006/main">
   <p:cSld name="Slide 13">
+    <p:spTree>
+      <p:nvGrpSpPr>
+        <p:cNvPr id="1" name=""/>
+        <p:cNvGrpSpPr/>
+        <p:nvPr/>
+      </p:nvGrpSpPr>
+      <p:grpSpPr>
+        <a:xfrm>
+          <a:off x="0" y="0"/>
+          <a:ext cx="0" cy="0"/>
+          <a:chOff x="0" y="0"/>
+          <a:chExt cx="0" cy="0"/>
+        </a:xfrm>
+      </p:grpSpPr>
+      <p:sp>
+        <p:nvSpPr>
+          <p:cNvPr id="2" name="Text 0"/>
+          <p:cNvSpPr/>
+          <p:nvPr/>
+        </p:nvSpPr>
+        <p:spPr>
+          <a:xfrm>
+            <a:off x="457200" y="365760"/>
+            <a:ext cx="11274552" cy="731520"/>
+          </a:xfrm>
+          <a:prstGeom prst="rect">
+            <a:avLst/>
+          </a:prstGeom>
+          <a:noFill/>
+          <a:ln/>
+        </p:spPr>
+        <p:txBody>
+          <a:bodyPr wrap="square" rtlCol="0" anchor="ctr"/>
+          <a:lstStyle/>
+          <a:p>
+            <a:pPr algn="ctr" indent="0" marL="0">
+              <a:buNone/>
+            </a:pPr>
+            <a:r>
+              <a:rPr lang="en-US" sz="2800" b="1" dirty="0">
+                <a:solidFill>
+                  <a:srgbClr val="2D3748"/>
+                </a:solidFill>
+              </a:rPr>
+              <a:t>⚠️ リスク評価</a:t>
+            </a:r>
+            <a:endParaRPr lang="en-US" sz="2800" dirty="0"/>
+          </a:p>
+        </p:txBody>
+      </p:sp>
+      <p:sp>
+        <p:nvSpPr>
+          <p:cNvPr id="3" name="Shape 1"/>
+          <p:cNvSpPr/>
+          <p:nvPr/>
+        </p:nvSpPr>
+        <p:spPr>
+          <a:xfrm>
+            <a:off x="457200" y="1188720"/>
+            <a:ext cx="3575304" cy="1463040"/>
+          </a:xfrm>
+          <a:prstGeom prst="roundRect">
+            <a:avLst>
+              <a:gd name="adj" fmla="val 6250"/>
+            </a:avLst>
+          </a:prstGeom>
+          <a:solidFill>
+            <a:srgbClr val="F7FAFC"/>
+          </a:solidFill>
+          <a:ln w="12700">
+            <a:solidFill>
+              <a:srgbClr val="667EEA"/>
+            </a:solidFill>
+            <a:prstDash val="solid"/>
+          </a:ln>
+        </p:spPr>
+      </p:sp>
+      <p:sp>
+        <p:nvSpPr>
+          <p:cNvPr id="4" name="Shape 2"/>
+          <p:cNvSpPr/>
+          <p:nvPr/>
+        </p:nvSpPr>
+        <p:spPr>
+          <a:xfrm>
+            <a:off x="457200" y="1188720"/>
+            <a:ext cx="54864" cy="1463040"/>
+          </a:xfrm>
+          <a:prstGeom prst="rect">
+            <a:avLst/>
+          </a:prstGeom>
+          <a:solidFill>
+            <a:srgbClr val="667EEA"/>
+          </a:solidFill>
+          <a:ln/>
+        </p:spPr>
+      </p:sp>
+      <p:sp>
+        <p:nvSpPr>
+          <p:cNvPr id="5" name="Text 3"/>
+          <p:cNvSpPr/>
+          <p:nvPr/>
+        </p:nvSpPr>
+        <p:spPr>
+          <a:xfrm>
+            <a:off x="594360" y="1280160"/>
+            <a:ext cx="3300984" cy="365760"/>
+          </a:xfrm>
+          <a:prstGeom prst="rect">
+            <a:avLst/>
+          </a:prstGeom>
+          <a:noFill/>
+          <a:ln/>
+        </p:spPr>
+        <p:txBody>
+          <a:bodyPr wrap="square" rtlCol="0" anchor="t"/>
+          <a:lstStyle/>
+          <a:p>
+            <a:pPr indent="0" marL="0">
+              <a:buNone/>
+            </a:pPr>
+            <a:r>
+              <a:rPr lang="en-US" sz="1300" b="1" dirty="0">
+                <a:solidFill>
+                  <a:srgbClr val="2D3748"/>
+                </a:solidFill>
+              </a:rPr>
+              <a:t>音声キャプチャ失敗</a:t>
+            </a:r>
+            <a:endParaRPr lang="en-US" sz="1300" dirty="0"/>
+          </a:p>
+        </p:txBody>
+      </p:sp>
+      <p:sp>
+        <p:nvSpPr>
+          <p:cNvPr id="6" name="Text 4"/>
+          <p:cNvSpPr/>
+          <p:nvPr/>
+        </p:nvSpPr>
+        <p:spPr>
+          <a:xfrm>
+            <a:off x="594360" y="1645920"/>
+            <a:ext cx="3300984" cy="914400"/>
+          </a:xfrm>
+          <a:prstGeom prst="rect">
+            <a:avLst/>
+          </a:prstGeom>
+          <a:noFill/>
+          <a:ln/>
+        </p:spPr>
+        <p:txBody>
+          <a:bodyPr wrap="square" rtlCol="0" anchor="t"/>
+          <a:lstStyle/>
+          <a:p>
+            <a:pPr indent="0" marL="0">
+              <a:buNone/>
+            </a:pPr>
+            <a:r>
+              <a:rPr lang="en-US" sz="1000" dirty="0">
+                <a:solidFill>
+                  <a:srgbClr val="4A5568"/>
+                </a:solidFill>
+              </a:rPr>
+              <a:t>HIGH</a:t>
+            </a:r>
+            <a:endParaRPr lang="en-US" sz="1000" dirty="0"/>
+          </a:p>
+        </p:txBody>
+      </p:sp>
+      <p:sp>
+        <p:nvSpPr>
+          <p:cNvPr id="7" name="Shape 5"/>
+          <p:cNvSpPr/>
+          <p:nvPr/>
+        </p:nvSpPr>
+        <p:spPr>
+          <a:xfrm>
+            <a:off x="4306824" y="1188720"/>
+            <a:ext cx="3575304" cy="1463040"/>
+          </a:xfrm>
+          <a:prstGeom prst="roundRect">
+            <a:avLst>
+              <a:gd name="adj" fmla="val 6250"/>
+            </a:avLst>
+          </a:prstGeom>
+          <a:solidFill>
+            <a:srgbClr val="F7FAFC"/>
+          </a:solidFill>
+          <a:ln w="12700">
+            <a:solidFill>
+              <a:srgbClr val="48BB78"/>
+            </a:solidFill>
+            <a:prstDash val="solid"/>
+          </a:ln>
+        </p:spPr>
+      </p:sp>
+      <p:sp>
+        <p:nvSpPr>
+          <p:cNvPr id="8" name="Shape 6"/>
+          <p:cNvSpPr/>
+          <p:nvPr/>
+        </p:nvSpPr>
+        <p:spPr>
+          <a:xfrm>
+            <a:off x="4306824" y="1188720"/>
+            <a:ext cx="54864" cy="1463040"/>
+          </a:xfrm>
+          <a:prstGeom prst="rect">
+            <a:avLst/>
+          </a:prstGeom>
+          <a:solidFill>
+            <a:srgbClr val="48BB78"/>
+          </a:solidFill>
+          <a:ln/>
+        </p:spPr>
+      </p:sp>
+      <p:sp>
+        <p:nvSpPr>
+          <p:cNvPr id="9" name="Text 7"/>
+          <p:cNvSpPr/>
+          <p:nvPr/>
+        </p:nvSpPr>
+        <p:spPr>
+          <a:xfrm>
+            <a:off x="4443984" y="1280160"/>
+            <a:ext cx="3300984" cy="365760"/>
+          </a:xfrm>
+          <a:prstGeom prst="rect">
+            <a:avLst/>
+          </a:prstGeom>
+          <a:noFill/>
+          <a:ln/>
+        </p:spPr>
+        <p:txBody>
+          <a:bodyPr wrap="square" rtlCol="0" anchor="t"/>
+          <a:lstStyle/>
+          <a:p>
+            <a:pPr indent="0" marL="0">
+              <a:buNone/>
+            </a:pPr>
+            <a:r>
+              <a:rPr lang="en-US" sz="1300" b="1" dirty="0">
+                <a:solidFill>
+                  <a:srgbClr val="2D3748"/>
+                </a:solidFill>
+              </a:rPr>
+              <a:t>💡 Mitigation: マイク本体で常時ローカル録音</a:t>
+            </a:r>
+            <a:endParaRPr lang="en-US" sz="1300" dirty="0"/>
+          </a:p>
+        </p:txBody>
+      </p:sp>
+      <p:sp>
+        <p:nvSpPr>
+          <p:cNvPr id="10" name="Shape 8"/>
+          <p:cNvSpPr/>
+          <p:nvPr/>
+        </p:nvSpPr>
+        <p:spPr>
+          <a:xfrm>
+            <a:off x="8156448" y="1188720"/>
+            <a:ext cx="3575304" cy="1463040"/>
+          </a:xfrm>
+          <a:prstGeom prst="roundRect">
+            <a:avLst>
+              <a:gd name="adj" fmla="val 6250"/>
+            </a:avLst>
+          </a:prstGeom>
+          <a:solidFill>
+            <a:srgbClr val="F7FAFC"/>
+          </a:solidFill>
+          <a:ln w="12700">
+            <a:solidFill>
+              <a:srgbClr val="ED8936"/>
+            </a:solidFill>
+            <a:prstDash val="solid"/>
+          </a:ln>
+        </p:spPr>
+      </p:sp>
+      <p:sp>
+        <p:nvSpPr>
+          <p:cNvPr id="11" name="Shape 9"/>
+          <p:cNvSpPr/>
+          <p:nvPr/>
+        </p:nvSpPr>
+        <p:spPr>
+          <a:xfrm>
+            <a:off x="8156448" y="1188720"/>
+            <a:ext cx="54864" cy="1463040"/>
+          </a:xfrm>
+          <a:prstGeom prst="rect">
+            <a:avLst/>
+          </a:prstGeom>
+          <a:solidFill>
+            <a:srgbClr val="ED8936"/>
+          </a:solidFill>
+          <a:ln/>
+        </p:spPr>
+      </p:sp>
+      <p:sp>
+        <p:nvSpPr>
+          <p:cNvPr id="12" name="Text 10"/>
+          <p:cNvSpPr/>
+          <p:nvPr/>
+        </p:nvSpPr>
+        <p:spPr>
+          <a:xfrm>
+            <a:off x="8293608" y="1280160"/>
+            <a:ext cx="3300984" cy="365760"/>
+          </a:xfrm>
+          <a:prstGeom prst="rect">
+            <a:avLst/>
+          </a:prstGeom>
+          <a:noFill/>
+          <a:ln/>
+        </p:spPr>
+        <p:txBody>
+          <a:bodyPr wrap="square" rtlCol="0" anchor="t"/>
+          <a:lstStyle/>
+          <a:p>
+            <a:pPr indent="0" marL="0">
+              <a:buNone/>
+            </a:pPr>
+            <a:r>
+              <a:rPr lang="en-US" sz="1300" b="1" dirty="0">
+                <a:solidFill>
+                  <a:srgbClr val="2D3748"/>
+                </a:solidFill>
+              </a:rPr>
+              <a:t>リアルタイムAPIコスト</a:t>
+            </a:r>
+            <a:endParaRPr lang="en-US" sz="1300" dirty="0"/>
+          </a:p>
+        </p:txBody>
+      </p:sp>
+      <p:sp>
+        <p:nvSpPr>
+          <p:cNvPr id="13" name="Text 11"/>
+          <p:cNvSpPr/>
+          <p:nvPr/>
+        </p:nvSpPr>
+        <p:spPr>
+          <a:xfrm>
+            <a:off x="8293608" y="1645920"/>
+            <a:ext cx="3300984" cy="914400"/>
+          </a:xfrm>
+          <a:prstGeom prst="rect">
+            <a:avLst/>
+          </a:prstGeom>
+          <a:noFill/>
+          <a:ln/>
+        </p:spPr>
+        <p:txBody>
+          <a:bodyPr wrap="square" rtlCol="0" anchor="t"/>
+          <a:lstStyle/>
+          <a:p>
+            <a:pPr indent="0" marL="0">
+              <a:buNone/>
+            </a:pPr>
+            <a:r>
+              <a:rPr lang="en-US" sz="1000" dirty="0">
+                <a:solidFill>
+                  <a:srgbClr val="4A5568"/>
+                </a:solidFill>
+              </a:rPr>
+              <a:t>MED</a:t>
+            </a:r>
+            <a:endParaRPr lang="en-US" sz="1000" dirty="0"/>
+          </a:p>
+        </p:txBody>
+      </p:sp>
+      <p:sp>
+        <p:nvSpPr>
+          <p:cNvPr id="14" name="Shape 12"/>
+          <p:cNvSpPr/>
+          <p:nvPr/>
+        </p:nvSpPr>
+        <p:spPr>
+          <a:xfrm>
+            <a:off x="457200" y="2834640"/>
+            <a:ext cx="3575304" cy="1463040"/>
+          </a:xfrm>
+          <a:prstGeom prst="roundRect">
+            <a:avLst>
+              <a:gd name="adj" fmla="val 6250"/>
+            </a:avLst>
+          </a:prstGeom>
+          <a:solidFill>
+            <a:srgbClr val="F7FAFC"/>
+          </a:solidFill>
+          <a:ln w="12700">
+            <a:solidFill>
+              <a:srgbClr val="E53E3E"/>
+            </a:solidFill>
+            <a:prstDash val="solid"/>
+          </a:ln>
+        </p:spPr>
+      </p:sp>
+      <p:sp>
+        <p:nvSpPr>
+          <p:cNvPr id="15" name="Shape 13"/>
+          <p:cNvSpPr/>
+          <p:nvPr/>
+        </p:nvSpPr>
+        <p:spPr>
+          <a:xfrm>
+            <a:off x="457200" y="2834640"/>
+            <a:ext cx="54864" cy="1463040"/>
+          </a:xfrm>
+          <a:prstGeom prst="rect">
+            <a:avLst/>
+          </a:prstGeom>
+          <a:solidFill>
+            <a:srgbClr val="E53E3E"/>
+          </a:solidFill>
+          <a:ln/>
+        </p:spPr>
+      </p:sp>
+      <p:sp>
+        <p:nvSpPr>
+          <p:cNvPr id="16" name="Text 14"/>
+          <p:cNvSpPr/>
+          <p:nvPr/>
+        </p:nvSpPr>
+        <p:spPr>
+          <a:xfrm>
+            <a:off x="594360" y="2926080"/>
+            <a:ext cx="3300984" cy="365760"/>
+          </a:xfrm>
+          <a:prstGeom prst="rect">
+            <a:avLst/>
+          </a:prstGeom>
+          <a:noFill/>
+          <a:ln/>
+        </p:spPr>
+        <p:txBody>
+          <a:bodyPr wrap="square" rtlCol="0" anchor="t"/>
+          <a:lstStyle/>
+          <a:p>
+            <a:pPr indent="0" marL="0">
+              <a:buNone/>
+            </a:pPr>
+            <a:r>
+              <a:rPr lang="en-US" sz="1300" b="1" dirty="0">
+                <a:solidFill>
+                  <a:srgbClr val="2D3748"/>
+                </a:solidFill>
+              </a:rPr>
+              <a:t>💡 Mitigation: MVPは制御環境＋方式選択で運用</a:t>
+            </a:r>
+            <a:endParaRPr lang="en-US" sz="1300" dirty="0"/>
+          </a:p>
+        </p:txBody>
+      </p:sp>
+      <p:sp>
+        <p:nvSpPr>
+          <p:cNvPr id="17" name="Shape 15"/>
+          <p:cNvSpPr/>
+          <p:nvPr/>
+        </p:nvSpPr>
+        <p:spPr>
+          <a:xfrm>
+            <a:off x="4306824" y="2834640"/>
+            <a:ext cx="3575304" cy="1463040"/>
+          </a:xfrm>
+          <a:prstGeom prst="roundRect">
+            <a:avLst>
+              <a:gd name="adj" fmla="val 6250"/>
+            </a:avLst>
+          </a:prstGeom>
+          <a:solidFill>
+            <a:srgbClr val="F7FAFC"/>
+          </a:solidFill>
+          <a:ln w="12700">
+            <a:solidFill>
+              <a:srgbClr val="764BA2"/>
+            </a:solidFill>
+            <a:prstDash val="solid"/>
+          </a:ln>
+        </p:spPr>
+      </p:sp>
+      <p:sp>
+        <p:nvSpPr>
+          <p:cNvPr id="18" name="Shape 16"/>
+          <p:cNvSpPr/>
+          <p:nvPr/>
+        </p:nvSpPr>
+        <p:spPr>
+          <a:xfrm>
+            <a:off x="4306824" y="2834640"/>
+            <a:ext cx="54864" cy="1463040"/>
+          </a:xfrm>
+          <a:prstGeom prst="rect">
+            <a:avLst/>
+          </a:prstGeom>
+          <a:solidFill>
+            <a:srgbClr val="764BA2"/>
+          </a:solidFill>
+          <a:ln/>
+        </p:spPr>
+      </p:sp>
+      <p:sp>
+        <p:nvSpPr>
+          <p:cNvPr id="19" name="Text 17"/>
+          <p:cNvSpPr/>
+          <p:nvPr/>
+        </p:nvSpPr>
+        <p:spPr>
+          <a:xfrm>
+            <a:off x="4443984" y="2926080"/>
+            <a:ext cx="3300984" cy="365760"/>
+          </a:xfrm>
+          <a:prstGeom prst="rect">
+            <a:avLst/>
+          </a:prstGeom>
+          <a:noFill/>
+          <a:ln/>
+        </p:spPr>
+        <p:txBody>
+          <a:bodyPr wrap="square" rtlCol="0" anchor="t"/>
+          <a:lstStyle/>
+          <a:p>
+            <a:pPr indent="0" marL="0">
+              <a:buNone/>
+            </a:pPr>
+            <a:r>
+              <a:rPr lang="en-US" sz="1300" b="1" dirty="0">
+                <a:solidFill>
+                  <a:srgbClr val="2D3748"/>
+                </a:solidFill>
+              </a:rPr>
+              <a:t>RAG基盤未確定</a:t>
+            </a:r>
+            <a:endParaRPr lang="en-US" sz="1300" dirty="0"/>
+          </a:p>
+        </p:txBody>
+      </p:sp>
+      <p:sp>
+        <p:nvSpPr>
+          <p:cNvPr id="20" name="Text 18"/>
+          <p:cNvSpPr/>
+          <p:nvPr/>
+        </p:nvSpPr>
+        <p:spPr>
+          <a:xfrm>
+            <a:off x="4443984" y="3291840"/>
+            <a:ext cx="3300984" cy="914400"/>
+          </a:xfrm>
+          <a:prstGeom prst="rect">
+            <a:avLst/>
+          </a:prstGeom>
+          <a:noFill/>
+          <a:ln/>
+        </p:spPr>
+        <p:txBody>
+          <a:bodyPr wrap="square" rtlCol="0" anchor="t"/>
+          <a:lstStyle/>
+          <a:p>
+            <a:pPr indent="0" marL="0">
+              <a:buNone/>
+            </a:pPr>
+            <a:r>
+              <a:rPr lang="en-US" sz="1000" dirty="0">
+                <a:solidFill>
+                  <a:srgbClr val="4A5568"/>
+                </a:solidFill>
+              </a:rPr>
+              <a:t>MED</a:t>
+            </a:r>
+            <a:endParaRPr lang="en-US" sz="1000" dirty="0"/>
+          </a:p>
+        </p:txBody>
+      </p:sp>
+      <p:sp>
+        <p:nvSpPr>
+          <p:cNvPr id="21" name="Shape 19"/>
+          <p:cNvSpPr/>
+          <p:nvPr/>
+        </p:nvSpPr>
+        <p:spPr>
+          <a:xfrm>
+            <a:off x="8156448" y="2834640"/>
+            <a:ext cx="3575304" cy="1463040"/>
+          </a:xfrm>
+          <a:prstGeom prst="roundRect">
+            <a:avLst>
+              <a:gd name="adj" fmla="val 6250"/>
+            </a:avLst>
+          </a:prstGeom>
+          <a:solidFill>
+            <a:srgbClr val="F7FAFC"/>
+          </a:solidFill>
+          <a:ln w="12700">
+            <a:solidFill>
+              <a:srgbClr val="38A169"/>
+            </a:solidFill>
+            <a:prstDash val="solid"/>
+          </a:ln>
+        </p:spPr>
+      </p:sp>
+      <p:sp>
+        <p:nvSpPr>
+          <p:cNvPr id="22" name="Shape 20"/>
+          <p:cNvSpPr/>
+          <p:nvPr/>
+        </p:nvSpPr>
+        <p:spPr>
+          <a:xfrm>
+            <a:off x="8156448" y="2834640"/>
+            <a:ext cx="54864" cy="1463040"/>
+          </a:xfrm>
+          <a:prstGeom prst="rect">
+            <a:avLst/>
+          </a:prstGeom>
+          <a:solidFill>
+            <a:srgbClr val="38A169"/>
+          </a:solidFill>
+          <a:ln/>
+        </p:spPr>
+      </p:sp>
+      <p:sp>
+        <p:nvSpPr>
+          <p:cNvPr id="23" name="Text 21"/>
+          <p:cNvSpPr/>
+          <p:nvPr/>
+        </p:nvSpPr>
+        <p:spPr>
+          <a:xfrm>
+            <a:off x="8293608" y="2926080"/>
+            <a:ext cx="3300984" cy="365760"/>
+          </a:xfrm>
+          <a:prstGeom prst="rect">
+            <a:avLst/>
+          </a:prstGeom>
+          <a:noFill/>
+          <a:ln/>
+        </p:spPr>
+        <p:txBody>
+          <a:bodyPr wrap="square" rtlCol="0" anchor="t"/>
+          <a:lstStyle/>
+          <a:p>
+            <a:pPr indent="0" marL="0">
+              <a:buNone/>
+            </a:pPr>
+            <a:r>
+              <a:rPr lang="en-US" sz="1300" b="1" dirty="0">
+                <a:solidFill>
+                  <a:srgbClr val="2D3748"/>
+                </a:solidFill>
+              </a:rPr>
+              <a:t>💡 Mitigation: クラウド/オンプレ比較調査を先行</a:t>
+            </a:r>
+            <a:endParaRPr lang="en-US" sz="1300" dirty="0"/>
+          </a:p>
+        </p:txBody>
+      </p:sp>
+    </p:spTree>
+  </p:cSld>
+  <p:clrMapOvr>
+    <a:masterClrMapping/>
+  </p:clrMapOvr>
+</p:sld>
+</file>
+
+<file path=ppt/slides/slide14.xml><?xml version="1.0" encoding="utf-8"?>
+<p:sld xmlns:a="http://schemas.openxmlformats.org/drawingml/2006/main" xmlns:r="http://schemas.openxmlformats.org/officeDocument/2006/relationships" xmlns:p="http://schemas.openxmlformats.org/presentationml/2006/main">
+  <p:cSld name="Slide 14">
     <p:bg>
       <p:bgPr>
         <a:solidFill>
@@ -3820,7 +5179,7 @@
                   <a:srgbClr val="FFFFFF"/>
                 </a:solidFill>
               </a:rPr>
-              <a:t>Dependencies &amp; Risks</a:t>
+              <a:t>4. 実行計画と意思決定</a:t>
             </a:r>
             <a:endParaRPr lang="en-US" sz="2800" dirty="0"/>
           </a:p>
@@ -3859,568 +5218,9 @@
                   <a:srgbClr val="FFFFFF"/>
                 </a:solidFill>
               </a:rPr>
-              <a:t>実装可否は外部API・RAG基盤・テンプレート資産・セキュリティ整備に依存</a:t>
-            </a:r>
-            <a:endParaRPr lang="en-US" sz="1400" dirty="0"/>
-          </a:p>
-        </p:txBody>
-      </p:sp>
-    </p:spTree>
-  </p:cSld>
-  <p:clrMapOvr>
-    <a:masterClrMapping/>
-  </p:clrMapOvr>
-</p:sld>
-</file>
-
-<file path=ppt/slides/slide14.xml><?xml version="1.0" encoding="utf-8"?>
-<p:sld xmlns:a="http://schemas.openxmlformats.org/drawingml/2006/main" xmlns:r="http://schemas.openxmlformats.org/officeDocument/2006/relationships" xmlns:p="http://schemas.openxmlformats.org/presentationml/2006/main">
-  <p:cSld name="Slide 14">
-    <p:spTree>
-      <p:nvGrpSpPr>
-        <p:cNvPr id="1" name=""/>
-        <p:cNvGrpSpPr/>
-        <p:nvPr/>
-      </p:nvGrpSpPr>
-      <p:grpSpPr>
-        <a:xfrm>
-          <a:off x="0" y="0"/>
-          <a:ext cx="0" cy="0"/>
-          <a:chOff x="0" y="0"/>
-          <a:chExt cx="0" cy="0"/>
-        </a:xfrm>
-      </p:grpSpPr>
-      <p:sp>
-        <p:nvSpPr>
-          <p:cNvPr id="2" name="Text 0"/>
-          <p:cNvSpPr/>
-          <p:nvPr/>
-        </p:nvSpPr>
-        <p:spPr>
-          <a:xfrm>
-            <a:off x="457200" y="365760"/>
-            <a:ext cx="11274552" cy="731520"/>
-          </a:xfrm>
-          <a:prstGeom prst="rect">
-            <a:avLst/>
-          </a:prstGeom>
-          <a:noFill/>
-          <a:ln/>
-        </p:spPr>
-        <p:txBody>
-          <a:bodyPr wrap="square" rtlCol="0" anchor="ctr"/>
-          <a:lstStyle/>
-          <a:p>
-            <a:pPr algn="ctr" indent="0" marL="0">
-              <a:buNone/>
-            </a:pPr>
-            <a:r>
-              <a:rPr lang="en-US" sz="2800" b="1" dirty="0">
-                <a:solidFill>
-                  <a:srgbClr val="2D3748"/>
-                </a:solidFill>
-              </a:rPr>
-              <a:t>🔗 主要依存関係マップ</a:t>
-            </a:r>
-            <a:endParaRPr lang="en-US" sz="2800" dirty="0"/>
-          </a:p>
-        </p:txBody>
-      </p:sp>
-      <p:sp>
-        <p:nvSpPr>
-          <p:cNvPr id="3" name="Shape 1"/>
-          <p:cNvSpPr/>
-          <p:nvPr/>
-        </p:nvSpPr>
-        <p:spPr>
-          <a:xfrm>
-            <a:off x="457200" y="1188720"/>
-            <a:ext cx="3575304" cy="1463040"/>
-          </a:xfrm>
-          <a:prstGeom prst="roundRect">
-            <a:avLst>
-              <a:gd name="adj" fmla="val 6250"/>
-            </a:avLst>
-          </a:prstGeom>
-          <a:solidFill>
-            <a:srgbClr val="F7FAFC"/>
-          </a:solidFill>
-          <a:ln w="12700">
-            <a:solidFill>
-              <a:srgbClr val="667EEA"/>
-            </a:solidFill>
-            <a:prstDash val="solid"/>
-          </a:ln>
-        </p:spPr>
-      </p:sp>
-      <p:sp>
-        <p:nvSpPr>
-          <p:cNvPr id="4" name="Shape 2"/>
-          <p:cNvSpPr/>
-          <p:nvPr/>
-        </p:nvSpPr>
-        <p:spPr>
-          <a:xfrm>
-            <a:off x="457200" y="1188720"/>
-            <a:ext cx="54864" cy="1463040"/>
-          </a:xfrm>
-          <a:prstGeom prst="rect">
-            <a:avLst/>
-          </a:prstGeom>
-          <a:solidFill>
-            <a:srgbClr val="667EEA"/>
-          </a:solidFill>
-          <a:ln/>
-        </p:spPr>
-      </p:sp>
-      <p:sp>
-        <p:nvSpPr>
-          <p:cNvPr id="5" name="Text 3"/>
-          <p:cNvSpPr/>
-          <p:nvPr/>
-        </p:nvSpPr>
-        <p:spPr>
-          <a:xfrm>
-            <a:off x="594360" y="1280160"/>
-            <a:ext cx="3300984" cy="365760"/>
-          </a:xfrm>
-          <a:prstGeom prst="rect">
-            <a:avLst/>
-          </a:prstGeom>
-          <a:noFill/>
-          <a:ln/>
-        </p:spPr>
-        <p:txBody>
-          <a:bodyPr wrap="square" rtlCol="0" anchor="t"/>
-          <a:lstStyle/>
-          <a:p>
-            <a:pPr indent="0" marL="0">
-              <a:buNone/>
-            </a:pPr>
-            <a:r>
-              <a:rPr lang="en-US" sz="1300" b="1" dirty="0">
-                <a:solidFill>
-                  <a:srgbClr val="2D3748"/>
-                </a:solidFill>
-              </a:rPr>
-              <a:t>🎯 提供機能</a:t>
-            </a:r>
-            <a:endParaRPr lang="en-US" sz="1300" dirty="0"/>
-          </a:p>
-        </p:txBody>
-      </p:sp>
-      <p:sp>
-        <p:nvSpPr>
-          <p:cNvPr id="6" name="Shape 4"/>
-          <p:cNvSpPr/>
-          <p:nvPr/>
-        </p:nvSpPr>
-        <p:spPr>
-          <a:xfrm>
-            <a:off x="4306824" y="1188720"/>
-            <a:ext cx="3575304" cy="1463040"/>
-          </a:xfrm>
-          <a:prstGeom prst="roundRect">
-            <a:avLst>
-              <a:gd name="adj" fmla="val 6250"/>
-            </a:avLst>
-          </a:prstGeom>
-          <a:solidFill>
-            <a:srgbClr val="F7FAFC"/>
-          </a:solidFill>
-          <a:ln w="12700">
-            <a:solidFill>
-              <a:srgbClr val="48BB78"/>
-            </a:solidFill>
-            <a:prstDash val="solid"/>
-          </a:ln>
-        </p:spPr>
-      </p:sp>
-      <p:sp>
-        <p:nvSpPr>
-          <p:cNvPr id="7" name="Shape 5"/>
-          <p:cNvSpPr/>
-          <p:nvPr/>
-        </p:nvSpPr>
-        <p:spPr>
-          <a:xfrm>
-            <a:off x="4306824" y="1188720"/>
-            <a:ext cx="54864" cy="1463040"/>
-          </a:xfrm>
-          <a:prstGeom prst="rect">
-            <a:avLst/>
-          </a:prstGeom>
-          <a:solidFill>
-            <a:srgbClr val="48BB78"/>
-          </a:solidFill>
-          <a:ln/>
-        </p:spPr>
-      </p:sp>
-      <p:sp>
-        <p:nvSpPr>
-          <p:cNvPr id="8" name="Text 6"/>
-          <p:cNvSpPr/>
-          <p:nvPr/>
-        </p:nvSpPr>
-        <p:spPr>
-          <a:xfrm>
-            <a:off x="4443984" y="1280160"/>
-            <a:ext cx="3300984" cy="365760"/>
-          </a:xfrm>
-          <a:prstGeom prst="rect">
-            <a:avLst/>
-          </a:prstGeom>
-          <a:noFill/>
-          <a:ln/>
-        </p:spPr>
-        <p:txBody>
-          <a:bodyPr wrap="square" rtlCol="0" anchor="t"/>
-          <a:lstStyle/>
-          <a:p>
-            <a:pPr indent="0" marL="0">
-              <a:buNone/>
-            </a:pPr>
-            <a:r>
-              <a:rPr lang="en-US" sz="1300" b="1" dirty="0">
-                <a:solidFill>
-                  <a:srgbClr val="2D3748"/>
-                </a:solidFill>
-              </a:rPr>
-              <a:t>会議サマリー</a:t>
-            </a:r>
-            <a:endParaRPr lang="en-US" sz="1300" dirty="0"/>
-          </a:p>
-        </p:txBody>
-      </p:sp>
-      <p:sp>
-        <p:nvSpPr>
-          <p:cNvPr id="9" name="Shape 7"/>
-          <p:cNvSpPr/>
-          <p:nvPr/>
-        </p:nvSpPr>
-        <p:spPr>
-          <a:xfrm>
-            <a:off x="8156448" y="1188720"/>
-            <a:ext cx="3575304" cy="1463040"/>
-          </a:xfrm>
-          <a:prstGeom prst="roundRect">
-            <a:avLst>
-              <a:gd name="adj" fmla="val 6250"/>
-            </a:avLst>
-          </a:prstGeom>
-          <a:solidFill>
-            <a:srgbClr val="F7FAFC"/>
-          </a:solidFill>
-          <a:ln w="12700">
-            <a:solidFill>
-              <a:srgbClr val="ED8936"/>
-            </a:solidFill>
-            <a:prstDash val="solid"/>
-          </a:ln>
-        </p:spPr>
-      </p:sp>
-      <p:sp>
-        <p:nvSpPr>
-          <p:cNvPr id="10" name="Shape 8"/>
-          <p:cNvSpPr/>
-          <p:nvPr/>
-        </p:nvSpPr>
-        <p:spPr>
-          <a:xfrm>
-            <a:off x="8156448" y="1188720"/>
-            <a:ext cx="54864" cy="1463040"/>
-          </a:xfrm>
-          <a:prstGeom prst="rect">
-            <a:avLst/>
-          </a:prstGeom>
-          <a:solidFill>
-            <a:srgbClr val="ED8936"/>
-          </a:solidFill>
-          <a:ln/>
-        </p:spPr>
-      </p:sp>
-      <p:sp>
-        <p:nvSpPr>
-          <p:cNvPr id="11" name="Text 9"/>
-          <p:cNvSpPr/>
-          <p:nvPr/>
-        </p:nvSpPr>
-        <p:spPr>
-          <a:xfrm>
-            <a:off x="8293608" y="1280160"/>
-            <a:ext cx="3300984" cy="365760"/>
-          </a:xfrm>
-          <a:prstGeom prst="rect">
-            <a:avLst/>
-          </a:prstGeom>
-          <a:noFill/>
-          <a:ln/>
-        </p:spPr>
-        <p:txBody>
-          <a:bodyPr wrap="square" rtlCol="0" anchor="t"/>
-          <a:lstStyle/>
-          <a:p>
-            <a:pPr indent="0" marL="0">
-              <a:buNone/>
-            </a:pPr>
-            <a:r>
-              <a:rPr lang="en-US" sz="1300" b="1" dirty="0">
-                <a:solidFill>
-                  <a:srgbClr val="2D3748"/>
-                </a:solidFill>
-              </a:rPr>
-              <a:t>RAG統合</a:t>
-            </a:r>
-            <a:endParaRPr lang="en-US" sz="1300" dirty="0"/>
-          </a:p>
-        </p:txBody>
-      </p:sp>
-      <p:sp>
-        <p:nvSpPr>
-          <p:cNvPr id="12" name="Shape 10"/>
-          <p:cNvSpPr/>
-          <p:nvPr/>
-        </p:nvSpPr>
-        <p:spPr>
-          <a:xfrm>
-            <a:off x="457200" y="2834640"/>
-            <a:ext cx="3575304" cy="1463040"/>
-          </a:xfrm>
-          <a:prstGeom prst="roundRect">
-            <a:avLst>
-              <a:gd name="adj" fmla="val 6250"/>
-            </a:avLst>
-          </a:prstGeom>
-          <a:solidFill>
-            <a:srgbClr val="F7FAFC"/>
-          </a:solidFill>
-          <a:ln w="12700">
-            <a:solidFill>
-              <a:srgbClr val="E53E3E"/>
-            </a:solidFill>
-            <a:prstDash val="solid"/>
-          </a:ln>
-        </p:spPr>
-      </p:sp>
-      <p:sp>
-        <p:nvSpPr>
-          <p:cNvPr id="13" name="Shape 11"/>
-          <p:cNvSpPr/>
-          <p:nvPr/>
-        </p:nvSpPr>
-        <p:spPr>
-          <a:xfrm>
-            <a:off x="457200" y="2834640"/>
-            <a:ext cx="54864" cy="1463040"/>
-          </a:xfrm>
-          <a:prstGeom prst="rect">
-            <a:avLst/>
-          </a:prstGeom>
-          <a:solidFill>
-            <a:srgbClr val="E53E3E"/>
-          </a:solidFill>
-          <a:ln/>
-        </p:spPr>
-      </p:sp>
-      <p:sp>
-        <p:nvSpPr>
-          <p:cNvPr id="14" name="Text 12"/>
-          <p:cNvSpPr/>
-          <p:nvPr/>
-        </p:nvSpPr>
-        <p:spPr>
-          <a:xfrm>
-            <a:off x="594360" y="2926080"/>
-            <a:ext cx="3300984" cy="365760"/>
-          </a:xfrm>
-          <a:prstGeom prst="rect">
-            <a:avLst/>
-          </a:prstGeom>
-          <a:noFill/>
-          <a:ln/>
-        </p:spPr>
-        <p:txBody>
-          <a:bodyPr wrap="square" rtlCol="0" anchor="t"/>
-          <a:lstStyle/>
-          <a:p>
-            <a:pPr indent="0" marL="0">
-              <a:buNone/>
-            </a:pPr>
-            <a:r>
-              <a:rPr lang="en-US" sz="1300" b="1" dirty="0">
-                <a:solidFill>
-                  <a:srgbClr val="2D3748"/>
-                </a:solidFill>
-              </a:rPr>
-              <a:t>資料生成</a:t>
-            </a:r>
-            <a:endParaRPr lang="en-US" sz="1300" dirty="0"/>
-          </a:p>
-        </p:txBody>
-      </p:sp>
-      <p:sp>
-        <p:nvSpPr>
-          <p:cNvPr id="15" name="Shape 13"/>
-          <p:cNvSpPr/>
-          <p:nvPr/>
-        </p:nvSpPr>
-        <p:spPr>
-          <a:xfrm>
-            <a:off x="4306824" y="2834640"/>
-            <a:ext cx="3575304" cy="1463040"/>
-          </a:xfrm>
-          <a:prstGeom prst="roundRect">
-            <a:avLst>
-              <a:gd name="adj" fmla="val 6250"/>
-            </a:avLst>
-          </a:prstGeom>
-          <a:solidFill>
-            <a:srgbClr val="F7FAFC"/>
-          </a:solidFill>
-          <a:ln w="12700">
-            <a:solidFill>
-              <a:srgbClr val="764BA2"/>
-            </a:solidFill>
-            <a:prstDash val="solid"/>
-          </a:ln>
-        </p:spPr>
-      </p:sp>
-      <p:sp>
-        <p:nvSpPr>
-          <p:cNvPr id="16" name="Shape 14"/>
-          <p:cNvSpPr/>
-          <p:nvPr/>
-        </p:nvSpPr>
-        <p:spPr>
-          <a:xfrm>
-            <a:off x="4306824" y="2834640"/>
-            <a:ext cx="54864" cy="1463040"/>
-          </a:xfrm>
-          <a:prstGeom prst="rect">
-            <a:avLst/>
-          </a:prstGeom>
-          <a:solidFill>
-            <a:srgbClr val="764BA2"/>
-          </a:solidFill>
-          <a:ln/>
-        </p:spPr>
-      </p:sp>
-      <p:sp>
-        <p:nvSpPr>
-          <p:cNvPr id="17" name="Text 15"/>
-          <p:cNvSpPr/>
-          <p:nvPr/>
-        </p:nvSpPr>
-        <p:spPr>
-          <a:xfrm>
-            <a:off x="4443984" y="2926080"/>
-            <a:ext cx="3300984" cy="365760"/>
-          </a:xfrm>
-          <a:prstGeom prst="rect">
-            <a:avLst/>
-          </a:prstGeom>
-          <a:noFill/>
-          <a:ln/>
-        </p:spPr>
-        <p:txBody>
-          <a:bodyPr wrap="square" rtlCol="0" anchor="t"/>
-          <a:lstStyle/>
-          <a:p>
-            <a:pPr indent="0" marL="0">
-              <a:buNone/>
-            </a:pPr>
-            <a:r>
-              <a:rPr lang="en-US" sz="1300" b="1" dirty="0">
-                <a:solidFill>
-                  <a:srgbClr val="2D3748"/>
-                </a:solidFill>
-              </a:rPr>
-              <a:t>ライブ字幕</a:t>
-            </a:r>
-            <a:endParaRPr lang="en-US" sz="1300" dirty="0"/>
-          </a:p>
-        </p:txBody>
-      </p:sp>
-      <p:sp>
-        <p:nvSpPr>
-          <p:cNvPr id="18" name="Shape 16"/>
-          <p:cNvSpPr/>
-          <p:nvPr/>
-        </p:nvSpPr>
-        <p:spPr>
-          <a:xfrm>
-            <a:off x="8156448" y="2834640"/>
-            <a:ext cx="3575304" cy="1463040"/>
-          </a:xfrm>
-          <a:prstGeom prst="roundRect">
-            <a:avLst>
-              <a:gd name="adj" fmla="val 6250"/>
-            </a:avLst>
-          </a:prstGeom>
-          <a:solidFill>
-            <a:srgbClr val="F7FAFC"/>
-          </a:solidFill>
-          <a:ln w="12700">
-            <a:solidFill>
-              <a:srgbClr val="38A169"/>
-            </a:solidFill>
-            <a:prstDash val="solid"/>
-          </a:ln>
-        </p:spPr>
-      </p:sp>
-      <p:sp>
-        <p:nvSpPr>
-          <p:cNvPr id="19" name="Shape 17"/>
-          <p:cNvSpPr/>
-          <p:nvPr/>
-        </p:nvSpPr>
-        <p:spPr>
-          <a:xfrm>
-            <a:off x="8156448" y="2834640"/>
-            <a:ext cx="54864" cy="1463040"/>
-          </a:xfrm>
-          <a:prstGeom prst="rect">
-            <a:avLst/>
-          </a:prstGeom>
-          <a:solidFill>
-            <a:srgbClr val="38A169"/>
-          </a:solidFill>
-          <a:ln/>
-        </p:spPr>
-      </p:sp>
-      <p:sp>
-        <p:nvSpPr>
-          <p:cNvPr id="20" name="Text 18"/>
-          <p:cNvSpPr/>
-          <p:nvPr/>
-        </p:nvSpPr>
-        <p:spPr>
-          <a:xfrm>
-            <a:off x="8293608" y="2926080"/>
-            <a:ext cx="3300984" cy="365760"/>
-          </a:xfrm>
-          <a:prstGeom prst="rect">
-            <a:avLst/>
-          </a:prstGeom>
-          <a:noFill/>
-          <a:ln/>
-        </p:spPr>
-        <p:txBody>
-          <a:bodyPr wrap="square" rtlCol="0" anchor="t"/>
-          <a:lstStyle/>
-          <a:p>
-            <a:pPr indent="0" marL="0">
-              <a:buNone/>
-            </a:pPr>
-            <a:r>
-              <a:rPr lang="en-US" sz="1300" b="1" dirty="0">
-                <a:solidFill>
-                  <a:srgbClr val="2D3748"/>
-                </a:solidFill>
-              </a:rPr>
-              <a:t>🧩 必須基盤</a:t>
-            </a:r>
-            <a:endParaRPr lang="en-US" sz="1300" dirty="0"/>
+              <a:t>段階導入でMVP成立性を検証し、Phase 2へ拡張</a:t>
+            </a:r>
+            <a:endParaRPr lang="en-US" sz="1400" dirty="0"/>
           </a:p>
         </p:txBody>
       </p:sp>
@@ -4479,7 +5279,7 @@
                   <a:srgbClr val="2D3748"/>
                 </a:solidFill>
               </a:rPr>
-              <a:t>⚠️ リスク評価</a:t>
+              <a:t>📅 ロードマップ</a:t>
             </a:r>
             <a:endParaRPr lang="en-US" sz="2800" dirty="0"/>
           </a:p>
@@ -4562,7 +5362,7 @@
                   <a:srgbClr val="2D3748"/>
                 </a:solidFill>
               </a:rPr>
-              <a:t>音声キャプチャ失敗</a:t>
+              <a:t>Must依存の解消</a:t>
             </a:r>
             <a:endParaRPr lang="en-US" sz="1300" dirty="0"/>
           </a:p>
@@ -4570,43 +5370,7 @@
       </p:sp>
       <p:sp>
         <p:nvSpPr>
-          <p:cNvPr id="6" name="Text 4"/>
-          <p:cNvSpPr/>
-          <p:nvPr/>
-        </p:nvSpPr>
-        <p:spPr>
-          <a:xfrm>
-            <a:off x="594360" y="1645920"/>
-            <a:ext cx="3300984" cy="914400"/>
-          </a:xfrm>
-          <a:prstGeom prst="rect">
-            <a:avLst/>
-          </a:prstGeom>
-          <a:noFill/>
-          <a:ln/>
-        </p:spPr>
-        <p:txBody>
-          <a:bodyPr wrap="square" rtlCol="0" anchor="t"/>
-          <a:lstStyle/>
-          <a:p>
-            <a:pPr indent="0" marL="0">
-              <a:buNone/>
-            </a:pPr>
-            <a:r>
-              <a:rPr lang="en-US" sz="1000" dirty="0">
-                <a:solidFill>
-                  <a:srgbClr val="4A5568"/>
-                </a:solidFill>
-              </a:rPr>
-              <a:t>HIGH</a:t>
-            </a:r>
-            <a:endParaRPr lang="en-US" sz="1000" dirty="0"/>
-          </a:p>
-        </p:txBody>
-      </p:sp>
-      <p:sp>
-        <p:nvSpPr>
-          <p:cNvPr id="7" name="Shape 5"/>
+          <p:cNvPr id="6" name="Shape 4"/>
           <p:cNvSpPr/>
           <p:nvPr/>
         </p:nvSpPr>
@@ -4633,7 +5397,7 @@
       </p:sp>
       <p:sp>
         <p:nvSpPr>
-          <p:cNvPr id="8" name="Shape 6"/>
+          <p:cNvPr id="7" name="Shape 5"/>
           <p:cNvSpPr/>
           <p:nvPr/>
         </p:nvSpPr>
@@ -4653,7 +5417,7 @@
       </p:sp>
       <p:sp>
         <p:nvSpPr>
-          <p:cNvPr id="9" name="Text 7"/>
+          <p:cNvPr id="8" name="Text 6"/>
           <p:cNvSpPr/>
           <p:nvPr/>
         </p:nvSpPr>
@@ -4681,7 +5445,7 @@
                   <a:srgbClr val="2D3748"/>
                 </a:solidFill>
               </a:rPr>
-              <a:t>💡 Mitigation: ローカル録音を全会議で必須化</a:t>
+              <a:t>受け入れ基準の初回検証</a:t>
             </a:r>
             <a:endParaRPr lang="en-US" sz="1300" dirty="0"/>
           </a:p>
@@ -4689,7 +5453,7 @@
       </p:sp>
       <p:sp>
         <p:nvSpPr>
-          <p:cNvPr id="10" name="Shape 8"/>
+          <p:cNvPr id="9" name="Shape 7"/>
           <p:cNvSpPr/>
           <p:nvPr/>
         </p:nvSpPr>
@@ -4716,7 +5480,7 @@
       </p:sp>
       <p:sp>
         <p:nvSpPr>
-          <p:cNvPr id="11" name="Shape 9"/>
+          <p:cNvPr id="10" name="Shape 8"/>
           <p:cNvSpPr/>
           <p:nvPr/>
         </p:nvSpPr>
@@ -4736,7 +5500,7 @@
       </p:sp>
       <p:sp>
         <p:nvSpPr>
-          <p:cNvPr id="12" name="Text 10"/>
+          <p:cNvPr id="11" name="Text 9"/>
           <p:cNvSpPr/>
           <p:nvPr/>
         </p:nvSpPr>
@@ -4764,7 +5528,7 @@
                   <a:srgbClr val="2D3748"/>
                 </a:solidFill>
               </a:rPr>
-              <a:t>リアルタイムAPI費用</a:t>
+              <a:t>未解決論点の収束</a:t>
             </a:r>
             <a:endParaRPr lang="en-US" sz="1300" dirty="0"/>
           </a:p>
@@ -4772,43 +5536,7 @@
       </p:sp>
       <p:sp>
         <p:nvSpPr>
-          <p:cNvPr id="13" name="Text 11"/>
-          <p:cNvSpPr/>
-          <p:nvPr/>
-        </p:nvSpPr>
-        <p:spPr>
-          <a:xfrm>
-            <a:off x="8293608" y="1645920"/>
-            <a:ext cx="3300984" cy="914400"/>
-          </a:xfrm>
-          <a:prstGeom prst="rect">
-            <a:avLst/>
-          </a:prstGeom>
-          <a:noFill/>
-          <a:ln/>
-        </p:spPr>
-        <p:txBody>
-          <a:bodyPr wrap="square" rtlCol="0" anchor="t"/>
-          <a:lstStyle/>
-          <a:p>
-            <a:pPr indent="0" marL="0">
-              <a:buNone/>
-            </a:pPr>
-            <a:r>
-              <a:rPr lang="en-US" sz="1000" dirty="0">
-                <a:solidFill>
-                  <a:srgbClr val="4A5568"/>
-                </a:solidFill>
-              </a:rPr>
-              <a:t>MED</a:t>
-            </a:r>
-            <a:endParaRPr lang="en-US" sz="1000" dirty="0"/>
-          </a:p>
-        </p:txBody>
-      </p:sp>
-      <p:sp>
-        <p:nvSpPr>
-          <p:cNvPr id="14" name="Shape 12"/>
+          <p:cNvPr id="12" name="Shape 10"/>
           <p:cNvSpPr/>
           <p:nvPr/>
         </p:nvSpPr>
@@ -4835,7 +5563,7 @@
       </p:sp>
       <p:sp>
         <p:nvSpPr>
-          <p:cNvPr id="15" name="Shape 13"/>
+          <p:cNvPr id="13" name="Shape 11"/>
           <p:cNvSpPr/>
           <p:nvPr/>
         </p:nvSpPr>
@@ -4855,7 +5583,7 @@
       </p:sp>
       <p:sp>
         <p:nvSpPr>
-          <p:cNvPr id="16" name="Text 14"/>
+          <p:cNvPr id="14" name="Text 12"/>
           <p:cNvSpPr/>
           <p:nvPr/>
         </p:nvSpPr>
@@ -4883,209 +5611,7 @@
                   <a:srgbClr val="2D3748"/>
                 </a:solidFill>
               </a:rPr>
-              <a:t>💡 Mitigation: Whisper方式と選択可能にする</a:t>
-            </a:r>
-            <a:endParaRPr lang="en-US" sz="1300" dirty="0"/>
-          </a:p>
-        </p:txBody>
-      </p:sp>
-      <p:sp>
-        <p:nvSpPr>
-          <p:cNvPr id="17" name="Shape 15"/>
-          <p:cNvSpPr/>
-          <p:nvPr/>
-        </p:nvSpPr>
-        <p:spPr>
-          <a:xfrm>
-            <a:off x="4306824" y="2834640"/>
-            <a:ext cx="3575304" cy="1463040"/>
-          </a:xfrm>
-          <a:prstGeom prst="roundRect">
-            <a:avLst>
-              <a:gd name="adj" fmla="val 6250"/>
-            </a:avLst>
-          </a:prstGeom>
-          <a:solidFill>
-            <a:srgbClr val="F7FAFC"/>
-          </a:solidFill>
-          <a:ln w="12700">
-            <a:solidFill>
-              <a:srgbClr val="764BA2"/>
-            </a:solidFill>
-            <a:prstDash val="solid"/>
-          </a:ln>
-        </p:spPr>
-      </p:sp>
-      <p:sp>
-        <p:nvSpPr>
-          <p:cNvPr id="18" name="Shape 16"/>
-          <p:cNvSpPr/>
-          <p:nvPr/>
-        </p:nvSpPr>
-        <p:spPr>
-          <a:xfrm>
-            <a:off x="4306824" y="2834640"/>
-            <a:ext cx="54864" cy="1463040"/>
-          </a:xfrm>
-          <a:prstGeom prst="rect">
-            <a:avLst/>
-          </a:prstGeom>
-          <a:solidFill>
-            <a:srgbClr val="764BA2"/>
-          </a:solidFill>
-          <a:ln/>
-        </p:spPr>
-      </p:sp>
-      <p:sp>
-        <p:nvSpPr>
-          <p:cNvPr id="19" name="Text 17"/>
-          <p:cNvSpPr/>
-          <p:nvPr/>
-        </p:nvSpPr>
-        <p:spPr>
-          <a:xfrm>
-            <a:off x="4443984" y="2926080"/>
-            <a:ext cx="3300984" cy="365760"/>
-          </a:xfrm>
-          <a:prstGeom prst="rect">
-            <a:avLst/>
-          </a:prstGeom>
-          <a:noFill/>
-          <a:ln/>
-        </p:spPr>
-        <p:txBody>
-          <a:bodyPr wrap="square" rtlCol="0" anchor="t"/>
-          <a:lstStyle/>
-          <a:p>
-            <a:pPr indent="0" marL="0">
-              <a:buNone/>
-            </a:pPr>
-            <a:r>
-              <a:rPr lang="en-US" sz="1300" b="1" dirty="0">
-                <a:solidFill>
-                  <a:srgbClr val="2D3748"/>
-                </a:solidFill>
-              </a:rPr>
-              <a:t>RAG基盤未決定</a:t>
-            </a:r>
-            <a:endParaRPr lang="en-US" sz="1300" dirty="0"/>
-          </a:p>
-        </p:txBody>
-      </p:sp>
-      <p:sp>
-        <p:nvSpPr>
-          <p:cNvPr id="20" name="Text 18"/>
-          <p:cNvSpPr/>
-          <p:nvPr/>
-        </p:nvSpPr>
-        <p:spPr>
-          <a:xfrm>
-            <a:off x="4443984" y="3291840"/>
-            <a:ext cx="3300984" cy="914400"/>
-          </a:xfrm>
-          <a:prstGeom prst="rect">
-            <a:avLst/>
-          </a:prstGeom>
-          <a:noFill/>
-          <a:ln/>
-        </p:spPr>
-        <p:txBody>
-          <a:bodyPr wrap="square" rtlCol="0" anchor="t"/>
-          <a:lstStyle/>
-          <a:p>
-            <a:pPr indent="0" marL="0">
-              <a:buNone/>
-            </a:pPr>
-            <a:r>
-              <a:rPr lang="en-US" sz="1000" dirty="0">
-                <a:solidFill>
-                  <a:srgbClr val="4A5568"/>
-                </a:solidFill>
-              </a:rPr>
-              <a:t>MED</a:t>
-            </a:r>
-            <a:endParaRPr lang="en-US" sz="1000" dirty="0"/>
-          </a:p>
-        </p:txBody>
-      </p:sp>
-      <p:sp>
-        <p:nvSpPr>
-          <p:cNvPr id="21" name="Shape 19"/>
-          <p:cNvSpPr/>
-          <p:nvPr/>
-        </p:nvSpPr>
-        <p:spPr>
-          <a:xfrm>
-            <a:off x="8156448" y="2834640"/>
-            <a:ext cx="3575304" cy="1463040"/>
-          </a:xfrm>
-          <a:prstGeom prst="roundRect">
-            <a:avLst>
-              <a:gd name="adj" fmla="val 6250"/>
-            </a:avLst>
-          </a:prstGeom>
-          <a:solidFill>
-            <a:srgbClr val="F7FAFC"/>
-          </a:solidFill>
-          <a:ln w="12700">
-            <a:solidFill>
-              <a:srgbClr val="38A169"/>
-            </a:solidFill>
-            <a:prstDash val="solid"/>
-          </a:ln>
-        </p:spPr>
-      </p:sp>
-      <p:sp>
-        <p:nvSpPr>
-          <p:cNvPr id="22" name="Shape 20"/>
-          <p:cNvSpPr/>
-          <p:nvPr/>
-        </p:nvSpPr>
-        <p:spPr>
-          <a:xfrm>
-            <a:off x="8156448" y="2834640"/>
-            <a:ext cx="54864" cy="1463040"/>
-          </a:xfrm>
-          <a:prstGeom prst="rect">
-            <a:avLst/>
-          </a:prstGeom>
-          <a:solidFill>
-            <a:srgbClr val="38A169"/>
-          </a:solidFill>
-          <a:ln/>
-        </p:spPr>
-      </p:sp>
-      <p:sp>
-        <p:nvSpPr>
-          <p:cNvPr id="23" name="Text 21"/>
-          <p:cNvSpPr/>
-          <p:nvPr/>
-        </p:nvSpPr>
-        <p:spPr>
-          <a:xfrm>
-            <a:off x="8293608" y="2926080"/>
-            <a:ext cx="3300984" cy="365760"/>
-          </a:xfrm>
-          <a:prstGeom prst="rect">
-            <a:avLst/>
-          </a:prstGeom>
-          <a:noFill/>
-          <a:ln/>
-        </p:spPr>
-        <p:txBody>
-          <a:bodyPr wrap="square" rtlCol="0" anchor="t"/>
-          <a:lstStyle/>
-          <a:p>
-            <a:pPr indent="0" marL="0">
-              <a:buNone/>
-            </a:pPr>
-            <a:r>
-              <a:rPr lang="en-US" sz="1300" b="1" dirty="0">
-                <a:solidFill>
-                  <a:srgbClr val="2D3748"/>
-                </a:solidFill>
-              </a:rPr>
-              <a:t>💡 Mitigation: クラウド / オンプレ比較で先行評価</a:t>
+              <a:t>Could/除外項目を再評価</a:t>
             </a:r>
             <a:endParaRPr lang="en-US" sz="1300" dirty="0"/>
           </a:p>
@@ -5146,7 +5672,7 @@
                   <a:srgbClr val="2D3748"/>
                 </a:solidFill>
               </a:rPr>
-              <a:t>⭕ スコープ境界</a:t>
+              <a:t>🧭 スコープ判断マトリクス</a:t>
             </a:r>
             <a:endParaRPr lang="en-US" sz="2800" dirty="0"/>
           </a:p>
@@ -5229,7 +5755,7 @@
                   <a:srgbClr val="2D3748"/>
                 </a:solidFill>
               </a:rPr>
-              <a:t>音声要約</a:t>
+              <a:t>✅ Quick Wins</a:t>
             </a:r>
             <a:endParaRPr lang="en-US" sz="1300" dirty="0"/>
           </a:p>
@@ -5265,7 +5791,7 @@
                   <a:srgbClr val="4A5568"/>
                 </a:solidFill>
               </a:rPr>
-              <a:t>RAG統合</a:t>
+              <a:t>音声サマリー</a:t>
             </a:r>
             <a:endParaRPr lang="en-US" sz="1000" dirty="0"/>
           </a:p>
@@ -5362,7 +5888,7 @@
                   <a:srgbClr val="2D3748"/>
                 </a:solidFill>
               </a:rPr>
-              <a:t>✅ MVP: 会議記録の生成と統合</a:t>
+              <a:t>🎯 Strategic</a:t>
             </a:r>
             <a:endParaRPr lang="en-US" sz="1300" dirty="0"/>
           </a:p>
@@ -5370,7 +5896,57 @@
       </p:sp>
       <p:sp>
         <p:nvSpPr>
-          <p:cNvPr id="10" name="Shape 8"/>
+          <p:cNvPr id="10" name="Text 8"/>
+          <p:cNvSpPr/>
+          <p:nvPr/>
+        </p:nvSpPr>
+        <p:spPr>
+          <a:xfrm>
+            <a:off x="4443984" y="1645920"/>
+            <a:ext cx="3300984" cy="914400"/>
+          </a:xfrm>
+          <a:prstGeom prst="rect">
+            <a:avLst/>
+          </a:prstGeom>
+          <a:noFill/>
+          <a:ln/>
+        </p:spPr>
+        <p:txBody>
+          <a:bodyPr wrap="square" rtlCol="0" anchor="t"/>
+          <a:lstStyle/>
+          <a:p>
+            <a:pPr indent="0" marL="0">
+              <a:buNone/>
+            </a:pPr>
+            <a:r>
+              <a:rPr lang="en-US" sz="1000" dirty="0">
+                <a:solidFill>
+                  <a:srgbClr val="4A5568"/>
+                </a:solidFill>
+              </a:rPr>
+              <a:t>RAG統合</a:t>
+            </a:r>
+            <a:endParaRPr lang="en-US" sz="1000" dirty="0"/>
+          </a:p>
+          <a:p>
+            <a:pPr indent="0" marL="0">
+              <a:buNone/>
+            </a:pPr>
+            <a:r>
+              <a:rPr lang="en-US" sz="1000" dirty="0">
+                <a:solidFill>
+                  <a:srgbClr val="4A5568"/>
+                </a:solidFill>
+              </a:rPr>
+              <a:t>ライブ字幕</a:t>
+            </a:r>
+            <a:endParaRPr lang="en-US" sz="1000" dirty="0"/>
+          </a:p>
+        </p:txBody>
+      </p:sp>
+      <p:sp>
+        <p:nvSpPr>
+          <p:cNvPr id="11" name="Shape 9"/>
           <p:cNvSpPr/>
           <p:nvPr/>
         </p:nvSpPr>
@@ -5397,7 +5973,7 @@
       </p:sp>
       <p:sp>
         <p:nvSpPr>
-          <p:cNvPr id="11" name="Shape 9"/>
+          <p:cNvPr id="12" name="Shape 10"/>
           <p:cNvSpPr/>
           <p:nvPr/>
         </p:nvSpPr>
@@ -5417,7 +5993,7 @@
       </p:sp>
       <p:sp>
         <p:nvSpPr>
-          <p:cNvPr id="12" name="Text 10"/>
+          <p:cNvPr id="13" name="Text 11"/>
           <p:cNvSpPr/>
           <p:nvPr/>
         </p:nvSpPr>
@@ -5445,9 +6021,178 @@
                   <a:srgbClr val="2D3748"/>
                 </a:solidFill>
               </a:rPr>
-              <a:t>🚫 初期除外: 連携・統制機能の本格整備</a:t>
+              <a:t>⚡ Fill-ins</a:t>
             </a:r>
             <a:endParaRPr lang="en-US" sz="1300" dirty="0"/>
+          </a:p>
+        </p:txBody>
+      </p:sp>
+      <p:sp>
+        <p:nvSpPr>
+          <p:cNvPr id="14" name="Text 12"/>
+          <p:cNvSpPr/>
+          <p:nvPr/>
+        </p:nvSpPr>
+        <p:spPr>
+          <a:xfrm>
+            <a:off x="8293608" y="1645920"/>
+            <a:ext cx="3300984" cy="914400"/>
+          </a:xfrm>
+          <a:prstGeom prst="rect">
+            <a:avLst/>
+          </a:prstGeom>
+          <a:noFill/>
+          <a:ln/>
+        </p:spPr>
+        <p:txBody>
+          <a:bodyPr wrap="square" rtlCol="0" anchor="t"/>
+          <a:lstStyle/>
+          <a:p>
+            <a:pPr indent="0" marL="0">
+              <a:buNone/>
+            </a:pPr>
+            <a:r>
+              <a:rPr lang="en-US" sz="1000" dirty="0">
+                <a:solidFill>
+                  <a:srgbClr val="4A5568"/>
+                </a:solidFill>
+              </a:rPr>
+              <a:t>エクスポート</a:t>
+            </a:r>
+            <a:endParaRPr lang="en-US" sz="1000" dirty="0"/>
+          </a:p>
+        </p:txBody>
+      </p:sp>
+      <p:sp>
+        <p:nvSpPr>
+          <p:cNvPr id="15" name="Shape 13"/>
+          <p:cNvSpPr/>
+          <p:nvPr/>
+        </p:nvSpPr>
+        <p:spPr>
+          <a:xfrm>
+            <a:off x="457200" y="2834640"/>
+            <a:ext cx="3575304" cy="1463040"/>
+          </a:xfrm>
+          <a:prstGeom prst="roundRect">
+            <a:avLst>
+              <a:gd name="adj" fmla="val 6250"/>
+            </a:avLst>
+          </a:prstGeom>
+          <a:solidFill>
+            <a:srgbClr val="F7FAFC"/>
+          </a:solidFill>
+          <a:ln w="12700">
+            <a:solidFill>
+              <a:srgbClr val="E53E3E"/>
+            </a:solidFill>
+            <a:prstDash val="solid"/>
+          </a:ln>
+        </p:spPr>
+      </p:sp>
+      <p:sp>
+        <p:nvSpPr>
+          <p:cNvPr id="16" name="Shape 14"/>
+          <p:cNvSpPr/>
+          <p:nvPr/>
+        </p:nvSpPr>
+        <p:spPr>
+          <a:xfrm>
+            <a:off x="457200" y="2834640"/>
+            <a:ext cx="54864" cy="1463040"/>
+          </a:xfrm>
+          <a:prstGeom prst="rect">
+            <a:avLst/>
+          </a:prstGeom>
+          <a:solidFill>
+            <a:srgbClr val="E53E3E"/>
+          </a:solidFill>
+          <a:ln/>
+        </p:spPr>
+      </p:sp>
+      <p:sp>
+        <p:nvSpPr>
+          <p:cNvPr id="17" name="Text 15"/>
+          <p:cNvSpPr/>
+          <p:nvPr/>
+        </p:nvSpPr>
+        <p:spPr>
+          <a:xfrm>
+            <a:off x="594360" y="2926080"/>
+            <a:ext cx="3300984" cy="365760"/>
+          </a:xfrm>
+          <a:prstGeom prst="rect">
+            <a:avLst/>
+          </a:prstGeom>
+          <a:noFill/>
+          <a:ln/>
+        </p:spPr>
+        <p:txBody>
+          <a:bodyPr wrap="square" rtlCol="0" anchor="t"/>
+          <a:lstStyle/>
+          <a:p>
+            <a:pPr indent="0" marL="0">
+              <a:buNone/>
+            </a:pPr>
+            <a:r>
+              <a:rPr lang="en-US" sz="1300" b="1" dirty="0">
+                <a:solidFill>
+                  <a:srgbClr val="2D3748"/>
+                </a:solidFill>
+              </a:rPr>
+              <a:t>❌ Avoid in MVP</a:t>
+            </a:r>
+            <a:endParaRPr lang="en-US" sz="1300" dirty="0"/>
+          </a:p>
+        </p:txBody>
+      </p:sp>
+      <p:sp>
+        <p:nvSpPr>
+          <p:cNvPr id="18" name="Text 16"/>
+          <p:cNvSpPr/>
+          <p:nvPr/>
+        </p:nvSpPr>
+        <p:spPr>
+          <a:xfrm>
+            <a:off x="594360" y="3291840"/>
+            <a:ext cx="3300984" cy="914400"/>
+          </a:xfrm>
+          <a:prstGeom prst="rect">
+            <a:avLst/>
+          </a:prstGeom>
+          <a:noFill/>
+          <a:ln/>
+        </p:spPr>
+        <p:txBody>
+          <a:bodyPr wrap="square" rtlCol="0" anchor="t"/>
+          <a:lstStyle/>
+          <a:p>
+            <a:pPr indent="0" marL="0">
+              <a:buNone/>
+            </a:pPr>
+            <a:r>
+              <a:rPr lang="en-US" sz="1000" dirty="0">
+                <a:solidFill>
+                  <a:srgbClr val="4A5568"/>
+                </a:solidFill>
+              </a:rPr>
+              <a:t>外部連携</a:t>
+            </a:r>
+            <a:endParaRPr lang="en-US" sz="1000" dirty="0"/>
+          </a:p>
+          <a:p>
+            <a:pPr indent="0" marL="0">
+              <a:buNone/>
+            </a:pPr>
+            <a:r>
+              <a:rPr lang="en-US" sz="1000" dirty="0">
+                <a:solidFill>
+                  <a:srgbClr val="4A5568"/>
+                </a:solidFill>
+              </a:rPr>
+              <a:t>承認WF</a:t>
+            </a:r>
+            <a:endParaRPr lang="en-US" sz="1000" dirty="0"/>
           </a:p>
         </p:txBody>
       </p:sp>
@@ -5506,7 +6251,7 @@
                   <a:srgbClr val="2D3748"/>
                 </a:solidFill>
               </a:rPr>
-              <a:t>❓ 未解決事項の整理</a:t>
+              <a:t>🚫 MVP除外範囲</a:t>
             </a:r>
             <a:endParaRPr lang="en-US" sz="2800" dirty="0"/>
           </a:p>
@@ -5514,61 +6259,14 @@
       </p:sp>
       <p:sp>
         <p:nvSpPr>
-          <p:cNvPr id="3" name="Shape 1"/>
+          <p:cNvPr id="3" name="Text 1"/>
           <p:cNvSpPr/>
           <p:nvPr/>
         </p:nvSpPr>
         <p:spPr>
           <a:xfrm>
-            <a:off x="457200" y="1188720"/>
-            <a:ext cx="3575304" cy="1463040"/>
-          </a:xfrm>
-          <a:prstGeom prst="roundRect">
-            <a:avLst>
-              <a:gd name="adj" fmla="val 6250"/>
-            </a:avLst>
-          </a:prstGeom>
-          <a:solidFill>
-            <a:srgbClr val="F7FAFC"/>
-          </a:solidFill>
-          <a:ln w="12700">
-            <a:solidFill>
-              <a:srgbClr val="667EEA"/>
-            </a:solidFill>
-            <a:prstDash val="solid"/>
-          </a:ln>
-        </p:spPr>
-      </p:sp>
-      <p:sp>
-        <p:nvSpPr>
-          <p:cNvPr id="4" name="Shape 2"/>
-          <p:cNvSpPr/>
-          <p:nvPr/>
-        </p:nvSpPr>
-        <p:spPr>
-          <a:xfrm>
-            <a:off x="457200" y="1188720"/>
-            <a:ext cx="54864" cy="1463040"/>
-          </a:xfrm>
-          <a:prstGeom prst="rect">
-            <a:avLst/>
-          </a:prstGeom>
-          <a:solidFill>
-            <a:srgbClr val="667EEA"/>
-          </a:solidFill>
-          <a:ln/>
-        </p:spPr>
-      </p:sp>
-      <p:sp>
-        <p:nvSpPr>
-          <p:cNvPr id="5" name="Text 3"/>
-          <p:cNvSpPr/>
-          <p:nvPr/>
-        </p:nvSpPr>
-        <p:spPr>
-          <a:xfrm>
-            <a:off x="594360" y="1280160"/>
-            <a:ext cx="3300984" cy="365760"/>
+            <a:off x="731520" y="1188720"/>
+            <a:ext cx="10725912" cy="3383280"/>
           </a:xfrm>
           <a:prstGeom prst="rect">
             <a:avLst/>
@@ -5581,432 +6279,649 @@
           <a:lstStyle/>
           <a:p>
             <a:pPr indent="0" marL="0">
-              <a:buNone/>
-            </a:pPr>
-            <a:r>
-              <a:rPr lang="en-US" sz="1300" b="1" dirty="0">
-                <a:solidFill>
-                  <a:srgbClr val="2D3748"/>
-                </a:solidFill>
-              </a:rPr>
-              <a:t>💰 コスト・予算</a:t>
-            </a:r>
-            <a:endParaRPr lang="en-US" sz="1300" dirty="0"/>
-          </a:p>
-        </p:txBody>
-      </p:sp>
-      <p:sp>
-        <p:nvSpPr>
-          <p:cNvPr id="6" name="Shape 4"/>
-          <p:cNvSpPr/>
-          <p:nvPr/>
-        </p:nvSpPr>
-        <p:spPr>
-          <a:xfrm>
-            <a:off x="4306824" y="1188720"/>
-            <a:ext cx="3575304" cy="1463040"/>
-          </a:xfrm>
-          <a:prstGeom prst="roundRect">
-            <a:avLst>
-              <a:gd name="adj" fmla="val 6250"/>
-            </a:avLst>
-          </a:prstGeom>
-          <a:solidFill>
-            <a:srgbClr val="F7FAFC"/>
-          </a:solidFill>
-          <a:ln w="12700">
-            <a:solidFill>
-              <a:srgbClr val="48BB78"/>
-            </a:solidFill>
-            <a:prstDash val="solid"/>
-          </a:ln>
-        </p:spPr>
-      </p:sp>
-      <p:sp>
-        <p:nvSpPr>
-          <p:cNvPr id="7" name="Shape 5"/>
-          <p:cNvSpPr/>
-          <p:nvPr/>
-        </p:nvSpPr>
-        <p:spPr>
-          <a:xfrm>
-            <a:off x="4306824" y="1188720"/>
-            <a:ext cx="54864" cy="1463040"/>
-          </a:xfrm>
-          <a:prstGeom prst="rect">
-            <a:avLst/>
-          </a:prstGeom>
-          <a:solidFill>
-            <a:srgbClr val="48BB78"/>
-          </a:solidFill>
-          <a:ln/>
-        </p:spPr>
-      </p:sp>
-      <p:sp>
-        <p:nvSpPr>
-          <p:cNvPr id="8" name="Text 6"/>
-          <p:cNvSpPr/>
-          <p:nvPr/>
-        </p:nvSpPr>
-        <p:spPr>
-          <a:xfrm>
-            <a:off x="4443984" y="1280160"/>
-            <a:ext cx="3300984" cy="365760"/>
-          </a:xfrm>
-          <a:prstGeom prst="rect">
-            <a:avLst/>
-          </a:prstGeom>
-          <a:noFill/>
-          <a:ln/>
-        </p:spPr>
-        <p:txBody>
-          <a:bodyPr wrap="square" rtlCol="0" anchor="t"/>
-          <a:lstStyle/>
-          <a:p>
-            <a:pPr indent="0" marL="0">
-              <a:buNone/>
-            </a:pPr>
-            <a:r>
-              <a:rPr lang="en-US" sz="1300" b="1" dirty="0">
-                <a:solidFill>
-                  <a:srgbClr val="2D3748"/>
-                </a:solidFill>
-              </a:rPr>
-              <a:t>🧠 RAG要件</a:t>
-            </a:r>
-            <a:endParaRPr lang="en-US" sz="1300" dirty="0"/>
-          </a:p>
-        </p:txBody>
-      </p:sp>
-      <p:sp>
-        <p:nvSpPr>
-          <p:cNvPr id="9" name="Shape 7"/>
-          <p:cNvSpPr/>
-          <p:nvPr/>
-        </p:nvSpPr>
-        <p:spPr>
-          <a:xfrm>
-            <a:off x="8156448" y="1188720"/>
-            <a:ext cx="3575304" cy="1463040"/>
-          </a:xfrm>
-          <a:prstGeom prst="roundRect">
-            <a:avLst>
-              <a:gd name="adj" fmla="val 6250"/>
-            </a:avLst>
-          </a:prstGeom>
-          <a:solidFill>
-            <a:srgbClr val="F7FAFC"/>
-          </a:solidFill>
-          <a:ln w="12700">
-            <a:solidFill>
-              <a:srgbClr val="ED8936"/>
-            </a:solidFill>
-            <a:prstDash val="solid"/>
-          </a:ln>
-        </p:spPr>
-      </p:sp>
-      <p:sp>
-        <p:nvSpPr>
-          <p:cNvPr id="10" name="Shape 8"/>
-          <p:cNvSpPr/>
-          <p:nvPr/>
-        </p:nvSpPr>
-        <p:spPr>
-          <a:xfrm>
-            <a:off x="8156448" y="1188720"/>
-            <a:ext cx="54864" cy="1463040"/>
-          </a:xfrm>
-          <a:prstGeom prst="rect">
-            <a:avLst/>
-          </a:prstGeom>
-          <a:solidFill>
-            <a:srgbClr val="ED8936"/>
-          </a:solidFill>
-          <a:ln/>
-        </p:spPr>
-      </p:sp>
-      <p:sp>
-        <p:nvSpPr>
-          <p:cNvPr id="11" name="Text 9"/>
-          <p:cNvSpPr/>
-          <p:nvPr/>
-        </p:nvSpPr>
-        <p:spPr>
-          <a:xfrm>
-            <a:off x="8293608" y="1280160"/>
-            <a:ext cx="3300984" cy="365760"/>
-          </a:xfrm>
-          <a:prstGeom prst="rect">
-            <a:avLst/>
-          </a:prstGeom>
-          <a:noFill/>
-          <a:ln/>
-        </p:spPr>
-        <p:txBody>
-          <a:bodyPr wrap="square" rtlCol="0" anchor="t"/>
-          <a:lstStyle/>
-          <a:p>
-            <a:pPr indent="0" marL="0">
-              <a:buNone/>
-            </a:pPr>
-            <a:r>
-              <a:rPr lang="en-US" sz="1300" b="1" dirty="0">
-                <a:solidFill>
-                  <a:srgbClr val="2D3748"/>
-                </a:solidFill>
-              </a:rPr>
-              <a:t>🌐 言語・辞書</a:t>
-            </a:r>
-            <a:endParaRPr lang="en-US" sz="1300" dirty="0"/>
-          </a:p>
-        </p:txBody>
-      </p:sp>
-      <p:sp>
-        <p:nvSpPr>
-          <p:cNvPr id="12" name="Shape 10"/>
-          <p:cNvSpPr/>
-          <p:nvPr/>
-        </p:nvSpPr>
-        <p:spPr>
-          <a:xfrm>
-            <a:off x="457200" y="2834640"/>
-            <a:ext cx="3575304" cy="1463040"/>
-          </a:xfrm>
-          <a:prstGeom prst="roundRect">
-            <a:avLst>
-              <a:gd name="adj" fmla="val 6250"/>
-            </a:avLst>
-          </a:prstGeom>
-          <a:solidFill>
-            <a:srgbClr val="F7FAFC"/>
-          </a:solidFill>
-          <a:ln w="12700">
-            <a:solidFill>
-              <a:srgbClr val="E53E3E"/>
-            </a:solidFill>
-            <a:prstDash val="solid"/>
-          </a:ln>
-        </p:spPr>
-      </p:sp>
-      <p:sp>
-        <p:nvSpPr>
-          <p:cNvPr id="13" name="Shape 11"/>
-          <p:cNvSpPr/>
-          <p:nvPr/>
-        </p:nvSpPr>
-        <p:spPr>
-          <a:xfrm>
-            <a:off x="457200" y="2834640"/>
-            <a:ext cx="54864" cy="1463040"/>
-          </a:xfrm>
-          <a:prstGeom prst="rect">
-            <a:avLst/>
-          </a:prstGeom>
-          <a:solidFill>
-            <a:srgbClr val="E53E3E"/>
-          </a:solidFill>
-          <a:ln/>
-        </p:spPr>
-      </p:sp>
-      <p:sp>
-        <p:nvSpPr>
-          <p:cNvPr id="14" name="Text 12"/>
-          <p:cNvSpPr/>
-          <p:nvPr/>
-        </p:nvSpPr>
-        <p:spPr>
-          <a:xfrm>
-            <a:off x="594360" y="2926080"/>
-            <a:ext cx="3300984" cy="365760"/>
-          </a:xfrm>
-          <a:prstGeom prst="rect">
-            <a:avLst/>
-          </a:prstGeom>
-          <a:noFill/>
-          <a:ln/>
-        </p:spPr>
-        <p:txBody>
-          <a:bodyPr wrap="square" rtlCol="0" anchor="t"/>
-          <a:lstStyle/>
-          <a:p>
-            <a:pPr indent="0" marL="0">
-              <a:buNone/>
-            </a:pPr>
-            <a:r>
-              <a:rPr lang="en-US" sz="1300" b="1" dirty="0">
-                <a:solidFill>
-                  <a:srgbClr val="2D3748"/>
-                </a:solidFill>
-              </a:rPr>
-              <a:t>📄 テンプレート資産</a:t>
-            </a:r>
-            <a:endParaRPr lang="en-US" sz="1300" dirty="0"/>
-          </a:p>
-        </p:txBody>
-      </p:sp>
-      <p:sp>
-        <p:nvSpPr>
-          <p:cNvPr id="15" name="Shape 13"/>
-          <p:cNvSpPr/>
-          <p:nvPr/>
-        </p:nvSpPr>
-        <p:spPr>
-          <a:xfrm>
-            <a:off x="4306824" y="2834640"/>
-            <a:ext cx="3575304" cy="1463040"/>
-          </a:xfrm>
-          <a:prstGeom prst="roundRect">
-            <a:avLst>
-              <a:gd name="adj" fmla="val 6250"/>
-            </a:avLst>
-          </a:prstGeom>
-          <a:solidFill>
-            <a:srgbClr val="F7FAFC"/>
-          </a:solidFill>
-          <a:ln w="12700">
-            <a:solidFill>
-              <a:srgbClr val="764BA2"/>
-            </a:solidFill>
-            <a:prstDash val="solid"/>
-          </a:ln>
-        </p:spPr>
-      </p:sp>
-      <p:sp>
-        <p:nvSpPr>
-          <p:cNvPr id="16" name="Shape 14"/>
-          <p:cNvSpPr/>
-          <p:nvPr/>
-        </p:nvSpPr>
-        <p:spPr>
-          <a:xfrm>
-            <a:off x="4306824" y="2834640"/>
-            <a:ext cx="54864" cy="1463040"/>
-          </a:xfrm>
-          <a:prstGeom prst="rect">
-            <a:avLst/>
-          </a:prstGeom>
-          <a:solidFill>
-            <a:srgbClr val="764BA2"/>
-          </a:solidFill>
-          <a:ln/>
-        </p:spPr>
-      </p:sp>
-      <p:sp>
-        <p:nvSpPr>
-          <p:cNvPr id="17" name="Text 15"/>
-          <p:cNvSpPr/>
-          <p:nvPr/>
-        </p:nvSpPr>
-        <p:spPr>
-          <a:xfrm>
-            <a:off x="4443984" y="2926080"/>
-            <a:ext cx="3300984" cy="365760"/>
-          </a:xfrm>
-          <a:prstGeom prst="rect">
-            <a:avLst/>
-          </a:prstGeom>
-          <a:noFill/>
-          <a:ln/>
-        </p:spPr>
-        <p:txBody>
-          <a:bodyPr wrap="square" rtlCol="0" anchor="t"/>
-          <a:lstStyle/>
-          <a:p>
-            <a:pPr indent="0" marL="0">
-              <a:buNone/>
-            </a:pPr>
-            <a:r>
-              <a:rPr lang="en-US" sz="1300" b="1" dirty="0">
-                <a:solidFill>
-                  <a:srgbClr val="2D3748"/>
-                </a:solidFill>
-              </a:rPr>
-              <a:t>✅ 成功指標定義</a:t>
-            </a:r>
-            <a:endParaRPr lang="en-US" sz="1300" dirty="0"/>
-          </a:p>
-        </p:txBody>
-      </p:sp>
-      <p:sp>
-        <p:nvSpPr>
-          <p:cNvPr id="18" name="Shape 16"/>
-          <p:cNvSpPr/>
-          <p:nvPr/>
-        </p:nvSpPr>
-        <p:spPr>
-          <a:xfrm>
-            <a:off x="8156448" y="2834640"/>
-            <a:ext cx="3575304" cy="1463040"/>
-          </a:xfrm>
-          <a:prstGeom prst="roundRect">
-            <a:avLst>
-              <a:gd name="adj" fmla="val 6250"/>
-            </a:avLst>
-          </a:prstGeom>
-          <a:solidFill>
-            <a:srgbClr val="F7FAFC"/>
-          </a:solidFill>
-          <a:ln w="12700">
-            <a:solidFill>
-              <a:srgbClr val="38A169"/>
-            </a:solidFill>
-            <a:prstDash val="solid"/>
-          </a:ln>
-        </p:spPr>
-      </p:sp>
-      <p:sp>
-        <p:nvSpPr>
-          <p:cNvPr id="19" name="Shape 17"/>
-          <p:cNvSpPr/>
-          <p:nvPr/>
-        </p:nvSpPr>
-        <p:spPr>
-          <a:xfrm>
-            <a:off x="8156448" y="2834640"/>
-            <a:ext cx="54864" cy="1463040"/>
-          </a:xfrm>
-          <a:prstGeom prst="rect">
-            <a:avLst/>
-          </a:prstGeom>
-          <a:solidFill>
-            <a:srgbClr val="38A169"/>
-          </a:solidFill>
-          <a:ln/>
-        </p:spPr>
-      </p:sp>
-      <p:sp>
-        <p:nvSpPr>
-          <p:cNvPr id="20" name="Text 18"/>
-          <p:cNvSpPr/>
-          <p:nvPr/>
-        </p:nvSpPr>
-        <p:spPr>
-          <a:xfrm>
-            <a:off x="8293608" y="2926080"/>
-            <a:ext cx="3300984" cy="365760"/>
-          </a:xfrm>
-          <a:prstGeom prst="rect">
-            <a:avLst/>
-          </a:prstGeom>
-          <a:noFill/>
-          <a:ln/>
-        </p:spPr>
-        <p:txBody>
-          <a:bodyPr wrap="square" rtlCol="0" anchor="t"/>
-          <a:lstStyle/>
-          <a:p>
-            <a:pPr indent="0" marL="0">
-              <a:buNone/>
-            </a:pPr>
-            <a:r>
-              <a:rPr lang="en-US" sz="1300" b="1" dirty="0">
-                <a:solidFill>
-                  <a:srgbClr val="2D3748"/>
-                </a:solidFill>
-              </a:rPr>
-              <a:t>🎯 API費用 / RAG要件</a:t>
-            </a:r>
-            <a:endParaRPr lang="en-US" sz="1300" dirty="0"/>
+              <a:lnSpc>
+                <a:spcPct val="140000"/>
+              </a:lnSpc>
+              <a:buNone/>
+            </a:pPr>
+            <a:r>
+              <a:rPr lang="en-US" sz="1400" dirty="0">
+                <a:solidFill>
+                  <a:srgbClr val="2D3748"/>
+                </a:solidFill>
+              </a:rPr>
+              <a:t>🔌</a:t>
+            </a:r>
+            <a:endParaRPr lang="en-US" sz="1400" dirty="0"/>
+          </a:p>
+          <a:p>
+            <a:pPr indent="0" marL="0">
+              <a:lnSpc>
+                <a:spcPct val="140000"/>
+              </a:lnSpc>
+              <a:buNone/>
+            </a:pPr>
+            <a:endParaRPr lang="en-US" sz="1400" dirty="0"/>
+          </a:p>
+          <a:p>
+            <a:pPr indent="0" marL="0">
+              <a:lnSpc>
+                <a:spcPct val="140000"/>
+              </a:lnSpc>
+              <a:buNone/>
+            </a:pPr>
+            <a:r>
+              <a:rPr lang="en-US" sz="1400" dirty="0">
+                <a:solidFill>
+                  <a:srgbClr val="2D3748"/>
+                </a:solidFill>
+              </a:rPr>
+              <a:t>      </a:t>
+            </a:r>
+            <a:endParaRPr lang="en-US" sz="1400" dirty="0"/>
+          </a:p>
+          <a:p>
+            <a:pPr indent="0" marL="0">
+              <a:lnSpc>
+                <a:spcPct val="140000"/>
+              </a:lnSpc>
+              <a:buNone/>
+            </a:pPr>
+            <a:r>
+              <a:rPr lang="en-US" sz="1400" dirty="0">
+                <a:solidFill>
+                  <a:srgbClr val="2D3748"/>
+                </a:solidFill>
+              </a:rPr>
+              <a:t>会議ツール連携</a:t>
+            </a:r>
+            <a:endParaRPr lang="en-US" sz="1400" dirty="0"/>
+          </a:p>
+          <a:p>
+            <a:pPr indent="0" marL="0">
+              <a:lnSpc>
+                <a:spcPct val="140000"/>
+              </a:lnSpc>
+              <a:buNone/>
+            </a:pPr>
+            <a:endParaRPr lang="en-US" sz="1400" dirty="0"/>
+          </a:p>
+          <a:p>
+            <a:pPr indent="0" marL="0">
+              <a:lnSpc>
+                <a:spcPct val="140000"/>
+              </a:lnSpc>
+              <a:buNone/>
+            </a:pPr>
+            <a:r>
+              <a:rPr lang="en-US" sz="1400" dirty="0">
+                <a:solidFill>
+                  <a:srgbClr val="2D3748"/>
+                </a:solidFill>
+              </a:rPr>
+              <a:t>      </a:t>
+            </a:r>
+            <a:endParaRPr lang="en-US" sz="1400" dirty="0"/>
+          </a:p>
+          <a:p>
+            <a:pPr indent="0" marL="0">
+              <a:lnSpc>
+                <a:spcPct val="140000"/>
+              </a:lnSpc>
+              <a:buNone/>
+            </a:pPr>
+            <a:r>
+              <a:rPr lang="en-US" sz="1400" dirty="0">
+                <a:solidFill>
+                  <a:srgbClr val="2D3748"/>
+                </a:solidFill>
+              </a:rPr>
+              <a:t>Zoom / Teams は第2フェーズ</a:t>
+            </a:r>
+            <a:endParaRPr lang="en-US" sz="1400" dirty="0"/>
+          </a:p>
+          <a:p>
+            <a:pPr indent="0" marL="0">
+              <a:lnSpc>
+                <a:spcPct val="140000"/>
+              </a:lnSpc>
+              <a:buNone/>
+            </a:pPr>
+            <a:endParaRPr lang="en-US" sz="1400" dirty="0"/>
+          </a:p>
+          <a:p>
+            <a:pPr indent="0" marL="0">
+              <a:lnSpc>
+                <a:spcPct val="140000"/>
+              </a:lnSpc>
+              <a:buNone/>
+            </a:pPr>
+            <a:r>
+              <a:rPr lang="en-US" sz="1400" dirty="0">
+                <a:solidFill>
+                  <a:srgbClr val="2D3748"/>
+                </a:solidFill>
+              </a:rPr>
+              <a:t>    </a:t>
+            </a:r>
+            <a:endParaRPr lang="en-US" sz="1400" dirty="0"/>
+          </a:p>
+          <a:p>
+            <a:pPr indent="0" marL="0">
+              <a:lnSpc>
+                <a:spcPct val="140000"/>
+              </a:lnSpc>
+              <a:buNone/>
+            </a:pPr>
+            <a:endParaRPr lang="en-US" sz="1400" dirty="0"/>
+          </a:p>
+          <a:p>
+            <a:pPr indent="0" marL="0">
+              <a:lnSpc>
+                <a:spcPct val="140000"/>
+              </a:lnSpc>
+              <a:buNone/>
+            </a:pPr>
+            <a:r>
+              <a:rPr lang="en-US" sz="1400" dirty="0">
+                <a:solidFill>
+                  <a:srgbClr val="2D3748"/>
+                </a:solidFill>
+              </a:rPr>
+              <a:t>    </a:t>
+            </a:r>
+            <a:endParaRPr lang="en-US" sz="1400" dirty="0"/>
+          </a:p>
+          <a:p>
+            <a:pPr indent="0" marL="0">
+              <a:lnSpc>
+                <a:spcPct val="140000"/>
+              </a:lnSpc>
+              <a:buNone/>
+            </a:pPr>
+            <a:endParaRPr lang="en-US" sz="1400" dirty="0"/>
+          </a:p>
+          <a:p>
+            <a:pPr indent="0" marL="0">
+              <a:lnSpc>
+                <a:spcPct val="140000"/>
+              </a:lnSpc>
+              <a:buNone/>
+            </a:pPr>
+            <a:r>
+              <a:rPr lang="en-US" sz="1400" dirty="0">
+                <a:solidFill>
+                  <a:srgbClr val="2D3748"/>
+                </a:solidFill>
+              </a:rPr>
+              <a:t>      </a:t>
+            </a:r>
+            <a:endParaRPr lang="en-US" sz="1400" dirty="0"/>
+          </a:p>
+          <a:p>
+            <a:pPr indent="0" marL="0">
+              <a:lnSpc>
+                <a:spcPct val="140000"/>
+              </a:lnSpc>
+              <a:buNone/>
+            </a:pPr>
+            <a:r>
+              <a:rPr lang="en-US" sz="1400" dirty="0">
+                <a:solidFill>
+                  <a:srgbClr val="2D3748"/>
+                </a:solidFill>
+              </a:rPr>
+              <a:t>🛒</a:t>
+            </a:r>
+            <a:endParaRPr lang="en-US" sz="1400" dirty="0"/>
+          </a:p>
+          <a:p>
+            <a:pPr indent="0" marL="0">
+              <a:lnSpc>
+                <a:spcPct val="140000"/>
+              </a:lnSpc>
+              <a:buNone/>
+            </a:pPr>
+            <a:endParaRPr lang="en-US" sz="1400" dirty="0"/>
+          </a:p>
+          <a:p>
+            <a:pPr indent="0" marL="0">
+              <a:lnSpc>
+                <a:spcPct val="140000"/>
+              </a:lnSpc>
+              <a:buNone/>
+            </a:pPr>
+            <a:r>
+              <a:rPr lang="en-US" sz="1400" dirty="0">
+                <a:solidFill>
+                  <a:srgbClr val="2D3748"/>
+                </a:solidFill>
+              </a:rPr>
+              <a:t>      </a:t>
+            </a:r>
+            <a:endParaRPr lang="en-US" sz="1400" dirty="0"/>
+          </a:p>
+          <a:p>
+            <a:pPr indent="0" marL="0">
+              <a:lnSpc>
+                <a:spcPct val="140000"/>
+              </a:lnSpc>
+              <a:buNone/>
+            </a:pPr>
+            <a:r>
+              <a:rPr lang="en-US" sz="1400" dirty="0">
+                <a:solidFill>
+                  <a:srgbClr val="2D3748"/>
+                </a:solidFill>
+              </a:rPr>
+              <a:t>EC/チケット連携</a:t>
+            </a:r>
+            <a:endParaRPr lang="en-US" sz="1400" dirty="0"/>
+          </a:p>
+          <a:p>
+            <a:pPr indent="0" marL="0">
+              <a:lnSpc>
+                <a:spcPct val="140000"/>
+              </a:lnSpc>
+              <a:buNone/>
+            </a:pPr>
+            <a:endParaRPr lang="en-US" sz="1400" dirty="0"/>
+          </a:p>
+          <a:p>
+            <a:pPr indent="0" marL="0">
+              <a:lnSpc>
+                <a:spcPct val="140000"/>
+              </a:lnSpc>
+              <a:buNone/>
+            </a:pPr>
+            <a:r>
+              <a:rPr lang="en-US" sz="1400" dirty="0">
+                <a:solidFill>
+                  <a:srgbClr val="2D3748"/>
+                </a:solidFill>
+              </a:rPr>
+              <a:t>      </a:t>
+            </a:r>
+            <a:endParaRPr lang="en-US" sz="1400" dirty="0"/>
+          </a:p>
+          <a:p>
+            <a:pPr indent="0" marL="0">
+              <a:lnSpc>
+                <a:spcPct val="140000"/>
+              </a:lnSpc>
+              <a:buNone/>
+            </a:pPr>
+            <a:r>
+              <a:rPr lang="en-US" sz="1400" dirty="0">
+                <a:solidFill>
+                  <a:srgbClr val="2D3748"/>
+                </a:solidFill>
+              </a:rPr>
+              <a:t>初期フェーズでは対象外</a:t>
+            </a:r>
+            <a:endParaRPr lang="en-US" sz="1400" dirty="0"/>
+          </a:p>
+          <a:p>
+            <a:pPr indent="0" marL="0">
+              <a:lnSpc>
+                <a:spcPct val="140000"/>
+              </a:lnSpc>
+              <a:buNone/>
+            </a:pPr>
+            <a:endParaRPr lang="en-US" sz="1400" dirty="0"/>
+          </a:p>
+          <a:p>
+            <a:pPr indent="0" marL="0">
+              <a:lnSpc>
+                <a:spcPct val="140000"/>
+              </a:lnSpc>
+              <a:buNone/>
+            </a:pPr>
+            <a:r>
+              <a:rPr lang="en-US" sz="1400" dirty="0">
+                <a:solidFill>
+                  <a:srgbClr val="2D3748"/>
+                </a:solidFill>
+              </a:rPr>
+              <a:t>    </a:t>
+            </a:r>
+            <a:endParaRPr lang="en-US" sz="1400" dirty="0"/>
+          </a:p>
+          <a:p>
+            <a:pPr indent="0" marL="0">
+              <a:lnSpc>
+                <a:spcPct val="140000"/>
+              </a:lnSpc>
+              <a:buNone/>
+            </a:pPr>
+            <a:endParaRPr lang="en-US" sz="1400" dirty="0"/>
+          </a:p>
+          <a:p>
+            <a:pPr indent="0" marL="0">
+              <a:lnSpc>
+                <a:spcPct val="140000"/>
+              </a:lnSpc>
+              <a:buNone/>
+            </a:pPr>
+            <a:r>
+              <a:rPr lang="en-US" sz="1400" dirty="0">
+                <a:solidFill>
+                  <a:srgbClr val="2D3748"/>
+                </a:solidFill>
+              </a:rPr>
+              <a:t>    </a:t>
+            </a:r>
+            <a:endParaRPr lang="en-US" sz="1400" dirty="0"/>
+          </a:p>
+          <a:p>
+            <a:pPr indent="0" marL="0">
+              <a:lnSpc>
+                <a:spcPct val="140000"/>
+              </a:lnSpc>
+              <a:buNone/>
+            </a:pPr>
+            <a:endParaRPr lang="en-US" sz="1400" dirty="0"/>
+          </a:p>
+          <a:p>
+            <a:pPr indent="0" marL="0">
+              <a:lnSpc>
+                <a:spcPct val="140000"/>
+              </a:lnSpc>
+              <a:buNone/>
+            </a:pPr>
+            <a:r>
+              <a:rPr lang="en-US" sz="1400" dirty="0">
+                <a:solidFill>
+                  <a:srgbClr val="2D3748"/>
+                </a:solidFill>
+              </a:rPr>
+              <a:t>      </a:t>
+            </a:r>
+            <a:endParaRPr lang="en-US" sz="1400" dirty="0"/>
+          </a:p>
+          <a:p>
+            <a:pPr indent="0" marL="0">
+              <a:lnSpc>
+                <a:spcPct val="140000"/>
+              </a:lnSpc>
+              <a:buNone/>
+            </a:pPr>
+            <a:r>
+              <a:rPr lang="en-US" sz="1400" dirty="0">
+                <a:solidFill>
+                  <a:srgbClr val="2D3748"/>
+                </a:solidFill>
+              </a:rPr>
+              <a:t>🧾</a:t>
+            </a:r>
+            <a:endParaRPr lang="en-US" sz="1400" dirty="0"/>
+          </a:p>
+          <a:p>
+            <a:pPr indent="0" marL="0">
+              <a:lnSpc>
+                <a:spcPct val="140000"/>
+              </a:lnSpc>
+              <a:buNone/>
+            </a:pPr>
+            <a:endParaRPr lang="en-US" sz="1400" dirty="0"/>
+          </a:p>
+          <a:p>
+            <a:pPr indent="0" marL="0">
+              <a:lnSpc>
+                <a:spcPct val="140000"/>
+              </a:lnSpc>
+              <a:buNone/>
+            </a:pPr>
+            <a:r>
+              <a:rPr lang="en-US" sz="1400" dirty="0">
+                <a:solidFill>
+                  <a:srgbClr val="2D3748"/>
+                </a:solidFill>
+              </a:rPr>
+              <a:t>      </a:t>
+            </a:r>
+            <a:endParaRPr lang="en-US" sz="1400" dirty="0"/>
+          </a:p>
+          <a:p>
+            <a:pPr indent="0" marL="0">
+              <a:lnSpc>
+                <a:spcPct val="140000"/>
+              </a:lnSpc>
+              <a:buNone/>
+            </a:pPr>
+            <a:r>
+              <a:rPr lang="en-US" sz="1400" dirty="0">
+                <a:solidFill>
+                  <a:srgbClr val="2D3748"/>
+                </a:solidFill>
+              </a:rPr>
+              <a:t>承認・権限・監査</a:t>
+            </a:r>
+            <a:endParaRPr lang="en-US" sz="1400" dirty="0"/>
+          </a:p>
+          <a:p>
+            <a:pPr indent="0" marL="0">
+              <a:lnSpc>
+                <a:spcPct val="140000"/>
+              </a:lnSpc>
+              <a:buNone/>
+            </a:pPr>
+            <a:endParaRPr lang="en-US" sz="1400" dirty="0"/>
+          </a:p>
+          <a:p>
+            <a:pPr indent="0" marL="0">
+              <a:lnSpc>
+                <a:spcPct val="140000"/>
+              </a:lnSpc>
+              <a:buNone/>
+            </a:pPr>
+            <a:r>
+              <a:rPr lang="en-US" sz="1400" dirty="0">
+                <a:solidFill>
+                  <a:srgbClr val="2D3748"/>
+                </a:solidFill>
+              </a:rPr>
+              <a:t>      </a:t>
+            </a:r>
+            <a:endParaRPr lang="en-US" sz="1400" dirty="0"/>
+          </a:p>
+          <a:p>
+            <a:pPr indent="0" marL="0">
+              <a:lnSpc>
+                <a:spcPct val="140000"/>
+              </a:lnSpc>
+              <a:buNone/>
+            </a:pPr>
+            <a:r>
+              <a:rPr lang="en-US" sz="1400" dirty="0">
+                <a:solidFill>
+                  <a:srgbClr val="2D3748"/>
+                </a:solidFill>
+              </a:rPr>
+              <a:t>運用統制は後続整備</a:t>
+            </a:r>
+            <a:endParaRPr lang="en-US" sz="1400" dirty="0"/>
+          </a:p>
+          <a:p>
+            <a:pPr indent="0" marL="0">
+              <a:lnSpc>
+                <a:spcPct val="140000"/>
+              </a:lnSpc>
+              <a:buNone/>
+            </a:pPr>
+            <a:endParaRPr lang="en-US" sz="1400" dirty="0"/>
+          </a:p>
+          <a:p>
+            <a:pPr indent="0" marL="0">
+              <a:lnSpc>
+                <a:spcPct val="140000"/>
+              </a:lnSpc>
+              <a:buNone/>
+            </a:pPr>
+            <a:r>
+              <a:rPr lang="en-US" sz="1400" dirty="0">
+                <a:solidFill>
+                  <a:srgbClr val="2D3748"/>
+                </a:solidFill>
+              </a:rPr>
+              <a:t>    </a:t>
+            </a:r>
+            <a:endParaRPr lang="en-US" sz="1400" dirty="0"/>
+          </a:p>
+          <a:p>
+            <a:pPr indent="0" marL="0">
+              <a:lnSpc>
+                <a:spcPct val="140000"/>
+              </a:lnSpc>
+              <a:buNone/>
+            </a:pPr>
+            <a:endParaRPr lang="en-US" sz="1400" dirty="0"/>
+          </a:p>
+          <a:p>
+            <a:pPr indent="0" marL="0">
+              <a:lnSpc>
+                <a:spcPct val="140000"/>
+              </a:lnSpc>
+              <a:buNone/>
+            </a:pPr>
+            <a:r>
+              <a:rPr lang="en-US" sz="1400" dirty="0">
+                <a:solidFill>
+                  <a:srgbClr val="2D3748"/>
+                </a:solidFill>
+              </a:rPr>
+              <a:t>    </a:t>
+            </a:r>
+            <a:endParaRPr lang="en-US" sz="1400" dirty="0"/>
+          </a:p>
+          <a:p>
+            <a:pPr indent="0" marL="0">
+              <a:lnSpc>
+                <a:spcPct val="140000"/>
+              </a:lnSpc>
+              <a:buNone/>
+            </a:pPr>
+            <a:endParaRPr lang="en-US" sz="1400" dirty="0"/>
+          </a:p>
+          <a:p>
+            <a:pPr indent="0" marL="0">
+              <a:lnSpc>
+                <a:spcPct val="140000"/>
+              </a:lnSpc>
+              <a:buNone/>
+            </a:pPr>
+            <a:r>
+              <a:rPr lang="en-US" sz="1400" dirty="0">
+                <a:solidFill>
+                  <a:srgbClr val="2D3748"/>
+                </a:solidFill>
+              </a:rPr>
+              <a:t>      </a:t>
+            </a:r>
+            <a:endParaRPr lang="en-US" sz="1400" dirty="0"/>
+          </a:p>
+          <a:p>
+            <a:pPr indent="0" marL="0">
+              <a:lnSpc>
+                <a:spcPct val="140000"/>
+              </a:lnSpc>
+              <a:buNone/>
+            </a:pPr>
+            <a:r>
+              <a:rPr lang="en-US" sz="1400" dirty="0">
+                <a:solidFill>
+                  <a:srgbClr val="2D3748"/>
+                </a:solidFill>
+              </a:rPr>
+              <a:t>📚</a:t>
+            </a:r>
+            <a:endParaRPr lang="en-US" sz="1400" dirty="0"/>
+          </a:p>
+          <a:p>
+            <a:pPr indent="0" marL="0">
+              <a:lnSpc>
+                <a:spcPct val="140000"/>
+              </a:lnSpc>
+              <a:buNone/>
+            </a:pPr>
+            <a:endParaRPr lang="en-US" sz="1400" dirty="0"/>
+          </a:p>
+          <a:p>
+            <a:pPr indent="0" marL="0">
+              <a:lnSpc>
+                <a:spcPct val="140000"/>
+              </a:lnSpc>
+              <a:buNone/>
+            </a:pPr>
+            <a:r>
+              <a:rPr lang="en-US" sz="1400" dirty="0">
+                <a:solidFill>
+                  <a:srgbClr val="2D3748"/>
+                </a:solidFill>
+              </a:rPr>
+              <a:t>      </a:t>
+            </a:r>
+            <a:endParaRPr lang="en-US" sz="1400" dirty="0"/>
+          </a:p>
+          <a:p>
+            <a:pPr indent="0" marL="0">
+              <a:lnSpc>
+                <a:spcPct val="140000"/>
+              </a:lnSpc>
+              <a:buNone/>
+            </a:pPr>
+            <a:r>
+              <a:rPr lang="en-US" sz="1400" dirty="0">
+                <a:solidFill>
+                  <a:srgbClr val="2D3748"/>
+                </a:solidFill>
+              </a:rPr>
+              <a:t>テンプレ運用体制</a:t>
+            </a:r>
+            <a:endParaRPr lang="en-US" sz="1400" dirty="0"/>
+          </a:p>
+          <a:p>
+            <a:pPr indent="0" marL="0">
+              <a:lnSpc>
+                <a:spcPct val="140000"/>
+              </a:lnSpc>
+              <a:buNone/>
+            </a:pPr>
+            <a:endParaRPr lang="en-US" sz="1400" dirty="0"/>
+          </a:p>
+          <a:p>
+            <a:pPr indent="0" marL="0">
+              <a:lnSpc>
+                <a:spcPct val="140000"/>
+              </a:lnSpc>
+              <a:buNone/>
+            </a:pPr>
+            <a:r>
+              <a:rPr lang="en-US" sz="1400" dirty="0">
+                <a:solidFill>
+                  <a:srgbClr val="2D3748"/>
+                </a:solidFill>
+              </a:rPr>
+              <a:t>      </a:t>
+            </a:r>
+            <a:endParaRPr lang="en-US" sz="1400" dirty="0"/>
+          </a:p>
+          <a:p>
+            <a:pPr indent="0" marL="0">
+              <a:lnSpc>
+                <a:spcPct val="140000"/>
+              </a:lnSpc>
+              <a:buNone/>
+            </a:pPr>
+            <a:r>
+              <a:rPr lang="en-US" sz="1400" dirty="0">
+                <a:solidFill>
+                  <a:srgbClr val="2D3748"/>
+                </a:solidFill>
+              </a:rPr>
+              <a:t>詳細策定は別トラック</a:t>
+            </a:r>
+            <a:endParaRPr lang="en-US" sz="1400" dirty="0"/>
           </a:p>
         </p:txBody>
       </p:sp>
@@ -6021,6 +6936,1097 @@
 <file path=ppt/slides/slide18.xml><?xml version="1.0" encoding="utf-8"?>
 <p:sld xmlns:a="http://schemas.openxmlformats.org/drawingml/2006/main" xmlns:r="http://schemas.openxmlformats.org/officeDocument/2006/relationships" xmlns:p="http://schemas.openxmlformats.org/presentationml/2006/main">
   <p:cSld name="Slide 18">
+    <p:spTree>
+      <p:nvGrpSpPr>
+        <p:cNvPr id="1" name=""/>
+        <p:cNvGrpSpPr/>
+        <p:nvPr/>
+      </p:nvGrpSpPr>
+      <p:grpSpPr>
+        <a:xfrm>
+          <a:off x="0" y="0"/>
+          <a:ext cx="0" cy="0"/>
+          <a:chOff x="0" y="0"/>
+          <a:chExt cx="0" cy="0"/>
+        </a:xfrm>
+      </p:grpSpPr>
+      <p:sp>
+        <p:nvSpPr>
+          <p:cNvPr id="2" name="Text 0"/>
+          <p:cNvSpPr/>
+          <p:nvPr/>
+        </p:nvSpPr>
+        <p:spPr>
+          <a:xfrm>
+            <a:off x="457200" y="365760"/>
+            <a:ext cx="11274552" cy="731520"/>
+          </a:xfrm>
+          <a:prstGeom prst="rect">
+            <a:avLst/>
+          </a:prstGeom>
+          <a:noFill/>
+          <a:ln/>
+        </p:spPr>
+        <p:txBody>
+          <a:bodyPr wrap="square" rtlCol="0" anchor="ctr"/>
+          <a:lstStyle/>
+          <a:p>
+            <a:pPr algn="ctr" indent="0" marL="0">
+              <a:buNone/>
+            </a:pPr>
+            <a:r>
+              <a:rPr lang="en-US" sz="2800" b="1" dirty="0">
+                <a:solidFill>
+                  <a:srgbClr val="2D3748"/>
+                </a:solidFill>
+              </a:rPr>
+              <a:t>❓ 未解決論点</a:t>
+            </a:r>
+            <a:endParaRPr lang="en-US" sz="2800" dirty="0"/>
+          </a:p>
+        </p:txBody>
+      </p:sp>
+      <p:sp>
+        <p:nvSpPr>
+          <p:cNvPr id="3" name="Text 1"/>
+          <p:cNvSpPr/>
+          <p:nvPr/>
+        </p:nvSpPr>
+        <p:spPr>
+          <a:xfrm>
+            <a:off x="731520" y="1188720"/>
+            <a:ext cx="10725912" cy="3383280"/>
+          </a:xfrm>
+          <a:prstGeom prst="rect">
+            <a:avLst/>
+          </a:prstGeom>
+          <a:noFill/>
+          <a:ln/>
+        </p:spPr>
+        <p:txBody>
+          <a:bodyPr wrap="square" rtlCol="0" anchor="t"/>
+          <a:lstStyle/>
+          <a:p>
+            <a:pPr indent="0" marL="0">
+              <a:lnSpc>
+                <a:spcPct val="140000"/>
+              </a:lnSpc>
+              <a:buNone/>
+            </a:pPr>
+            <a:r>
+              <a:rPr lang="en-US" sz="1400" dirty="0">
+                <a:solidFill>
+                  <a:srgbClr val="2D3748"/>
+                </a:solidFill>
+              </a:rPr>
+              <a:t>💰</a:t>
+            </a:r>
+            <a:endParaRPr lang="en-US" sz="1400" dirty="0"/>
+          </a:p>
+          <a:p>
+            <a:pPr indent="0" marL="0">
+              <a:lnSpc>
+                <a:spcPct val="140000"/>
+              </a:lnSpc>
+              <a:buNone/>
+            </a:pPr>
+            <a:endParaRPr lang="en-US" sz="1400" dirty="0"/>
+          </a:p>
+          <a:p>
+            <a:pPr indent="0" marL="0">
+              <a:lnSpc>
+                <a:spcPct val="140000"/>
+              </a:lnSpc>
+              <a:buNone/>
+            </a:pPr>
+            <a:r>
+              <a:rPr lang="en-US" sz="1400" dirty="0">
+                <a:solidFill>
+                  <a:srgbClr val="2D3748"/>
+                </a:solidFill>
+              </a:rPr>
+              <a:t>      </a:t>
+            </a:r>
+            <a:endParaRPr lang="en-US" sz="1400" dirty="0"/>
+          </a:p>
+          <a:p>
+            <a:pPr indent="0" marL="0">
+              <a:lnSpc>
+                <a:spcPct val="140000"/>
+              </a:lnSpc>
+              <a:buNone/>
+            </a:pPr>
+            <a:r>
+              <a:rPr lang="en-US" sz="1400" dirty="0">
+                <a:solidFill>
+                  <a:srgbClr val="2D3748"/>
+                </a:solidFill>
+              </a:rPr>
+              <a:t>リアルタイムAPI費用</a:t>
+            </a:r>
+            <a:endParaRPr lang="en-US" sz="1400" dirty="0"/>
+          </a:p>
+          <a:p>
+            <a:pPr indent="0" marL="0">
+              <a:lnSpc>
+                <a:spcPct val="140000"/>
+              </a:lnSpc>
+              <a:buNone/>
+            </a:pPr>
+            <a:endParaRPr lang="en-US" sz="1400" dirty="0"/>
+          </a:p>
+          <a:p>
+            <a:pPr indent="0" marL="0">
+              <a:lnSpc>
+                <a:spcPct val="140000"/>
+              </a:lnSpc>
+              <a:buNone/>
+            </a:pPr>
+            <a:r>
+              <a:rPr lang="en-US" sz="1400" dirty="0">
+                <a:solidFill>
+                  <a:srgbClr val="2D3748"/>
+                </a:solidFill>
+              </a:rPr>
+              <a:t>      </a:t>
+            </a:r>
+            <a:endParaRPr lang="en-US" sz="1400" dirty="0"/>
+          </a:p>
+          <a:p>
+            <a:pPr indent="0" marL="0">
+              <a:lnSpc>
+                <a:spcPct val="140000"/>
+              </a:lnSpc>
+              <a:buNone/>
+            </a:pPr>
+            <a:r>
+              <a:rPr lang="en-US" sz="1400" dirty="0">
+                <a:solidFill>
+                  <a:srgbClr val="2D3748"/>
+                </a:solidFill>
+              </a:rPr>
+              <a:t>継続許容額の設定</a:t>
+            </a:r>
+            <a:endParaRPr lang="en-US" sz="1400" dirty="0"/>
+          </a:p>
+          <a:p>
+            <a:pPr indent="0" marL="0">
+              <a:lnSpc>
+                <a:spcPct val="140000"/>
+              </a:lnSpc>
+              <a:buNone/>
+            </a:pPr>
+            <a:endParaRPr lang="en-US" sz="1400" dirty="0"/>
+          </a:p>
+          <a:p>
+            <a:pPr indent="0" marL="0">
+              <a:lnSpc>
+                <a:spcPct val="140000"/>
+              </a:lnSpc>
+              <a:buNone/>
+            </a:pPr>
+            <a:r>
+              <a:rPr lang="en-US" sz="1400" dirty="0">
+                <a:solidFill>
+                  <a:srgbClr val="2D3748"/>
+                </a:solidFill>
+              </a:rPr>
+              <a:t>    </a:t>
+            </a:r>
+            <a:endParaRPr lang="en-US" sz="1400" dirty="0"/>
+          </a:p>
+          <a:p>
+            <a:pPr indent="0" marL="0">
+              <a:lnSpc>
+                <a:spcPct val="140000"/>
+              </a:lnSpc>
+              <a:buNone/>
+            </a:pPr>
+            <a:endParaRPr lang="en-US" sz="1400" dirty="0"/>
+          </a:p>
+          <a:p>
+            <a:pPr indent="0" marL="0">
+              <a:lnSpc>
+                <a:spcPct val="140000"/>
+              </a:lnSpc>
+              <a:buNone/>
+            </a:pPr>
+            <a:r>
+              <a:rPr lang="en-US" sz="1400" dirty="0">
+                <a:solidFill>
+                  <a:srgbClr val="2D3748"/>
+                </a:solidFill>
+              </a:rPr>
+              <a:t>    </a:t>
+            </a:r>
+            <a:endParaRPr lang="en-US" sz="1400" dirty="0"/>
+          </a:p>
+          <a:p>
+            <a:pPr indent="0" marL="0">
+              <a:lnSpc>
+                <a:spcPct val="140000"/>
+              </a:lnSpc>
+              <a:buNone/>
+            </a:pPr>
+            <a:endParaRPr lang="en-US" sz="1400" dirty="0"/>
+          </a:p>
+          <a:p>
+            <a:pPr indent="0" marL="0">
+              <a:lnSpc>
+                <a:spcPct val="140000"/>
+              </a:lnSpc>
+              <a:buNone/>
+            </a:pPr>
+            <a:r>
+              <a:rPr lang="en-US" sz="1400" dirty="0">
+                <a:solidFill>
+                  <a:srgbClr val="2D3748"/>
+                </a:solidFill>
+              </a:rPr>
+              <a:t>      </a:t>
+            </a:r>
+            <a:endParaRPr lang="en-US" sz="1400" dirty="0"/>
+          </a:p>
+          <a:p>
+            <a:pPr indent="0" marL="0">
+              <a:lnSpc>
+                <a:spcPct val="140000"/>
+              </a:lnSpc>
+              <a:buNone/>
+            </a:pPr>
+            <a:r>
+              <a:rPr lang="en-US" sz="1400" dirty="0">
+                <a:solidFill>
+                  <a:srgbClr val="2D3748"/>
+                </a:solidFill>
+              </a:rPr>
+              <a:t>🗂️</a:t>
+            </a:r>
+            <a:endParaRPr lang="en-US" sz="1400" dirty="0"/>
+          </a:p>
+          <a:p>
+            <a:pPr indent="0" marL="0">
+              <a:lnSpc>
+                <a:spcPct val="140000"/>
+              </a:lnSpc>
+              <a:buNone/>
+            </a:pPr>
+            <a:endParaRPr lang="en-US" sz="1400" dirty="0"/>
+          </a:p>
+          <a:p>
+            <a:pPr indent="0" marL="0">
+              <a:lnSpc>
+                <a:spcPct val="140000"/>
+              </a:lnSpc>
+              <a:buNone/>
+            </a:pPr>
+            <a:r>
+              <a:rPr lang="en-US" sz="1400" dirty="0">
+                <a:solidFill>
+                  <a:srgbClr val="2D3748"/>
+                </a:solidFill>
+              </a:rPr>
+              <a:t>      </a:t>
+            </a:r>
+            <a:endParaRPr lang="en-US" sz="1400" dirty="0"/>
+          </a:p>
+          <a:p>
+            <a:pPr indent="0" marL="0">
+              <a:lnSpc>
+                <a:spcPct val="140000"/>
+              </a:lnSpc>
+              <a:buNone/>
+            </a:pPr>
+            <a:r>
+              <a:rPr lang="en-US" sz="1400" dirty="0">
+                <a:solidFill>
+                  <a:srgbClr val="2D3748"/>
+                </a:solidFill>
+              </a:rPr>
+              <a:t>RAG保存先</a:t>
+            </a:r>
+            <a:endParaRPr lang="en-US" sz="1400" dirty="0"/>
+          </a:p>
+          <a:p>
+            <a:pPr indent="0" marL="0">
+              <a:lnSpc>
+                <a:spcPct val="140000"/>
+              </a:lnSpc>
+              <a:buNone/>
+            </a:pPr>
+            <a:endParaRPr lang="en-US" sz="1400" dirty="0"/>
+          </a:p>
+          <a:p>
+            <a:pPr indent="0" marL="0">
+              <a:lnSpc>
+                <a:spcPct val="140000"/>
+              </a:lnSpc>
+              <a:buNone/>
+            </a:pPr>
+            <a:r>
+              <a:rPr lang="en-US" sz="1400" dirty="0">
+                <a:solidFill>
+                  <a:srgbClr val="2D3748"/>
+                </a:solidFill>
+              </a:rPr>
+              <a:t>      </a:t>
+            </a:r>
+            <a:endParaRPr lang="en-US" sz="1400" dirty="0"/>
+          </a:p>
+          <a:p>
+            <a:pPr indent="0" marL="0">
+              <a:lnSpc>
+                <a:spcPct val="140000"/>
+              </a:lnSpc>
+              <a:buNone/>
+            </a:pPr>
+            <a:r>
+              <a:rPr lang="en-US" sz="1400" dirty="0">
+                <a:solidFill>
+                  <a:srgbClr val="2D3748"/>
+                </a:solidFill>
+              </a:rPr>
+              <a:t>クラウド/オンプレ比較</a:t>
+            </a:r>
+            <a:endParaRPr lang="en-US" sz="1400" dirty="0"/>
+          </a:p>
+          <a:p>
+            <a:pPr indent="0" marL="0">
+              <a:lnSpc>
+                <a:spcPct val="140000"/>
+              </a:lnSpc>
+              <a:buNone/>
+            </a:pPr>
+            <a:endParaRPr lang="en-US" sz="1400" dirty="0"/>
+          </a:p>
+          <a:p>
+            <a:pPr indent="0" marL="0">
+              <a:lnSpc>
+                <a:spcPct val="140000"/>
+              </a:lnSpc>
+              <a:buNone/>
+            </a:pPr>
+            <a:r>
+              <a:rPr lang="en-US" sz="1400" dirty="0">
+                <a:solidFill>
+                  <a:srgbClr val="2D3748"/>
+                </a:solidFill>
+              </a:rPr>
+              <a:t>    </a:t>
+            </a:r>
+            <a:endParaRPr lang="en-US" sz="1400" dirty="0"/>
+          </a:p>
+          <a:p>
+            <a:pPr indent="0" marL="0">
+              <a:lnSpc>
+                <a:spcPct val="140000"/>
+              </a:lnSpc>
+              <a:buNone/>
+            </a:pPr>
+            <a:endParaRPr lang="en-US" sz="1400" dirty="0"/>
+          </a:p>
+          <a:p>
+            <a:pPr indent="0" marL="0">
+              <a:lnSpc>
+                <a:spcPct val="140000"/>
+              </a:lnSpc>
+              <a:buNone/>
+            </a:pPr>
+            <a:r>
+              <a:rPr lang="en-US" sz="1400" dirty="0">
+                <a:solidFill>
+                  <a:srgbClr val="2D3748"/>
+                </a:solidFill>
+              </a:rPr>
+              <a:t>    </a:t>
+            </a:r>
+            <a:endParaRPr lang="en-US" sz="1400" dirty="0"/>
+          </a:p>
+          <a:p>
+            <a:pPr indent="0" marL="0">
+              <a:lnSpc>
+                <a:spcPct val="140000"/>
+              </a:lnSpc>
+              <a:buNone/>
+            </a:pPr>
+            <a:endParaRPr lang="en-US" sz="1400" dirty="0"/>
+          </a:p>
+          <a:p>
+            <a:pPr indent="0" marL="0">
+              <a:lnSpc>
+                <a:spcPct val="140000"/>
+              </a:lnSpc>
+              <a:buNone/>
+            </a:pPr>
+            <a:r>
+              <a:rPr lang="en-US" sz="1400" dirty="0">
+                <a:solidFill>
+                  <a:srgbClr val="2D3748"/>
+                </a:solidFill>
+              </a:rPr>
+              <a:t>      </a:t>
+            </a:r>
+            <a:endParaRPr lang="en-US" sz="1400" dirty="0"/>
+          </a:p>
+          <a:p>
+            <a:pPr indent="0" marL="0">
+              <a:lnSpc>
+                <a:spcPct val="140000"/>
+              </a:lnSpc>
+              <a:buNone/>
+            </a:pPr>
+            <a:r>
+              <a:rPr lang="en-US" sz="1400" dirty="0">
+                <a:solidFill>
+                  <a:srgbClr val="2D3748"/>
+                </a:solidFill>
+              </a:rPr>
+              <a:t>🧾</a:t>
+            </a:r>
+            <a:endParaRPr lang="en-US" sz="1400" dirty="0"/>
+          </a:p>
+          <a:p>
+            <a:pPr indent="0" marL="0">
+              <a:lnSpc>
+                <a:spcPct val="140000"/>
+              </a:lnSpc>
+              <a:buNone/>
+            </a:pPr>
+            <a:endParaRPr lang="en-US" sz="1400" dirty="0"/>
+          </a:p>
+          <a:p>
+            <a:pPr indent="0" marL="0">
+              <a:lnSpc>
+                <a:spcPct val="140000"/>
+              </a:lnSpc>
+              <a:buNone/>
+            </a:pPr>
+            <a:r>
+              <a:rPr lang="en-US" sz="1400" dirty="0">
+                <a:solidFill>
+                  <a:srgbClr val="2D3748"/>
+                </a:solidFill>
+              </a:rPr>
+              <a:t>      </a:t>
+            </a:r>
+            <a:endParaRPr lang="en-US" sz="1400" dirty="0"/>
+          </a:p>
+          <a:p>
+            <a:pPr indent="0" marL="0">
+              <a:lnSpc>
+                <a:spcPct val="140000"/>
+              </a:lnSpc>
+              <a:buNone/>
+            </a:pPr>
+            <a:r>
+              <a:rPr lang="en-US" sz="1400" dirty="0">
+                <a:solidFill>
+                  <a:srgbClr val="2D3748"/>
+                </a:solidFill>
+              </a:rPr>
+              <a:t>出力粒度・期間指定</a:t>
+            </a:r>
+            <a:endParaRPr lang="en-US" sz="1400" dirty="0"/>
+          </a:p>
+          <a:p>
+            <a:pPr indent="0" marL="0">
+              <a:lnSpc>
+                <a:spcPct val="140000"/>
+              </a:lnSpc>
+              <a:buNone/>
+            </a:pPr>
+            <a:endParaRPr lang="en-US" sz="1400" dirty="0"/>
+          </a:p>
+          <a:p>
+            <a:pPr indent="0" marL="0">
+              <a:lnSpc>
+                <a:spcPct val="140000"/>
+              </a:lnSpc>
+              <a:buNone/>
+            </a:pPr>
+            <a:r>
+              <a:rPr lang="en-US" sz="1400" dirty="0">
+                <a:solidFill>
+                  <a:srgbClr val="2D3748"/>
+                </a:solidFill>
+              </a:rPr>
+              <a:t>      </a:t>
+            </a:r>
+            <a:endParaRPr lang="en-US" sz="1400" dirty="0"/>
+          </a:p>
+          <a:p>
+            <a:pPr indent="0" marL="0">
+              <a:lnSpc>
+                <a:spcPct val="140000"/>
+              </a:lnSpc>
+              <a:buNone/>
+            </a:pPr>
+            <a:r>
+              <a:rPr lang="en-US" sz="1400" dirty="0">
+                <a:solidFill>
+                  <a:srgbClr val="2D3748"/>
+                </a:solidFill>
+              </a:rPr>
+              <a:t>統合サマリーの粒度定義</a:t>
+            </a:r>
+            <a:endParaRPr lang="en-US" sz="1400" dirty="0"/>
+          </a:p>
+          <a:p>
+            <a:pPr indent="0" marL="0">
+              <a:lnSpc>
+                <a:spcPct val="140000"/>
+              </a:lnSpc>
+              <a:buNone/>
+            </a:pPr>
+            <a:endParaRPr lang="en-US" sz="1400" dirty="0"/>
+          </a:p>
+          <a:p>
+            <a:pPr indent="0" marL="0">
+              <a:lnSpc>
+                <a:spcPct val="140000"/>
+              </a:lnSpc>
+              <a:buNone/>
+            </a:pPr>
+            <a:r>
+              <a:rPr lang="en-US" sz="1400" dirty="0">
+                <a:solidFill>
+                  <a:srgbClr val="2D3748"/>
+                </a:solidFill>
+              </a:rPr>
+              <a:t>    </a:t>
+            </a:r>
+            <a:endParaRPr lang="en-US" sz="1400" dirty="0"/>
+          </a:p>
+          <a:p>
+            <a:pPr indent="0" marL="0">
+              <a:lnSpc>
+                <a:spcPct val="140000"/>
+              </a:lnSpc>
+              <a:buNone/>
+            </a:pPr>
+            <a:endParaRPr lang="en-US" sz="1400" dirty="0"/>
+          </a:p>
+          <a:p>
+            <a:pPr indent="0" marL="0">
+              <a:lnSpc>
+                <a:spcPct val="140000"/>
+              </a:lnSpc>
+              <a:buNone/>
+            </a:pPr>
+            <a:r>
+              <a:rPr lang="en-US" sz="1400" dirty="0">
+                <a:solidFill>
+                  <a:srgbClr val="2D3748"/>
+                </a:solidFill>
+              </a:rPr>
+              <a:t>    </a:t>
+            </a:r>
+            <a:endParaRPr lang="en-US" sz="1400" dirty="0"/>
+          </a:p>
+          <a:p>
+            <a:pPr indent="0" marL="0">
+              <a:lnSpc>
+                <a:spcPct val="140000"/>
+              </a:lnSpc>
+              <a:buNone/>
+            </a:pPr>
+            <a:endParaRPr lang="en-US" sz="1400" dirty="0"/>
+          </a:p>
+          <a:p>
+            <a:pPr indent="0" marL="0">
+              <a:lnSpc>
+                <a:spcPct val="140000"/>
+              </a:lnSpc>
+              <a:buNone/>
+            </a:pPr>
+            <a:r>
+              <a:rPr lang="en-US" sz="1400" dirty="0">
+                <a:solidFill>
+                  <a:srgbClr val="2D3748"/>
+                </a:solidFill>
+              </a:rPr>
+              <a:t>      </a:t>
+            </a:r>
+            <a:endParaRPr lang="en-US" sz="1400" dirty="0"/>
+          </a:p>
+          <a:p>
+            <a:pPr indent="0" marL="0">
+              <a:lnSpc>
+                <a:spcPct val="140000"/>
+              </a:lnSpc>
+              <a:buNone/>
+            </a:pPr>
+            <a:r>
+              <a:rPr lang="en-US" sz="1400" dirty="0">
+                <a:solidFill>
+                  <a:srgbClr val="2D3748"/>
+                </a:solidFill>
+              </a:rPr>
+              <a:t>🌐</a:t>
+            </a:r>
+            <a:endParaRPr lang="en-US" sz="1400" dirty="0"/>
+          </a:p>
+          <a:p>
+            <a:pPr indent="0" marL="0">
+              <a:lnSpc>
+                <a:spcPct val="140000"/>
+              </a:lnSpc>
+              <a:buNone/>
+            </a:pPr>
+            <a:endParaRPr lang="en-US" sz="1400" dirty="0"/>
+          </a:p>
+          <a:p>
+            <a:pPr indent="0" marL="0">
+              <a:lnSpc>
+                <a:spcPct val="140000"/>
+              </a:lnSpc>
+              <a:buNone/>
+            </a:pPr>
+            <a:r>
+              <a:rPr lang="en-US" sz="1400" dirty="0">
+                <a:solidFill>
+                  <a:srgbClr val="2D3748"/>
+                </a:solidFill>
+              </a:rPr>
+              <a:t>      </a:t>
+            </a:r>
+            <a:endParaRPr lang="en-US" sz="1400" dirty="0"/>
+          </a:p>
+          <a:p>
+            <a:pPr indent="0" marL="0">
+              <a:lnSpc>
+                <a:spcPct val="140000"/>
+              </a:lnSpc>
+              <a:buNone/>
+            </a:pPr>
+            <a:r>
+              <a:rPr lang="en-US" sz="1400" dirty="0">
+                <a:solidFill>
+                  <a:srgbClr val="2D3748"/>
+                </a:solidFill>
+              </a:rPr>
+              <a:t>対応言語・用語辞書</a:t>
+            </a:r>
+            <a:endParaRPr lang="en-US" sz="1400" dirty="0"/>
+          </a:p>
+          <a:p>
+            <a:pPr indent="0" marL="0">
+              <a:lnSpc>
+                <a:spcPct val="140000"/>
+              </a:lnSpc>
+              <a:buNone/>
+            </a:pPr>
+            <a:endParaRPr lang="en-US" sz="1400" dirty="0"/>
+          </a:p>
+          <a:p>
+            <a:pPr indent="0" marL="0">
+              <a:lnSpc>
+                <a:spcPct val="140000"/>
+              </a:lnSpc>
+              <a:buNone/>
+            </a:pPr>
+            <a:r>
+              <a:rPr lang="en-US" sz="1400" dirty="0">
+                <a:solidFill>
+                  <a:srgbClr val="2D3748"/>
+                </a:solidFill>
+              </a:rPr>
+              <a:t>      </a:t>
+            </a:r>
+            <a:endParaRPr lang="en-US" sz="1400" dirty="0"/>
+          </a:p>
+          <a:p>
+            <a:pPr indent="0" marL="0">
+              <a:lnSpc>
+                <a:spcPct val="140000"/>
+              </a:lnSpc>
+              <a:buNone/>
+            </a:pPr>
+            <a:r>
+              <a:rPr lang="en-US" sz="1400" dirty="0">
+                <a:solidFill>
+                  <a:srgbClr val="2D3748"/>
+                </a:solidFill>
+              </a:rPr>
+              <a:t>専門用語対応の必要性</a:t>
+            </a:r>
+            <a:endParaRPr lang="en-US" sz="1400" dirty="0"/>
+          </a:p>
+          <a:p>
+            <a:pPr indent="0" marL="0">
+              <a:lnSpc>
+                <a:spcPct val="140000"/>
+              </a:lnSpc>
+              <a:buNone/>
+            </a:pPr>
+            <a:endParaRPr lang="en-US" sz="1400" dirty="0"/>
+          </a:p>
+          <a:p>
+            <a:pPr indent="0" marL="0">
+              <a:lnSpc>
+                <a:spcPct val="140000"/>
+              </a:lnSpc>
+              <a:buNone/>
+            </a:pPr>
+            <a:r>
+              <a:rPr lang="en-US" sz="1400" dirty="0">
+                <a:solidFill>
+                  <a:srgbClr val="2D3748"/>
+                </a:solidFill>
+              </a:rPr>
+              <a:t>    </a:t>
+            </a:r>
+            <a:endParaRPr lang="en-US" sz="1400" dirty="0"/>
+          </a:p>
+          <a:p>
+            <a:pPr indent="0" marL="0">
+              <a:lnSpc>
+                <a:spcPct val="140000"/>
+              </a:lnSpc>
+              <a:buNone/>
+            </a:pPr>
+            <a:endParaRPr lang="en-US" sz="1400" dirty="0"/>
+          </a:p>
+          <a:p>
+            <a:pPr indent="0" marL="0">
+              <a:lnSpc>
+                <a:spcPct val="140000"/>
+              </a:lnSpc>
+              <a:buNone/>
+            </a:pPr>
+            <a:r>
+              <a:rPr lang="en-US" sz="1400" dirty="0">
+                <a:solidFill>
+                  <a:srgbClr val="2D3748"/>
+                </a:solidFill>
+              </a:rPr>
+              <a:t>    </a:t>
+            </a:r>
+            <a:endParaRPr lang="en-US" sz="1400" dirty="0"/>
+          </a:p>
+          <a:p>
+            <a:pPr indent="0" marL="0">
+              <a:lnSpc>
+                <a:spcPct val="140000"/>
+              </a:lnSpc>
+              <a:buNone/>
+            </a:pPr>
+            <a:endParaRPr lang="en-US" sz="1400" dirty="0"/>
+          </a:p>
+          <a:p>
+            <a:pPr indent="0" marL="0">
+              <a:lnSpc>
+                <a:spcPct val="140000"/>
+              </a:lnSpc>
+              <a:buNone/>
+            </a:pPr>
+            <a:r>
+              <a:rPr lang="en-US" sz="1400" dirty="0">
+                <a:solidFill>
+                  <a:srgbClr val="2D3748"/>
+                </a:solidFill>
+              </a:rPr>
+              <a:t>      </a:t>
+            </a:r>
+            <a:endParaRPr lang="en-US" sz="1400" dirty="0"/>
+          </a:p>
+          <a:p>
+            <a:pPr indent="0" marL="0">
+              <a:lnSpc>
+                <a:spcPct val="140000"/>
+              </a:lnSpc>
+              <a:buNone/>
+            </a:pPr>
+            <a:r>
+              <a:rPr lang="en-US" sz="1400" dirty="0">
+                <a:solidFill>
+                  <a:srgbClr val="2D3748"/>
+                </a:solidFill>
+              </a:rPr>
+              <a:t>📐</a:t>
+            </a:r>
+            <a:endParaRPr lang="en-US" sz="1400" dirty="0"/>
+          </a:p>
+          <a:p>
+            <a:pPr indent="0" marL="0">
+              <a:lnSpc>
+                <a:spcPct val="140000"/>
+              </a:lnSpc>
+              <a:buNone/>
+            </a:pPr>
+            <a:endParaRPr lang="en-US" sz="1400" dirty="0"/>
+          </a:p>
+          <a:p>
+            <a:pPr indent="0" marL="0">
+              <a:lnSpc>
+                <a:spcPct val="140000"/>
+              </a:lnSpc>
+              <a:buNone/>
+            </a:pPr>
+            <a:r>
+              <a:rPr lang="en-US" sz="1400" dirty="0">
+                <a:solidFill>
+                  <a:srgbClr val="2D3748"/>
+                </a:solidFill>
+              </a:rPr>
+              <a:t>      </a:t>
+            </a:r>
+            <a:endParaRPr lang="en-US" sz="1400" dirty="0"/>
+          </a:p>
+          <a:p>
+            <a:pPr indent="0" marL="0">
+              <a:lnSpc>
+                <a:spcPct val="140000"/>
+              </a:lnSpc>
+              <a:buNone/>
+            </a:pPr>
+            <a:r>
+              <a:rPr lang="en-US" sz="1400" dirty="0">
+                <a:solidFill>
+                  <a:srgbClr val="2D3748"/>
+                </a:solidFill>
+              </a:rPr>
+              <a:t>既存テンプレート有無</a:t>
+            </a:r>
+            <a:endParaRPr lang="en-US" sz="1400" dirty="0"/>
+          </a:p>
+          <a:p>
+            <a:pPr indent="0" marL="0">
+              <a:lnSpc>
+                <a:spcPct val="140000"/>
+              </a:lnSpc>
+              <a:buNone/>
+            </a:pPr>
+            <a:endParaRPr lang="en-US" sz="1400" dirty="0"/>
+          </a:p>
+          <a:p>
+            <a:pPr indent="0" marL="0">
+              <a:lnSpc>
+                <a:spcPct val="140000"/>
+              </a:lnSpc>
+              <a:buNone/>
+            </a:pPr>
+            <a:r>
+              <a:rPr lang="en-US" sz="1400" dirty="0">
+                <a:solidFill>
+                  <a:srgbClr val="2D3748"/>
+                </a:solidFill>
+              </a:rPr>
+              <a:t>      </a:t>
+            </a:r>
+            <a:endParaRPr lang="en-US" sz="1400" dirty="0"/>
+          </a:p>
+          <a:p>
+            <a:pPr indent="0" marL="0">
+              <a:lnSpc>
+                <a:spcPct val="140000"/>
+              </a:lnSpc>
+              <a:buNone/>
+            </a:pPr>
+            <a:r>
+              <a:rPr lang="en-US" sz="1400" dirty="0">
+                <a:solidFill>
+                  <a:srgbClr val="2D3748"/>
+                </a:solidFill>
+              </a:rPr>
+              <a:t>資料フォーマットの棚卸し</a:t>
+            </a:r>
+            <a:endParaRPr lang="en-US" sz="1400" dirty="0"/>
+          </a:p>
+          <a:p>
+            <a:pPr indent="0" marL="0">
+              <a:lnSpc>
+                <a:spcPct val="140000"/>
+              </a:lnSpc>
+              <a:buNone/>
+            </a:pPr>
+            <a:endParaRPr lang="en-US" sz="1400" dirty="0"/>
+          </a:p>
+          <a:p>
+            <a:pPr indent="0" marL="0">
+              <a:lnSpc>
+                <a:spcPct val="140000"/>
+              </a:lnSpc>
+              <a:buNone/>
+            </a:pPr>
+            <a:r>
+              <a:rPr lang="en-US" sz="1400" dirty="0">
+                <a:solidFill>
+                  <a:srgbClr val="2D3748"/>
+                </a:solidFill>
+              </a:rPr>
+              <a:t>    </a:t>
+            </a:r>
+            <a:endParaRPr lang="en-US" sz="1400" dirty="0"/>
+          </a:p>
+          <a:p>
+            <a:pPr indent="0" marL="0">
+              <a:lnSpc>
+                <a:spcPct val="140000"/>
+              </a:lnSpc>
+              <a:buNone/>
+            </a:pPr>
+            <a:endParaRPr lang="en-US" sz="1400" dirty="0"/>
+          </a:p>
+          <a:p>
+            <a:pPr indent="0" marL="0">
+              <a:lnSpc>
+                <a:spcPct val="140000"/>
+              </a:lnSpc>
+              <a:buNone/>
+            </a:pPr>
+            <a:r>
+              <a:rPr lang="en-US" sz="1400" dirty="0">
+                <a:solidFill>
+                  <a:srgbClr val="2D3748"/>
+                </a:solidFill>
+              </a:rPr>
+              <a:t>    </a:t>
+            </a:r>
+            <a:endParaRPr lang="en-US" sz="1400" dirty="0"/>
+          </a:p>
+          <a:p>
+            <a:pPr indent="0" marL="0">
+              <a:lnSpc>
+                <a:spcPct val="140000"/>
+              </a:lnSpc>
+              <a:buNone/>
+            </a:pPr>
+            <a:endParaRPr lang="en-US" sz="1400" dirty="0"/>
+          </a:p>
+          <a:p>
+            <a:pPr indent="0" marL="0">
+              <a:lnSpc>
+                <a:spcPct val="140000"/>
+              </a:lnSpc>
+              <a:buNone/>
+            </a:pPr>
+            <a:r>
+              <a:rPr lang="en-US" sz="1400" dirty="0">
+                <a:solidFill>
+                  <a:srgbClr val="2D3748"/>
+                </a:solidFill>
+              </a:rPr>
+              <a:t>      </a:t>
+            </a:r>
+            <a:endParaRPr lang="en-US" sz="1400" dirty="0"/>
+          </a:p>
+          <a:p>
+            <a:pPr indent="0" marL="0">
+              <a:lnSpc>
+                <a:spcPct val="140000"/>
+              </a:lnSpc>
+              <a:buNone/>
+            </a:pPr>
+            <a:r>
+              <a:rPr lang="en-US" sz="1400" dirty="0">
+                <a:solidFill>
+                  <a:srgbClr val="2D3748"/>
+                </a:solidFill>
+              </a:rPr>
+              <a:t>📈</a:t>
+            </a:r>
+            <a:endParaRPr lang="en-US" sz="1400" dirty="0"/>
+          </a:p>
+          <a:p>
+            <a:pPr indent="0" marL="0">
+              <a:lnSpc>
+                <a:spcPct val="140000"/>
+              </a:lnSpc>
+              <a:buNone/>
+            </a:pPr>
+            <a:endParaRPr lang="en-US" sz="1400" dirty="0"/>
+          </a:p>
+          <a:p>
+            <a:pPr indent="0" marL="0">
+              <a:lnSpc>
+                <a:spcPct val="140000"/>
+              </a:lnSpc>
+              <a:buNone/>
+            </a:pPr>
+            <a:r>
+              <a:rPr lang="en-US" sz="1400" dirty="0">
+                <a:solidFill>
+                  <a:srgbClr val="2D3748"/>
+                </a:solidFill>
+              </a:rPr>
+              <a:t>      </a:t>
+            </a:r>
+            <a:endParaRPr lang="en-US" sz="1400" dirty="0"/>
+          </a:p>
+          <a:p>
+            <a:pPr indent="0" marL="0">
+              <a:lnSpc>
+                <a:spcPct val="140000"/>
+              </a:lnSpc>
+              <a:buNone/>
+            </a:pPr>
+            <a:r>
+              <a:rPr lang="en-US" sz="1400" dirty="0">
+                <a:solidFill>
+                  <a:srgbClr val="2D3748"/>
+                </a:solidFill>
+              </a:rPr>
+              <a:t>成功指標</a:t>
+            </a:r>
+            <a:endParaRPr lang="en-US" sz="1400" dirty="0"/>
+          </a:p>
+          <a:p>
+            <a:pPr indent="0" marL="0">
+              <a:lnSpc>
+                <a:spcPct val="140000"/>
+              </a:lnSpc>
+              <a:buNone/>
+            </a:pPr>
+            <a:endParaRPr lang="en-US" sz="1400" dirty="0"/>
+          </a:p>
+          <a:p>
+            <a:pPr indent="0" marL="0">
+              <a:lnSpc>
+                <a:spcPct val="140000"/>
+              </a:lnSpc>
+              <a:buNone/>
+            </a:pPr>
+            <a:r>
+              <a:rPr lang="en-US" sz="1400" dirty="0">
+                <a:solidFill>
+                  <a:srgbClr val="2D3748"/>
+                </a:solidFill>
+              </a:rPr>
+              <a:t>      </a:t>
+            </a:r>
+            <a:endParaRPr lang="en-US" sz="1400" dirty="0"/>
+          </a:p>
+          <a:p>
+            <a:pPr indent="0" marL="0">
+              <a:lnSpc>
+                <a:spcPct val="140000"/>
+              </a:lnSpc>
+              <a:buNone/>
+            </a:pPr>
+            <a:r>
+              <a:rPr lang="en-US" sz="1400" dirty="0">
+                <a:solidFill>
+                  <a:srgbClr val="2D3748"/>
+                </a:solidFill>
+              </a:rPr>
+              <a:t>工数削減・共有遅延の定量化</a:t>
+            </a:r>
+            <a:endParaRPr lang="en-US" sz="1400" dirty="0"/>
+          </a:p>
+        </p:txBody>
+      </p:sp>
+    </p:spTree>
+  </p:cSld>
+  <p:clrMapOvr>
+    <a:masterClrMapping/>
+  </p:clrMapOvr>
+</p:sld>
+</file>
+
+<file path=ppt/slides/slide19.xml><?xml version="1.0" encoding="utf-8"?>
+<p:sld xmlns:a="http://schemas.openxmlformats.org/drawingml/2006/main" xmlns:r="http://schemas.openxmlformats.org/officeDocument/2006/relationships" xmlns:p="http://schemas.openxmlformats.org/presentationml/2006/main">
+  <p:cSld name="Slide 19">
     <p:bg>
       <p:bgPr>
         <a:solidFill>
@@ -6154,7 +8160,7 @@
                   <a:srgbClr val="FFFFFF"/>
                 </a:solidFill>
               </a:rPr>
-              <a:t>Must 5機能をMVP確定し、受け入れ基準をテスト項目へ落とし込む</a:t>
+              <a:t>Must機能でMVP確定：音声サマリー・資料生成・ローカル録音を先行実装</a:t>
             </a:r>
             <a:endParaRPr lang="en-US" sz="1400" dirty="0"/>
           </a:p>
@@ -6292,7 +8298,7 @@
                   <a:srgbClr val="FFFFFF"/>
                 </a:solidFill>
               </a:rPr>
-              <a:t>Realtime API費用とRAG保存先の調査を先行実施する</a:t>
+              <a:t>未解決論点を短期調査：RT APIコスト、RAG保存先、テンプレート要件を決定</a:t>
             </a:r>
             <a:endParaRPr lang="en-US" sz="1400" dirty="0"/>
           </a:p>
@@ -6430,7 +8436,145 @@
                   <a:srgbClr val="FFFFFF"/>
                 </a:solidFill>
               </a:rPr>
-              <a:t>標準テンプレートと成功指標を定義し、PoC計画を承認へ進める</a:t>
+              <a:t>受け入れ基準で実証：1分以内生成、3回統合、字幕90%以上を検証</a:t>
+            </a:r>
+            <a:endParaRPr lang="en-US" sz="1400" dirty="0"/>
+          </a:p>
+          <a:p>
+            <a:pPr indent="0" marL="0">
+              <a:lnSpc>
+                <a:spcPct val="140000"/>
+              </a:lnSpc>
+              <a:buNone/>
+            </a:pPr>
+            <a:endParaRPr lang="en-US" sz="1400" dirty="0"/>
+          </a:p>
+          <a:p>
+            <a:pPr indent="0" marL="0">
+              <a:lnSpc>
+                <a:spcPct val="140000"/>
+              </a:lnSpc>
+              <a:buNone/>
+            </a:pPr>
+            <a:r>
+              <a:rPr lang="en-US" sz="1400" dirty="0">
+                <a:solidFill>
+                  <a:srgbClr val="FFFFFF"/>
+                </a:solidFill>
+              </a:rPr>
+              <a:t>    </a:t>
+            </a:r>
+            <a:endParaRPr lang="en-US" sz="1400" dirty="0"/>
+          </a:p>
+          <a:p>
+            <a:pPr indent="0" marL="0">
+              <a:lnSpc>
+                <a:spcPct val="140000"/>
+              </a:lnSpc>
+              <a:buNone/>
+            </a:pPr>
+            <a:endParaRPr lang="en-US" sz="1400" dirty="0"/>
+          </a:p>
+          <a:p>
+            <a:pPr indent="0" marL="0">
+              <a:lnSpc>
+                <a:spcPct val="140000"/>
+              </a:lnSpc>
+              <a:buNone/>
+            </a:pPr>
+            <a:r>
+              <a:rPr lang="en-US" sz="1400" dirty="0">
+                <a:solidFill>
+                  <a:srgbClr val="FFFFFF"/>
+                </a:solidFill>
+              </a:rPr>
+              <a:t>    </a:t>
+            </a:r>
+            <a:endParaRPr lang="en-US" sz="1400" dirty="0"/>
+          </a:p>
+          <a:p>
+            <a:pPr indent="0" marL="0">
+              <a:lnSpc>
+                <a:spcPct val="140000"/>
+              </a:lnSpc>
+              <a:buNone/>
+            </a:pPr>
+            <a:endParaRPr lang="en-US" sz="1400" dirty="0"/>
+          </a:p>
+          <a:p>
+            <a:pPr indent="0" marL="0">
+              <a:lnSpc>
+                <a:spcPct val="140000"/>
+              </a:lnSpc>
+              <a:buNone/>
+            </a:pPr>
+            <a:r>
+              <a:rPr lang="en-US" sz="1400" dirty="0">
+                <a:solidFill>
+                  <a:srgbClr val="FFFFFF"/>
+                </a:solidFill>
+              </a:rPr>
+              <a:t>      </a:t>
+            </a:r>
+            <a:endParaRPr lang="en-US" sz="1400" dirty="0"/>
+          </a:p>
+          <a:p>
+            <a:pPr indent="0" marL="0">
+              <a:lnSpc>
+                <a:spcPct val="140000"/>
+              </a:lnSpc>
+              <a:buNone/>
+            </a:pPr>
+            <a:r>
+              <a:rPr lang="en-US" sz="1400" dirty="0">
+                <a:solidFill>
+                  <a:srgbClr val="FFFFFF"/>
+                </a:solidFill>
+              </a:rPr>
+              <a:t>4</a:t>
+            </a:r>
+            <a:endParaRPr lang="en-US" sz="1400" dirty="0"/>
+          </a:p>
+          <a:p>
+            <a:pPr indent="0" marL="0">
+              <a:lnSpc>
+                <a:spcPct val="140000"/>
+              </a:lnSpc>
+              <a:buNone/>
+            </a:pPr>
+            <a:endParaRPr lang="en-US" sz="1400" dirty="0"/>
+          </a:p>
+          <a:p>
+            <a:pPr indent="0" marL="0">
+              <a:lnSpc>
+                <a:spcPct val="140000"/>
+              </a:lnSpc>
+              <a:buNone/>
+            </a:pPr>
+            <a:r>
+              <a:rPr lang="en-US" sz="1400" dirty="0">
+                <a:solidFill>
+                  <a:srgbClr val="FFFFFF"/>
+                </a:solidFill>
+              </a:rPr>
+              <a:t>      </a:t>
+            </a:r>
+            <a:endParaRPr lang="en-US" sz="1400" dirty="0"/>
+          </a:p>
+          <a:p>
+            <a:pPr indent="0" marL="0">
+              <a:lnSpc>
+                <a:spcPct val="140000"/>
+              </a:lnSpc>
+              <a:buNone/>
+            </a:pPr>
+            <a:r>
+              <a:rPr lang="en-US" sz="1400" dirty="0">
+                <a:solidFill>
+                  <a:srgbClr val="FFFFFF"/>
+                </a:solidFill>
+              </a:rPr>
+              <a:t>Phase 2判定：外部連携・エクスポート・編集再生成の投資優先度を再評価</a:t>
             </a:r>
             <a:endParaRPr lang="en-US" sz="1400" dirty="0"/>
           </a:p>
@@ -6616,24 +8760,7 @@
                   <a:srgbClr val="2D3748"/>
                 </a:solidFill>
               </a:rPr>
-              <a:t>会議音声から</a:t>
-            </a:r>
-            <a:endParaRPr lang="en-US" sz="1400" dirty="0"/>
-          </a:p>
-          <a:p>
-            <a:pPr indent="0" marL="0">
-              <a:lnSpc>
-                <a:spcPct val="140000"/>
-              </a:lnSpc>
-              <a:buNone/>
-            </a:pPr>
-            <a:r>
-              <a:rPr lang="en-US" sz="1400" dirty="0">
-                <a:solidFill>
-                  <a:srgbClr val="2D3748"/>
-                </a:solidFill>
-              </a:rPr>
-              <a:t>要点とアクションを自動化</a:t>
+              <a:t>会議音声から要点・決定事項・次アクションを即時に構造化</a:t>
             </a:r>
             <a:endParaRPr lang="en-US" sz="1400" dirty="0"/>
           </a:p>
@@ -6728,7 +8855,7 @@
                   <a:srgbClr val="2D3748"/>
                 </a:solidFill>
               </a:rPr>
-              <a:t>🧠</a:t>
+              <a:t>🏗️</a:t>
             </a:r>
             <a:endParaRPr lang="en-US" sz="1400" dirty="0"/>
           </a:p>
@@ -6771,7 +8898,7 @@
                   <a:srgbClr val="2D3748"/>
                 </a:solidFill>
               </a:rPr>
-              <a:t>Core Solution</a:t>
+              <a:t>Solution</a:t>
             </a:r>
             <a:endParaRPr lang="en-US" sz="1400" dirty="0"/>
           </a:p>
@@ -6814,24 +8941,7 @@
                   <a:srgbClr val="2D3748"/>
                 </a:solidFill>
               </a:rPr>
-              <a:t>文字起こし＋RAG＋</a:t>
-            </a:r>
-            <a:endParaRPr lang="en-US" sz="1400" dirty="0"/>
-          </a:p>
-          <a:p>
-            <a:pPr indent="0" marL="0">
-              <a:lnSpc>
-                <a:spcPct val="140000"/>
-              </a:lnSpc>
-              <a:buNone/>
-            </a:pPr>
-            <a:r>
-              <a:rPr lang="en-US" sz="1400" dirty="0">
-                <a:solidFill>
-                  <a:srgbClr val="2D3748"/>
-                </a:solidFill>
-              </a:rPr>
-              <a:t>資料生成を一体提供</a:t>
+              <a:t>文字起こし＋RAG＋テンプレート生成で会議と発足資料を一気通貫化</a:t>
             </a:r>
             <a:endParaRPr lang="en-US" sz="1400" dirty="0"/>
           </a:p>
@@ -6926,7 +9036,7 @@
                   <a:srgbClr val="2D3748"/>
                 </a:solidFill>
               </a:rPr>
-              <a:t>🚀</a:t>
+              <a:t>⚠️</a:t>
             </a:r>
             <a:endParaRPr lang="en-US" sz="1400" dirty="0"/>
           </a:p>
@@ -6969,7 +9079,7 @@
                   <a:srgbClr val="2D3748"/>
                 </a:solidFill>
               </a:rPr>
-              <a:t>MVP Focus</a:t>
+              <a:t>Focus</a:t>
             </a:r>
             <a:endParaRPr lang="en-US" sz="1400" dirty="0"/>
           </a:p>
@@ -7012,24 +9122,7 @@
                   <a:srgbClr val="2D3748"/>
                 </a:solidFill>
               </a:rPr>
-              <a:t>Mustを先行実装し</a:t>
-            </a:r>
-            <a:endParaRPr lang="en-US" sz="1400" dirty="0"/>
-          </a:p>
-          <a:p>
-            <a:pPr indent="0" marL="0">
-              <a:lnSpc>
-                <a:spcPct val="140000"/>
-              </a:lnSpc>
-              <a:buNone/>
-            </a:pPr>
-            <a:r>
-              <a:rPr lang="en-US" sz="1400" dirty="0">
-                <a:solidFill>
-                  <a:srgbClr val="2D3748"/>
-                </a:solidFill>
-              </a:rPr>
-              <a:t>Shouldは精度と費用で判断</a:t>
+              <a:t>MVPはMust中心。コスト・RAG基盤・運用設計が主要論点</a:t>
             </a:r>
             <a:endParaRPr lang="en-US" sz="1400" dirty="0"/>
           </a:p>
@@ -7652,196 +9745,6 @@
                 </a:solidFill>
               </a:rPr>
               <a:t>Could</a:t>
-            </a:r>
-            <a:endParaRPr lang="en-US" sz="1400" dirty="0"/>
-          </a:p>
-          <a:p>
-            <a:pPr indent="0" marL="0">
-              <a:lnSpc>
-                <a:spcPct val="140000"/>
-              </a:lnSpc>
-              <a:buNone/>
-            </a:pPr>
-            <a:endParaRPr lang="en-US" sz="1400" dirty="0"/>
-          </a:p>
-          <a:p>
-            <a:pPr indent="0" marL="0">
-              <a:lnSpc>
-                <a:spcPct val="140000"/>
-              </a:lnSpc>
-              <a:buNone/>
-            </a:pPr>
-            <a:r>
-              <a:rPr lang="en-US" sz="1400" dirty="0">
-                <a:solidFill>
-                  <a:srgbClr val="2D3748"/>
-                </a:solidFill>
-              </a:rPr>
-              <a:t>    </a:t>
-            </a:r>
-            <a:endParaRPr lang="en-US" sz="1400" dirty="0"/>
-          </a:p>
-          <a:p>
-            <a:pPr indent="0" marL="0">
-              <a:lnSpc>
-                <a:spcPct val="140000"/>
-              </a:lnSpc>
-              <a:buNone/>
-            </a:pPr>
-            <a:endParaRPr lang="en-US" sz="1400" dirty="0"/>
-          </a:p>
-          <a:p>
-            <a:pPr indent="0" marL="0">
-              <a:lnSpc>
-                <a:spcPct val="140000"/>
-              </a:lnSpc>
-              <a:buNone/>
-            </a:pPr>
-            <a:r>
-              <a:rPr lang="en-US" sz="1400" dirty="0">
-                <a:solidFill>
-                  <a:srgbClr val="2D3748"/>
-                </a:solidFill>
-              </a:rPr>
-              <a:t>    </a:t>
-            </a:r>
-            <a:endParaRPr lang="en-US" sz="1400" dirty="0"/>
-          </a:p>
-          <a:p>
-            <a:pPr indent="0" marL="0">
-              <a:lnSpc>
-                <a:spcPct val="140000"/>
-              </a:lnSpc>
-              <a:buNone/>
-            </a:pPr>
-            <a:endParaRPr lang="en-US" sz="1400" dirty="0"/>
-          </a:p>
-          <a:p>
-            <a:pPr indent="0" marL="0">
-              <a:lnSpc>
-                <a:spcPct val="140000"/>
-              </a:lnSpc>
-              <a:buNone/>
-            </a:pPr>
-            <a:r>
-              <a:rPr lang="en-US" sz="1400" dirty="0">
-                <a:solidFill>
-                  <a:srgbClr val="2D3748"/>
-                </a:solidFill>
-              </a:rPr>
-              <a:t>      </a:t>
-            </a:r>
-            <a:endParaRPr lang="en-US" sz="1400" dirty="0"/>
-          </a:p>
-          <a:p>
-            <a:pPr indent="0" marL="0">
-              <a:lnSpc>
-                <a:spcPct val="140000"/>
-              </a:lnSpc>
-              <a:buNone/>
-            </a:pPr>
-            <a:endParaRPr lang="en-US" sz="1400" dirty="0"/>
-          </a:p>
-          <a:p>
-            <a:pPr indent="0" marL="0">
-              <a:lnSpc>
-                <a:spcPct val="140000"/>
-              </a:lnSpc>
-              <a:buNone/>
-            </a:pPr>
-            <a:r>
-              <a:rPr lang="en-US" sz="1400" dirty="0">
-                <a:solidFill>
-                  <a:srgbClr val="2D3748"/>
-                </a:solidFill>
-              </a:rPr>
-              <a:t>        </a:t>
-            </a:r>
-            <a:endParaRPr lang="en-US" sz="1400" dirty="0"/>
-          </a:p>
-          <a:p>
-            <a:pPr indent="0" marL="0">
-              <a:lnSpc>
-                <a:spcPct val="140000"/>
-              </a:lnSpc>
-              <a:buNone/>
-            </a:pPr>
-            <a:r>
-              <a:rPr lang="en-US" sz="1400" dirty="0">
-                <a:solidFill>
-                  <a:srgbClr val="2D3748"/>
-                </a:solidFill>
-              </a:rPr>
-              <a:t>8</a:t>
-            </a:r>
-            <a:endParaRPr lang="en-US" sz="1400" dirty="0"/>
-          </a:p>
-          <a:p>
-            <a:pPr indent="0" marL="0">
-              <a:lnSpc>
-                <a:spcPct val="140000"/>
-              </a:lnSpc>
-              <a:buNone/>
-            </a:pPr>
-            <a:endParaRPr lang="en-US" sz="1400" dirty="0"/>
-          </a:p>
-          <a:p>
-            <a:pPr indent="0" marL="0">
-              <a:lnSpc>
-                <a:spcPct val="140000"/>
-              </a:lnSpc>
-              <a:buNone/>
-            </a:pPr>
-            <a:r>
-              <a:rPr lang="en-US" sz="1400" dirty="0">
-                <a:solidFill>
-                  <a:srgbClr val="2D3748"/>
-                </a:solidFill>
-              </a:rPr>
-              <a:t>      </a:t>
-            </a:r>
-            <a:endParaRPr lang="en-US" sz="1400" dirty="0"/>
-          </a:p>
-          <a:p>
-            <a:pPr indent="0" marL="0">
-              <a:lnSpc>
-                <a:spcPct val="140000"/>
-              </a:lnSpc>
-              <a:buNone/>
-            </a:pPr>
-            <a:endParaRPr lang="en-US" sz="1400" dirty="0"/>
-          </a:p>
-          <a:p>
-            <a:pPr indent="0" marL="0">
-              <a:lnSpc>
-                <a:spcPct val="140000"/>
-              </a:lnSpc>
-              <a:buNone/>
-            </a:pPr>
-            <a:r>
-              <a:rPr lang="en-US" sz="1400" dirty="0">
-                <a:solidFill>
-                  <a:srgbClr val="2D3748"/>
-                </a:solidFill>
-              </a:rPr>
-              <a:t>      </a:t>
-            </a:r>
-            <a:endParaRPr lang="en-US" sz="1400" dirty="0"/>
-          </a:p>
-          <a:p>
-            <a:pPr indent="0" marL="0">
-              <a:lnSpc>
-                <a:spcPct val="140000"/>
-              </a:lnSpc>
-              <a:buNone/>
-            </a:pPr>
-            <a:r>
-              <a:rPr lang="en-US" sz="1400" dirty="0">
-                <a:solidFill>
-                  <a:srgbClr val="2D3748"/>
-                </a:solidFill>
-              </a:rPr>
-              <a:t>未解決</a:t>
             </a:r>
             <a:endParaRPr lang="en-US" sz="1400" dirty="0"/>
           </a:p>
@@ -7909,7 +9812,7 @@
                   <a:srgbClr val="FFFFFF"/>
                 </a:solidFill>
               </a:rPr>
-              <a:t>Why Now</a:t>
+              <a:t>1. 課題と狙い</a:t>
             </a:r>
             <a:endParaRPr lang="en-US" sz="2800" dirty="0"/>
           </a:p>
@@ -7948,7 +9851,7 @@
                   <a:srgbClr val="FFFFFF"/>
                 </a:solidFill>
               </a:rPr>
-              <a:t>会議後処理の遅延・抜け漏れ・横断活用不足を一気通貫で解消する</a:t>
+              <a:t>会議記録・合意形成・資料作成の分断を解消する</a:t>
             </a:r>
             <a:endParaRPr lang="en-US" sz="1400" dirty="0"/>
           </a:p>
@@ -8009,7 +9912,7 @@
                   <a:srgbClr val="2D3748"/>
                 </a:solidFill>
               </a:rPr>
-              <a:t>⚖️ 現状課題 → 目指す姿</a:t>
+              <a:t>⚖️ 現状課題 vs 提案後の姿</a:t>
             </a:r>
             <a:endParaRPr lang="en-US" sz="2800" dirty="0"/>
           </a:p>
@@ -8045,7 +9948,7 @@
                   <a:srgbClr val="718096"/>
                 </a:solidFill>
               </a:rPr>
-              <a:t>❌ Before / Problem</a:t>
+              <a:t>❌ 現状</a:t>
             </a:r>
             <a:endParaRPr lang="en-US" sz="1800" dirty="0"/>
           </a:p>
@@ -8088,7 +9991,7 @@
                   <a:srgbClr val="2D3748"/>
                 </a:solidFill>
               </a:rPr>
-              <a:t>議事録作成が手作業で遅い</a:t>
+              <a:t>会議ごとに議事録作成が手作業</a:t>
             </a:r>
             <a:endParaRPr lang="en-US" sz="1400" dirty="0"/>
           </a:p>
@@ -8109,7 +10012,7 @@
                   <a:srgbClr val="2D3748"/>
                 </a:solidFill>
               </a:rPr>
-              <a:t>複数会議の文脈が分断される</a:t>
+              <a:t>複数回会議の文脈が分断</a:t>
             </a:r>
             <a:endParaRPr lang="en-US" sz="1400" dirty="0"/>
           </a:p>
@@ -8130,7 +10033,7 @@
                   <a:srgbClr val="2D3748"/>
                 </a:solidFill>
               </a:rPr>
-              <a:t>音声取得失敗時のデータロス懸念</a:t>
+              <a:t>発足資料・提案書も別工程で作成</a:t>
             </a:r>
             <a:endParaRPr lang="en-US" sz="1400" dirty="0"/>
           </a:p>
@@ -8151,7 +10054,7 @@
                   <a:srgbClr val="2D3748"/>
                 </a:solidFill>
               </a:rPr>
-              <a:t>1分以内に要点・決定事項・次アクション生成</a:t>
+              <a:t>音声から1分以内に構造化サマリー生成</a:t>
             </a:r>
             <a:endParaRPr lang="en-US" sz="1400" dirty="0"/>
           </a:p>
@@ -8172,7 +10075,7 @@
                   <a:srgbClr val="2D3748"/>
                 </a:solidFill>
               </a:rPr>
-              <a:t>RAGで複数回会議を統合要約</a:t>
+              <a:t>RAGで複数会議を統合要約</a:t>
             </a:r>
             <a:endParaRPr lang="en-US" sz="1400" dirty="0"/>
           </a:p>
@@ -8193,7 +10096,7 @@
                   <a:srgbClr val="2D3748"/>
                 </a:solidFill>
               </a:rPr>
-              <a:t>ローカル録音で復元可能</a:t>
+              <a:t>キックオフ資料・提案書まで自動生成</a:t>
             </a:r>
             <a:endParaRPr lang="en-US" sz="1400" dirty="0"/>
           </a:p>
@@ -8254,7 +10157,7 @@
                   <a:srgbClr val="2D3748"/>
                 </a:solidFill>
               </a:rPr>
-              <a:t>🔄 価値提供フロー</a:t>
+              <a:t>🔄 価値創出フロー</a:t>
             </a:r>
             <a:endParaRPr lang="en-US" sz="2800" dirty="0"/>
           </a:p>
@@ -8336,7 +10239,7 @@
                   <a:srgbClr val="2D3748"/>
                 </a:solidFill>
               </a:rPr>
-              <a:t>音声取得</a:t>
+              <a:t>会議音声取得</a:t>
             </a:r>
             <a:endParaRPr lang="en-US" sz="1400" dirty="0"/>
           </a:p>
@@ -8655,7 +10558,7 @@
                   <a:srgbClr val="2D3748"/>
                 </a:solidFill>
               </a:rPr>
-              <a:t>🧠</a:t>
+              <a:t>📌</a:t>
             </a:r>
             <a:endParaRPr lang="en-US" sz="1400" dirty="0"/>
           </a:p>
@@ -8698,7 +10601,7 @@
                   <a:srgbClr val="2D3748"/>
                 </a:solidFill>
               </a:rPr>
-              <a:t>要約 / RAG統合</a:t>
+              <a:t>要点・決定抽出</a:t>
             </a:r>
             <a:endParaRPr lang="en-US" sz="1400" dirty="0"/>
           </a:p>
@@ -8836,7 +10739,7 @@
                   <a:srgbClr val="2D3748"/>
                 </a:solidFill>
               </a:rPr>
-              <a:t>📄</a:t>
+              <a:t>📚</a:t>
             </a:r>
             <a:endParaRPr lang="en-US" sz="1400" dirty="0"/>
           </a:p>
@@ -8879,7 +10782,7 @@
                   <a:srgbClr val="2D3748"/>
                 </a:solidFill>
               </a:rPr>
-              <a:t>資料出力</a:t>
+              <a:t>統合・資料生成</a:t>
             </a:r>
             <a:endParaRPr lang="en-US" sz="1400" dirty="0"/>
           </a:p>
@@ -8974,7 +10877,7 @@
                   <a:srgbClr val="2D3748"/>
                 </a:solidFill>
               </a:rPr>
-              <a:t>単発会議の即時要約から、複数回会議の知識統合・キックオフ資料生成までを連結</a:t>
+              <a:t>単発会議の議事録自動化から、継続会議の知識資産化まで拡張</a:t>
             </a:r>
             <a:endParaRPr lang="en-US" sz="1400" dirty="0"/>
           </a:p>
@@ -9042,7 +10945,7 @@
                   <a:srgbClr val="FFFFFF"/>
                 </a:solidFill>
               </a:rPr>
-              <a:t>Feature Scope</a:t>
+              <a:t>2. MVPスコープ</a:t>
             </a:r>
             <a:endParaRPr lang="en-US" sz="2800" dirty="0"/>
           </a:p>
@@ -9081,7 +10984,7 @@
                   <a:srgbClr val="FFFFFF"/>
                 </a:solidFill>
               </a:rPr>
-              <a:t>Must / Should / Couldで投資優先度を明確化</a:t>
+              <a:t>Must / Should / Could を優先度で整理</a:t>
             </a:r>
             <a:endParaRPr lang="en-US" sz="1400" dirty="0"/>
           </a:p>
@@ -9142,7 +11045,7 @@
                   <a:srgbClr val="2D3748"/>
                 </a:solidFill>
               </a:rPr>
-              <a:t>🎯 優先順位ポートフォリオ</a:t>
+              <a:t>🎯 優先度ポートフォリオ</a:t>
             </a:r>
             <a:endParaRPr lang="en-US" sz="2800" dirty="0"/>
           </a:p>
@@ -9150,61 +11053,14 @@
       </p:sp>
       <p:sp>
         <p:nvSpPr>
-          <p:cNvPr id="3" name="Shape 1"/>
+          <p:cNvPr id="3" name="Text 1"/>
           <p:cNvSpPr/>
           <p:nvPr/>
         </p:nvSpPr>
         <p:spPr>
           <a:xfrm>
-            <a:off x="457200" y="1188720"/>
-            <a:ext cx="3575304" cy="1463040"/>
-          </a:xfrm>
-          <a:prstGeom prst="roundRect">
-            <a:avLst>
-              <a:gd name="adj" fmla="val 6250"/>
-            </a:avLst>
-          </a:prstGeom>
-          <a:solidFill>
-            <a:srgbClr val="F7FAFC"/>
-          </a:solidFill>
-          <a:ln w="12700">
-            <a:solidFill>
-              <a:srgbClr val="667EEA"/>
-            </a:solidFill>
-            <a:prstDash val="solid"/>
-          </a:ln>
-        </p:spPr>
-      </p:sp>
-      <p:sp>
-        <p:nvSpPr>
-          <p:cNvPr id="4" name="Shape 2"/>
-          <p:cNvSpPr/>
-          <p:nvPr/>
-        </p:nvSpPr>
-        <p:spPr>
-          <a:xfrm>
-            <a:off x="457200" y="1188720"/>
-            <a:ext cx="54864" cy="1463040"/>
-          </a:xfrm>
-          <a:prstGeom prst="rect">
-            <a:avLst/>
-          </a:prstGeom>
-          <a:solidFill>
-            <a:srgbClr val="667EEA"/>
-          </a:solidFill>
-          <a:ln/>
-        </p:spPr>
-      </p:sp>
-      <p:sp>
-        <p:nvSpPr>
-          <p:cNvPr id="5" name="Text 3"/>
-          <p:cNvSpPr/>
-          <p:nvPr/>
-        </p:nvSpPr>
-        <p:spPr>
-          <a:xfrm>
-            <a:off x="594360" y="1280160"/>
-            <a:ext cx="3300984" cy="365760"/>
+            <a:off x="731520" y="1188720"/>
+            <a:ext cx="10725912" cy="3383280"/>
           </a:xfrm>
           <a:prstGeom prst="rect">
             <a:avLst/>
@@ -9217,504 +11073,770 @@
           <a:lstStyle/>
           <a:p>
             <a:pPr indent="0" marL="0">
-              <a:buNone/>
-            </a:pPr>
-            <a:r>
-              <a:rPr lang="en-US" sz="1300" b="1" dirty="0">
+              <a:lnSpc>
+                <a:spcPct val="140000"/>
+              </a:lnSpc>
+              <a:buNone/>
+            </a:pPr>
+            <a:r>
+              <a:rPr lang="en-US" sz="1400" dirty="0">
+                <a:solidFill>
+                  <a:srgbClr val="2D3748"/>
+                </a:solidFill>
+              </a:rPr>
+              <a:t>Could：将来拡張</a:t>
+            </a:r>
+            <a:endParaRPr lang="en-US" sz="1400" dirty="0"/>
+          </a:p>
+          <a:p>
+            <a:pPr indent="0" marL="0">
+              <a:lnSpc>
+                <a:spcPct val="140000"/>
+              </a:lnSpc>
+              <a:buNone/>
+            </a:pPr>
+            <a:endParaRPr lang="en-US" sz="1400" dirty="0"/>
+          </a:p>
+          <a:p>
+            <a:pPr indent="0" marL="0">
+              <a:lnSpc>
+                <a:spcPct val="140000"/>
+              </a:lnSpc>
+              <a:buNone/>
+            </a:pPr>
+            <a:r>
+              <a:rPr lang="en-US" sz="1400" dirty="0">
+                <a:solidFill>
+                  <a:srgbClr val="2D3748"/>
+                </a:solidFill>
+              </a:rPr>
+              <a:t>      </a:t>
+            </a:r>
+            <a:endParaRPr lang="en-US" sz="1400" dirty="0"/>
+          </a:p>
+          <a:p>
+            <a:pPr indent="0" marL="0">
+              <a:lnSpc>
+                <a:spcPct val="140000"/>
+              </a:lnSpc>
+              <a:buNone/>
+            </a:pPr>
+            <a:endParaRPr lang="en-US" sz="1400" dirty="0"/>
+          </a:p>
+          <a:p>
+            <a:pPr indent="0" marL="0">
+              <a:lnSpc>
+                <a:spcPct val="140000"/>
+              </a:lnSpc>
+              <a:buNone/>
+            </a:pPr>
+            <a:r>
+              <a:rPr lang="en-US" sz="1400" dirty="0">
+                <a:solidFill>
+                  <a:srgbClr val="2D3748"/>
+                </a:solidFill>
+              </a:rPr>
+              <a:t>        </a:t>
+            </a:r>
+            <a:endParaRPr lang="en-US" sz="1400" dirty="0"/>
+          </a:p>
+          <a:p>
+            <a:pPr indent="0" marL="0">
+              <a:lnSpc>
+                <a:spcPct val="140000"/>
+              </a:lnSpc>
+              <a:buNone/>
+            </a:pPr>
+            <a:r>
+              <a:rPr lang="en-US" sz="1400" dirty="0">
+                <a:solidFill>
+                  <a:srgbClr val="2D3748"/>
+                </a:solidFill>
+              </a:rPr>
+              <a:t>Should：利便性強化</a:t>
+            </a:r>
+            <a:endParaRPr lang="en-US" sz="1400" dirty="0"/>
+          </a:p>
+          <a:p>
+            <a:pPr indent="0" marL="0">
+              <a:lnSpc>
+                <a:spcPct val="140000"/>
+              </a:lnSpc>
+              <a:buNone/>
+            </a:pPr>
+            <a:endParaRPr lang="en-US" sz="1400" dirty="0"/>
+          </a:p>
+          <a:p>
+            <a:pPr indent="0" marL="0">
+              <a:lnSpc>
+                <a:spcPct val="140000"/>
+              </a:lnSpc>
+              <a:buNone/>
+            </a:pPr>
+            <a:r>
+              <a:rPr lang="en-US" sz="1400" dirty="0">
+                <a:solidFill>
+                  <a:srgbClr val="2D3748"/>
+                </a:solidFill>
+              </a:rPr>
+              <a:t>        </a:t>
+            </a:r>
+            <a:endParaRPr lang="en-US" sz="1400" dirty="0"/>
+          </a:p>
+          <a:p>
+            <a:pPr indent="0" marL="0">
+              <a:lnSpc>
+                <a:spcPct val="140000"/>
+              </a:lnSpc>
+              <a:buNone/>
+            </a:pPr>
+            <a:r>
+              <a:rPr lang="en-US" sz="1400" dirty="0">
                 <a:solidFill>
                   <a:srgbClr val="2D3748"/>
                 </a:solidFill>
               </a:rPr>
               <a:t>Must</a:t>
             </a:r>
-            <a:endParaRPr lang="en-US" sz="1300" dirty="0"/>
-          </a:p>
-        </p:txBody>
-      </p:sp>
-      <p:sp>
-        <p:nvSpPr>
-          <p:cNvPr id="6" name="Shape 4"/>
-          <p:cNvSpPr/>
-          <p:nvPr/>
-        </p:nvSpPr>
-        <p:spPr>
-          <a:xfrm>
-            <a:off x="4306824" y="1188720"/>
-            <a:ext cx="3575304" cy="1463040"/>
-          </a:xfrm>
-          <a:prstGeom prst="roundRect">
-            <a:avLst>
-              <a:gd name="adj" fmla="val 6250"/>
-            </a:avLst>
-          </a:prstGeom>
-          <a:solidFill>
-            <a:srgbClr val="F7FAFC"/>
-          </a:solidFill>
-          <a:ln w="12700">
-            <a:solidFill>
-              <a:srgbClr val="48BB78"/>
-            </a:solidFill>
-            <a:prstDash val="solid"/>
-          </a:ln>
-        </p:spPr>
-      </p:sp>
-      <p:sp>
-        <p:nvSpPr>
-          <p:cNvPr id="7" name="Shape 5"/>
-          <p:cNvSpPr/>
-          <p:nvPr/>
-        </p:nvSpPr>
-        <p:spPr>
-          <a:xfrm>
-            <a:off x="4306824" y="1188720"/>
-            <a:ext cx="54864" cy="1463040"/>
-          </a:xfrm>
-          <a:prstGeom prst="rect">
-            <a:avLst/>
-          </a:prstGeom>
-          <a:solidFill>
-            <a:srgbClr val="48BB78"/>
-          </a:solidFill>
-          <a:ln/>
-        </p:spPr>
-      </p:sp>
-      <p:sp>
-        <p:nvSpPr>
-          <p:cNvPr id="8" name="Text 6"/>
-          <p:cNvSpPr/>
-          <p:nvPr/>
-        </p:nvSpPr>
-        <p:spPr>
-          <a:xfrm>
-            <a:off x="4443984" y="1280160"/>
-            <a:ext cx="3300984" cy="365760"/>
-          </a:xfrm>
-          <a:prstGeom prst="rect">
-            <a:avLst/>
-          </a:prstGeom>
-          <a:noFill/>
-          <a:ln/>
-        </p:spPr>
-        <p:txBody>
-          <a:bodyPr wrap="square" rtlCol="0" anchor="t"/>
-          <a:lstStyle/>
-          <a:p>
-            <a:pPr indent="0" marL="0">
-              <a:buNone/>
-            </a:pPr>
-            <a:r>
-              <a:rPr lang="en-US" sz="1300" b="1" dirty="0">
-                <a:solidFill>
-                  <a:srgbClr val="2D3748"/>
-                </a:solidFill>
-              </a:rPr>
-              <a:t>🎙️ Must</a:t>
-            </a:r>
-            <a:endParaRPr lang="en-US" sz="1300" dirty="0"/>
-          </a:p>
-        </p:txBody>
-      </p:sp>
-      <p:sp>
-        <p:nvSpPr>
-          <p:cNvPr id="9" name="Text 7"/>
-          <p:cNvSpPr/>
-          <p:nvPr/>
-        </p:nvSpPr>
-        <p:spPr>
-          <a:xfrm>
-            <a:off x="4443984" y="1645920"/>
-            <a:ext cx="3300984" cy="914400"/>
-          </a:xfrm>
-          <a:prstGeom prst="rect">
-            <a:avLst/>
-          </a:prstGeom>
-          <a:noFill/>
-          <a:ln/>
-        </p:spPr>
-        <p:txBody>
-          <a:bodyPr wrap="square" rtlCol="0" anchor="t"/>
-          <a:lstStyle/>
-          <a:p>
-            <a:pPr indent="0" marL="0">
-              <a:buNone/>
-            </a:pPr>
-            <a:r>
-              <a:rPr lang="en-US" sz="1000" dirty="0">
-                <a:solidFill>
-                  <a:srgbClr val="4A5568"/>
-                </a:solidFill>
-              </a:rPr>
-              <a:t>音声サマリー / 資料生成 / RAG / 統合 / バックアップ</a:t>
-            </a:r>
-            <a:endParaRPr lang="en-US" sz="1000" dirty="0"/>
-          </a:p>
-        </p:txBody>
-      </p:sp>
-      <p:sp>
-        <p:nvSpPr>
-          <p:cNvPr id="10" name="Shape 8"/>
-          <p:cNvSpPr/>
-          <p:nvPr/>
-        </p:nvSpPr>
-        <p:spPr>
-          <a:xfrm>
-            <a:off x="8156448" y="1188720"/>
-            <a:ext cx="3575304" cy="1463040"/>
-          </a:xfrm>
-          <a:prstGeom prst="roundRect">
-            <a:avLst>
-              <a:gd name="adj" fmla="val 6250"/>
-            </a:avLst>
-          </a:prstGeom>
-          <a:solidFill>
-            <a:srgbClr val="F7FAFC"/>
-          </a:solidFill>
-          <a:ln w="12700">
-            <a:solidFill>
-              <a:srgbClr val="ED8936"/>
-            </a:solidFill>
-            <a:prstDash val="solid"/>
-          </a:ln>
-        </p:spPr>
-      </p:sp>
-      <p:sp>
-        <p:nvSpPr>
-          <p:cNvPr id="11" name="Shape 9"/>
-          <p:cNvSpPr/>
-          <p:nvPr/>
-        </p:nvSpPr>
-        <p:spPr>
-          <a:xfrm>
-            <a:off x="8156448" y="1188720"/>
-            <a:ext cx="54864" cy="1463040"/>
-          </a:xfrm>
-          <a:prstGeom prst="rect">
-            <a:avLst/>
-          </a:prstGeom>
-          <a:solidFill>
-            <a:srgbClr val="ED8936"/>
-          </a:solidFill>
-          <a:ln/>
-        </p:spPr>
-      </p:sp>
-      <p:sp>
-        <p:nvSpPr>
-          <p:cNvPr id="12" name="Text 10"/>
-          <p:cNvSpPr/>
-          <p:nvPr/>
-        </p:nvSpPr>
-        <p:spPr>
-          <a:xfrm>
-            <a:off x="8293608" y="1280160"/>
-            <a:ext cx="3300984" cy="365760"/>
-          </a:xfrm>
-          <a:prstGeom prst="rect">
-            <a:avLst/>
-          </a:prstGeom>
-          <a:noFill/>
-          <a:ln/>
-        </p:spPr>
-        <p:txBody>
-          <a:bodyPr wrap="square" rtlCol="0" anchor="t"/>
-          <a:lstStyle/>
-          <a:p>
-            <a:pPr indent="0" marL="0">
-              <a:buNone/>
-            </a:pPr>
-            <a:r>
-              <a:rPr lang="en-US" sz="1300" b="1" dirty="0">
-                <a:solidFill>
-                  <a:srgbClr val="2D3748"/>
-                </a:solidFill>
-              </a:rPr>
-              <a:t>⚡ Should</a:t>
-            </a:r>
-            <a:endParaRPr lang="en-US" sz="1300" dirty="0"/>
-          </a:p>
-        </p:txBody>
-      </p:sp>
-      <p:sp>
-        <p:nvSpPr>
-          <p:cNvPr id="13" name="Text 11"/>
-          <p:cNvSpPr/>
-          <p:nvPr/>
-        </p:nvSpPr>
-        <p:spPr>
-          <a:xfrm>
-            <a:off x="8293608" y="1645920"/>
-            <a:ext cx="3300984" cy="914400"/>
-          </a:xfrm>
-          <a:prstGeom prst="rect">
-            <a:avLst/>
-          </a:prstGeom>
-          <a:noFill/>
-          <a:ln/>
-        </p:spPr>
-        <p:txBody>
-          <a:bodyPr wrap="square" rtlCol="0" anchor="t"/>
-          <a:lstStyle/>
-          <a:p>
-            <a:pPr indent="0" marL="0">
-              <a:buNone/>
-            </a:pPr>
-            <a:r>
-              <a:rPr lang="en-US" sz="1000" dirty="0">
-                <a:solidFill>
-                  <a:srgbClr val="4A5568"/>
+            <a:endParaRPr lang="en-US" sz="1400" dirty="0"/>
+          </a:p>
+          <a:p>
+            <a:pPr indent="0" marL="0">
+              <a:lnSpc>
+                <a:spcPct val="140000"/>
+              </a:lnSpc>
+              <a:buNone/>
+            </a:pPr>
+            <a:r>
+              <a:rPr lang="en-US" sz="1400" dirty="0">
+                <a:solidFill>
+                  <a:srgbClr val="2D3748"/>
+                </a:solidFill>
+              </a:rPr>
+              <a:t>中核機能</a:t>
+            </a:r>
+            <a:endParaRPr lang="en-US" sz="1400" dirty="0"/>
+          </a:p>
+          <a:p>
+            <a:pPr indent="0" marL="0">
+              <a:lnSpc>
+                <a:spcPct val="140000"/>
+              </a:lnSpc>
+              <a:buNone/>
+            </a:pPr>
+            <a:endParaRPr lang="en-US" sz="1400" dirty="0"/>
+          </a:p>
+          <a:p>
+            <a:pPr indent="0" marL="0">
+              <a:lnSpc>
+                <a:spcPct val="140000"/>
+              </a:lnSpc>
+              <a:buNone/>
+            </a:pPr>
+            <a:r>
+              <a:rPr lang="en-US" sz="1400" dirty="0">
+                <a:solidFill>
+                  <a:srgbClr val="2D3748"/>
+                </a:solidFill>
+              </a:rPr>
+              <a:t>      </a:t>
+            </a:r>
+            <a:endParaRPr lang="en-US" sz="1400" dirty="0"/>
+          </a:p>
+          <a:p>
+            <a:pPr indent="0" marL="0">
+              <a:lnSpc>
+                <a:spcPct val="140000"/>
+              </a:lnSpc>
+              <a:buNone/>
+            </a:pPr>
+            <a:endParaRPr lang="en-US" sz="1400" dirty="0"/>
+          </a:p>
+          <a:p>
+            <a:pPr indent="0" marL="0">
+              <a:lnSpc>
+                <a:spcPct val="140000"/>
+              </a:lnSpc>
+              <a:buNone/>
+            </a:pPr>
+            <a:r>
+              <a:rPr lang="en-US" sz="1400" dirty="0">
+                <a:solidFill>
+                  <a:srgbClr val="2D3748"/>
+                </a:solidFill>
+              </a:rPr>
+              <a:t>    </a:t>
+            </a:r>
+            <a:endParaRPr lang="en-US" sz="1400" dirty="0"/>
+          </a:p>
+          <a:p>
+            <a:pPr indent="0" marL="0">
+              <a:lnSpc>
+                <a:spcPct val="140000"/>
+              </a:lnSpc>
+              <a:buNone/>
+            </a:pPr>
+            <a:endParaRPr lang="en-US" sz="1400" dirty="0"/>
+          </a:p>
+          <a:p>
+            <a:pPr indent="0" marL="0">
+              <a:lnSpc>
+                <a:spcPct val="140000"/>
+              </a:lnSpc>
+              <a:buNone/>
+            </a:pPr>
+            <a:r>
+              <a:rPr lang="en-US" sz="1400" dirty="0">
+                <a:solidFill>
+                  <a:srgbClr val="2D3748"/>
+                </a:solidFill>
+              </a:rPr>
+              <a:t>  </a:t>
+            </a:r>
+            <a:endParaRPr lang="en-US" sz="1400" dirty="0"/>
+          </a:p>
+          <a:p>
+            <a:pPr indent="0" marL="0">
+              <a:lnSpc>
+                <a:spcPct val="140000"/>
+              </a:lnSpc>
+              <a:buNone/>
+            </a:pPr>
+            <a:endParaRPr lang="en-US" sz="1400" dirty="0"/>
+          </a:p>
+          <a:p>
+            <a:pPr indent="0" marL="0">
+              <a:lnSpc>
+                <a:spcPct val="140000"/>
+              </a:lnSpc>
+              <a:buNone/>
+            </a:pPr>
+            <a:r>
+              <a:rPr lang="en-US" sz="1400" dirty="0">
+                <a:solidFill>
+                  <a:srgbClr val="2D3748"/>
+                </a:solidFill>
+              </a:rPr>
+              <a:t>  </a:t>
+            </a:r>
+            <a:endParaRPr lang="en-US" sz="1400" dirty="0"/>
+          </a:p>
+          <a:p>
+            <a:pPr indent="0" marL="0">
+              <a:lnSpc>
+                <a:spcPct val="140000"/>
+              </a:lnSpc>
+              <a:buNone/>
+            </a:pPr>
+            <a:endParaRPr lang="en-US" sz="1400" dirty="0"/>
+          </a:p>
+          <a:p>
+            <a:pPr indent="0" marL="0">
+              <a:lnSpc>
+                <a:spcPct val="140000"/>
+              </a:lnSpc>
+              <a:buNone/>
+            </a:pPr>
+            <a:r>
+              <a:rPr lang="en-US" sz="1400" dirty="0">
+                <a:solidFill>
+                  <a:srgbClr val="2D3748"/>
+                </a:solidFill>
+              </a:rPr>
+              <a:t>    </a:t>
+            </a:r>
+            <a:endParaRPr lang="en-US" sz="1400" dirty="0"/>
+          </a:p>
+          <a:p>
+            <a:pPr indent="0" marL="0">
+              <a:lnSpc>
+                <a:spcPct val="140000"/>
+              </a:lnSpc>
+              <a:buNone/>
+            </a:pPr>
+            <a:endParaRPr lang="en-US" sz="1400" dirty="0"/>
+          </a:p>
+          <a:p>
+            <a:pPr indent="0" marL="0">
+              <a:lnSpc>
+                <a:spcPct val="140000"/>
+              </a:lnSpc>
+              <a:buNone/>
+            </a:pPr>
+            <a:r>
+              <a:rPr lang="en-US" sz="1400" dirty="0">
+                <a:solidFill>
+                  <a:srgbClr val="2D3748"/>
+                </a:solidFill>
+              </a:rPr>
+              <a:t>      </a:t>
+            </a:r>
+            <a:endParaRPr lang="en-US" sz="1400" dirty="0"/>
+          </a:p>
+          <a:p>
+            <a:pPr indent="0" marL="0">
+              <a:lnSpc>
+                <a:spcPct val="140000"/>
+              </a:lnSpc>
+              <a:buNone/>
+            </a:pPr>
+            <a:r>
+              <a:rPr lang="en-US" sz="1400" dirty="0">
+                <a:solidFill>
+                  <a:srgbClr val="2D3748"/>
+                </a:solidFill>
+              </a:rPr>
+              <a:t>🔥</a:t>
+            </a:r>
+            <a:endParaRPr lang="en-US" sz="1400" dirty="0"/>
+          </a:p>
+          <a:p>
+            <a:pPr indent="0" marL="0">
+              <a:lnSpc>
+                <a:spcPct val="140000"/>
+              </a:lnSpc>
+              <a:buNone/>
+            </a:pPr>
+            <a:endParaRPr lang="en-US" sz="1400" dirty="0"/>
+          </a:p>
+          <a:p>
+            <a:pPr indent="0" marL="0">
+              <a:lnSpc>
+                <a:spcPct val="140000"/>
+              </a:lnSpc>
+              <a:buNone/>
+            </a:pPr>
+            <a:r>
+              <a:rPr lang="en-US" sz="1400" dirty="0">
+                <a:solidFill>
+                  <a:srgbClr val="2D3748"/>
+                </a:solidFill>
+              </a:rPr>
+              <a:t>      </a:t>
+            </a:r>
+            <a:endParaRPr lang="en-US" sz="1400" dirty="0"/>
+          </a:p>
+          <a:p>
+            <a:pPr indent="0" marL="0">
+              <a:lnSpc>
+                <a:spcPct val="140000"/>
+              </a:lnSpc>
+              <a:buNone/>
+            </a:pPr>
+            <a:r>
+              <a:rPr lang="en-US" sz="1400" dirty="0">
+                <a:solidFill>
+                  <a:srgbClr val="2D3748"/>
+                </a:solidFill>
+              </a:rPr>
+              <a:t>Must 5件</a:t>
+            </a:r>
+            <a:endParaRPr lang="en-US" sz="1400" dirty="0"/>
+          </a:p>
+          <a:p>
+            <a:pPr indent="0" marL="0">
+              <a:lnSpc>
+                <a:spcPct val="140000"/>
+              </a:lnSpc>
+              <a:buNone/>
+            </a:pPr>
+            <a:endParaRPr lang="en-US" sz="1400" dirty="0"/>
+          </a:p>
+          <a:p>
+            <a:pPr indent="0" marL="0">
+              <a:lnSpc>
+                <a:spcPct val="140000"/>
+              </a:lnSpc>
+              <a:buNone/>
+            </a:pPr>
+            <a:r>
+              <a:rPr lang="en-US" sz="1400" dirty="0">
+                <a:solidFill>
+                  <a:srgbClr val="2D3748"/>
+                </a:solidFill>
+              </a:rPr>
+              <a:t>      </a:t>
+            </a:r>
+            <a:endParaRPr lang="en-US" sz="1400" dirty="0"/>
+          </a:p>
+          <a:p>
+            <a:pPr indent="0" marL="0">
+              <a:lnSpc>
+                <a:spcPct val="140000"/>
+              </a:lnSpc>
+              <a:buNone/>
+            </a:pPr>
+            <a:r>
+              <a:rPr lang="en-US" sz="1400" dirty="0">
+                <a:solidFill>
+                  <a:srgbClr val="2D3748"/>
+                </a:solidFill>
+              </a:rPr>
+              <a:t>サマリー / 資料作成 / RAG / 統合 / バックアップ</a:t>
+            </a:r>
+            <a:endParaRPr lang="en-US" sz="1400" dirty="0"/>
+          </a:p>
+          <a:p>
+            <a:pPr indent="0" marL="0">
+              <a:lnSpc>
+                <a:spcPct val="140000"/>
+              </a:lnSpc>
+              <a:buNone/>
+            </a:pPr>
+            <a:endParaRPr lang="en-US" sz="1400" dirty="0"/>
+          </a:p>
+          <a:p>
+            <a:pPr indent="0" marL="0">
+              <a:lnSpc>
+                <a:spcPct val="140000"/>
+              </a:lnSpc>
+              <a:buNone/>
+            </a:pPr>
+            <a:r>
+              <a:rPr lang="en-US" sz="1400" dirty="0">
+                <a:solidFill>
+                  <a:srgbClr val="2D3748"/>
+                </a:solidFill>
+              </a:rPr>
+              <a:t>    </a:t>
+            </a:r>
+            <a:endParaRPr lang="en-US" sz="1400" dirty="0"/>
+          </a:p>
+          <a:p>
+            <a:pPr indent="0" marL="0">
+              <a:lnSpc>
+                <a:spcPct val="140000"/>
+              </a:lnSpc>
+              <a:buNone/>
+            </a:pPr>
+            <a:endParaRPr lang="en-US" sz="1400" dirty="0"/>
+          </a:p>
+          <a:p>
+            <a:pPr indent="0" marL="0">
+              <a:lnSpc>
+                <a:spcPct val="140000"/>
+              </a:lnSpc>
+              <a:buNone/>
+            </a:pPr>
+            <a:r>
+              <a:rPr lang="en-US" sz="1400" dirty="0">
+                <a:solidFill>
+                  <a:srgbClr val="2D3748"/>
+                </a:solidFill>
+              </a:rPr>
+              <a:t>    </a:t>
+            </a:r>
+            <a:endParaRPr lang="en-US" sz="1400" dirty="0"/>
+          </a:p>
+          <a:p>
+            <a:pPr indent="0" marL="0">
+              <a:lnSpc>
+                <a:spcPct val="140000"/>
+              </a:lnSpc>
+              <a:buNone/>
+            </a:pPr>
+            <a:endParaRPr lang="en-US" sz="1400" dirty="0"/>
+          </a:p>
+          <a:p>
+            <a:pPr indent="0" marL="0">
+              <a:lnSpc>
+                <a:spcPct val="140000"/>
+              </a:lnSpc>
+              <a:buNone/>
+            </a:pPr>
+            <a:r>
+              <a:rPr lang="en-US" sz="1400" dirty="0">
+                <a:solidFill>
+                  <a:srgbClr val="2D3748"/>
+                </a:solidFill>
+              </a:rPr>
+              <a:t>      </a:t>
+            </a:r>
+            <a:endParaRPr lang="en-US" sz="1400" dirty="0"/>
+          </a:p>
+          <a:p>
+            <a:pPr indent="0" marL="0">
+              <a:lnSpc>
+                <a:spcPct val="140000"/>
+              </a:lnSpc>
+              <a:buNone/>
+            </a:pPr>
+            <a:r>
+              <a:rPr lang="en-US" sz="1400" dirty="0">
+                <a:solidFill>
+                  <a:srgbClr val="2D3748"/>
+                </a:solidFill>
+              </a:rPr>
+              <a:t>✨</a:t>
+            </a:r>
+            <a:endParaRPr lang="en-US" sz="1400" dirty="0"/>
+          </a:p>
+          <a:p>
+            <a:pPr indent="0" marL="0">
+              <a:lnSpc>
+                <a:spcPct val="140000"/>
+              </a:lnSpc>
+              <a:buNone/>
+            </a:pPr>
+            <a:endParaRPr lang="en-US" sz="1400" dirty="0"/>
+          </a:p>
+          <a:p>
+            <a:pPr indent="0" marL="0">
+              <a:lnSpc>
+                <a:spcPct val="140000"/>
+              </a:lnSpc>
+              <a:buNone/>
+            </a:pPr>
+            <a:r>
+              <a:rPr lang="en-US" sz="1400" dirty="0">
+                <a:solidFill>
+                  <a:srgbClr val="2D3748"/>
+                </a:solidFill>
+              </a:rPr>
+              <a:t>      </a:t>
+            </a:r>
+            <a:endParaRPr lang="en-US" sz="1400" dirty="0"/>
+          </a:p>
+          <a:p>
+            <a:pPr indent="0" marL="0">
+              <a:lnSpc>
+                <a:spcPct val="140000"/>
+              </a:lnSpc>
+              <a:buNone/>
+            </a:pPr>
+            <a:r>
+              <a:rPr lang="en-US" sz="1400" dirty="0">
+                <a:solidFill>
+                  <a:srgbClr val="2D3748"/>
+                </a:solidFill>
+              </a:rPr>
+              <a:t>Should 2件</a:t>
+            </a:r>
+            <a:endParaRPr lang="en-US" sz="1400" dirty="0"/>
+          </a:p>
+          <a:p>
+            <a:pPr indent="0" marL="0">
+              <a:lnSpc>
+                <a:spcPct val="140000"/>
+              </a:lnSpc>
+              <a:buNone/>
+            </a:pPr>
+            <a:endParaRPr lang="en-US" sz="1400" dirty="0"/>
+          </a:p>
+          <a:p>
+            <a:pPr indent="0" marL="0">
+              <a:lnSpc>
+                <a:spcPct val="140000"/>
+              </a:lnSpc>
+              <a:buNone/>
+            </a:pPr>
+            <a:r>
+              <a:rPr lang="en-US" sz="1400" dirty="0">
+                <a:solidFill>
+                  <a:srgbClr val="2D3748"/>
+                </a:solidFill>
+              </a:rPr>
+              <a:t>      </a:t>
+            </a:r>
+            <a:endParaRPr lang="en-US" sz="1400" dirty="0"/>
+          </a:p>
+          <a:p>
+            <a:pPr indent="0" marL="0">
+              <a:lnSpc>
+                <a:spcPct val="140000"/>
+              </a:lnSpc>
+              <a:buNone/>
+            </a:pPr>
+            <a:r>
+              <a:rPr lang="en-US" sz="1400" dirty="0">
+                <a:solidFill>
+                  <a:srgbClr val="2D3748"/>
                 </a:solidFill>
               </a:rPr>
               <a:t>ライブ字幕 / 文字起こし方式選択</a:t>
             </a:r>
-            <a:endParaRPr lang="en-US" sz="1000" dirty="0"/>
-          </a:p>
-        </p:txBody>
-      </p:sp>
-      <p:sp>
-        <p:nvSpPr>
-          <p:cNvPr id="14" name="Shape 12"/>
-          <p:cNvSpPr/>
-          <p:nvPr/>
-        </p:nvSpPr>
-        <p:spPr>
-          <a:xfrm>
-            <a:off x="457200" y="2834640"/>
-            <a:ext cx="3575304" cy="1463040"/>
-          </a:xfrm>
-          <a:prstGeom prst="roundRect">
-            <a:avLst>
-              <a:gd name="adj" fmla="val 6250"/>
-            </a:avLst>
-          </a:prstGeom>
-          <a:solidFill>
-            <a:srgbClr val="F7FAFC"/>
-          </a:solidFill>
-          <a:ln w="12700">
-            <a:solidFill>
-              <a:srgbClr val="E53E3E"/>
-            </a:solidFill>
-            <a:prstDash val="solid"/>
-          </a:ln>
-        </p:spPr>
-      </p:sp>
-      <p:sp>
-        <p:nvSpPr>
-          <p:cNvPr id="15" name="Shape 13"/>
-          <p:cNvSpPr/>
-          <p:nvPr/>
-        </p:nvSpPr>
-        <p:spPr>
-          <a:xfrm>
-            <a:off x="457200" y="2834640"/>
-            <a:ext cx="54864" cy="1463040"/>
-          </a:xfrm>
-          <a:prstGeom prst="rect">
-            <a:avLst/>
-          </a:prstGeom>
-          <a:solidFill>
-            <a:srgbClr val="E53E3E"/>
-          </a:solidFill>
-          <a:ln/>
-        </p:spPr>
-      </p:sp>
-      <p:sp>
-        <p:nvSpPr>
-          <p:cNvPr id="16" name="Text 14"/>
-          <p:cNvSpPr/>
-          <p:nvPr/>
-        </p:nvSpPr>
-        <p:spPr>
-          <a:xfrm>
-            <a:off x="594360" y="2926080"/>
-            <a:ext cx="3300984" cy="365760"/>
-          </a:xfrm>
-          <a:prstGeom prst="rect">
-            <a:avLst/>
-          </a:prstGeom>
-          <a:noFill/>
-          <a:ln/>
-        </p:spPr>
-        <p:txBody>
-          <a:bodyPr wrap="square" rtlCol="0" anchor="t"/>
-          <a:lstStyle/>
-          <a:p>
-            <a:pPr indent="0" marL="0">
-              <a:buNone/>
-            </a:pPr>
-            <a:r>
-              <a:rPr lang="en-US" sz="1300" b="1" dirty="0">
-                <a:solidFill>
-                  <a:srgbClr val="2D3748"/>
-                </a:solidFill>
-              </a:rPr>
-              <a:t>✅ 単体サマリー</a:t>
-            </a:r>
-            <a:endParaRPr lang="en-US" sz="1300" dirty="0"/>
-          </a:p>
-        </p:txBody>
-      </p:sp>
-      <p:sp>
-        <p:nvSpPr>
-          <p:cNvPr id="17" name="Shape 15"/>
-          <p:cNvSpPr/>
-          <p:nvPr/>
-        </p:nvSpPr>
-        <p:spPr>
-          <a:xfrm>
-            <a:off x="4306824" y="2834640"/>
-            <a:ext cx="3575304" cy="1463040"/>
-          </a:xfrm>
-          <a:prstGeom prst="roundRect">
-            <a:avLst>
-              <a:gd name="adj" fmla="val 6250"/>
-            </a:avLst>
-          </a:prstGeom>
-          <a:solidFill>
-            <a:srgbClr val="F7FAFC"/>
-          </a:solidFill>
-          <a:ln w="12700">
-            <a:solidFill>
-              <a:srgbClr val="764BA2"/>
-            </a:solidFill>
-            <a:prstDash val="solid"/>
-          </a:ln>
-        </p:spPr>
-      </p:sp>
-      <p:sp>
-        <p:nvSpPr>
-          <p:cNvPr id="18" name="Shape 16"/>
-          <p:cNvSpPr/>
-          <p:nvPr/>
-        </p:nvSpPr>
-        <p:spPr>
-          <a:xfrm>
-            <a:off x="4306824" y="2834640"/>
-            <a:ext cx="54864" cy="1463040"/>
-          </a:xfrm>
-          <a:prstGeom prst="rect">
-            <a:avLst/>
-          </a:prstGeom>
-          <a:solidFill>
-            <a:srgbClr val="764BA2"/>
-          </a:solidFill>
-          <a:ln/>
-        </p:spPr>
-      </p:sp>
-      <p:sp>
-        <p:nvSpPr>
-          <p:cNvPr id="19" name="Text 17"/>
-          <p:cNvSpPr/>
-          <p:nvPr/>
-        </p:nvSpPr>
-        <p:spPr>
-          <a:xfrm>
-            <a:off x="4443984" y="2926080"/>
-            <a:ext cx="3300984" cy="365760"/>
-          </a:xfrm>
-          <a:prstGeom prst="rect">
-            <a:avLst/>
-          </a:prstGeom>
-          <a:noFill/>
-          <a:ln/>
-        </p:spPr>
-        <p:txBody>
-          <a:bodyPr wrap="square" rtlCol="0" anchor="t"/>
-          <a:lstStyle/>
-          <a:p>
-            <a:pPr indent="0" marL="0">
-              <a:buNone/>
-            </a:pPr>
-            <a:r>
-              <a:rPr lang="en-US" sz="1300" b="1" dirty="0">
-                <a:solidFill>
-                  <a:srgbClr val="2D3748"/>
-                </a:solidFill>
-              </a:rPr>
-              <a:t>🎯 RAG統合 / 資料生成</a:t>
-            </a:r>
-            <a:endParaRPr lang="en-US" sz="1300" dirty="0"/>
-          </a:p>
-        </p:txBody>
-      </p:sp>
-      <p:sp>
-        <p:nvSpPr>
-          <p:cNvPr id="20" name="Shape 18"/>
-          <p:cNvSpPr/>
-          <p:nvPr/>
-        </p:nvSpPr>
-        <p:spPr>
-          <a:xfrm>
-            <a:off x="8156448" y="2834640"/>
-            <a:ext cx="3575304" cy="1463040"/>
-          </a:xfrm>
-          <a:prstGeom prst="roundRect">
-            <a:avLst>
-              <a:gd name="adj" fmla="val 6250"/>
-            </a:avLst>
-          </a:prstGeom>
-          <a:solidFill>
-            <a:srgbClr val="F7FAFC"/>
-          </a:solidFill>
-          <a:ln w="12700">
-            <a:solidFill>
-              <a:srgbClr val="38A169"/>
-            </a:solidFill>
-            <a:prstDash val="solid"/>
-          </a:ln>
-        </p:spPr>
-      </p:sp>
-      <p:sp>
-        <p:nvSpPr>
-          <p:cNvPr id="21" name="Shape 19"/>
-          <p:cNvSpPr/>
-          <p:nvPr/>
-        </p:nvSpPr>
-        <p:spPr>
-          <a:xfrm>
-            <a:off x="8156448" y="2834640"/>
-            <a:ext cx="54864" cy="1463040"/>
-          </a:xfrm>
-          <a:prstGeom prst="rect">
-            <a:avLst/>
-          </a:prstGeom>
-          <a:solidFill>
-            <a:srgbClr val="38A169"/>
-          </a:solidFill>
-          <a:ln/>
-        </p:spPr>
-      </p:sp>
-      <p:sp>
-        <p:nvSpPr>
-          <p:cNvPr id="22" name="Text 20"/>
-          <p:cNvSpPr/>
-          <p:nvPr/>
-        </p:nvSpPr>
-        <p:spPr>
-          <a:xfrm>
-            <a:off x="8293608" y="2926080"/>
-            <a:ext cx="3300984" cy="365760"/>
-          </a:xfrm>
-          <a:prstGeom prst="rect">
-            <a:avLst/>
-          </a:prstGeom>
-          <a:noFill/>
-          <a:ln/>
-        </p:spPr>
-        <p:txBody>
-          <a:bodyPr wrap="square" rtlCol="0" anchor="t"/>
-          <a:lstStyle/>
-          <a:p>
-            <a:pPr indent="0" marL="0">
-              <a:buNone/>
-            </a:pPr>
-            <a:r>
-              <a:rPr lang="en-US" sz="1300" b="1" dirty="0">
-                <a:solidFill>
-                  <a:srgbClr val="2D3748"/>
-                </a:solidFill>
-              </a:rPr>
-              <a:t>⚡ エクスポート</a:t>
-            </a:r>
-            <a:endParaRPr lang="en-US" sz="1300" dirty="0"/>
+            <a:endParaRPr lang="en-US" sz="1400" dirty="0"/>
+          </a:p>
+          <a:p>
+            <a:pPr indent="0" marL="0">
+              <a:lnSpc>
+                <a:spcPct val="140000"/>
+              </a:lnSpc>
+              <a:buNone/>
+            </a:pPr>
+            <a:endParaRPr lang="en-US" sz="1400" dirty="0"/>
+          </a:p>
+          <a:p>
+            <a:pPr indent="0" marL="0">
+              <a:lnSpc>
+                <a:spcPct val="140000"/>
+              </a:lnSpc>
+              <a:buNone/>
+            </a:pPr>
+            <a:r>
+              <a:rPr lang="en-US" sz="1400" dirty="0">
+                <a:solidFill>
+                  <a:srgbClr val="2D3748"/>
+                </a:solidFill>
+              </a:rPr>
+              <a:t>    </a:t>
+            </a:r>
+            <a:endParaRPr lang="en-US" sz="1400" dirty="0"/>
+          </a:p>
+          <a:p>
+            <a:pPr indent="0" marL="0">
+              <a:lnSpc>
+                <a:spcPct val="140000"/>
+              </a:lnSpc>
+              <a:buNone/>
+            </a:pPr>
+            <a:endParaRPr lang="en-US" sz="1400" dirty="0"/>
+          </a:p>
+          <a:p>
+            <a:pPr indent="0" marL="0">
+              <a:lnSpc>
+                <a:spcPct val="140000"/>
+              </a:lnSpc>
+              <a:buNone/>
+            </a:pPr>
+            <a:r>
+              <a:rPr lang="en-US" sz="1400" dirty="0">
+                <a:solidFill>
+                  <a:srgbClr val="2D3748"/>
+                </a:solidFill>
+              </a:rPr>
+              <a:t>    </a:t>
+            </a:r>
+            <a:endParaRPr lang="en-US" sz="1400" dirty="0"/>
+          </a:p>
+          <a:p>
+            <a:pPr indent="0" marL="0">
+              <a:lnSpc>
+                <a:spcPct val="140000"/>
+              </a:lnSpc>
+              <a:buNone/>
+            </a:pPr>
+            <a:endParaRPr lang="en-US" sz="1400" dirty="0"/>
+          </a:p>
+          <a:p>
+            <a:pPr indent="0" marL="0">
+              <a:lnSpc>
+                <a:spcPct val="140000"/>
+              </a:lnSpc>
+              <a:buNone/>
+            </a:pPr>
+            <a:r>
+              <a:rPr lang="en-US" sz="1400" dirty="0">
+                <a:solidFill>
+                  <a:srgbClr val="2D3748"/>
+                </a:solidFill>
+              </a:rPr>
+              <a:t>      </a:t>
+            </a:r>
+            <a:endParaRPr lang="en-US" sz="1400" dirty="0"/>
+          </a:p>
+          <a:p>
+            <a:pPr indent="0" marL="0">
+              <a:lnSpc>
+                <a:spcPct val="140000"/>
+              </a:lnSpc>
+              <a:buNone/>
+            </a:pPr>
+            <a:r>
+              <a:rPr lang="en-US" sz="1400" dirty="0">
+                <a:solidFill>
+                  <a:srgbClr val="2D3748"/>
+                </a:solidFill>
+              </a:rPr>
+              <a:t>🌱</a:t>
+            </a:r>
+            <a:endParaRPr lang="en-US" sz="1400" dirty="0"/>
+          </a:p>
+          <a:p>
+            <a:pPr indent="0" marL="0">
+              <a:lnSpc>
+                <a:spcPct val="140000"/>
+              </a:lnSpc>
+              <a:buNone/>
+            </a:pPr>
+            <a:endParaRPr lang="en-US" sz="1400" dirty="0"/>
+          </a:p>
+          <a:p>
+            <a:pPr indent="0" marL="0">
+              <a:lnSpc>
+                <a:spcPct val="140000"/>
+              </a:lnSpc>
+              <a:buNone/>
+            </a:pPr>
+            <a:r>
+              <a:rPr lang="en-US" sz="1400" dirty="0">
+                <a:solidFill>
+                  <a:srgbClr val="2D3748"/>
+                </a:solidFill>
+              </a:rPr>
+              <a:t>      </a:t>
+            </a:r>
+            <a:endParaRPr lang="en-US" sz="1400" dirty="0"/>
+          </a:p>
+          <a:p>
+            <a:pPr indent="0" marL="0">
+              <a:lnSpc>
+                <a:spcPct val="140000"/>
+              </a:lnSpc>
+              <a:buNone/>
+            </a:pPr>
+            <a:r>
+              <a:rPr lang="en-US" sz="1400" dirty="0">
+                <a:solidFill>
+                  <a:srgbClr val="2D3748"/>
+                </a:solidFill>
+              </a:rPr>
+              <a:t>Could 3件</a:t>
+            </a:r>
+            <a:endParaRPr lang="en-US" sz="1400" dirty="0"/>
+          </a:p>
+          <a:p>
+            <a:pPr indent="0" marL="0">
+              <a:lnSpc>
+                <a:spcPct val="140000"/>
+              </a:lnSpc>
+              <a:buNone/>
+            </a:pPr>
+            <a:endParaRPr lang="en-US" sz="1400" dirty="0"/>
+          </a:p>
+          <a:p>
+            <a:pPr indent="0" marL="0">
+              <a:lnSpc>
+                <a:spcPct val="140000"/>
+              </a:lnSpc>
+              <a:buNone/>
+            </a:pPr>
+            <a:r>
+              <a:rPr lang="en-US" sz="1400" dirty="0">
+                <a:solidFill>
+                  <a:srgbClr val="2D3748"/>
+                </a:solidFill>
+              </a:rPr>
+              <a:t>      </a:t>
+            </a:r>
+            <a:endParaRPr lang="en-US" sz="1400" dirty="0"/>
+          </a:p>
+          <a:p>
+            <a:pPr indent="0" marL="0">
+              <a:lnSpc>
+                <a:spcPct val="140000"/>
+              </a:lnSpc>
+              <a:buNone/>
+            </a:pPr>
+            <a:r>
+              <a:rPr lang="en-US" sz="1400" dirty="0">
+                <a:solidFill>
+                  <a:srgbClr val="2D3748"/>
+                </a:solidFill>
+              </a:rPr>
+              <a:t>外部連携 / エクスポート / 編集再生成</a:t>
+            </a:r>
+            <a:endParaRPr lang="en-US" sz="1400" dirty="0"/>
           </a:p>
         </p:txBody>
       </p:sp>
@@ -9773,7 +11895,7 @@
                   <a:srgbClr val="2D3748"/>
                 </a:solidFill>
               </a:rPr>
-              <a:t>📋 Must機能の中核</a:t>
+              <a:t>📋 Must機能の中核価値</a:t>
             </a:r>
             <a:endParaRPr lang="en-US" sz="2800" dirty="0"/>
           </a:p>
@@ -9856,7 +11978,7 @@
                   <a:srgbClr val="2D3748"/>
                 </a:solidFill>
               </a:rPr>
-              <a:t>🎙️ 会議サマリー自動生成</a:t>
+              <a:t>🎙️ 音声入力サマリー</a:t>
             </a:r>
             <a:endParaRPr lang="en-US" sz="1300" dirty="0"/>
           </a:p>
@@ -9892,7 +12014,7 @@
                   <a:srgbClr val="4A5568"/>
                 </a:solidFill>
               </a:rPr>
-              <a:t>要点・決定事項・論点・次アクションを標準出力</a:t>
+              <a:t>要点・決定事項・論点・次アクションを自動生成</a:t>
             </a:r>
             <a:endParaRPr lang="en-US" sz="1000" dirty="0"/>
           </a:p>
@@ -9975,7 +12097,7 @@
                   <a:srgbClr val="2D3748"/>
                 </a:solidFill>
               </a:rPr>
-              <a:t>🧠 RAG統合</a:t>
+              <a:t>🚀 発足資料自動生成</a:t>
             </a:r>
             <a:endParaRPr lang="en-US" sz="1300" dirty="0"/>
           </a:p>
@@ -10011,7 +12133,7 @@
                   <a:srgbClr val="4A5568"/>
                 </a:solidFill>
               </a:rPr>
-              <a:t>複数回会議を横断し整合的な文脈を保持</a:t>
+              <a:t>キックオフ資料・機能提案書をテンプレート準拠で出力</a:t>
             </a:r>
             <a:endParaRPr lang="en-US" sz="1000" dirty="0"/>
           </a:p>
@@ -10094,7 +12216,7 @@
                   <a:srgbClr val="2D3748"/>
                 </a:solidFill>
               </a:rPr>
-              <a:t>📄 発足資料自動生成</a:t>
+              <a:t>🧠 RAG導入</a:t>
             </a:r>
             <a:endParaRPr lang="en-US" sz="1300" dirty="0"/>
           </a:p>
@@ -10130,7 +12252,7 @@
                   <a:srgbClr val="4A5568"/>
                 </a:solidFill>
               </a:rPr>
-              <a:t>キックオフ資料と機能提案書をテンプレート準拠で生成</a:t>
+              <a:t>複数会議サマリーを検索・参照しながら統合要約</a:t>
             </a:r>
             <a:endParaRPr lang="en-US" sz="1000" dirty="0"/>
           </a:p>
@@ -10213,7 +12335,7 @@
                   <a:srgbClr val="2D3748"/>
                 </a:solidFill>
               </a:rPr>
-              <a:t>💾 ローカル録音バックアップ</a:t>
+              <a:t>🛡️ ローカル録音</a:t>
             </a:r>
             <a:endParaRPr lang="en-US" sz="1300" dirty="0"/>
           </a:p>
@@ -10249,245 +12371,7 @@
                   <a:srgbClr val="4A5568"/>
                 </a:solidFill>
               </a:rPr>
-              <a:t>取得失敗時にも録音復元でデータロスを回避</a:t>
-            </a:r>
-            <a:endParaRPr lang="en-US" sz="1000" dirty="0"/>
-          </a:p>
-        </p:txBody>
-      </p:sp>
-      <p:sp>
-        <p:nvSpPr>
-          <p:cNvPr id="19" name="Shape 17"/>
-          <p:cNvSpPr/>
-          <p:nvPr/>
-        </p:nvSpPr>
-        <p:spPr>
-          <a:xfrm>
-            <a:off x="4306824" y="2834640"/>
-            <a:ext cx="3575304" cy="1463040"/>
-          </a:xfrm>
-          <a:prstGeom prst="roundRect">
-            <a:avLst>
-              <a:gd name="adj" fmla="val 6250"/>
-            </a:avLst>
-          </a:prstGeom>
-          <a:solidFill>
-            <a:srgbClr val="F7FAFC"/>
-          </a:solidFill>
-          <a:ln w="12700">
-            <a:solidFill>
-              <a:srgbClr val="764BA2"/>
-            </a:solidFill>
-            <a:prstDash val="solid"/>
-          </a:ln>
-        </p:spPr>
-      </p:sp>
-      <p:sp>
-        <p:nvSpPr>
-          <p:cNvPr id="20" name="Shape 18"/>
-          <p:cNvSpPr/>
-          <p:nvPr/>
-        </p:nvSpPr>
-        <p:spPr>
-          <a:xfrm>
-            <a:off x="4306824" y="2834640"/>
-            <a:ext cx="54864" cy="1463040"/>
-          </a:xfrm>
-          <a:prstGeom prst="rect">
-            <a:avLst/>
-          </a:prstGeom>
-          <a:solidFill>
-            <a:srgbClr val="764BA2"/>
-          </a:solidFill>
-          <a:ln/>
-        </p:spPr>
-      </p:sp>
-      <p:sp>
-        <p:nvSpPr>
-          <p:cNvPr id="21" name="Text 19"/>
-          <p:cNvSpPr/>
-          <p:nvPr/>
-        </p:nvSpPr>
-        <p:spPr>
-          <a:xfrm>
-            <a:off x="4443984" y="2926080"/>
-            <a:ext cx="3300984" cy="365760"/>
-          </a:xfrm>
-          <a:prstGeom prst="rect">
-            <a:avLst/>
-          </a:prstGeom>
-          <a:noFill/>
-          <a:ln/>
-        </p:spPr>
-        <p:txBody>
-          <a:bodyPr wrap="square" rtlCol="0" anchor="t"/>
-          <a:lstStyle/>
-          <a:p>
-            <a:pPr indent="0" marL="0">
-              <a:buNone/>
-            </a:pPr>
-            <a:r>
-              <a:rPr lang="en-US" sz="1300" b="1" dirty="0">
-                <a:solidFill>
-                  <a:srgbClr val="2D3748"/>
-                </a:solidFill>
-              </a:rPr>
-              <a:t>🧩 サマリー統合</a:t>
-            </a:r>
-            <a:endParaRPr lang="en-US" sz="1300" dirty="0"/>
-          </a:p>
-        </p:txBody>
-      </p:sp>
-      <p:sp>
-        <p:nvSpPr>
-          <p:cNvPr id="22" name="Text 20"/>
-          <p:cNvSpPr/>
-          <p:nvPr/>
-        </p:nvSpPr>
-        <p:spPr>
-          <a:xfrm>
-            <a:off x="4443984" y="3291840"/>
-            <a:ext cx="3300984" cy="914400"/>
-          </a:xfrm>
-          <a:prstGeom prst="rect">
-            <a:avLst/>
-          </a:prstGeom>
-          <a:noFill/>
-          <a:ln/>
-        </p:spPr>
-        <p:txBody>
-          <a:bodyPr wrap="square" rtlCol="0" anchor="t"/>
-          <a:lstStyle/>
-          <a:p>
-            <a:pPr indent="0" marL="0">
-              <a:buNone/>
-            </a:pPr>
-            <a:r>
-              <a:rPr lang="en-US" sz="1000" dirty="0">
-                <a:solidFill>
-                  <a:srgbClr val="4A5568"/>
-                </a:solidFill>
-              </a:rPr>
-              <a:t>定例会やフェーズ横断の記録を一文書化</a:t>
-            </a:r>
-            <a:endParaRPr lang="en-US" sz="1000" dirty="0"/>
-          </a:p>
-        </p:txBody>
-      </p:sp>
-      <p:sp>
-        <p:nvSpPr>
-          <p:cNvPr id="23" name="Shape 21"/>
-          <p:cNvSpPr/>
-          <p:nvPr/>
-        </p:nvSpPr>
-        <p:spPr>
-          <a:xfrm>
-            <a:off x="8156448" y="2834640"/>
-            <a:ext cx="3575304" cy="1463040"/>
-          </a:xfrm>
-          <a:prstGeom prst="roundRect">
-            <a:avLst>
-              <a:gd name="adj" fmla="val 6250"/>
-            </a:avLst>
-          </a:prstGeom>
-          <a:solidFill>
-            <a:srgbClr val="F7FAFC"/>
-          </a:solidFill>
-          <a:ln w="12700">
-            <a:solidFill>
-              <a:srgbClr val="38A169"/>
-            </a:solidFill>
-            <a:prstDash val="solid"/>
-          </a:ln>
-        </p:spPr>
-      </p:sp>
-      <p:sp>
-        <p:nvSpPr>
-          <p:cNvPr id="24" name="Shape 22"/>
-          <p:cNvSpPr/>
-          <p:nvPr/>
-        </p:nvSpPr>
-        <p:spPr>
-          <a:xfrm>
-            <a:off x="8156448" y="2834640"/>
-            <a:ext cx="54864" cy="1463040"/>
-          </a:xfrm>
-          <a:prstGeom prst="rect">
-            <a:avLst/>
-          </a:prstGeom>
-          <a:solidFill>
-            <a:srgbClr val="38A169"/>
-          </a:solidFill>
-          <a:ln/>
-        </p:spPr>
-      </p:sp>
-      <p:sp>
-        <p:nvSpPr>
-          <p:cNvPr id="25" name="Text 23"/>
-          <p:cNvSpPr/>
-          <p:nvPr/>
-        </p:nvSpPr>
-        <p:spPr>
-          <a:xfrm>
-            <a:off x="8293608" y="2926080"/>
-            <a:ext cx="3300984" cy="365760"/>
-          </a:xfrm>
-          <a:prstGeom prst="rect">
-            <a:avLst/>
-          </a:prstGeom>
-          <a:noFill/>
-          <a:ln/>
-        </p:spPr>
-        <p:txBody>
-          <a:bodyPr wrap="square" rtlCol="0" anchor="t"/>
-          <a:lstStyle/>
-          <a:p>
-            <a:pPr indent="0" marL="0">
-              <a:buNone/>
-            </a:pPr>
-            <a:r>
-              <a:rPr lang="en-US" sz="1300" b="1" dirty="0">
-                <a:solidFill>
-                  <a:srgbClr val="2D3748"/>
-                </a:solidFill>
-              </a:rPr>
-              <a:t>👥 主対象</a:t>
-            </a:r>
-            <a:endParaRPr lang="en-US" sz="1300" dirty="0"/>
-          </a:p>
-        </p:txBody>
-      </p:sp>
-      <p:sp>
-        <p:nvSpPr>
-          <p:cNvPr id="26" name="Text 24"/>
-          <p:cNvSpPr/>
-          <p:nvPr/>
-        </p:nvSpPr>
-        <p:spPr>
-          <a:xfrm>
-            <a:off x="8293608" y="3291840"/>
-            <a:ext cx="3300984" cy="914400"/>
-          </a:xfrm>
-          <a:prstGeom prst="rect">
-            <a:avLst/>
-          </a:prstGeom>
-          <a:noFill/>
-          <a:ln/>
-        </p:spPr>
-        <p:txBody>
-          <a:bodyPr wrap="square" rtlCol="0" anchor="t"/>
-          <a:lstStyle/>
-          <a:p>
-            <a:pPr indent="0" marL="0">
-              <a:buNone/>
-            </a:pPr>
-            <a:r>
-              <a:rPr lang="en-US" sz="1000" dirty="0">
-                <a:solidFill>
-                  <a:srgbClr val="4A5568"/>
-                </a:solidFill>
-              </a:rPr>
-              <a:t>参加者・PM・PMO・ナレッジ管理者</a:t>
+              <a:t>音声取得失敗時も復元可能なバックアップを全会議で確保</a:t>
             </a:r>
             <a:endParaRPr lang="en-US" sz="1000" dirty="0"/>
           </a:p>
@@ -10548,7 +12432,7 @@
                   <a:srgbClr val="2D3748"/>
                 </a:solidFill>
               </a:rPr>
-              <a:t>🏗️ 期待アーキテクチャ</a:t>
+              <a:t>🏗️ 想定アーキテクチャ</a:t>
             </a:r>
             <a:endParaRPr lang="en-US" sz="2800" dirty="0"/>
           </a:p>
@@ -10631,7 +12515,7 @@
                   <a:srgbClr val="2D3748"/>
                 </a:solidFill>
               </a:rPr>
-              <a:t>🎙️ 会議参加者</a:t>
+              <a:t>👥 会議参加者</a:t>
             </a:r>
             <a:endParaRPr lang="en-US" sz="1300" dirty="0"/>
           </a:p>
@@ -10714,7 +12598,7 @@
                   <a:srgbClr val="2D3748"/>
                 </a:solidFill>
               </a:rPr>
-              <a:t>🖥️ 管理UI</a:t>
+              <a:t>🎤 マイク/録音端末</a:t>
             </a:r>
             <a:endParaRPr lang="en-US" sz="1300" dirty="0"/>
           </a:p>
@@ -10963,7 +12847,7 @@
                   <a:srgbClr val="2D3748"/>
                 </a:solidFill>
               </a:rPr>
-              <a:t>💾 ローカル録音</a:t>
+              <a:t>💾 ローカル録音バックアップ</a:t>
             </a:r>
             <a:endParaRPr lang="en-US" sz="1300" dirty="0"/>
           </a:p>
@@ -11046,7 +12930,7 @@
                   <a:srgbClr val="2D3748"/>
                 </a:solidFill>
               </a:rPr>
-              <a:t>🧠 要約生成</a:t>
+              <a:t>🤖 サマリー生成エンジン</a:t>
             </a:r>
             <a:endParaRPr lang="en-US" sz="1300" dirty="0"/>
           </a:p>

--- a/documents/doc-3-feature_proposal.pptx
+++ b/documents/doc-3-feature_proposal.pptx
@@ -23,10 +23,9 @@
     <p:sldId id="271" r:id="rId17"/>
     <p:sldId id="272" r:id="rId18"/>
     <p:sldId id="273" r:id="rId19"/>
-    <p:sldId id="274" r:id="rId20"/>
   </p:sldIdLst>
   <p:notesMasterIdLst>
-    <p:notesMasterId r:id="rId21"/>
+    <p:notesMasterId r:id="rId20"/>
   </p:notesMasterIdLst>
   <p:sldSz cx="12192000" cy="6858000"/>
   <p:notesSz cx="6858000" cy="12192000"/>
@@ -1336,94 +1335,6 @@
             <a:fld id="{F7021451-1387-4CA6-816F-3879F97B5CBC}" type="slidenum">
               <a:rPr lang="en-US"/>
               <a:t>18</a:t>
-            </a:fld>
-            <a:endParaRPr lang="en-US"/>
-          </a:p>
-        </p:txBody>
-      </p:sp>
-    </p:spTree>
-    <p:extLst>
-      <p:ext uri="{BB962C8B-B14F-4D97-AF65-F5344CB8AC3E}">
-        <p14:creationId xmlns:p14="http://schemas.microsoft.com/office/powerpoint/2010/main" val="1024086991"/>
-      </p:ext>
-    </p:extLst>
-  </p:cSld>
-  <p:clrMapOvr>
-    <a:masterClrMapping/>
-  </p:clrMapOvr>
-</p:notes>
-</file>
-
-<file path=ppt/notesSlides/notesSlide19.xml><?xml version="1.0" encoding="utf-8"?>
-<p:notes xmlns:a="http://schemas.openxmlformats.org/drawingml/2006/main" xmlns:r="http://schemas.openxmlformats.org/officeDocument/2006/relationships" xmlns:p="http://schemas.openxmlformats.org/presentationml/2006/main">
-  <p:cSld>
-    <p:spTree>
-      <p:nvGrpSpPr>
-        <p:cNvPr id="1" name=""/>
-        <p:cNvGrpSpPr/>
-        <p:nvPr/>
-      </p:nvGrpSpPr>
-      <p:grpSpPr>
-        <a:xfrm>
-          <a:off x="0" y="0"/>
-          <a:ext cx="0" cy="0"/>
-          <a:chOff x="0" y="0"/>
-          <a:chExt cx="0" cy="0"/>
-        </a:xfrm>
-      </p:grpSpPr>
-      <p:sp>
-        <p:nvSpPr>
-          <p:cNvPr id="2" name="Slide Image Placeholder 1"/>
-          <p:cNvSpPr>
-            <a:spLocks noGrp="1" noRot="1" noChangeAspect="1"/>
-          </p:cNvSpPr>
-          <p:nvPr>
-            <p:ph type="sldImg"/>
-          </p:nvPr>
-        </p:nvSpPr>
-        <p:spPr/>
-      </p:sp>
-      <p:sp>
-        <p:nvSpPr>
-          <p:cNvPr id="3" name="Notes Placeholder 2"/>
-          <p:cNvSpPr>
-            <a:spLocks noGrp="1"/>
-          </p:cNvSpPr>
-          <p:nvPr>
-            <p:ph type="body" idx="1"/>
-          </p:nvPr>
-        </p:nvSpPr>
-        <p:spPr/>
-        <p:txBody>
-          <a:bodyPr/>
-          <a:lstStyle/>
-          <a:p>
-            <a:r>
-              <a:rPr lang="en-US" dirty="0"/>
-              <a:t/>
-            </a:r>
-            <a:endParaRPr lang="en-US" dirty="0"/>
-          </a:p>
-        </p:txBody>
-      </p:sp>
-      <p:sp>
-        <p:nvSpPr>
-          <p:cNvPr id="4" name="Slide Number Placeholder 3"/>
-          <p:cNvSpPr>
-            <a:spLocks noGrp="1"/>
-          </p:cNvSpPr>
-          <p:nvPr>
-            <p:ph type="sldNum" sz="quarter" idx="10"/>
-          </p:nvPr>
-        </p:nvSpPr>
-        <p:spPr/>
-        <p:txBody>
-          <a:bodyPr/>
-          <a:lstStyle/>
-          <a:p>
-            <a:fld id="{F7021451-1387-4CA6-816F-3879F97B5CBC}" type="slidenum">
-              <a:rPr lang="en-US"/>
-              <a:t>19</a:t>
             </a:fld>
             <a:endParaRPr lang="en-US"/>
           </a:p>
@@ -2576,7 +2487,7 @@
                   <a:srgbClr val="FFFFFF"/>
                 </a:solidFill>
               </a:rPr>
-              <a:t>会議サマリー自動化機能提案</a:t>
+              <a:t>会議サマリー自動生成機能 提案</a:t>
             </a:r>
             <a:endParaRPr lang="en-US" sz="3600" dirty="0"/>
           </a:p>
@@ -2612,7 +2523,7 @@
                   <a:srgbClr val="CCCCCC"/>
                 </a:solidFill>
               </a:rPr>
-              <a:t>音声入力・RAG統合・資料自動生成を核にしたMVP構想</a:t>
+              <a:t>音声入力・RAG・資料自動生成で会議から成果物までを一気通貫化</a:t>
             </a:r>
             <a:endParaRPr lang="en-US" sz="1800" dirty="0"/>
           </a:p>
@@ -2846,7 +2757,7 @@
                   <a:srgbClr val="FFFFFF"/>
                 </a:solidFill>
               </a:rPr>
-              <a:t>3. 品質・成立条件</a:t>
+              <a:t>品質・受け入れ基準</a:t>
             </a:r>
             <a:endParaRPr lang="en-US" sz="2800" dirty="0"/>
           </a:p>
@@ -2885,7 +2796,7 @@
                   <a:srgbClr val="FFFFFF"/>
                 </a:solidFill>
               </a:rPr>
-              <a:t>受け入れ基準・依存関係・リスクを可視化</a:t>
+              <a:t>MVPの成立条件を数値で定義し、判断基準を明確化する</a:t>
             </a:r>
             <a:endParaRPr lang="en-US" sz="1400" dirty="0"/>
           </a:p>
@@ -2946,7 +2857,7 @@
                   <a:srgbClr val="2D3748"/>
                 </a:solidFill>
               </a:rPr>
-              <a:t>📊 受け入れ基準KPI</a:t>
+              <a:t>📊 主要KPI / 受け入れ基準</a:t>
             </a:r>
             <a:endParaRPr lang="en-US" sz="2800" dirty="0"/>
           </a:p>
@@ -2954,14 +2865,61 @@
       </p:sp>
       <p:sp>
         <p:nvSpPr>
-          <p:cNvPr id="3" name="Text 1"/>
-          <p:cNvSpPr/>
-          <p:nvPr/>
-        </p:nvSpPr>
-        <p:spPr>
-          <a:xfrm>
-            <a:off x="731520" y="1188720"/>
-            <a:ext cx="10725912" cy="3383280"/>
+          <p:cNvPr id="3" name="Shape 1"/>
+          <p:cNvSpPr/>
+          <p:nvPr/>
+        </p:nvSpPr>
+        <p:spPr>
+          <a:xfrm>
+            <a:off x="457200" y="1188720"/>
+            <a:ext cx="5500116" cy="1463040"/>
+          </a:xfrm>
+          <a:prstGeom prst="roundRect">
+            <a:avLst>
+              <a:gd name="adj" fmla="val 6250"/>
+            </a:avLst>
+          </a:prstGeom>
+          <a:solidFill>
+            <a:srgbClr val="F7FAFC"/>
+          </a:solidFill>
+          <a:ln w="12700">
+            <a:solidFill>
+              <a:srgbClr val="667EEA"/>
+            </a:solidFill>
+            <a:prstDash val="solid"/>
+          </a:ln>
+        </p:spPr>
+      </p:sp>
+      <p:sp>
+        <p:nvSpPr>
+          <p:cNvPr id="4" name="Shape 2"/>
+          <p:cNvSpPr/>
+          <p:nvPr/>
+        </p:nvSpPr>
+        <p:spPr>
+          <a:xfrm>
+            <a:off x="457200" y="1188720"/>
+            <a:ext cx="54864" cy="1463040"/>
+          </a:xfrm>
+          <a:prstGeom prst="rect">
+            <a:avLst/>
+          </a:prstGeom>
+          <a:solidFill>
+            <a:srgbClr val="667EEA"/>
+          </a:solidFill>
+          <a:ln/>
+        </p:spPr>
+      </p:sp>
+      <p:sp>
+        <p:nvSpPr>
+          <p:cNvPr id="5" name="Text 3"/>
+          <p:cNvSpPr/>
+          <p:nvPr/>
+        </p:nvSpPr>
+        <p:spPr>
+          <a:xfrm>
+            <a:off x="594360" y="1280160"/>
+            <a:ext cx="5225796" cy="365760"/>
           </a:xfrm>
           <a:prstGeom prst="rect">
             <a:avLst/>
@@ -2974,1169 +2932,100 @@
           <a:lstStyle/>
           <a:p>
             <a:pPr indent="0" marL="0">
-              <a:lnSpc>
-                <a:spcPct val="140000"/>
-              </a:lnSpc>
-              <a:buNone/>
-            </a:pPr>
-            <a:r>
-              <a:rPr lang="en-US" sz="1400" dirty="0">
-                <a:solidFill>
-                  <a:srgbClr val="2D3748"/>
-                </a:solidFill>
-              </a:rPr>
-              <a:t>≤1分</a:t>
-            </a:r>
-            <a:endParaRPr lang="en-US" sz="1400" dirty="0"/>
-          </a:p>
-          <a:p>
-            <a:pPr indent="0" marL="0">
-              <a:lnSpc>
-                <a:spcPct val="140000"/>
-              </a:lnSpc>
-              <a:buNone/>
-            </a:pPr>
-            <a:endParaRPr lang="en-US" sz="1400" dirty="0"/>
-          </a:p>
-          <a:p>
-            <a:pPr indent="0" marL="0">
-              <a:lnSpc>
-                <a:spcPct val="140000"/>
-              </a:lnSpc>
-              <a:buNone/>
-            </a:pPr>
-            <a:r>
-              <a:rPr lang="en-US" sz="1400" dirty="0">
-                <a:solidFill>
-                  <a:srgbClr val="2D3748"/>
-                </a:solidFill>
-              </a:rPr>
-              <a:t>      </a:t>
-            </a:r>
-            <a:endParaRPr lang="en-US" sz="1400" dirty="0"/>
-          </a:p>
-          <a:p>
-            <a:pPr indent="0" marL="0">
-              <a:lnSpc>
-                <a:spcPct val="140000"/>
-              </a:lnSpc>
-              <a:buNone/>
-            </a:pPr>
-            <a:endParaRPr lang="en-US" sz="1400" dirty="0"/>
-          </a:p>
-          <a:p>
-            <a:pPr indent="0" marL="0">
-              <a:lnSpc>
-                <a:spcPct val="140000"/>
-              </a:lnSpc>
-              <a:buNone/>
-            </a:pPr>
-            <a:r>
-              <a:rPr lang="en-US" sz="1400" dirty="0">
-                <a:solidFill>
-                  <a:srgbClr val="2D3748"/>
-                </a:solidFill>
-              </a:rPr>
-              <a:t>      </a:t>
-            </a:r>
-            <a:endParaRPr lang="en-US" sz="1400" dirty="0"/>
-          </a:p>
-          <a:p>
-            <a:pPr indent="0" marL="0">
-              <a:lnSpc>
-                <a:spcPct val="140000"/>
-              </a:lnSpc>
-              <a:buNone/>
-            </a:pPr>
-            <a:r>
-              <a:rPr lang="en-US" sz="1400" dirty="0">
-                <a:solidFill>
-                  <a:srgbClr val="2D3748"/>
-                </a:solidFill>
-              </a:rPr>
-              <a:t>サマリー生成速度</a:t>
-            </a:r>
-            <a:endParaRPr lang="en-US" sz="1400" dirty="0"/>
-          </a:p>
-          <a:p>
-            <a:pPr indent="0" marL="0">
-              <a:lnSpc>
-                <a:spcPct val="140000"/>
-              </a:lnSpc>
-              <a:buNone/>
-            </a:pPr>
-            <a:endParaRPr lang="en-US" sz="1400" dirty="0"/>
-          </a:p>
-          <a:p>
-            <a:pPr indent="0" marL="0">
-              <a:lnSpc>
-                <a:spcPct val="140000"/>
-              </a:lnSpc>
-              <a:buNone/>
-            </a:pPr>
-            <a:r>
-              <a:rPr lang="en-US" sz="1400" dirty="0">
-                <a:solidFill>
-                  <a:srgbClr val="2D3748"/>
-                </a:solidFill>
-              </a:rPr>
-              <a:t>    </a:t>
-            </a:r>
-            <a:endParaRPr lang="en-US" sz="1400" dirty="0"/>
-          </a:p>
-          <a:p>
-            <a:pPr indent="0" marL="0">
-              <a:lnSpc>
-                <a:spcPct val="140000"/>
-              </a:lnSpc>
-              <a:buNone/>
-            </a:pPr>
-            <a:endParaRPr lang="en-US" sz="1400" dirty="0"/>
-          </a:p>
-          <a:p>
-            <a:pPr indent="0" marL="0">
-              <a:lnSpc>
-                <a:spcPct val="140000"/>
-              </a:lnSpc>
-              <a:buNone/>
-            </a:pPr>
-            <a:r>
-              <a:rPr lang="en-US" sz="1400" dirty="0">
-                <a:solidFill>
-                  <a:srgbClr val="2D3748"/>
-                </a:solidFill>
-              </a:rPr>
-              <a:t>    </a:t>
-            </a:r>
-            <a:endParaRPr lang="en-US" sz="1400" dirty="0"/>
-          </a:p>
-          <a:p>
-            <a:pPr indent="0" marL="0">
-              <a:lnSpc>
-                <a:spcPct val="140000"/>
-              </a:lnSpc>
-              <a:buNone/>
-            </a:pPr>
-            <a:endParaRPr lang="en-US" sz="1400" dirty="0"/>
-          </a:p>
-          <a:p>
-            <a:pPr indent="0" marL="0">
-              <a:lnSpc>
-                <a:spcPct val="140000"/>
-              </a:lnSpc>
-              <a:buNone/>
-            </a:pPr>
-            <a:r>
-              <a:rPr lang="en-US" sz="1400" dirty="0">
-                <a:solidFill>
-                  <a:srgbClr val="2D3748"/>
-                </a:solidFill>
-              </a:rPr>
-              <a:t>      </a:t>
-            </a:r>
-            <a:endParaRPr lang="en-US" sz="1400" dirty="0"/>
-          </a:p>
-          <a:p>
-            <a:pPr indent="0" marL="0">
-              <a:lnSpc>
-                <a:spcPct val="140000"/>
-              </a:lnSpc>
-              <a:buNone/>
-            </a:pPr>
-            <a:endParaRPr lang="en-US" sz="1400" dirty="0"/>
-          </a:p>
-          <a:p>
-            <a:pPr indent="0" marL="0">
-              <a:lnSpc>
-                <a:spcPct val="140000"/>
-              </a:lnSpc>
-              <a:buNone/>
-            </a:pPr>
-            <a:r>
-              <a:rPr lang="en-US" sz="1400" dirty="0">
-                <a:solidFill>
-                  <a:srgbClr val="2D3748"/>
-                </a:solidFill>
-              </a:rPr>
-              <a:t>        </a:t>
-            </a:r>
-            <a:endParaRPr lang="en-US" sz="1400" dirty="0"/>
-          </a:p>
-          <a:p>
-            <a:pPr indent="0" marL="0">
-              <a:lnSpc>
-                <a:spcPct val="140000"/>
-              </a:lnSpc>
-              <a:buNone/>
-            </a:pPr>
-            <a:r>
-              <a:rPr lang="en-US" sz="1400" dirty="0">
-                <a:solidFill>
-                  <a:srgbClr val="2D3748"/>
-                </a:solidFill>
-              </a:rPr>
-              <a:t>90%+</a:t>
-            </a:r>
-            <a:endParaRPr lang="en-US" sz="1400" dirty="0"/>
-          </a:p>
-          <a:p>
-            <a:pPr indent="0" marL="0">
-              <a:lnSpc>
-                <a:spcPct val="140000"/>
-              </a:lnSpc>
-              <a:buNone/>
-            </a:pPr>
-            <a:endParaRPr lang="en-US" sz="1400" dirty="0"/>
-          </a:p>
-          <a:p>
-            <a:pPr indent="0" marL="0">
-              <a:lnSpc>
-                <a:spcPct val="140000"/>
-              </a:lnSpc>
-              <a:buNone/>
-            </a:pPr>
-            <a:r>
-              <a:rPr lang="en-US" sz="1400" dirty="0">
-                <a:solidFill>
-                  <a:srgbClr val="2D3748"/>
-                </a:solidFill>
-              </a:rPr>
-              <a:t>      </a:t>
-            </a:r>
-            <a:endParaRPr lang="en-US" sz="1400" dirty="0"/>
-          </a:p>
-          <a:p>
-            <a:pPr indent="0" marL="0">
-              <a:lnSpc>
-                <a:spcPct val="140000"/>
-              </a:lnSpc>
-              <a:buNone/>
-            </a:pPr>
-            <a:endParaRPr lang="en-US" sz="1400" dirty="0"/>
-          </a:p>
-          <a:p>
-            <a:pPr indent="0" marL="0">
-              <a:lnSpc>
-                <a:spcPct val="140000"/>
-              </a:lnSpc>
-              <a:buNone/>
-            </a:pPr>
-            <a:r>
-              <a:rPr lang="en-US" sz="1400" dirty="0">
-                <a:solidFill>
-                  <a:srgbClr val="2D3748"/>
-                </a:solidFill>
-              </a:rPr>
-              <a:t>      </a:t>
-            </a:r>
-            <a:endParaRPr lang="en-US" sz="1400" dirty="0"/>
-          </a:p>
-          <a:p>
-            <a:pPr indent="0" marL="0">
-              <a:lnSpc>
-                <a:spcPct val="140000"/>
-              </a:lnSpc>
-              <a:buNone/>
-            </a:pPr>
-            <a:r>
-              <a:rPr lang="en-US" sz="1400" dirty="0">
-                <a:solidFill>
-                  <a:srgbClr val="2D3748"/>
-                </a:solidFill>
-              </a:rPr>
-              <a:t>ライブ字幕精度</a:t>
-            </a:r>
-            <a:endParaRPr lang="en-US" sz="1400" dirty="0"/>
-          </a:p>
-          <a:p>
-            <a:pPr indent="0" marL="0">
-              <a:lnSpc>
-                <a:spcPct val="140000"/>
-              </a:lnSpc>
-              <a:buNone/>
-            </a:pPr>
-            <a:endParaRPr lang="en-US" sz="1400" dirty="0"/>
-          </a:p>
-          <a:p>
-            <a:pPr indent="0" marL="0">
-              <a:lnSpc>
-                <a:spcPct val="140000"/>
-              </a:lnSpc>
-              <a:buNone/>
-            </a:pPr>
-            <a:r>
-              <a:rPr lang="en-US" sz="1400" dirty="0">
-                <a:solidFill>
-                  <a:srgbClr val="2D3748"/>
-                </a:solidFill>
-              </a:rPr>
-              <a:t>    </a:t>
-            </a:r>
-            <a:endParaRPr lang="en-US" sz="1400" dirty="0"/>
-          </a:p>
-          <a:p>
-            <a:pPr indent="0" marL="0">
-              <a:lnSpc>
-                <a:spcPct val="140000"/>
-              </a:lnSpc>
-              <a:buNone/>
-            </a:pPr>
-            <a:endParaRPr lang="en-US" sz="1400" dirty="0"/>
-          </a:p>
-          <a:p>
-            <a:pPr indent="0" marL="0">
-              <a:lnSpc>
-                <a:spcPct val="140000"/>
-              </a:lnSpc>
-              <a:buNone/>
-            </a:pPr>
-            <a:r>
-              <a:rPr lang="en-US" sz="1400" dirty="0">
-                <a:solidFill>
-                  <a:srgbClr val="2D3748"/>
-                </a:solidFill>
-              </a:rPr>
-              <a:t>    </a:t>
-            </a:r>
-            <a:endParaRPr lang="en-US" sz="1400" dirty="0"/>
-          </a:p>
-          <a:p>
-            <a:pPr indent="0" marL="0">
-              <a:lnSpc>
-                <a:spcPct val="140000"/>
-              </a:lnSpc>
-              <a:buNone/>
-            </a:pPr>
-            <a:endParaRPr lang="en-US" sz="1400" dirty="0"/>
-          </a:p>
-          <a:p>
-            <a:pPr indent="0" marL="0">
-              <a:lnSpc>
-                <a:spcPct val="140000"/>
-              </a:lnSpc>
-              <a:buNone/>
-            </a:pPr>
-            <a:r>
-              <a:rPr lang="en-US" sz="1400" dirty="0">
-                <a:solidFill>
-                  <a:srgbClr val="2D3748"/>
-                </a:solidFill>
-              </a:rPr>
-              <a:t>      </a:t>
-            </a:r>
-            <a:endParaRPr lang="en-US" sz="1400" dirty="0"/>
-          </a:p>
-          <a:p>
-            <a:pPr indent="0" marL="0">
-              <a:lnSpc>
-                <a:spcPct val="140000"/>
-              </a:lnSpc>
-              <a:buNone/>
-            </a:pPr>
-            <a:endParaRPr lang="en-US" sz="1400" dirty="0"/>
-          </a:p>
-          <a:p>
-            <a:pPr indent="0" marL="0">
-              <a:lnSpc>
-                <a:spcPct val="140000"/>
-              </a:lnSpc>
-              <a:buNone/>
-            </a:pPr>
-            <a:r>
-              <a:rPr lang="en-US" sz="1400" dirty="0">
-                <a:solidFill>
-                  <a:srgbClr val="2D3748"/>
-                </a:solidFill>
-              </a:rPr>
-              <a:t>        </a:t>
-            </a:r>
-            <a:endParaRPr lang="en-US" sz="1400" dirty="0"/>
-          </a:p>
-          <a:p>
-            <a:pPr indent="0" marL="0">
-              <a:lnSpc>
-                <a:spcPct val="140000"/>
-              </a:lnSpc>
-              <a:buNone/>
-            </a:pPr>
-            <a:r>
-              <a:rPr lang="en-US" sz="1400" dirty="0">
-                <a:solidFill>
-                  <a:srgbClr val="2D3748"/>
-                </a:solidFill>
-              </a:rPr>
-              <a:t>3回+</a:t>
-            </a:r>
-            <a:endParaRPr lang="en-US" sz="1400" dirty="0"/>
-          </a:p>
-          <a:p>
-            <a:pPr indent="0" marL="0">
-              <a:lnSpc>
-                <a:spcPct val="140000"/>
-              </a:lnSpc>
-              <a:buNone/>
-            </a:pPr>
-            <a:endParaRPr lang="en-US" sz="1400" dirty="0"/>
-          </a:p>
-          <a:p>
-            <a:pPr indent="0" marL="0">
-              <a:lnSpc>
-                <a:spcPct val="140000"/>
-              </a:lnSpc>
-              <a:buNone/>
-            </a:pPr>
-            <a:r>
-              <a:rPr lang="en-US" sz="1400" dirty="0">
-                <a:solidFill>
-                  <a:srgbClr val="2D3748"/>
-                </a:solidFill>
-              </a:rPr>
-              <a:t>      </a:t>
-            </a:r>
-            <a:endParaRPr lang="en-US" sz="1400" dirty="0"/>
-          </a:p>
-          <a:p>
-            <a:pPr indent="0" marL="0">
-              <a:lnSpc>
-                <a:spcPct val="140000"/>
-              </a:lnSpc>
-              <a:buNone/>
-            </a:pPr>
-            <a:endParaRPr lang="en-US" sz="1400" dirty="0"/>
-          </a:p>
-          <a:p>
-            <a:pPr indent="0" marL="0">
-              <a:lnSpc>
-                <a:spcPct val="140000"/>
-              </a:lnSpc>
-              <a:buNone/>
-            </a:pPr>
-            <a:r>
-              <a:rPr lang="en-US" sz="1400" dirty="0">
-                <a:solidFill>
-                  <a:srgbClr val="2D3748"/>
-                </a:solidFill>
-              </a:rPr>
-              <a:t>      </a:t>
-            </a:r>
-            <a:endParaRPr lang="en-US" sz="1400" dirty="0"/>
-          </a:p>
-          <a:p>
-            <a:pPr indent="0" marL="0">
-              <a:lnSpc>
-                <a:spcPct val="140000"/>
-              </a:lnSpc>
-              <a:buNone/>
-            </a:pPr>
-            <a:r>
-              <a:rPr lang="en-US" sz="1400" dirty="0">
-                <a:solidFill>
-                  <a:srgbClr val="2D3748"/>
-                </a:solidFill>
-              </a:rPr>
-              <a:t>統合対象会議数</a:t>
-            </a:r>
-            <a:endParaRPr lang="en-US" sz="1400" dirty="0"/>
-          </a:p>
-          <a:p>
-            <a:pPr indent="0" marL="0">
-              <a:lnSpc>
-                <a:spcPct val="140000"/>
-              </a:lnSpc>
-              <a:buNone/>
-            </a:pPr>
-            <a:endParaRPr lang="en-US" sz="1400" dirty="0"/>
-          </a:p>
-          <a:p>
-            <a:pPr indent="0" marL="0">
-              <a:lnSpc>
-                <a:spcPct val="140000"/>
-              </a:lnSpc>
-              <a:buNone/>
-            </a:pPr>
-            <a:r>
-              <a:rPr lang="en-US" sz="1400" dirty="0">
-                <a:solidFill>
-                  <a:srgbClr val="2D3748"/>
-                </a:solidFill>
-              </a:rPr>
-              <a:t>    </a:t>
-            </a:r>
-            <a:endParaRPr lang="en-US" sz="1400" dirty="0"/>
-          </a:p>
-          <a:p>
-            <a:pPr indent="0" marL="0">
-              <a:lnSpc>
-                <a:spcPct val="140000"/>
-              </a:lnSpc>
-              <a:buNone/>
-            </a:pPr>
-            <a:endParaRPr lang="en-US" sz="1400" dirty="0"/>
-          </a:p>
-          <a:p>
-            <a:pPr indent="0" marL="0">
-              <a:lnSpc>
-                <a:spcPct val="140000"/>
-              </a:lnSpc>
-              <a:buNone/>
-            </a:pPr>
-            <a:r>
-              <a:rPr lang="en-US" sz="1400" dirty="0">
-                <a:solidFill>
-                  <a:srgbClr val="2D3748"/>
-                </a:solidFill>
-              </a:rPr>
-              <a:t>  </a:t>
-            </a:r>
-            <a:endParaRPr lang="en-US" sz="1400" dirty="0"/>
-          </a:p>
-          <a:p>
-            <a:pPr indent="0" marL="0">
-              <a:lnSpc>
-                <a:spcPct val="140000"/>
-              </a:lnSpc>
-              <a:buNone/>
-            </a:pPr>
-            <a:endParaRPr lang="en-US" sz="1400" dirty="0"/>
-          </a:p>
-          <a:p>
-            <a:pPr indent="0" marL="0">
-              <a:lnSpc>
-                <a:spcPct val="140000"/>
-              </a:lnSpc>
-              <a:buNone/>
-            </a:pPr>
-            <a:r>
-              <a:rPr lang="en-US" sz="1400" dirty="0">
-                <a:solidFill>
-                  <a:srgbClr val="2D3748"/>
-                </a:solidFill>
-              </a:rPr>
-              <a:t>  </a:t>
-            </a:r>
-            <a:endParaRPr lang="en-US" sz="1400" dirty="0"/>
-          </a:p>
-          <a:p>
-            <a:pPr indent="0" marL="0">
-              <a:lnSpc>
-                <a:spcPct val="140000"/>
-              </a:lnSpc>
-              <a:buNone/>
-            </a:pPr>
-            <a:endParaRPr lang="en-US" sz="1400" dirty="0"/>
-          </a:p>
-          <a:p>
-            <a:pPr indent="0" marL="0">
-              <a:lnSpc>
-                <a:spcPct val="140000"/>
-              </a:lnSpc>
-              <a:buNone/>
-            </a:pPr>
-            <a:r>
-              <a:rPr lang="en-US" sz="1400" dirty="0">
-                <a:solidFill>
-                  <a:srgbClr val="2D3748"/>
-                </a:solidFill>
-              </a:rPr>
-              <a:t>    </a:t>
-            </a:r>
-            <a:endParaRPr lang="en-US" sz="1400" dirty="0"/>
-          </a:p>
-          <a:p>
-            <a:pPr indent="0" marL="0">
-              <a:lnSpc>
-                <a:spcPct val="140000"/>
-              </a:lnSpc>
-              <a:buNone/>
-            </a:pPr>
-            <a:endParaRPr lang="en-US" sz="1400" dirty="0"/>
-          </a:p>
-          <a:p>
-            <a:pPr indent="0" marL="0">
-              <a:lnSpc>
-                <a:spcPct val="140000"/>
-              </a:lnSpc>
-              <a:buNone/>
-            </a:pPr>
-            <a:r>
-              <a:rPr lang="en-US" sz="1400" dirty="0">
-                <a:solidFill>
-                  <a:srgbClr val="2D3748"/>
-                </a:solidFill>
-              </a:rPr>
-              <a:t>      </a:t>
-            </a:r>
-            <a:endParaRPr lang="en-US" sz="1400" dirty="0"/>
-          </a:p>
-          <a:p>
-            <a:pPr indent="0" marL="0">
-              <a:lnSpc>
-                <a:spcPct val="140000"/>
-              </a:lnSpc>
-              <a:buNone/>
-            </a:pPr>
-            <a:r>
-              <a:rPr lang="en-US" sz="1400" dirty="0">
-                <a:solidFill>
-                  <a:srgbClr val="2D3748"/>
-                </a:solidFill>
-              </a:rPr>
-              <a:t>テンプレート準拠</a:t>
-            </a:r>
-            <a:endParaRPr lang="en-US" sz="1400" dirty="0"/>
-          </a:p>
-          <a:p>
-            <a:pPr indent="0" marL="0">
-              <a:lnSpc>
-                <a:spcPct val="140000"/>
-              </a:lnSpc>
-              <a:buNone/>
-            </a:pPr>
-            <a:endParaRPr lang="en-US" sz="1400" dirty="0"/>
-          </a:p>
-          <a:p>
-            <a:pPr indent="0" marL="0">
-              <a:lnSpc>
-                <a:spcPct val="140000"/>
-              </a:lnSpc>
-              <a:buNone/>
-            </a:pPr>
-            <a:r>
-              <a:rPr lang="en-US" sz="1400" dirty="0">
-                <a:solidFill>
-                  <a:srgbClr val="2D3748"/>
-                </a:solidFill>
-              </a:rPr>
-              <a:t>      </a:t>
-            </a:r>
-            <a:endParaRPr lang="en-US" sz="1400" dirty="0"/>
-          </a:p>
-          <a:p>
-            <a:pPr indent="0" marL="0">
-              <a:lnSpc>
-                <a:spcPct val="140000"/>
-              </a:lnSpc>
-              <a:buNone/>
-            </a:pPr>
-            <a:endParaRPr lang="en-US" sz="1400" dirty="0"/>
-          </a:p>
-          <a:p>
-            <a:pPr indent="0" marL="0">
-              <a:lnSpc>
-                <a:spcPct val="140000"/>
-              </a:lnSpc>
-              <a:buNone/>
-            </a:pPr>
-            <a:r>
-              <a:rPr lang="en-US" sz="1400" dirty="0">
-                <a:solidFill>
-                  <a:srgbClr val="2D3748"/>
-                </a:solidFill>
-              </a:rPr>
-              <a:t>        </a:t>
-            </a:r>
-            <a:endParaRPr lang="en-US" sz="1400" dirty="0"/>
-          </a:p>
-          <a:p>
-            <a:pPr indent="0" marL="0">
-              <a:lnSpc>
-                <a:spcPct val="140000"/>
-              </a:lnSpc>
-              <a:buNone/>
-            </a:pPr>
-            <a:endParaRPr lang="en-US" sz="1400" dirty="0"/>
-          </a:p>
-          <a:p>
-            <a:pPr indent="0" marL="0">
-              <a:lnSpc>
-                <a:spcPct val="140000"/>
-              </a:lnSpc>
-              <a:buNone/>
-            </a:pPr>
-            <a:r>
-              <a:rPr lang="en-US" sz="1400" dirty="0">
-                <a:solidFill>
-                  <a:srgbClr val="2D3748"/>
-                </a:solidFill>
-              </a:rPr>
-              <a:t>      </a:t>
-            </a:r>
-            <a:endParaRPr lang="en-US" sz="1400" dirty="0"/>
-          </a:p>
-          <a:p>
-            <a:pPr indent="0" marL="0">
-              <a:lnSpc>
-                <a:spcPct val="140000"/>
-              </a:lnSpc>
-              <a:buNone/>
-            </a:pPr>
-            <a:endParaRPr lang="en-US" sz="1400" dirty="0"/>
-          </a:p>
-          <a:p>
-            <a:pPr indent="0" marL="0">
-              <a:lnSpc>
-                <a:spcPct val="140000"/>
-              </a:lnSpc>
-              <a:buNone/>
-            </a:pPr>
-            <a:r>
-              <a:rPr lang="en-US" sz="1400" dirty="0">
-                <a:solidFill>
-                  <a:srgbClr val="2D3748"/>
-                </a:solidFill>
-              </a:rPr>
-              <a:t>      </a:t>
-            </a:r>
-            <a:endParaRPr lang="en-US" sz="1400" dirty="0"/>
-          </a:p>
-          <a:p>
-            <a:pPr indent="0" marL="0">
-              <a:lnSpc>
-                <a:spcPct val="140000"/>
-              </a:lnSpc>
-              <a:buNone/>
-            </a:pPr>
-            <a:r>
-              <a:rPr lang="en-US" sz="1400" dirty="0">
-                <a:solidFill>
-                  <a:srgbClr val="2D3748"/>
-                </a:solidFill>
-              </a:rPr>
-              <a:t>必須</a:t>
-            </a:r>
-            <a:endParaRPr lang="en-US" sz="1400" dirty="0"/>
-          </a:p>
-          <a:p>
-            <a:pPr indent="0" marL="0">
-              <a:lnSpc>
-                <a:spcPct val="140000"/>
-              </a:lnSpc>
-              <a:buNone/>
-            </a:pPr>
-            <a:endParaRPr lang="en-US" sz="1400" dirty="0"/>
-          </a:p>
-          <a:p>
-            <a:pPr indent="0" marL="0">
-              <a:lnSpc>
-                <a:spcPct val="140000"/>
-              </a:lnSpc>
-              <a:buNone/>
-            </a:pPr>
-            <a:r>
-              <a:rPr lang="en-US" sz="1400" dirty="0">
-                <a:solidFill>
-                  <a:srgbClr val="2D3748"/>
-                </a:solidFill>
-              </a:rPr>
-              <a:t>    </a:t>
-            </a:r>
-            <a:endParaRPr lang="en-US" sz="1400" dirty="0"/>
-          </a:p>
-          <a:p>
-            <a:pPr indent="0" marL="0">
-              <a:lnSpc>
-                <a:spcPct val="140000"/>
-              </a:lnSpc>
-              <a:buNone/>
-            </a:pPr>
-            <a:endParaRPr lang="en-US" sz="1400" dirty="0"/>
-          </a:p>
-          <a:p>
-            <a:pPr indent="0" marL="0">
-              <a:lnSpc>
-                <a:spcPct val="140000"/>
-              </a:lnSpc>
-              <a:buNone/>
-            </a:pPr>
-            <a:r>
-              <a:rPr lang="en-US" sz="1400" dirty="0">
-                <a:solidFill>
-                  <a:srgbClr val="2D3748"/>
-                </a:solidFill>
-              </a:rPr>
-              <a:t>    </a:t>
-            </a:r>
-            <a:endParaRPr lang="en-US" sz="1400" dirty="0"/>
-          </a:p>
-          <a:p>
-            <a:pPr indent="0" marL="0">
-              <a:lnSpc>
-                <a:spcPct val="140000"/>
-              </a:lnSpc>
-              <a:buNone/>
-            </a:pPr>
-            <a:endParaRPr lang="en-US" sz="1400" dirty="0"/>
-          </a:p>
-          <a:p>
-            <a:pPr indent="0" marL="0">
-              <a:lnSpc>
-                <a:spcPct val="140000"/>
-              </a:lnSpc>
-              <a:buNone/>
-            </a:pPr>
-            <a:r>
-              <a:rPr lang="en-US" sz="1400" dirty="0">
-                <a:solidFill>
-                  <a:srgbClr val="2D3748"/>
-                </a:solidFill>
-              </a:rPr>
-              <a:t>      </a:t>
-            </a:r>
-            <a:endParaRPr lang="en-US" sz="1400" dirty="0"/>
-          </a:p>
-          <a:p>
-            <a:pPr indent="0" marL="0">
-              <a:lnSpc>
-                <a:spcPct val="140000"/>
-              </a:lnSpc>
-              <a:buNone/>
-            </a:pPr>
-            <a:r>
-              <a:rPr lang="en-US" sz="1400" dirty="0">
-                <a:solidFill>
-                  <a:srgbClr val="2D3748"/>
-                </a:solidFill>
-              </a:rPr>
-              <a:t>ローカル録音作成</a:t>
-            </a:r>
-            <a:endParaRPr lang="en-US" sz="1400" dirty="0"/>
-          </a:p>
-          <a:p>
-            <a:pPr indent="0" marL="0">
-              <a:lnSpc>
-                <a:spcPct val="140000"/>
-              </a:lnSpc>
-              <a:buNone/>
-            </a:pPr>
-            <a:endParaRPr lang="en-US" sz="1400" dirty="0"/>
-          </a:p>
-          <a:p>
-            <a:pPr indent="0" marL="0">
-              <a:lnSpc>
-                <a:spcPct val="140000"/>
-              </a:lnSpc>
-              <a:buNone/>
-            </a:pPr>
-            <a:r>
-              <a:rPr lang="en-US" sz="1400" dirty="0">
-                <a:solidFill>
-                  <a:srgbClr val="2D3748"/>
-                </a:solidFill>
-              </a:rPr>
-              <a:t>      </a:t>
-            </a:r>
-            <a:endParaRPr lang="en-US" sz="1400" dirty="0"/>
-          </a:p>
-          <a:p>
-            <a:pPr indent="0" marL="0">
-              <a:lnSpc>
-                <a:spcPct val="140000"/>
-              </a:lnSpc>
-              <a:buNone/>
-            </a:pPr>
-            <a:endParaRPr lang="en-US" sz="1400" dirty="0"/>
-          </a:p>
-          <a:p>
-            <a:pPr indent="0" marL="0">
-              <a:lnSpc>
-                <a:spcPct val="140000"/>
-              </a:lnSpc>
-              <a:buNone/>
-            </a:pPr>
-            <a:r>
-              <a:rPr lang="en-US" sz="1400" dirty="0">
-                <a:solidFill>
-                  <a:srgbClr val="2D3748"/>
-                </a:solidFill>
-              </a:rPr>
-              <a:t>        </a:t>
-            </a:r>
-            <a:endParaRPr lang="en-US" sz="1400" dirty="0"/>
-          </a:p>
-          <a:p>
-            <a:pPr indent="0" marL="0">
-              <a:lnSpc>
-                <a:spcPct val="140000"/>
-              </a:lnSpc>
-              <a:buNone/>
-            </a:pPr>
-            <a:endParaRPr lang="en-US" sz="1400" dirty="0"/>
-          </a:p>
-          <a:p>
-            <a:pPr indent="0" marL="0">
-              <a:lnSpc>
-                <a:spcPct val="140000"/>
-              </a:lnSpc>
-              <a:buNone/>
-            </a:pPr>
-            <a:r>
-              <a:rPr lang="en-US" sz="1400" dirty="0">
-                <a:solidFill>
-                  <a:srgbClr val="2D3748"/>
-                </a:solidFill>
-              </a:rPr>
-              <a:t>      </a:t>
-            </a:r>
-            <a:endParaRPr lang="en-US" sz="1400" dirty="0"/>
-          </a:p>
-          <a:p>
-            <a:pPr indent="0" marL="0">
-              <a:lnSpc>
-                <a:spcPct val="140000"/>
-              </a:lnSpc>
-              <a:buNone/>
-            </a:pPr>
-            <a:endParaRPr lang="en-US" sz="1400" dirty="0"/>
-          </a:p>
-          <a:p>
-            <a:pPr indent="0" marL="0">
-              <a:lnSpc>
-                <a:spcPct val="140000"/>
-              </a:lnSpc>
-              <a:buNone/>
-            </a:pPr>
-            <a:r>
-              <a:rPr lang="en-US" sz="1400" dirty="0">
-                <a:solidFill>
-                  <a:srgbClr val="2D3748"/>
-                </a:solidFill>
-              </a:rPr>
-              <a:t>      </a:t>
-            </a:r>
-            <a:endParaRPr lang="en-US" sz="1400" dirty="0"/>
-          </a:p>
-          <a:p>
-            <a:pPr indent="0" marL="0">
-              <a:lnSpc>
-                <a:spcPct val="140000"/>
-              </a:lnSpc>
-              <a:buNone/>
-            </a:pPr>
-            <a:r>
-              <a:rPr lang="en-US" sz="1400" dirty="0">
-                <a:solidFill>
-                  <a:srgbClr val="2D3748"/>
-                </a:solidFill>
-              </a:rPr>
-              <a:t>全件</a:t>
-            </a:r>
-            <a:endParaRPr lang="en-US" sz="1400" dirty="0"/>
-          </a:p>
-          <a:p>
-            <a:pPr indent="0" marL="0">
-              <a:lnSpc>
-                <a:spcPct val="140000"/>
-              </a:lnSpc>
-              <a:buNone/>
-            </a:pPr>
-            <a:endParaRPr lang="en-US" sz="1400" dirty="0"/>
-          </a:p>
-          <a:p>
-            <a:pPr indent="0" marL="0">
-              <a:lnSpc>
-                <a:spcPct val="140000"/>
-              </a:lnSpc>
-              <a:buNone/>
-            </a:pPr>
-            <a:r>
-              <a:rPr lang="en-US" sz="1400" dirty="0">
-                <a:solidFill>
-                  <a:srgbClr val="2D3748"/>
-                </a:solidFill>
-              </a:rPr>
-              <a:t>    </a:t>
-            </a:r>
-            <a:endParaRPr lang="en-US" sz="1400" dirty="0"/>
-          </a:p>
-          <a:p>
-            <a:pPr indent="0" marL="0">
-              <a:lnSpc>
-                <a:spcPct val="140000"/>
-              </a:lnSpc>
-              <a:buNone/>
-            </a:pPr>
-            <a:endParaRPr lang="en-US" sz="1400" dirty="0"/>
-          </a:p>
-          <a:p>
-            <a:pPr indent="0" marL="0">
-              <a:lnSpc>
-                <a:spcPct val="140000"/>
-              </a:lnSpc>
-              <a:buNone/>
-            </a:pPr>
-            <a:r>
-              <a:rPr lang="en-US" sz="1400" dirty="0">
-                <a:solidFill>
-                  <a:srgbClr val="2D3748"/>
-                </a:solidFill>
-              </a:rPr>
-              <a:t>    </a:t>
-            </a:r>
-            <a:endParaRPr lang="en-US" sz="1400" dirty="0"/>
-          </a:p>
-          <a:p>
-            <a:pPr indent="0" marL="0">
-              <a:lnSpc>
-                <a:spcPct val="140000"/>
-              </a:lnSpc>
-              <a:buNone/>
-            </a:pPr>
-            <a:endParaRPr lang="en-US" sz="1400" dirty="0"/>
-          </a:p>
-          <a:p>
-            <a:pPr indent="0" marL="0">
-              <a:lnSpc>
-                <a:spcPct val="140000"/>
-              </a:lnSpc>
-              <a:buNone/>
-            </a:pPr>
-            <a:r>
-              <a:rPr lang="en-US" sz="1400" dirty="0">
-                <a:solidFill>
-                  <a:srgbClr val="2D3748"/>
-                </a:solidFill>
-              </a:rPr>
-              <a:t>      </a:t>
-            </a:r>
-            <a:endParaRPr lang="en-US" sz="1400" dirty="0"/>
-          </a:p>
-          <a:p>
-            <a:pPr indent="0" marL="0">
-              <a:lnSpc>
-                <a:spcPct val="140000"/>
-              </a:lnSpc>
-              <a:buNone/>
-            </a:pPr>
-            <a:r>
-              <a:rPr lang="en-US" sz="1400" dirty="0">
-                <a:solidFill>
-                  <a:srgbClr val="2D3748"/>
-                </a:solidFill>
-              </a:rPr>
-              <a:t>文脈保持統合</a:t>
-            </a:r>
-            <a:endParaRPr lang="en-US" sz="1400" dirty="0"/>
-          </a:p>
-          <a:p>
-            <a:pPr indent="0" marL="0">
-              <a:lnSpc>
-                <a:spcPct val="140000"/>
-              </a:lnSpc>
-              <a:buNone/>
-            </a:pPr>
-            <a:endParaRPr lang="en-US" sz="1400" dirty="0"/>
-          </a:p>
-          <a:p>
-            <a:pPr indent="0" marL="0">
-              <a:lnSpc>
-                <a:spcPct val="140000"/>
-              </a:lnSpc>
-              <a:buNone/>
-            </a:pPr>
-            <a:r>
-              <a:rPr lang="en-US" sz="1400" dirty="0">
-                <a:solidFill>
-                  <a:srgbClr val="2D3748"/>
-                </a:solidFill>
-              </a:rPr>
-              <a:t>      </a:t>
-            </a:r>
-            <a:endParaRPr lang="en-US" sz="1400" dirty="0"/>
-          </a:p>
-          <a:p>
-            <a:pPr indent="0" marL="0">
-              <a:lnSpc>
-                <a:spcPct val="140000"/>
-              </a:lnSpc>
-              <a:buNone/>
-            </a:pPr>
-            <a:endParaRPr lang="en-US" sz="1400" dirty="0"/>
-          </a:p>
-          <a:p>
-            <a:pPr indent="0" marL="0">
-              <a:lnSpc>
-                <a:spcPct val="140000"/>
-              </a:lnSpc>
-              <a:buNone/>
-            </a:pPr>
-            <a:r>
-              <a:rPr lang="en-US" sz="1400" dirty="0">
-                <a:solidFill>
-                  <a:srgbClr val="2D3748"/>
-                </a:solidFill>
-              </a:rPr>
-              <a:t>        </a:t>
-            </a:r>
-            <a:endParaRPr lang="en-US" sz="1400" dirty="0"/>
-          </a:p>
-          <a:p>
-            <a:pPr indent="0" marL="0">
-              <a:lnSpc>
-                <a:spcPct val="140000"/>
-              </a:lnSpc>
-              <a:buNone/>
-            </a:pPr>
-            <a:endParaRPr lang="en-US" sz="1400" dirty="0"/>
-          </a:p>
-          <a:p>
-            <a:pPr indent="0" marL="0">
-              <a:lnSpc>
-                <a:spcPct val="140000"/>
-              </a:lnSpc>
-              <a:buNone/>
-            </a:pPr>
-            <a:r>
-              <a:rPr lang="en-US" sz="1400" dirty="0">
-                <a:solidFill>
-                  <a:srgbClr val="2D3748"/>
-                </a:solidFill>
-              </a:rPr>
-              <a:t>      </a:t>
-            </a:r>
-            <a:endParaRPr lang="en-US" sz="1400" dirty="0"/>
-          </a:p>
-          <a:p>
-            <a:pPr indent="0" marL="0">
-              <a:lnSpc>
-                <a:spcPct val="140000"/>
-              </a:lnSpc>
-              <a:buNone/>
-            </a:pPr>
-            <a:endParaRPr lang="en-US" sz="1400" dirty="0"/>
-          </a:p>
-          <a:p>
-            <a:pPr indent="0" marL="0">
-              <a:lnSpc>
-                <a:spcPct val="140000"/>
-              </a:lnSpc>
-              <a:buNone/>
-            </a:pPr>
-            <a:r>
-              <a:rPr lang="en-US" sz="1400" dirty="0">
-                <a:solidFill>
-                  <a:srgbClr val="2D3748"/>
-                </a:solidFill>
-              </a:rPr>
-              <a:t>      </a:t>
-            </a:r>
-            <a:endParaRPr lang="en-US" sz="1400" dirty="0"/>
-          </a:p>
-          <a:p>
-            <a:pPr indent="0" marL="0">
-              <a:lnSpc>
-                <a:spcPct val="140000"/>
-              </a:lnSpc>
-              <a:buNone/>
-            </a:pPr>
-            <a:r>
-              <a:rPr lang="en-US" sz="1400" dirty="0">
-                <a:solidFill>
-                  <a:srgbClr val="2D3748"/>
-                </a:solidFill>
-              </a:rPr>
-              <a:t>高</a:t>
-            </a:r>
-            <a:endParaRPr lang="en-US" sz="1400" dirty="0"/>
+              <a:buNone/>
+            </a:pPr>
+            <a:r>
+              <a:rPr lang="en-US" sz="1300" b="1" dirty="0">
+                <a:solidFill>
+                  <a:srgbClr val="2D3748"/>
+                </a:solidFill>
+              </a:rPr>
+              <a:t>📄 資料生成品質</a:t>
+            </a:r>
+            <a:endParaRPr lang="en-US" sz="1300" dirty="0"/>
+          </a:p>
+        </p:txBody>
+      </p:sp>
+      <p:sp>
+        <p:nvSpPr>
+          <p:cNvPr id="6" name="Shape 4"/>
+          <p:cNvSpPr/>
+          <p:nvPr/>
+        </p:nvSpPr>
+        <p:spPr>
+          <a:xfrm>
+            <a:off x="6231636" y="1188720"/>
+            <a:ext cx="5500116" cy="1463040"/>
+          </a:xfrm>
+          <a:prstGeom prst="roundRect">
+            <a:avLst>
+              <a:gd name="adj" fmla="val 6250"/>
+            </a:avLst>
+          </a:prstGeom>
+          <a:solidFill>
+            <a:srgbClr val="F7FAFC"/>
+          </a:solidFill>
+          <a:ln w="12700">
+            <a:solidFill>
+              <a:srgbClr val="48BB78"/>
+            </a:solidFill>
+            <a:prstDash val="solid"/>
+          </a:ln>
+        </p:spPr>
+      </p:sp>
+      <p:sp>
+        <p:nvSpPr>
+          <p:cNvPr id="7" name="Shape 5"/>
+          <p:cNvSpPr/>
+          <p:nvPr/>
+        </p:nvSpPr>
+        <p:spPr>
+          <a:xfrm>
+            <a:off x="6231636" y="1188720"/>
+            <a:ext cx="54864" cy="1463040"/>
+          </a:xfrm>
+          <a:prstGeom prst="rect">
+            <a:avLst/>
+          </a:prstGeom>
+          <a:solidFill>
+            <a:srgbClr val="48BB78"/>
+          </a:solidFill>
+          <a:ln/>
+        </p:spPr>
+      </p:sp>
+      <p:sp>
+        <p:nvSpPr>
+          <p:cNvPr id="8" name="Text 6"/>
+          <p:cNvSpPr/>
+          <p:nvPr/>
+        </p:nvSpPr>
+        <p:spPr>
+          <a:xfrm>
+            <a:off x="6368796" y="1280160"/>
+            <a:ext cx="5225796" cy="365760"/>
+          </a:xfrm>
+          <a:prstGeom prst="rect">
+            <a:avLst/>
+          </a:prstGeom>
+          <a:noFill/>
+          <a:ln/>
+        </p:spPr>
+        <p:txBody>
+          <a:bodyPr wrap="square" rtlCol="0" anchor="t"/>
+          <a:lstStyle/>
+          <a:p>
+            <a:pPr indent="0" marL="0">
+              <a:buNone/>
+            </a:pPr>
+            <a:r>
+              <a:rPr lang="en-US" sz="1300" b="1" dirty="0">
+                <a:solidFill>
+                  <a:srgbClr val="2D3748"/>
+                </a:solidFill>
+              </a:rPr>
+              <a:t>🧠 文脈保持</a:t>
+            </a:r>
+            <a:endParaRPr lang="en-US" sz="1300" dirty="0"/>
           </a:p>
         </p:txBody>
       </p:sp>
@@ -4195,7 +3084,7 @@
                   <a:srgbClr val="2D3748"/>
                 </a:solidFill>
               </a:rPr>
-              <a:t>🔗 依存関係マップ</a:t>
+              <a:t>🎯 スコープ境界</a:t>
             </a:r>
             <a:endParaRPr lang="en-US" sz="2800" dirty="0"/>
           </a:p>
@@ -4210,7 +3099,7 @@
         <p:spPr>
           <a:xfrm>
             <a:off x="457200" y="1188720"/>
-            <a:ext cx="3575304" cy="1463040"/>
+            <a:ext cx="11274552" cy="1463040"/>
           </a:xfrm>
           <a:prstGeom prst="roundRect">
             <a:avLst>
@@ -4257,7 +3146,7 @@
         <p:spPr>
           <a:xfrm>
             <a:off x="594360" y="1280160"/>
-            <a:ext cx="3300984" cy="365760"/>
+            <a:ext cx="11000232" cy="365760"/>
           </a:xfrm>
           <a:prstGeom prst="rect">
             <a:avLst/>
@@ -4278,7 +3167,7 @@
                   <a:srgbClr val="2D3748"/>
                 </a:solidFill>
               </a:rPr>
-              <a:t>Ready</a:t>
+              <a:t>会議要約</a:t>
             </a:r>
             <a:endParaRPr lang="en-US" sz="1300" dirty="0"/>
           </a:p>
@@ -4286,61 +3175,14 @@
       </p:sp>
       <p:sp>
         <p:nvSpPr>
-          <p:cNvPr id="6" name="Shape 4"/>
-          <p:cNvSpPr/>
-          <p:nvPr/>
-        </p:nvSpPr>
-        <p:spPr>
-          <a:xfrm>
-            <a:off x="4306824" y="1188720"/>
-            <a:ext cx="3575304" cy="1463040"/>
-          </a:xfrm>
-          <a:prstGeom prst="roundRect">
-            <a:avLst>
-              <a:gd name="adj" fmla="val 6250"/>
-            </a:avLst>
-          </a:prstGeom>
-          <a:solidFill>
-            <a:srgbClr val="F7FAFC"/>
-          </a:solidFill>
-          <a:ln w="12700">
-            <a:solidFill>
-              <a:srgbClr val="48BB78"/>
-            </a:solidFill>
-            <a:prstDash val="solid"/>
-          </a:ln>
-        </p:spPr>
-      </p:sp>
-      <p:sp>
-        <p:nvSpPr>
-          <p:cNvPr id="7" name="Shape 5"/>
-          <p:cNvSpPr/>
-          <p:nvPr/>
-        </p:nvSpPr>
-        <p:spPr>
-          <a:xfrm>
-            <a:off x="4306824" y="1188720"/>
-            <a:ext cx="54864" cy="1463040"/>
-          </a:xfrm>
-          <a:prstGeom prst="rect">
-            <a:avLst/>
-          </a:prstGeom>
-          <a:solidFill>
-            <a:srgbClr val="48BB78"/>
-          </a:solidFill>
-          <a:ln/>
-        </p:spPr>
-      </p:sp>
-      <p:sp>
-        <p:nvSpPr>
-          <p:cNvPr id="8" name="Text 6"/>
-          <p:cNvSpPr/>
-          <p:nvPr/>
-        </p:nvSpPr>
-        <p:spPr>
-          <a:xfrm>
-            <a:off x="4443984" y="1280160"/>
-            <a:ext cx="3300984" cy="365760"/>
+          <p:cNvPr id="6" name="Text 4"/>
+          <p:cNvSpPr/>
+          <p:nvPr/>
+        </p:nvSpPr>
+        <p:spPr>
+          <a:xfrm>
+            <a:off x="594360" y="1645920"/>
+            <a:ext cx="11000232" cy="914400"/>
           </a:xfrm>
           <a:prstGeom prst="rect">
             <a:avLst/>
@@ -4356,97 +3198,28 @@
               <a:buNone/>
             </a:pPr>
             <a:r>
-              <a:rPr lang="en-US" sz="1300" b="1" dirty="0">
-                <a:solidFill>
-                  <a:srgbClr val="2D3748"/>
-                </a:solidFill>
-              </a:rPr>
-              <a:t>Pending</a:t>
-            </a:r>
-            <a:endParaRPr lang="en-US" sz="1300" dirty="0"/>
-          </a:p>
-        </p:txBody>
-      </p:sp>
-      <p:sp>
-        <p:nvSpPr>
-          <p:cNvPr id="9" name="Shape 7"/>
-          <p:cNvSpPr/>
-          <p:nvPr/>
-        </p:nvSpPr>
-        <p:spPr>
-          <a:xfrm>
-            <a:off x="8156448" y="1188720"/>
-            <a:ext cx="3575304" cy="1463040"/>
-          </a:xfrm>
-          <a:prstGeom prst="roundRect">
-            <a:avLst>
-              <a:gd name="adj" fmla="val 6250"/>
-            </a:avLst>
-          </a:prstGeom>
-          <a:solidFill>
-            <a:srgbClr val="F7FAFC"/>
-          </a:solidFill>
-          <a:ln w="12700">
-            <a:solidFill>
-              <a:srgbClr val="ED8936"/>
-            </a:solidFill>
-            <a:prstDash val="solid"/>
-          </a:ln>
-        </p:spPr>
-      </p:sp>
-      <p:sp>
-        <p:nvSpPr>
-          <p:cNvPr id="10" name="Shape 8"/>
-          <p:cNvSpPr/>
-          <p:nvPr/>
-        </p:nvSpPr>
-        <p:spPr>
-          <a:xfrm>
-            <a:off x="8156448" y="1188720"/>
-            <a:ext cx="54864" cy="1463040"/>
-          </a:xfrm>
-          <a:prstGeom prst="rect">
-            <a:avLst/>
-          </a:prstGeom>
-          <a:solidFill>
-            <a:srgbClr val="ED8936"/>
-          </a:solidFill>
-          <a:ln/>
-        </p:spPr>
-      </p:sp>
-      <p:sp>
-        <p:nvSpPr>
-          <p:cNvPr id="11" name="Text 9"/>
-          <p:cNvSpPr/>
-          <p:nvPr/>
-        </p:nvSpPr>
-        <p:spPr>
-          <a:xfrm>
-            <a:off x="8293608" y="1280160"/>
-            <a:ext cx="3300984" cy="365760"/>
-          </a:xfrm>
-          <a:prstGeom prst="rect">
-            <a:avLst/>
-          </a:prstGeom>
-          <a:noFill/>
-          <a:ln/>
-        </p:spPr>
-        <p:txBody>
-          <a:bodyPr wrap="square" rtlCol="0" anchor="t"/>
-          <a:lstStyle/>
-          <a:p>
-            <a:pPr indent="0" marL="0">
-              <a:buNone/>
-            </a:pPr>
-            <a:r>
-              <a:rPr lang="en-US" sz="1300" b="1" dirty="0">
-                <a:solidFill>
-                  <a:srgbClr val="2D3748"/>
-                </a:solidFill>
-              </a:rPr>
-              <a:t>Open</a:t>
-            </a:r>
-            <a:endParaRPr lang="en-US" sz="1300" dirty="0"/>
+              <a:rPr lang="en-US" sz="1000" dirty="0">
+                <a:solidFill>
+                  <a:srgbClr val="4A5568"/>
+                </a:solidFill>
+              </a:rPr>
+              <a:t>RAG統合</a:t>
+            </a:r>
+            <a:endParaRPr lang="en-US" sz="1000" dirty="0"/>
+          </a:p>
+          <a:p>
+            <a:pPr indent="0" marL="0">
+              <a:buNone/>
+            </a:pPr>
+            <a:r>
+              <a:rPr lang="en-US" sz="1000" dirty="0">
+                <a:solidFill>
+                  <a:srgbClr val="4A5568"/>
+                </a:solidFill>
+              </a:rPr>
+              <a:t>資料生成</a:t>
+            </a:r>
+            <a:endParaRPr lang="en-US" sz="1000" dirty="0"/>
           </a:p>
         </p:txBody>
       </p:sp>
@@ -4505,7 +3278,7 @@
                   <a:srgbClr val="2D3748"/>
                 </a:solidFill>
               </a:rPr>
-              <a:t>⚠️ リスク評価</a:t>
+              <a:t>📅 実装ロードマップ</a:t>
             </a:r>
             <a:endParaRPr lang="en-US" sz="2800" dirty="0"/>
           </a:p>
@@ -4513,61 +3286,14 @@
       </p:sp>
       <p:sp>
         <p:nvSpPr>
-          <p:cNvPr id="3" name="Shape 1"/>
-          <p:cNvSpPr/>
-          <p:nvPr/>
-        </p:nvSpPr>
-        <p:spPr>
-          <a:xfrm>
-            <a:off x="457200" y="1188720"/>
-            <a:ext cx="3575304" cy="1463040"/>
-          </a:xfrm>
-          <a:prstGeom prst="roundRect">
-            <a:avLst>
-              <a:gd name="adj" fmla="val 6250"/>
-            </a:avLst>
-          </a:prstGeom>
-          <a:solidFill>
-            <a:srgbClr val="F7FAFC"/>
-          </a:solidFill>
-          <a:ln w="12700">
-            <a:solidFill>
-              <a:srgbClr val="667EEA"/>
-            </a:solidFill>
-            <a:prstDash val="solid"/>
-          </a:ln>
-        </p:spPr>
-      </p:sp>
-      <p:sp>
-        <p:nvSpPr>
-          <p:cNvPr id="4" name="Shape 2"/>
-          <p:cNvSpPr/>
-          <p:nvPr/>
-        </p:nvSpPr>
-        <p:spPr>
-          <a:xfrm>
-            <a:off x="457200" y="1188720"/>
-            <a:ext cx="54864" cy="1463040"/>
-          </a:xfrm>
-          <a:prstGeom prst="rect">
-            <a:avLst/>
-          </a:prstGeom>
-          <a:solidFill>
-            <a:srgbClr val="667EEA"/>
-          </a:solidFill>
-          <a:ln/>
-        </p:spPr>
-      </p:sp>
-      <p:sp>
-        <p:nvSpPr>
-          <p:cNvPr id="5" name="Text 3"/>
-          <p:cNvSpPr/>
-          <p:nvPr/>
-        </p:nvSpPr>
-        <p:spPr>
-          <a:xfrm>
-            <a:off x="594360" y="1280160"/>
-            <a:ext cx="3300984" cy="365760"/>
+          <p:cNvPr id="3" name="Text 1"/>
+          <p:cNvSpPr/>
+          <p:nvPr/>
+        </p:nvSpPr>
+        <p:spPr>
+          <a:xfrm>
+            <a:off x="731520" y="1188720"/>
+            <a:ext cx="10725912" cy="3383280"/>
           </a:xfrm>
           <a:prstGeom prst="rect">
             <a:avLst/>
@@ -4580,540 +3306,649 @@
           <a:lstStyle/>
           <a:p>
             <a:pPr indent="0" marL="0">
-              <a:buNone/>
-            </a:pPr>
-            <a:r>
-              <a:rPr lang="en-US" sz="1300" b="1" dirty="0">
-                <a:solidFill>
-                  <a:srgbClr val="2D3748"/>
-                </a:solidFill>
-              </a:rPr>
-              <a:t>音声キャプチャ失敗</a:t>
-            </a:r>
-            <a:endParaRPr lang="en-US" sz="1300" dirty="0"/>
-          </a:p>
-        </p:txBody>
-      </p:sp>
-      <p:sp>
-        <p:nvSpPr>
-          <p:cNvPr id="6" name="Text 4"/>
-          <p:cNvSpPr/>
-          <p:nvPr/>
-        </p:nvSpPr>
-        <p:spPr>
-          <a:xfrm>
-            <a:off x="594360" y="1645920"/>
-            <a:ext cx="3300984" cy="914400"/>
-          </a:xfrm>
-          <a:prstGeom prst="rect">
-            <a:avLst/>
-          </a:prstGeom>
-          <a:noFill/>
-          <a:ln/>
-        </p:spPr>
-        <p:txBody>
-          <a:bodyPr wrap="square" rtlCol="0" anchor="t"/>
-          <a:lstStyle/>
-          <a:p>
-            <a:pPr indent="0" marL="0">
-              <a:buNone/>
-            </a:pPr>
-            <a:r>
-              <a:rPr lang="en-US" sz="1000" dirty="0">
-                <a:solidFill>
-                  <a:srgbClr val="4A5568"/>
-                </a:solidFill>
-              </a:rPr>
-              <a:t>HIGH</a:t>
-            </a:r>
-            <a:endParaRPr lang="en-US" sz="1000" dirty="0"/>
-          </a:p>
-        </p:txBody>
-      </p:sp>
-      <p:sp>
-        <p:nvSpPr>
-          <p:cNvPr id="7" name="Shape 5"/>
-          <p:cNvSpPr/>
-          <p:nvPr/>
-        </p:nvSpPr>
-        <p:spPr>
-          <a:xfrm>
-            <a:off x="4306824" y="1188720"/>
-            <a:ext cx="3575304" cy="1463040"/>
-          </a:xfrm>
-          <a:prstGeom prst="roundRect">
-            <a:avLst>
-              <a:gd name="adj" fmla="val 6250"/>
-            </a:avLst>
-          </a:prstGeom>
-          <a:solidFill>
-            <a:srgbClr val="F7FAFC"/>
-          </a:solidFill>
-          <a:ln w="12700">
-            <a:solidFill>
-              <a:srgbClr val="48BB78"/>
-            </a:solidFill>
-            <a:prstDash val="solid"/>
-          </a:ln>
-        </p:spPr>
-      </p:sp>
-      <p:sp>
-        <p:nvSpPr>
-          <p:cNvPr id="8" name="Shape 6"/>
-          <p:cNvSpPr/>
-          <p:nvPr/>
-        </p:nvSpPr>
-        <p:spPr>
-          <a:xfrm>
-            <a:off x="4306824" y="1188720"/>
-            <a:ext cx="54864" cy="1463040"/>
-          </a:xfrm>
-          <a:prstGeom prst="rect">
-            <a:avLst/>
-          </a:prstGeom>
-          <a:solidFill>
-            <a:srgbClr val="48BB78"/>
-          </a:solidFill>
-          <a:ln/>
-        </p:spPr>
-      </p:sp>
-      <p:sp>
-        <p:nvSpPr>
-          <p:cNvPr id="9" name="Text 7"/>
-          <p:cNvSpPr/>
-          <p:nvPr/>
-        </p:nvSpPr>
-        <p:spPr>
-          <a:xfrm>
-            <a:off x="4443984" y="1280160"/>
-            <a:ext cx="3300984" cy="365760"/>
-          </a:xfrm>
-          <a:prstGeom prst="rect">
-            <a:avLst/>
-          </a:prstGeom>
-          <a:noFill/>
-          <a:ln/>
-        </p:spPr>
-        <p:txBody>
-          <a:bodyPr wrap="square" rtlCol="0" anchor="t"/>
-          <a:lstStyle/>
-          <a:p>
-            <a:pPr indent="0" marL="0">
-              <a:buNone/>
-            </a:pPr>
-            <a:r>
-              <a:rPr lang="en-US" sz="1300" b="1" dirty="0">
-                <a:solidFill>
-                  <a:srgbClr val="2D3748"/>
-                </a:solidFill>
-              </a:rPr>
-              <a:t>💡 Mitigation: マイク本体で常時ローカル録音</a:t>
-            </a:r>
-            <a:endParaRPr lang="en-US" sz="1300" dirty="0"/>
-          </a:p>
-        </p:txBody>
-      </p:sp>
-      <p:sp>
-        <p:nvSpPr>
-          <p:cNvPr id="10" name="Shape 8"/>
-          <p:cNvSpPr/>
-          <p:nvPr/>
-        </p:nvSpPr>
-        <p:spPr>
-          <a:xfrm>
-            <a:off x="8156448" y="1188720"/>
-            <a:ext cx="3575304" cy="1463040"/>
-          </a:xfrm>
-          <a:prstGeom prst="roundRect">
-            <a:avLst>
-              <a:gd name="adj" fmla="val 6250"/>
-            </a:avLst>
-          </a:prstGeom>
-          <a:solidFill>
-            <a:srgbClr val="F7FAFC"/>
-          </a:solidFill>
-          <a:ln w="12700">
-            <a:solidFill>
-              <a:srgbClr val="ED8936"/>
-            </a:solidFill>
-            <a:prstDash val="solid"/>
-          </a:ln>
-        </p:spPr>
-      </p:sp>
-      <p:sp>
-        <p:nvSpPr>
-          <p:cNvPr id="11" name="Shape 9"/>
-          <p:cNvSpPr/>
-          <p:nvPr/>
-        </p:nvSpPr>
-        <p:spPr>
-          <a:xfrm>
-            <a:off x="8156448" y="1188720"/>
-            <a:ext cx="54864" cy="1463040"/>
-          </a:xfrm>
-          <a:prstGeom prst="rect">
-            <a:avLst/>
-          </a:prstGeom>
-          <a:solidFill>
-            <a:srgbClr val="ED8936"/>
-          </a:solidFill>
-          <a:ln/>
-        </p:spPr>
-      </p:sp>
-      <p:sp>
-        <p:nvSpPr>
-          <p:cNvPr id="12" name="Text 10"/>
-          <p:cNvSpPr/>
-          <p:nvPr/>
-        </p:nvSpPr>
-        <p:spPr>
-          <a:xfrm>
-            <a:off x="8293608" y="1280160"/>
-            <a:ext cx="3300984" cy="365760"/>
-          </a:xfrm>
-          <a:prstGeom prst="rect">
-            <a:avLst/>
-          </a:prstGeom>
-          <a:noFill/>
-          <a:ln/>
-        </p:spPr>
-        <p:txBody>
-          <a:bodyPr wrap="square" rtlCol="0" anchor="t"/>
-          <a:lstStyle/>
-          <a:p>
-            <a:pPr indent="0" marL="0">
-              <a:buNone/>
-            </a:pPr>
-            <a:r>
-              <a:rPr lang="en-US" sz="1300" b="1" dirty="0">
-                <a:solidFill>
-                  <a:srgbClr val="2D3748"/>
-                </a:solidFill>
-              </a:rPr>
-              <a:t>リアルタイムAPIコスト</a:t>
-            </a:r>
-            <a:endParaRPr lang="en-US" sz="1300" dirty="0"/>
-          </a:p>
-        </p:txBody>
-      </p:sp>
-      <p:sp>
-        <p:nvSpPr>
-          <p:cNvPr id="13" name="Text 11"/>
-          <p:cNvSpPr/>
-          <p:nvPr/>
-        </p:nvSpPr>
-        <p:spPr>
-          <a:xfrm>
-            <a:off x="8293608" y="1645920"/>
-            <a:ext cx="3300984" cy="914400"/>
-          </a:xfrm>
-          <a:prstGeom prst="rect">
-            <a:avLst/>
-          </a:prstGeom>
-          <a:noFill/>
-          <a:ln/>
-        </p:spPr>
-        <p:txBody>
-          <a:bodyPr wrap="square" rtlCol="0" anchor="t"/>
-          <a:lstStyle/>
-          <a:p>
-            <a:pPr indent="0" marL="0">
-              <a:buNone/>
-            </a:pPr>
-            <a:r>
-              <a:rPr lang="en-US" sz="1000" dirty="0">
-                <a:solidFill>
-                  <a:srgbClr val="4A5568"/>
-                </a:solidFill>
-              </a:rPr>
-              <a:t>MED</a:t>
-            </a:r>
-            <a:endParaRPr lang="en-US" sz="1000" dirty="0"/>
-          </a:p>
-        </p:txBody>
-      </p:sp>
-      <p:sp>
-        <p:nvSpPr>
-          <p:cNvPr id="14" name="Shape 12"/>
-          <p:cNvSpPr/>
-          <p:nvPr/>
-        </p:nvSpPr>
-        <p:spPr>
-          <a:xfrm>
-            <a:off x="457200" y="2834640"/>
-            <a:ext cx="3575304" cy="1463040"/>
-          </a:xfrm>
-          <a:prstGeom prst="roundRect">
-            <a:avLst>
-              <a:gd name="adj" fmla="val 6250"/>
-            </a:avLst>
-          </a:prstGeom>
-          <a:solidFill>
-            <a:srgbClr val="F7FAFC"/>
-          </a:solidFill>
-          <a:ln w="12700">
-            <a:solidFill>
-              <a:srgbClr val="E53E3E"/>
-            </a:solidFill>
-            <a:prstDash val="solid"/>
-          </a:ln>
-        </p:spPr>
-      </p:sp>
-      <p:sp>
-        <p:nvSpPr>
-          <p:cNvPr id="15" name="Shape 13"/>
-          <p:cNvSpPr/>
-          <p:nvPr/>
-        </p:nvSpPr>
-        <p:spPr>
-          <a:xfrm>
-            <a:off x="457200" y="2834640"/>
-            <a:ext cx="54864" cy="1463040"/>
-          </a:xfrm>
-          <a:prstGeom prst="rect">
-            <a:avLst/>
-          </a:prstGeom>
-          <a:solidFill>
-            <a:srgbClr val="E53E3E"/>
-          </a:solidFill>
-          <a:ln/>
-        </p:spPr>
-      </p:sp>
-      <p:sp>
-        <p:nvSpPr>
-          <p:cNvPr id="16" name="Text 14"/>
-          <p:cNvSpPr/>
-          <p:nvPr/>
-        </p:nvSpPr>
-        <p:spPr>
-          <a:xfrm>
-            <a:off x="594360" y="2926080"/>
-            <a:ext cx="3300984" cy="365760"/>
-          </a:xfrm>
-          <a:prstGeom prst="rect">
-            <a:avLst/>
-          </a:prstGeom>
-          <a:noFill/>
-          <a:ln/>
-        </p:spPr>
-        <p:txBody>
-          <a:bodyPr wrap="square" rtlCol="0" anchor="t"/>
-          <a:lstStyle/>
-          <a:p>
-            <a:pPr indent="0" marL="0">
-              <a:buNone/>
-            </a:pPr>
-            <a:r>
-              <a:rPr lang="en-US" sz="1300" b="1" dirty="0">
-                <a:solidFill>
-                  <a:srgbClr val="2D3748"/>
-                </a:solidFill>
-              </a:rPr>
-              <a:t>💡 Mitigation: MVPは制御環境＋方式選択で運用</a:t>
-            </a:r>
-            <a:endParaRPr lang="en-US" sz="1300" dirty="0"/>
-          </a:p>
-        </p:txBody>
-      </p:sp>
-      <p:sp>
-        <p:nvSpPr>
-          <p:cNvPr id="17" name="Shape 15"/>
-          <p:cNvSpPr/>
-          <p:nvPr/>
-        </p:nvSpPr>
-        <p:spPr>
-          <a:xfrm>
-            <a:off x="4306824" y="2834640"/>
-            <a:ext cx="3575304" cy="1463040"/>
-          </a:xfrm>
-          <a:prstGeom prst="roundRect">
-            <a:avLst>
-              <a:gd name="adj" fmla="val 6250"/>
-            </a:avLst>
-          </a:prstGeom>
-          <a:solidFill>
-            <a:srgbClr val="F7FAFC"/>
-          </a:solidFill>
-          <a:ln w="12700">
-            <a:solidFill>
-              <a:srgbClr val="764BA2"/>
-            </a:solidFill>
-            <a:prstDash val="solid"/>
-          </a:ln>
-        </p:spPr>
-      </p:sp>
-      <p:sp>
-        <p:nvSpPr>
-          <p:cNvPr id="18" name="Shape 16"/>
-          <p:cNvSpPr/>
-          <p:nvPr/>
-        </p:nvSpPr>
-        <p:spPr>
-          <a:xfrm>
-            <a:off x="4306824" y="2834640"/>
-            <a:ext cx="54864" cy="1463040"/>
-          </a:xfrm>
-          <a:prstGeom prst="rect">
-            <a:avLst/>
-          </a:prstGeom>
-          <a:solidFill>
-            <a:srgbClr val="764BA2"/>
-          </a:solidFill>
-          <a:ln/>
-        </p:spPr>
-      </p:sp>
-      <p:sp>
-        <p:nvSpPr>
-          <p:cNvPr id="19" name="Text 17"/>
-          <p:cNvSpPr/>
-          <p:nvPr/>
-        </p:nvSpPr>
-        <p:spPr>
-          <a:xfrm>
-            <a:off x="4443984" y="2926080"/>
-            <a:ext cx="3300984" cy="365760"/>
-          </a:xfrm>
-          <a:prstGeom prst="rect">
-            <a:avLst/>
-          </a:prstGeom>
-          <a:noFill/>
-          <a:ln/>
-        </p:spPr>
-        <p:txBody>
-          <a:bodyPr wrap="square" rtlCol="0" anchor="t"/>
-          <a:lstStyle/>
-          <a:p>
-            <a:pPr indent="0" marL="0">
-              <a:buNone/>
-            </a:pPr>
-            <a:r>
-              <a:rPr lang="en-US" sz="1300" b="1" dirty="0">
-                <a:solidFill>
-                  <a:srgbClr val="2D3748"/>
-                </a:solidFill>
-              </a:rPr>
-              <a:t>RAG基盤未確定</a:t>
-            </a:r>
-            <a:endParaRPr lang="en-US" sz="1300" dirty="0"/>
-          </a:p>
-        </p:txBody>
-      </p:sp>
-      <p:sp>
-        <p:nvSpPr>
-          <p:cNvPr id="20" name="Text 18"/>
-          <p:cNvSpPr/>
-          <p:nvPr/>
-        </p:nvSpPr>
-        <p:spPr>
-          <a:xfrm>
-            <a:off x="4443984" y="3291840"/>
-            <a:ext cx="3300984" cy="914400"/>
-          </a:xfrm>
-          <a:prstGeom prst="rect">
-            <a:avLst/>
-          </a:prstGeom>
-          <a:noFill/>
-          <a:ln/>
-        </p:spPr>
-        <p:txBody>
-          <a:bodyPr wrap="square" rtlCol="0" anchor="t"/>
-          <a:lstStyle/>
-          <a:p>
-            <a:pPr indent="0" marL="0">
-              <a:buNone/>
-            </a:pPr>
-            <a:r>
-              <a:rPr lang="en-US" sz="1000" dirty="0">
-                <a:solidFill>
-                  <a:srgbClr val="4A5568"/>
-                </a:solidFill>
-              </a:rPr>
-              <a:t>MED</a:t>
-            </a:r>
-            <a:endParaRPr lang="en-US" sz="1000" dirty="0"/>
-          </a:p>
-        </p:txBody>
-      </p:sp>
-      <p:sp>
-        <p:nvSpPr>
-          <p:cNvPr id="21" name="Shape 19"/>
-          <p:cNvSpPr/>
-          <p:nvPr/>
-        </p:nvSpPr>
-        <p:spPr>
-          <a:xfrm>
-            <a:off x="8156448" y="2834640"/>
-            <a:ext cx="3575304" cy="1463040"/>
-          </a:xfrm>
-          <a:prstGeom prst="roundRect">
-            <a:avLst>
-              <a:gd name="adj" fmla="val 6250"/>
-            </a:avLst>
-          </a:prstGeom>
-          <a:solidFill>
-            <a:srgbClr val="F7FAFC"/>
-          </a:solidFill>
-          <a:ln w="12700">
-            <a:solidFill>
-              <a:srgbClr val="38A169"/>
-            </a:solidFill>
-            <a:prstDash val="solid"/>
-          </a:ln>
-        </p:spPr>
-      </p:sp>
-      <p:sp>
-        <p:nvSpPr>
-          <p:cNvPr id="22" name="Shape 20"/>
-          <p:cNvSpPr/>
-          <p:nvPr/>
-        </p:nvSpPr>
-        <p:spPr>
-          <a:xfrm>
-            <a:off x="8156448" y="2834640"/>
-            <a:ext cx="54864" cy="1463040"/>
-          </a:xfrm>
-          <a:prstGeom prst="rect">
-            <a:avLst/>
-          </a:prstGeom>
-          <a:solidFill>
-            <a:srgbClr val="38A169"/>
-          </a:solidFill>
-          <a:ln/>
-        </p:spPr>
-      </p:sp>
-      <p:sp>
-        <p:nvSpPr>
-          <p:cNvPr id="23" name="Text 21"/>
-          <p:cNvSpPr/>
-          <p:nvPr/>
-        </p:nvSpPr>
-        <p:spPr>
-          <a:xfrm>
-            <a:off x="8293608" y="2926080"/>
-            <a:ext cx="3300984" cy="365760"/>
-          </a:xfrm>
-          <a:prstGeom prst="rect">
-            <a:avLst/>
-          </a:prstGeom>
-          <a:noFill/>
-          <a:ln/>
-        </p:spPr>
-        <p:txBody>
-          <a:bodyPr wrap="square" rtlCol="0" anchor="t"/>
-          <a:lstStyle/>
-          <a:p>
-            <a:pPr indent="0" marL="0">
-              <a:buNone/>
-            </a:pPr>
-            <a:r>
-              <a:rPr lang="en-US" sz="1300" b="1" dirty="0">
-                <a:solidFill>
-                  <a:srgbClr val="2D3748"/>
-                </a:solidFill>
-              </a:rPr>
-              <a:t>💡 Mitigation: クラウド/オンプレ比較調査を先行</a:t>
-            </a:r>
-            <a:endParaRPr lang="en-US" sz="1300" dirty="0"/>
+              <a:lnSpc>
+                <a:spcPct val="140000"/>
+              </a:lnSpc>
+              <a:buNone/>
+            </a:pPr>
+            <a:r>
+              <a:rPr lang="en-US" sz="1400" dirty="0">
+                <a:solidFill>
+                  <a:srgbClr val="2D3748"/>
+                </a:solidFill>
+              </a:rPr>
+              <a:t>1</a:t>
+            </a:r>
+            <a:endParaRPr lang="en-US" sz="1400" dirty="0"/>
+          </a:p>
+          <a:p>
+            <a:pPr indent="0" marL="0">
+              <a:lnSpc>
+                <a:spcPct val="140000"/>
+              </a:lnSpc>
+              <a:buNone/>
+            </a:pPr>
+            <a:endParaRPr lang="en-US" sz="1400" dirty="0"/>
+          </a:p>
+          <a:p>
+            <a:pPr indent="0" marL="0">
+              <a:lnSpc>
+                <a:spcPct val="140000"/>
+              </a:lnSpc>
+              <a:buNone/>
+            </a:pPr>
+            <a:r>
+              <a:rPr lang="en-US" sz="1400" dirty="0">
+                <a:solidFill>
+                  <a:srgbClr val="2D3748"/>
+                </a:solidFill>
+              </a:rPr>
+              <a:t>        </a:t>
+            </a:r>
+            <a:endParaRPr lang="en-US" sz="1400" dirty="0"/>
+          </a:p>
+          <a:p>
+            <a:pPr indent="0" marL="0">
+              <a:lnSpc>
+                <a:spcPct val="140000"/>
+              </a:lnSpc>
+              <a:buNone/>
+            </a:pPr>
+            <a:r>
+              <a:rPr lang="en-US" sz="1400" dirty="0">
+                <a:solidFill>
+                  <a:srgbClr val="2D3748"/>
+                </a:solidFill>
+              </a:rPr>
+              <a:t>基盤整備</a:t>
+            </a:r>
+            <a:endParaRPr lang="en-US" sz="1400" dirty="0"/>
+          </a:p>
+          <a:p>
+            <a:pPr indent="0" marL="0">
+              <a:lnSpc>
+                <a:spcPct val="140000"/>
+              </a:lnSpc>
+              <a:buNone/>
+            </a:pPr>
+            <a:endParaRPr lang="en-US" sz="1400" dirty="0"/>
+          </a:p>
+          <a:p>
+            <a:pPr indent="0" marL="0">
+              <a:lnSpc>
+                <a:spcPct val="140000"/>
+              </a:lnSpc>
+              <a:buNone/>
+            </a:pPr>
+            <a:r>
+              <a:rPr lang="en-US" sz="1400" dirty="0">
+                <a:solidFill>
+                  <a:srgbClr val="2D3748"/>
+                </a:solidFill>
+              </a:rPr>
+              <a:t>        </a:t>
+            </a:r>
+            <a:endParaRPr lang="en-US" sz="1400" dirty="0"/>
+          </a:p>
+          <a:p>
+            <a:pPr indent="0" marL="0">
+              <a:lnSpc>
+                <a:spcPct val="140000"/>
+              </a:lnSpc>
+              <a:buNone/>
+            </a:pPr>
+            <a:r>
+              <a:rPr lang="en-US" sz="1400" dirty="0">
+                <a:solidFill>
+                  <a:srgbClr val="2D3748"/>
+                </a:solidFill>
+              </a:rPr>
+              <a:t>音声・認証・テンプレート</a:t>
+            </a:r>
+            <a:endParaRPr lang="en-US" sz="1400" dirty="0"/>
+          </a:p>
+          <a:p>
+            <a:pPr indent="0" marL="0">
+              <a:lnSpc>
+                <a:spcPct val="140000"/>
+              </a:lnSpc>
+              <a:buNone/>
+            </a:pPr>
+            <a:endParaRPr lang="en-US" sz="1400" dirty="0"/>
+          </a:p>
+          <a:p>
+            <a:pPr indent="0" marL="0">
+              <a:lnSpc>
+                <a:spcPct val="140000"/>
+              </a:lnSpc>
+              <a:buNone/>
+            </a:pPr>
+            <a:r>
+              <a:rPr lang="en-US" sz="1400" dirty="0">
+                <a:solidFill>
+                  <a:srgbClr val="2D3748"/>
+                </a:solidFill>
+              </a:rPr>
+              <a:t>      </a:t>
+            </a:r>
+            <a:endParaRPr lang="en-US" sz="1400" dirty="0"/>
+          </a:p>
+          <a:p>
+            <a:pPr indent="0" marL="0">
+              <a:lnSpc>
+                <a:spcPct val="140000"/>
+              </a:lnSpc>
+              <a:buNone/>
+            </a:pPr>
+            <a:endParaRPr lang="en-US" sz="1400" dirty="0"/>
+          </a:p>
+          <a:p>
+            <a:pPr indent="0" marL="0">
+              <a:lnSpc>
+                <a:spcPct val="140000"/>
+              </a:lnSpc>
+              <a:buNone/>
+            </a:pPr>
+            <a:r>
+              <a:rPr lang="en-US" sz="1400" dirty="0">
+                <a:solidFill>
+                  <a:srgbClr val="2D3748"/>
+                </a:solidFill>
+              </a:rPr>
+              <a:t>      </a:t>
+            </a:r>
+            <a:endParaRPr lang="en-US" sz="1400" dirty="0"/>
+          </a:p>
+          <a:p>
+            <a:pPr indent="0" marL="0">
+              <a:lnSpc>
+                <a:spcPct val="140000"/>
+              </a:lnSpc>
+              <a:buNone/>
+            </a:pPr>
+            <a:endParaRPr lang="en-US" sz="1400" dirty="0"/>
+          </a:p>
+          <a:p>
+            <a:pPr indent="0" marL="0">
+              <a:lnSpc>
+                <a:spcPct val="140000"/>
+              </a:lnSpc>
+              <a:buNone/>
+            </a:pPr>
+            <a:r>
+              <a:rPr lang="en-US" sz="1400" dirty="0">
+                <a:solidFill>
+                  <a:srgbClr val="2D3748"/>
+                </a:solidFill>
+              </a:rPr>
+              <a:t>        </a:t>
+            </a:r>
+            <a:endParaRPr lang="en-US" sz="1400" dirty="0"/>
+          </a:p>
+          <a:p>
+            <a:pPr indent="0" marL="0">
+              <a:lnSpc>
+                <a:spcPct val="140000"/>
+              </a:lnSpc>
+              <a:buNone/>
+            </a:pPr>
+            <a:r>
+              <a:rPr lang="en-US" sz="1400" dirty="0">
+                <a:solidFill>
+                  <a:srgbClr val="2D3748"/>
+                </a:solidFill>
+              </a:rPr>
+              <a:t>2</a:t>
+            </a:r>
+            <a:endParaRPr lang="en-US" sz="1400" dirty="0"/>
+          </a:p>
+          <a:p>
+            <a:pPr indent="0" marL="0">
+              <a:lnSpc>
+                <a:spcPct val="140000"/>
+              </a:lnSpc>
+              <a:buNone/>
+            </a:pPr>
+            <a:endParaRPr lang="en-US" sz="1400" dirty="0"/>
+          </a:p>
+          <a:p>
+            <a:pPr indent="0" marL="0">
+              <a:lnSpc>
+                <a:spcPct val="140000"/>
+              </a:lnSpc>
+              <a:buNone/>
+            </a:pPr>
+            <a:r>
+              <a:rPr lang="en-US" sz="1400" dirty="0">
+                <a:solidFill>
+                  <a:srgbClr val="2D3748"/>
+                </a:solidFill>
+              </a:rPr>
+              <a:t>        </a:t>
+            </a:r>
+            <a:endParaRPr lang="en-US" sz="1400" dirty="0"/>
+          </a:p>
+          <a:p>
+            <a:pPr indent="0" marL="0">
+              <a:lnSpc>
+                <a:spcPct val="140000"/>
+              </a:lnSpc>
+              <a:buNone/>
+            </a:pPr>
+            <a:r>
+              <a:rPr lang="en-US" sz="1400" dirty="0">
+                <a:solidFill>
+                  <a:srgbClr val="2D3748"/>
+                </a:solidFill>
+              </a:rPr>
+              <a:t>MVP構築</a:t>
+            </a:r>
+            <a:endParaRPr lang="en-US" sz="1400" dirty="0"/>
+          </a:p>
+          <a:p>
+            <a:pPr indent="0" marL="0">
+              <a:lnSpc>
+                <a:spcPct val="140000"/>
+              </a:lnSpc>
+              <a:buNone/>
+            </a:pPr>
+            <a:endParaRPr lang="en-US" sz="1400" dirty="0"/>
+          </a:p>
+          <a:p>
+            <a:pPr indent="0" marL="0">
+              <a:lnSpc>
+                <a:spcPct val="140000"/>
+              </a:lnSpc>
+              <a:buNone/>
+            </a:pPr>
+            <a:r>
+              <a:rPr lang="en-US" sz="1400" dirty="0">
+                <a:solidFill>
+                  <a:srgbClr val="2D3748"/>
+                </a:solidFill>
+              </a:rPr>
+              <a:t>        </a:t>
+            </a:r>
+            <a:endParaRPr lang="en-US" sz="1400" dirty="0"/>
+          </a:p>
+          <a:p>
+            <a:pPr indent="0" marL="0">
+              <a:lnSpc>
+                <a:spcPct val="140000"/>
+              </a:lnSpc>
+              <a:buNone/>
+            </a:pPr>
+            <a:r>
+              <a:rPr lang="en-US" sz="1400" dirty="0">
+                <a:solidFill>
+                  <a:srgbClr val="2D3748"/>
+                </a:solidFill>
+              </a:rPr>
+              <a:t>要約・録音バックアップ</a:t>
+            </a:r>
+            <a:endParaRPr lang="en-US" sz="1400" dirty="0"/>
+          </a:p>
+          <a:p>
+            <a:pPr indent="0" marL="0">
+              <a:lnSpc>
+                <a:spcPct val="140000"/>
+              </a:lnSpc>
+              <a:buNone/>
+            </a:pPr>
+            <a:endParaRPr lang="en-US" sz="1400" dirty="0"/>
+          </a:p>
+          <a:p>
+            <a:pPr indent="0" marL="0">
+              <a:lnSpc>
+                <a:spcPct val="140000"/>
+              </a:lnSpc>
+              <a:buNone/>
+            </a:pPr>
+            <a:r>
+              <a:rPr lang="en-US" sz="1400" dirty="0">
+                <a:solidFill>
+                  <a:srgbClr val="2D3748"/>
+                </a:solidFill>
+              </a:rPr>
+              <a:t>      </a:t>
+            </a:r>
+            <a:endParaRPr lang="en-US" sz="1400" dirty="0"/>
+          </a:p>
+          <a:p>
+            <a:pPr indent="0" marL="0">
+              <a:lnSpc>
+                <a:spcPct val="140000"/>
+              </a:lnSpc>
+              <a:buNone/>
+            </a:pPr>
+            <a:endParaRPr lang="en-US" sz="1400" dirty="0"/>
+          </a:p>
+          <a:p>
+            <a:pPr indent="0" marL="0">
+              <a:lnSpc>
+                <a:spcPct val="140000"/>
+              </a:lnSpc>
+              <a:buNone/>
+            </a:pPr>
+            <a:r>
+              <a:rPr lang="en-US" sz="1400" dirty="0">
+                <a:solidFill>
+                  <a:srgbClr val="2D3748"/>
+                </a:solidFill>
+              </a:rPr>
+              <a:t>      </a:t>
+            </a:r>
+            <a:endParaRPr lang="en-US" sz="1400" dirty="0"/>
+          </a:p>
+          <a:p>
+            <a:pPr indent="0" marL="0">
+              <a:lnSpc>
+                <a:spcPct val="140000"/>
+              </a:lnSpc>
+              <a:buNone/>
+            </a:pPr>
+            <a:endParaRPr lang="en-US" sz="1400" dirty="0"/>
+          </a:p>
+          <a:p>
+            <a:pPr indent="0" marL="0">
+              <a:lnSpc>
+                <a:spcPct val="140000"/>
+              </a:lnSpc>
+              <a:buNone/>
+            </a:pPr>
+            <a:r>
+              <a:rPr lang="en-US" sz="1400" dirty="0">
+                <a:solidFill>
+                  <a:srgbClr val="2D3748"/>
+                </a:solidFill>
+              </a:rPr>
+              <a:t>        </a:t>
+            </a:r>
+            <a:endParaRPr lang="en-US" sz="1400" dirty="0"/>
+          </a:p>
+          <a:p>
+            <a:pPr indent="0" marL="0">
+              <a:lnSpc>
+                <a:spcPct val="140000"/>
+              </a:lnSpc>
+              <a:buNone/>
+            </a:pPr>
+            <a:r>
+              <a:rPr lang="en-US" sz="1400" dirty="0">
+                <a:solidFill>
+                  <a:srgbClr val="2D3748"/>
+                </a:solidFill>
+              </a:rPr>
+              <a:t>3</a:t>
+            </a:r>
+            <a:endParaRPr lang="en-US" sz="1400" dirty="0"/>
+          </a:p>
+          <a:p>
+            <a:pPr indent="0" marL="0">
+              <a:lnSpc>
+                <a:spcPct val="140000"/>
+              </a:lnSpc>
+              <a:buNone/>
+            </a:pPr>
+            <a:endParaRPr lang="en-US" sz="1400" dirty="0"/>
+          </a:p>
+          <a:p>
+            <a:pPr indent="0" marL="0">
+              <a:lnSpc>
+                <a:spcPct val="140000"/>
+              </a:lnSpc>
+              <a:buNone/>
+            </a:pPr>
+            <a:r>
+              <a:rPr lang="en-US" sz="1400" dirty="0">
+                <a:solidFill>
+                  <a:srgbClr val="2D3748"/>
+                </a:solidFill>
+              </a:rPr>
+              <a:t>        </a:t>
+            </a:r>
+            <a:endParaRPr lang="en-US" sz="1400" dirty="0"/>
+          </a:p>
+          <a:p>
+            <a:pPr indent="0" marL="0">
+              <a:lnSpc>
+                <a:spcPct val="140000"/>
+              </a:lnSpc>
+              <a:buNone/>
+            </a:pPr>
+            <a:r>
+              <a:rPr lang="en-US" sz="1400" dirty="0">
+                <a:solidFill>
+                  <a:srgbClr val="2D3748"/>
+                </a:solidFill>
+              </a:rPr>
+              <a:t>統合強化</a:t>
+            </a:r>
+            <a:endParaRPr lang="en-US" sz="1400" dirty="0"/>
+          </a:p>
+          <a:p>
+            <a:pPr indent="0" marL="0">
+              <a:lnSpc>
+                <a:spcPct val="140000"/>
+              </a:lnSpc>
+              <a:buNone/>
+            </a:pPr>
+            <a:endParaRPr lang="en-US" sz="1400" dirty="0"/>
+          </a:p>
+          <a:p>
+            <a:pPr indent="0" marL="0">
+              <a:lnSpc>
+                <a:spcPct val="140000"/>
+              </a:lnSpc>
+              <a:buNone/>
+            </a:pPr>
+            <a:r>
+              <a:rPr lang="en-US" sz="1400" dirty="0">
+                <a:solidFill>
+                  <a:srgbClr val="2D3748"/>
+                </a:solidFill>
+              </a:rPr>
+              <a:t>        </a:t>
+            </a:r>
+            <a:endParaRPr lang="en-US" sz="1400" dirty="0"/>
+          </a:p>
+          <a:p>
+            <a:pPr indent="0" marL="0">
+              <a:lnSpc>
+                <a:spcPct val="140000"/>
+              </a:lnSpc>
+              <a:buNone/>
+            </a:pPr>
+            <a:r>
+              <a:rPr lang="en-US" sz="1400" dirty="0">
+                <a:solidFill>
+                  <a:srgbClr val="2D3748"/>
+                </a:solidFill>
+              </a:rPr>
+              <a:t>RAG・複数回会議統合</a:t>
+            </a:r>
+            <a:endParaRPr lang="en-US" sz="1400" dirty="0"/>
+          </a:p>
+          <a:p>
+            <a:pPr indent="0" marL="0">
+              <a:lnSpc>
+                <a:spcPct val="140000"/>
+              </a:lnSpc>
+              <a:buNone/>
+            </a:pPr>
+            <a:endParaRPr lang="en-US" sz="1400" dirty="0"/>
+          </a:p>
+          <a:p>
+            <a:pPr indent="0" marL="0">
+              <a:lnSpc>
+                <a:spcPct val="140000"/>
+              </a:lnSpc>
+              <a:buNone/>
+            </a:pPr>
+            <a:r>
+              <a:rPr lang="en-US" sz="1400" dirty="0">
+                <a:solidFill>
+                  <a:srgbClr val="2D3748"/>
+                </a:solidFill>
+              </a:rPr>
+              <a:t>      </a:t>
+            </a:r>
+            <a:endParaRPr lang="en-US" sz="1400" dirty="0"/>
+          </a:p>
+          <a:p>
+            <a:pPr indent="0" marL="0">
+              <a:lnSpc>
+                <a:spcPct val="140000"/>
+              </a:lnSpc>
+              <a:buNone/>
+            </a:pPr>
+            <a:endParaRPr lang="en-US" sz="1400" dirty="0"/>
+          </a:p>
+          <a:p>
+            <a:pPr indent="0" marL="0">
+              <a:lnSpc>
+                <a:spcPct val="140000"/>
+              </a:lnSpc>
+              <a:buNone/>
+            </a:pPr>
+            <a:r>
+              <a:rPr lang="en-US" sz="1400" dirty="0">
+                <a:solidFill>
+                  <a:srgbClr val="2D3748"/>
+                </a:solidFill>
+              </a:rPr>
+              <a:t>      </a:t>
+            </a:r>
+            <a:endParaRPr lang="en-US" sz="1400" dirty="0"/>
+          </a:p>
+          <a:p>
+            <a:pPr indent="0" marL="0">
+              <a:lnSpc>
+                <a:spcPct val="140000"/>
+              </a:lnSpc>
+              <a:buNone/>
+            </a:pPr>
+            <a:endParaRPr lang="en-US" sz="1400" dirty="0"/>
+          </a:p>
+          <a:p>
+            <a:pPr indent="0" marL="0">
+              <a:lnSpc>
+                <a:spcPct val="140000"/>
+              </a:lnSpc>
+              <a:buNone/>
+            </a:pPr>
+            <a:r>
+              <a:rPr lang="en-US" sz="1400" dirty="0">
+                <a:solidFill>
+                  <a:srgbClr val="2D3748"/>
+                </a:solidFill>
+              </a:rPr>
+              <a:t>        </a:t>
+            </a:r>
+            <a:endParaRPr lang="en-US" sz="1400" dirty="0"/>
+          </a:p>
+          <a:p>
+            <a:pPr indent="0" marL="0">
+              <a:lnSpc>
+                <a:spcPct val="140000"/>
+              </a:lnSpc>
+              <a:buNone/>
+            </a:pPr>
+            <a:r>
+              <a:rPr lang="en-US" sz="1400" dirty="0">
+                <a:solidFill>
+                  <a:srgbClr val="2D3748"/>
+                </a:solidFill>
+              </a:rPr>
+              <a:t>4</a:t>
+            </a:r>
+            <a:endParaRPr lang="en-US" sz="1400" dirty="0"/>
+          </a:p>
+          <a:p>
+            <a:pPr indent="0" marL="0">
+              <a:lnSpc>
+                <a:spcPct val="140000"/>
+              </a:lnSpc>
+              <a:buNone/>
+            </a:pPr>
+            <a:endParaRPr lang="en-US" sz="1400" dirty="0"/>
+          </a:p>
+          <a:p>
+            <a:pPr indent="0" marL="0">
+              <a:lnSpc>
+                <a:spcPct val="140000"/>
+              </a:lnSpc>
+              <a:buNone/>
+            </a:pPr>
+            <a:r>
+              <a:rPr lang="en-US" sz="1400" dirty="0">
+                <a:solidFill>
+                  <a:srgbClr val="2D3748"/>
+                </a:solidFill>
+              </a:rPr>
+              <a:t>        </a:t>
+            </a:r>
+            <a:endParaRPr lang="en-US" sz="1400" dirty="0"/>
+          </a:p>
+          <a:p>
+            <a:pPr indent="0" marL="0">
+              <a:lnSpc>
+                <a:spcPct val="140000"/>
+              </a:lnSpc>
+              <a:buNone/>
+            </a:pPr>
+            <a:r>
+              <a:rPr lang="en-US" sz="1400" dirty="0">
+                <a:solidFill>
+                  <a:srgbClr val="2D3748"/>
+                </a:solidFill>
+              </a:rPr>
+              <a:t>拡張機能</a:t>
+            </a:r>
+            <a:endParaRPr lang="en-US" sz="1400" dirty="0"/>
+          </a:p>
+          <a:p>
+            <a:pPr indent="0" marL="0">
+              <a:lnSpc>
+                <a:spcPct val="140000"/>
+              </a:lnSpc>
+              <a:buNone/>
+            </a:pPr>
+            <a:endParaRPr lang="en-US" sz="1400" dirty="0"/>
+          </a:p>
+          <a:p>
+            <a:pPr indent="0" marL="0">
+              <a:lnSpc>
+                <a:spcPct val="140000"/>
+              </a:lnSpc>
+              <a:buNone/>
+            </a:pPr>
+            <a:r>
+              <a:rPr lang="en-US" sz="1400" dirty="0">
+                <a:solidFill>
+                  <a:srgbClr val="2D3748"/>
+                </a:solidFill>
+              </a:rPr>
+              <a:t>        </a:t>
+            </a:r>
+            <a:endParaRPr lang="en-US" sz="1400" dirty="0"/>
+          </a:p>
+          <a:p>
+            <a:pPr indent="0" marL="0">
+              <a:lnSpc>
+                <a:spcPct val="140000"/>
+              </a:lnSpc>
+              <a:buNone/>
+            </a:pPr>
+            <a:r>
+              <a:rPr lang="en-US" sz="1400" dirty="0">
+                <a:solidFill>
+                  <a:srgbClr val="2D3748"/>
+                </a:solidFill>
+              </a:rPr>
+              <a:t>字幕・外部連携・出力拡張</a:t>
+            </a:r>
+            <a:endParaRPr lang="en-US" sz="1400" dirty="0"/>
           </a:p>
         </p:txBody>
       </p:sp>
@@ -5179,7 +4014,7 @@
                   <a:srgbClr val="FFFFFF"/>
                 </a:solidFill>
               </a:rPr>
-              <a:t>4. 実行計画と意思決定</a:t>
+              <a:t>リスクと論点</a:t>
             </a:r>
             <a:endParaRPr lang="en-US" sz="2800" dirty="0"/>
           </a:p>
@@ -5218,7 +4053,7 @@
                   <a:srgbClr val="FFFFFF"/>
                 </a:solidFill>
               </a:rPr>
-              <a:t>段階導入でMVP成立性を検証し、Phase 2へ拡張</a:t>
+              <a:t>MVP成立を左右するコスト・インフラ・要件未確定を先に可視化する</a:t>
             </a:r>
             <a:endParaRPr lang="en-US" sz="1400" dirty="0"/>
           </a:p>
@@ -5279,7 +4114,7 @@
                   <a:srgbClr val="2D3748"/>
                 </a:solidFill>
               </a:rPr>
-              <a:t>📅 ロードマップ</a:t>
+              <a:t>⚠️ リスク評価</a:t>
             </a:r>
             <a:endParaRPr lang="en-US" sz="2800" dirty="0"/>
           </a:p>
@@ -5362,7 +4197,7 @@
                   <a:srgbClr val="2D3748"/>
                 </a:solidFill>
               </a:rPr>
-              <a:t>Must依存の解消</a:t>
+              <a:t>音声キャプチャ失敗</a:t>
             </a:r>
             <a:endParaRPr lang="en-US" sz="1300" dirty="0"/>
           </a:p>
@@ -5370,7 +4205,43 @@
       </p:sp>
       <p:sp>
         <p:nvSpPr>
-          <p:cNvPr id="6" name="Shape 4"/>
+          <p:cNvPr id="6" name="Text 4"/>
+          <p:cNvSpPr/>
+          <p:nvPr/>
+        </p:nvSpPr>
+        <p:spPr>
+          <a:xfrm>
+            <a:off x="594360" y="1645920"/>
+            <a:ext cx="3300984" cy="914400"/>
+          </a:xfrm>
+          <a:prstGeom prst="rect">
+            <a:avLst/>
+          </a:prstGeom>
+          <a:noFill/>
+          <a:ln/>
+        </p:spPr>
+        <p:txBody>
+          <a:bodyPr wrap="square" rtlCol="0" anchor="t"/>
+          <a:lstStyle/>
+          <a:p>
+            <a:pPr indent="0" marL="0">
+              <a:buNone/>
+            </a:pPr>
+            <a:r>
+              <a:rPr lang="en-US" sz="1000" dirty="0">
+                <a:solidFill>
+                  <a:srgbClr val="4A5568"/>
+                </a:solidFill>
+              </a:rPr>
+              <a:t>HIGH</a:t>
+            </a:r>
+            <a:endParaRPr lang="en-US" sz="1000" dirty="0"/>
+          </a:p>
+        </p:txBody>
+      </p:sp>
+      <p:sp>
+        <p:nvSpPr>
+          <p:cNvPr id="7" name="Shape 5"/>
           <p:cNvSpPr/>
           <p:nvPr/>
         </p:nvSpPr>
@@ -5397,7 +4268,7 @@
       </p:sp>
       <p:sp>
         <p:nvSpPr>
-          <p:cNvPr id="7" name="Shape 5"/>
+          <p:cNvPr id="8" name="Shape 6"/>
           <p:cNvSpPr/>
           <p:nvPr/>
         </p:nvSpPr>
@@ -5417,7 +4288,7 @@
       </p:sp>
       <p:sp>
         <p:nvSpPr>
-          <p:cNvPr id="8" name="Text 6"/>
+          <p:cNvPr id="9" name="Text 7"/>
           <p:cNvSpPr/>
           <p:nvPr/>
         </p:nvSpPr>
@@ -5445,7 +4316,7 @@
                   <a:srgbClr val="2D3748"/>
                 </a:solidFill>
               </a:rPr>
-              <a:t>受け入れ基準の初回検証</a:t>
+              <a:t>💡 Mitigation: ローカル録音を全会議で標準化</a:t>
             </a:r>
             <a:endParaRPr lang="en-US" sz="1300" dirty="0"/>
           </a:p>
@@ -5453,7 +4324,7 @@
       </p:sp>
       <p:sp>
         <p:nvSpPr>
-          <p:cNvPr id="9" name="Shape 7"/>
+          <p:cNvPr id="10" name="Shape 8"/>
           <p:cNvSpPr/>
           <p:nvPr/>
         </p:nvSpPr>
@@ -5480,7 +4351,7 @@
       </p:sp>
       <p:sp>
         <p:nvSpPr>
-          <p:cNvPr id="10" name="Shape 8"/>
+          <p:cNvPr id="11" name="Shape 9"/>
           <p:cNvSpPr/>
           <p:nvPr/>
         </p:nvSpPr>
@@ -5500,7 +4371,7 @@
       </p:sp>
       <p:sp>
         <p:nvSpPr>
-          <p:cNvPr id="11" name="Text 9"/>
+          <p:cNvPr id="12" name="Text 10"/>
           <p:cNvSpPr/>
           <p:nvPr/>
         </p:nvSpPr>
@@ -5528,7 +4399,7 @@
                   <a:srgbClr val="2D3748"/>
                 </a:solidFill>
               </a:rPr>
-              <a:t>未解決論点の収束</a:t>
+              <a:t>リアルタイムAPIコスト</a:t>
             </a:r>
             <a:endParaRPr lang="en-US" sz="1300" dirty="0"/>
           </a:p>
@@ -5536,7 +4407,43 @@
       </p:sp>
       <p:sp>
         <p:nvSpPr>
-          <p:cNvPr id="12" name="Shape 10"/>
+          <p:cNvPr id="13" name="Text 11"/>
+          <p:cNvSpPr/>
+          <p:nvPr/>
+        </p:nvSpPr>
+        <p:spPr>
+          <a:xfrm>
+            <a:off x="8293608" y="1645920"/>
+            <a:ext cx="3300984" cy="914400"/>
+          </a:xfrm>
+          <a:prstGeom prst="rect">
+            <a:avLst/>
+          </a:prstGeom>
+          <a:noFill/>
+          <a:ln/>
+        </p:spPr>
+        <p:txBody>
+          <a:bodyPr wrap="square" rtlCol="0" anchor="t"/>
+          <a:lstStyle/>
+          <a:p>
+            <a:pPr indent="0" marL="0">
+              <a:buNone/>
+            </a:pPr>
+            <a:r>
+              <a:rPr lang="en-US" sz="1000" dirty="0">
+                <a:solidFill>
+                  <a:srgbClr val="4A5568"/>
+                </a:solidFill>
+              </a:rPr>
+              <a:t>MED</a:t>
+            </a:r>
+            <a:endParaRPr lang="en-US" sz="1000" dirty="0"/>
+          </a:p>
+        </p:txBody>
+      </p:sp>
+      <p:sp>
+        <p:nvSpPr>
+          <p:cNvPr id="14" name="Shape 12"/>
           <p:cNvSpPr/>
           <p:nvPr/>
         </p:nvSpPr>
@@ -5563,7 +4470,7 @@
       </p:sp>
       <p:sp>
         <p:nvSpPr>
-          <p:cNvPr id="13" name="Shape 11"/>
+          <p:cNvPr id="15" name="Shape 13"/>
           <p:cNvSpPr/>
           <p:nvPr/>
         </p:nvSpPr>
@@ -5583,7 +4490,7 @@
       </p:sp>
       <p:sp>
         <p:nvSpPr>
-          <p:cNvPr id="14" name="Text 12"/>
+          <p:cNvPr id="16" name="Text 14"/>
           <p:cNvSpPr/>
           <p:nvPr/>
         </p:nvSpPr>
@@ -5611,7 +4518,209 @@
                   <a:srgbClr val="2D3748"/>
                 </a:solidFill>
               </a:rPr>
-              <a:t>Could/除外項目を再評価</a:t>
+              <a:t>💡 Mitigation: Whisper方式を代替経路として保持</a:t>
+            </a:r>
+            <a:endParaRPr lang="en-US" sz="1300" dirty="0"/>
+          </a:p>
+        </p:txBody>
+      </p:sp>
+      <p:sp>
+        <p:nvSpPr>
+          <p:cNvPr id="17" name="Shape 15"/>
+          <p:cNvSpPr/>
+          <p:nvPr/>
+        </p:nvSpPr>
+        <p:spPr>
+          <a:xfrm>
+            <a:off x="4306824" y="2834640"/>
+            <a:ext cx="3575304" cy="1463040"/>
+          </a:xfrm>
+          <a:prstGeom prst="roundRect">
+            <a:avLst>
+              <a:gd name="adj" fmla="val 6250"/>
+            </a:avLst>
+          </a:prstGeom>
+          <a:solidFill>
+            <a:srgbClr val="F7FAFC"/>
+          </a:solidFill>
+          <a:ln w="12700">
+            <a:solidFill>
+              <a:srgbClr val="764BA2"/>
+            </a:solidFill>
+            <a:prstDash val="solid"/>
+          </a:ln>
+        </p:spPr>
+      </p:sp>
+      <p:sp>
+        <p:nvSpPr>
+          <p:cNvPr id="18" name="Shape 16"/>
+          <p:cNvSpPr/>
+          <p:nvPr/>
+        </p:nvSpPr>
+        <p:spPr>
+          <a:xfrm>
+            <a:off x="4306824" y="2834640"/>
+            <a:ext cx="54864" cy="1463040"/>
+          </a:xfrm>
+          <a:prstGeom prst="rect">
+            <a:avLst/>
+          </a:prstGeom>
+          <a:solidFill>
+            <a:srgbClr val="764BA2"/>
+          </a:solidFill>
+          <a:ln/>
+        </p:spPr>
+      </p:sp>
+      <p:sp>
+        <p:nvSpPr>
+          <p:cNvPr id="19" name="Text 17"/>
+          <p:cNvSpPr/>
+          <p:nvPr/>
+        </p:nvSpPr>
+        <p:spPr>
+          <a:xfrm>
+            <a:off x="4443984" y="2926080"/>
+            <a:ext cx="3300984" cy="365760"/>
+          </a:xfrm>
+          <a:prstGeom prst="rect">
+            <a:avLst/>
+          </a:prstGeom>
+          <a:noFill/>
+          <a:ln/>
+        </p:spPr>
+        <p:txBody>
+          <a:bodyPr wrap="square" rtlCol="0" anchor="t"/>
+          <a:lstStyle/>
+          <a:p>
+            <a:pPr indent="0" marL="0">
+              <a:buNone/>
+            </a:pPr>
+            <a:r>
+              <a:rPr lang="en-US" sz="1300" b="1" dirty="0">
+                <a:solidFill>
+                  <a:srgbClr val="2D3748"/>
+                </a:solidFill>
+              </a:rPr>
+              <a:t>RAG保存先未決定</a:t>
+            </a:r>
+            <a:endParaRPr lang="en-US" sz="1300" dirty="0"/>
+          </a:p>
+        </p:txBody>
+      </p:sp>
+      <p:sp>
+        <p:nvSpPr>
+          <p:cNvPr id="20" name="Text 18"/>
+          <p:cNvSpPr/>
+          <p:nvPr/>
+        </p:nvSpPr>
+        <p:spPr>
+          <a:xfrm>
+            <a:off x="4443984" y="3291840"/>
+            <a:ext cx="3300984" cy="914400"/>
+          </a:xfrm>
+          <a:prstGeom prst="rect">
+            <a:avLst/>
+          </a:prstGeom>
+          <a:noFill/>
+          <a:ln/>
+        </p:spPr>
+        <p:txBody>
+          <a:bodyPr wrap="square" rtlCol="0" anchor="t"/>
+          <a:lstStyle/>
+          <a:p>
+            <a:pPr indent="0" marL="0">
+              <a:buNone/>
+            </a:pPr>
+            <a:r>
+              <a:rPr lang="en-US" sz="1000" dirty="0">
+                <a:solidFill>
+                  <a:srgbClr val="4A5568"/>
+                </a:solidFill>
+              </a:rPr>
+              <a:t>MED</a:t>
+            </a:r>
+            <a:endParaRPr lang="en-US" sz="1000" dirty="0"/>
+          </a:p>
+        </p:txBody>
+      </p:sp>
+      <p:sp>
+        <p:nvSpPr>
+          <p:cNvPr id="21" name="Shape 19"/>
+          <p:cNvSpPr/>
+          <p:nvPr/>
+        </p:nvSpPr>
+        <p:spPr>
+          <a:xfrm>
+            <a:off x="8156448" y="2834640"/>
+            <a:ext cx="3575304" cy="1463040"/>
+          </a:xfrm>
+          <a:prstGeom prst="roundRect">
+            <a:avLst>
+              <a:gd name="adj" fmla="val 6250"/>
+            </a:avLst>
+          </a:prstGeom>
+          <a:solidFill>
+            <a:srgbClr val="F7FAFC"/>
+          </a:solidFill>
+          <a:ln w="12700">
+            <a:solidFill>
+              <a:srgbClr val="38A169"/>
+            </a:solidFill>
+            <a:prstDash val="solid"/>
+          </a:ln>
+        </p:spPr>
+      </p:sp>
+      <p:sp>
+        <p:nvSpPr>
+          <p:cNvPr id="22" name="Shape 20"/>
+          <p:cNvSpPr/>
+          <p:nvPr/>
+        </p:nvSpPr>
+        <p:spPr>
+          <a:xfrm>
+            <a:off x="8156448" y="2834640"/>
+            <a:ext cx="54864" cy="1463040"/>
+          </a:xfrm>
+          <a:prstGeom prst="rect">
+            <a:avLst/>
+          </a:prstGeom>
+          <a:solidFill>
+            <a:srgbClr val="38A169"/>
+          </a:solidFill>
+          <a:ln/>
+        </p:spPr>
+      </p:sp>
+      <p:sp>
+        <p:nvSpPr>
+          <p:cNvPr id="23" name="Text 21"/>
+          <p:cNvSpPr/>
+          <p:nvPr/>
+        </p:nvSpPr>
+        <p:spPr>
+          <a:xfrm>
+            <a:off x="8293608" y="2926080"/>
+            <a:ext cx="3300984" cy="365760"/>
+          </a:xfrm>
+          <a:prstGeom prst="rect">
+            <a:avLst/>
+          </a:prstGeom>
+          <a:noFill/>
+          <a:ln/>
+        </p:spPr>
+        <p:txBody>
+          <a:bodyPr wrap="square" rtlCol="0" anchor="t"/>
+          <a:lstStyle/>
+          <a:p>
+            <a:pPr indent="0" marL="0">
+              <a:buNone/>
+            </a:pPr>
+            <a:r>
+              <a:rPr lang="en-US" sz="1300" b="1" dirty="0">
+                <a:solidFill>
+                  <a:srgbClr val="2D3748"/>
+                </a:solidFill>
+              </a:rPr>
+              <a:t>💡 Mitigation: 先に検索要件と保管ポリシーを固定</a:t>
             </a:r>
             <a:endParaRPr lang="en-US" sz="1300" dirty="0"/>
           </a:p>
@@ -5672,7 +4781,7 @@
                   <a:srgbClr val="2D3748"/>
                 </a:solidFill>
               </a:rPr>
-              <a:t>🧭 スコープ判断マトリクス</a:t>
+              <a:t>🧩 未解決項目の整理</a:t>
             </a:r>
             <a:endParaRPr lang="en-US" sz="2800" dirty="0"/>
           </a:p>
@@ -5755,7 +4864,7 @@
                   <a:srgbClr val="2D3748"/>
                 </a:solidFill>
               </a:rPr>
-              <a:t>✅ Quick Wins</a:t>
+              <a:t>✅ 成功指標定義</a:t>
             </a:r>
             <a:endParaRPr lang="en-US" sz="1300" dirty="0"/>
           </a:p>
@@ -5791,21 +4900,7 @@
                   <a:srgbClr val="4A5568"/>
                 </a:solidFill>
               </a:rPr>
-              <a:t>音声サマリー</a:t>
-            </a:r>
-            <a:endParaRPr lang="en-US" sz="1000" dirty="0"/>
-          </a:p>
-          <a:p>
-            <a:pPr indent="0" marL="0">
-              <a:buNone/>
-            </a:pPr>
-            <a:r>
-              <a:rPr lang="en-US" sz="1000" dirty="0">
-                <a:solidFill>
-                  <a:srgbClr val="4A5568"/>
-                </a:solidFill>
-              </a:rPr>
-              <a:t>資料生成</a:t>
+              <a:t>テンプレート有無確認</a:t>
             </a:r>
             <a:endParaRPr lang="en-US" sz="1000" dirty="0"/>
           </a:p>
@@ -5888,7 +4983,7 @@
                   <a:srgbClr val="2D3748"/>
                 </a:solidFill>
               </a:rPr>
-              <a:t>🎯 Strategic</a:t>
+              <a:t>🎯 APIコスト許容</a:t>
             </a:r>
             <a:endParaRPr lang="en-US" sz="1300" dirty="0"/>
           </a:p>
@@ -5924,7 +5019,7 @@
                   <a:srgbClr val="4A5568"/>
                 </a:solidFill>
               </a:rPr>
-              <a:t>RAG統合</a:t>
+              <a:t>RAG検索基盤</a:t>
             </a:r>
             <a:endParaRPr lang="en-US" sz="1000" dirty="0"/>
           </a:p>
@@ -5938,7 +5033,7 @@
                   <a:srgbClr val="4A5568"/>
                 </a:solidFill>
               </a:rPr>
-              <a:t>ライブ字幕</a:t>
+              <a:t>粒度/期間要件</a:t>
             </a:r>
             <a:endParaRPr lang="en-US" sz="1000" dirty="0"/>
           </a:p>
@@ -6021,7 +5116,7 @@
                   <a:srgbClr val="2D3748"/>
                 </a:solidFill>
               </a:rPr>
-              <a:t>⚡ Fill-ins</a:t>
+              <a:t>⚡ 辞書要否整理</a:t>
             </a:r>
             <a:endParaRPr lang="en-US" sz="1300" dirty="0"/>
           </a:p>
@@ -6029,43 +5124,7 @@
       </p:sp>
       <p:sp>
         <p:nvSpPr>
-          <p:cNvPr id="14" name="Text 12"/>
-          <p:cNvSpPr/>
-          <p:nvPr/>
-        </p:nvSpPr>
-        <p:spPr>
-          <a:xfrm>
-            <a:off x="8293608" y="1645920"/>
-            <a:ext cx="3300984" cy="914400"/>
-          </a:xfrm>
-          <a:prstGeom prst="rect">
-            <a:avLst/>
-          </a:prstGeom>
-          <a:noFill/>
-          <a:ln/>
-        </p:spPr>
-        <p:txBody>
-          <a:bodyPr wrap="square" rtlCol="0" anchor="t"/>
-          <a:lstStyle/>
-          <a:p>
-            <a:pPr indent="0" marL="0">
-              <a:buNone/>
-            </a:pPr>
-            <a:r>
-              <a:rPr lang="en-US" sz="1000" dirty="0">
-                <a:solidFill>
-                  <a:srgbClr val="4A5568"/>
-                </a:solidFill>
-              </a:rPr>
-              <a:t>エクスポート</a:t>
-            </a:r>
-            <a:endParaRPr lang="en-US" sz="1000" dirty="0"/>
-          </a:p>
-        </p:txBody>
-      </p:sp>
-      <p:sp>
-        <p:nvSpPr>
-          <p:cNvPr id="15" name="Shape 13"/>
+          <p:cNvPr id="14" name="Shape 12"/>
           <p:cNvSpPr/>
           <p:nvPr/>
         </p:nvSpPr>
@@ -6092,7 +5151,7 @@
       </p:sp>
       <p:sp>
         <p:nvSpPr>
-          <p:cNvPr id="16" name="Shape 14"/>
+          <p:cNvPr id="15" name="Shape 13"/>
           <p:cNvSpPr/>
           <p:nvPr/>
         </p:nvSpPr>
@@ -6112,7 +5171,7 @@
       </p:sp>
       <p:sp>
         <p:nvSpPr>
-          <p:cNvPr id="17" name="Text 15"/>
+          <p:cNvPr id="16" name="Text 14"/>
           <p:cNvSpPr/>
           <p:nvPr/>
         </p:nvSpPr>
@@ -6140,7 +5199,7 @@
                   <a:srgbClr val="2D3748"/>
                 </a:solidFill>
               </a:rPr>
-              <a:t>❌ Avoid in MVP</a:t>
+              <a:t>❌ 承認運用詳細は後続</a:t>
             </a:r>
             <a:endParaRPr lang="en-US" sz="1300" dirty="0"/>
           </a:p>
@@ -6148,14 +5207,61 @@
       </p:sp>
       <p:sp>
         <p:nvSpPr>
-          <p:cNvPr id="18" name="Text 16"/>
-          <p:cNvSpPr/>
-          <p:nvPr/>
-        </p:nvSpPr>
-        <p:spPr>
-          <a:xfrm>
-            <a:off x="594360" y="3291840"/>
-            <a:ext cx="3300984" cy="914400"/>
+          <p:cNvPr id="17" name="Shape 15"/>
+          <p:cNvSpPr/>
+          <p:nvPr/>
+        </p:nvSpPr>
+        <p:spPr>
+          <a:xfrm>
+            <a:off x="4306824" y="2834640"/>
+            <a:ext cx="3575304" cy="1463040"/>
+          </a:xfrm>
+          <a:prstGeom prst="roundRect">
+            <a:avLst>
+              <a:gd name="adj" fmla="val 6250"/>
+            </a:avLst>
+          </a:prstGeom>
+          <a:solidFill>
+            <a:srgbClr val="F7FAFC"/>
+          </a:solidFill>
+          <a:ln w="12700">
+            <a:solidFill>
+              <a:srgbClr val="764BA2"/>
+            </a:solidFill>
+            <a:prstDash val="solid"/>
+          </a:ln>
+        </p:spPr>
+      </p:sp>
+      <p:sp>
+        <p:nvSpPr>
+          <p:cNvPr id="18" name="Shape 16"/>
+          <p:cNvSpPr/>
+          <p:nvPr/>
+        </p:nvSpPr>
+        <p:spPr>
+          <a:xfrm>
+            <a:off x="4306824" y="2834640"/>
+            <a:ext cx="54864" cy="1463040"/>
+          </a:xfrm>
+          <a:prstGeom prst="rect">
+            <a:avLst/>
+          </a:prstGeom>
+          <a:solidFill>
+            <a:srgbClr val="764BA2"/>
+          </a:solidFill>
+          <a:ln/>
+        </p:spPr>
+      </p:sp>
+      <p:sp>
+        <p:nvSpPr>
+          <p:cNvPr id="19" name="Text 17"/>
+          <p:cNvSpPr/>
+          <p:nvPr/>
+        </p:nvSpPr>
+        <p:spPr>
+          <a:xfrm>
+            <a:off x="4443984" y="2926080"/>
+            <a:ext cx="3300984" cy="365760"/>
           </a:xfrm>
           <a:prstGeom prst="rect">
             <a:avLst/>
@@ -6171,28 +5277,97 @@
               <a:buNone/>
             </a:pPr>
             <a:r>
-              <a:rPr lang="en-US" sz="1000" dirty="0">
-                <a:solidFill>
-                  <a:srgbClr val="4A5568"/>
-                </a:solidFill>
-              </a:rPr>
-              <a:t>外部連携</a:t>
-            </a:r>
-            <a:endParaRPr lang="en-US" sz="1000" dirty="0"/>
-          </a:p>
-          <a:p>
-            <a:pPr indent="0" marL="0">
-              <a:buNone/>
-            </a:pPr>
-            <a:r>
-              <a:rPr lang="en-US" sz="1000" dirty="0">
-                <a:solidFill>
-                  <a:srgbClr val="4A5568"/>
-                </a:solidFill>
-              </a:rPr>
-              <a:t>承認WF</a:t>
-            </a:r>
-            <a:endParaRPr lang="en-US" sz="1000" dirty="0"/>
+              <a:rPr lang="en-US" sz="1300" b="1" dirty="0">
+                <a:solidFill>
+                  <a:srgbClr val="2D3748"/>
+                </a:solidFill>
+              </a:rPr>
+              <a:t>👥 予算算出にはユーザー数・会議数・録音時間が必要</a:t>
+            </a:r>
+            <a:endParaRPr lang="en-US" sz="1300" dirty="0"/>
+          </a:p>
+        </p:txBody>
+      </p:sp>
+      <p:sp>
+        <p:nvSpPr>
+          <p:cNvPr id="20" name="Shape 18"/>
+          <p:cNvSpPr/>
+          <p:nvPr/>
+        </p:nvSpPr>
+        <p:spPr>
+          <a:xfrm>
+            <a:off x="8156448" y="2834640"/>
+            <a:ext cx="3575304" cy="1463040"/>
+          </a:xfrm>
+          <a:prstGeom prst="roundRect">
+            <a:avLst>
+              <a:gd name="adj" fmla="val 6250"/>
+            </a:avLst>
+          </a:prstGeom>
+          <a:solidFill>
+            <a:srgbClr val="F7FAFC"/>
+          </a:solidFill>
+          <a:ln w="12700">
+            <a:solidFill>
+              <a:srgbClr val="38A169"/>
+            </a:solidFill>
+            <a:prstDash val="solid"/>
+          </a:ln>
+        </p:spPr>
+      </p:sp>
+      <p:sp>
+        <p:nvSpPr>
+          <p:cNvPr id="21" name="Shape 19"/>
+          <p:cNvSpPr/>
+          <p:nvPr/>
+        </p:nvSpPr>
+        <p:spPr>
+          <a:xfrm>
+            <a:off x="8156448" y="2834640"/>
+            <a:ext cx="54864" cy="1463040"/>
+          </a:xfrm>
+          <a:prstGeom prst="rect">
+            <a:avLst/>
+          </a:prstGeom>
+          <a:solidFill>
+            <a:srgbClr val="38A169"/>
+          </a:solidFill>
+          <a:ln/>
+        </p:spPr>
+      </p:sp>
+      <p:sp>
+        <p:nvSpPr>
+          <p:cNvPr id="22" name="Text 20"/>
+          <p:cNvSpPr/>
+          <p:nvPr/>
+        </p:nvSpPr>
+        <p:spPr>
+          <a:xfrm>
+            <a:off x="8293608" y="2926080"/>
+            <a:ext cx="3300984" cy="365760"/>
+          </a:xfrm>
+          <a:prstGeom prst="rect">
+            <a:avLst/>
+          </a:prstGeom>
+          <a:noFill/>
+          <a:ln/>
+        </p:spPr>
+        <p:txBody>
+          <a:bodyPr wrap="square" rtlCol="0" anchor="t"/>
+          <a:lstStyle/>
+          <a:p>
+            <a:pPr indent="0" marL="0">
+              <a:buNone/>
+            </a:pPr>
+            <a:r>
+              <a:rPr lang="en-US" sz="1300" b="1" dirty="0">
+                <a:solidFill>
+                  <a:srgbClr val="2D3748"/>
+                </a:solidFill>
+              </a:rPr>
+              <a:t>🌐 対応言語・専門用語辞書の必要性は早期判断</a:t>
+            </a:r>
+            <a:endParaRPr lang="en-US" sz="1300" dirty="0"/>
           </a:p>
         </p:txBody>
       </p:sp>
@@ -6251,7 +5426,7 @@
                   <a:srgbClr val="2D3748"/>
                 </a:solidFill>
               </a:rPr>
-              <a:t>🚫 MVP除外範囲</a:t>
+              <a:t>👥 主な利用者と価値提供</a:t>
             </a:r>
             <a:endParaRPr lang="en-US" sz="2800" dirty="0"/>
           </a:p>
@@ -6259,14 +5434,61 @@
       </p:sp>
       <p:sp>
         <p:nvSpPr>
-          <p:cNvPr id="3" name="Text 1"/>
-          <p:cNvSpPr/>
-          <p:nvPr/>
-        </p:nvSpPr>
-        <p:spPr>
-          <a:xfrm>
-            <a:off x="731520" y="1188720"/>
-            <a:ext cx="10725912" cy="3383280"/>
+          <p:cNvPr id="3" name="Shape 1"/>
+          <p:cNvSpPr/>
+          <p:nvPr/>
+        </p:nvSpPr>
+        <p:spPr>
+          <a:xfrm>
+            <a:off x="457200" y="1188720"/>
+            <a:ext cx="11274552" cy="1463040"/>
+          </a:xfrm>
+          <a:prstGeom prst="roundRect">
+            <a:avLst>
+              <a:gd name="adj" fmla="val 6250"/>
+            </a:avLst>
+          </a:prstGeom>
+          <a:solidFill>
+            <a:srgbClr val="F7FAFC"/>
+          </a:solidFill>
+          <a:ln w="12700">
+            <a:solidFill>
+              <a:srgbClr val="667EEA"/>
+            </a:solidFill>
+            <a:prstDash val="solid"/>
+          </a:ln>
+        </p:spPr>
+      </p:sp>
+      <p:sp>
+        <p:nvSpPr>
+          <p:cNvPr id="4" name="Shape 2"/>
+          <p:cNvSpPr/>
+          <p:nvPr/>
+        </p:nvSpPr>
+        <p:spPr>
+          <a:xfrm>
+            <a:off x="457200" y="1188720"/>
+            <a:ext cx="54864" cy="1463040"/>
+          </a:xfrm>
+          <a:prstGeom prst="rect">
+            <a:avLst/>
+          </a:prstGeom>
+          <a:solidFill>
+            <a:srgbClr val="667EEA"/>
+          </a:solidFill>
+          <a:ln/>
+        </p:spPr>
+      </p:sp>
+      <p:sp>
+        <p:nvSpPr>
+          <p:cNvPr id="5" name="Text 3"/>
+          <p:cNvSpPr/>
+          <p:nvPr/>
+        </p:nvSpPr>
+        <p:spPr>
+          <a:xfrm>
+            <a:off x="594360" y="1280160"/>
+            <a:ext cx="11000232" cy="365760"/>
           </a:xfrm>
           <a:prstGeom prst="rect">
             <a:avLst/>
@@ -6279,649 +5501,17 @@
           <a:lstStyle/>
           <a:p>
             <a:pPr indent="0" marL="0">
-              <a:lnSpc>
-                <a:spcPct val="140000"/>
-              </a:lnSpc>
-              <a:buNone/>
-            </a:pPr>
-            <a:r>
-              <a:rPr lang="en-US" sz="1400" dirty="0">
-                <a:solidFill>
-                  <a:srgbClr val="2D3748"/>
-                </a:solidFill>
-              </a:rPr>
-              <a:t>🔌</a:t>
-            </a:r>
-            <a:endParaRPr lang="en-US" sz="1400" dirty="0"/>
-          </a:p>
-          <a:p>
-            <a:pPr indent="0" marL="0">
-              <a:lnSpc>
-                <a:spcPct val="140000"/>
-              </a:lnSpc>
-              <a:buNone/>
-            </a:pPr>
-            <a:endParaRPr lang="en-US" sz="1400" dirty="0"/>
-          </a:p>
-          <a:p>
-            <a:pPr indent="0" marL="0">
-              <a:lnSpc>
-                <a:spcPct val="140000"/>
-              </a:lnSpc>
-              <a:buNone/>
-            </a:pPr>
-            <a:r>
-              <a:rPr lang="en-US" sz="1400" dirty="0">
-                <a:solidFill>
-                  <a:srgbClr val="2D3748"/>
-                </a:solidFill>
-              </a:rPr>
-              <a:t>      </a:t>
-            </a:r>
-            <a:endParaRPr lang="en-US" sz="1400" dirty="0"/>
-          </a:p>
-          <a:p>
-            <a:pPr indent="0" marL="0">
-              <a:lnSpc>
-                <a:spcPct val="140000"/>
-              </a:lnSpc>
-              <a:buNone/>
-            </a:pPr>
-            <a:r>
-              <a:rPr lang="en-US" sz="1400" dirty="0">
-                <a:solidFill>
-                  <a:srgbClr val="2D3748"/>
-                </a:solidFill>
-              </a:rPr>
-              <a:t>会議ツール連携</a:t>
-            </a:r>
-            <a:endParaRPr lang="en-US" sz="1400" dirty="0"/>
-          </a:p>
-          <a:p>
-            <a:pPr indent="0" marL="0">
-              <a:lnSpc>
-                <a:spcPct val="140000"/>
-              </a:lnSpc>
-              <a:buNone/>
-            </a:pPr>
-            <a:endParaRPr lang="en-US" sz="1400" dirty="0"/>
-          </a:p>
-          <a:p>
-            <a:pPr indent="0" marL="0">
-              <a:lnSpc>
-                <a:spcPct val="140000"/>
-              </a:lnSpc>
-              <a:buNone/>
-            </a:pPr>
-            <a:r>
-              <a:rPr lang="en-US" sz="1400" dirty="0">
-                <a:solidFill>
-                  <a:srgbClr val="2D3748"/>
-                </a:solidFill>
-              </a:rPr>
-              <a:t>      </a:t>
-            </a:r>
-            <a:endParaRPr lang="en-US" sz="1400" dirty="0"/>
-          </a:p>
-          <a:p>
-            <a:pPr indent="0" marL="0">
-              <a:lnSpc>
-                <a:spcPct val="140000"/>
-              </a:lnSpc>
-              <a:buNone/>
-            </a:pPr>
-            <a:r>
-              <a:rPr lang="en-US" sz="1400" dirty="0">
-                <a:solidFill>
-                  <a:srgbClr val="2D3748"/>
-                </a:solidFill>
-              </a:rPr>
-              <a:t>Zoom / Teams は第2フェーズ</a:t>
-            </a:r>
-            <a:endParaRPr lang="en-US" sz="1400" dirty="0"/>
-          </a:p>
-          <a:p>
-            <a:pPr indent="0" marL="0">
-              <a:lnSpc>
-                <a:spcPct val="140000"/>
-              </a:lnSpc>
-              <a:buNone/>
-            </a:pPr>
-            <a:endParaRPr lang="en-US" sz="1400" dirty="0"/>
-          </a:p>
-          <a:p>
-            <a:pPr indent="0" marL="0">
-              <a:lnSpc>
-                <a:spcPct val="140000"/>
-              </a:lnSpc>
-              <a:buNone/>
-            </a:pPr>
-            <a:r>
-              <a:rPr lang="en-US" sz="1400" dirty="0">
-                <a:solidFill>
-                  <a:srgbClr val="2D3748"/>
-                </a:solidFill>
-              </a:rPr>
-              <a:t>    </a:t>
-            </a:r>
-            <a:endParaRPr lang="en-US" sz="1400" dirty="0"/>
-          </a:p>
-          <a:p>
-            <a:pPr indent="0" marL="0">
-              <a:lnSpc>
-                <a:spcPct val="140000"/>
-              </a:lnSpc>
-              <a:buNone/>
-            </a:pPr>
-            <a:endParaRPr lang="en-US" sz="1400" dirty="0"/>
-          </a:p>
-          <a:p>
-            <a:pPr indent="0" marL="0">
-              <a:lnSpc>
-                <a:spcPct val="140000"/>
-              </a:lnSpc>
-              <a:buNone/>
-            </a:pPr>
-            <a:r>
-              <a:rPr lang="en-US" sz="1400" dirty="0">
-                <a:solidFill>
-                  <a:srgbClr val="2D3748"/>
-                </a:solidFill>
-              </a:rPr>
-              <a:t>    </a:t>
-            </a:r>
-            <a:endParaRPr lang="en-US" sz="1400" dirty="0"/>
-          </a:p>
-          <a:p>
-            <a:pPr indent="0" marL="0">
-              <a:lnSpc>
-                <a:spcPct val="140000"/>
-              </a:lnSpc>
-              <a:buNone/>
-            </a:pPr>
-            <a:endParaRPr lang="en-US" sz="1400" dirty="0"/>
-          </a:p>
-          <a:p>
-            <a:pPr indent="0" marL="0">
-              <a:lnSpc>
-                <a:spcPct val="140000"/>
-              </a:lnSpc>
-              <a:buNone/>
-            </a:pPr>
-            <a:r>
-              <a:rPr lang="en-US" sz="1400" dirty="0">
-                <a:solidFill>
-                  <a:srgbClr val="2D3748"/>
-                </a:solidFill>
-              </a:rPr>
-              <a:t>      </a:t>
-            </a:r>
-            <a:endParaRPr lang="en-US" sz="1400" dirty="0"/>
-          </a:p>
-          <a:p>
-            <a:pPr indent="0" marL="0">
-              <a:lnSpc>
-                <a:spcPct val="140000"/>
-              </a:lnSpc>
-              <a:buNone/>
-            </a:pPr>
-            <a:r>
-              <a:rPr lang="en-US" sz="1400" dirty="0">
-                <a:solidFill>
-                  <a:srgbClr val="2D3748"/>
-                </a:solidFill>
-              </a:rPr>
-              <a:t>🛒</a:t>
-            </a:r>
-            <a:endParaRPr lang="en-US" sz="1400" dirty="0"/>
-          </a:p>
-          <a:p>
-            <a:pPr indent="0" marL="0">
-              <a:lnSpc>
-                <a:spcPct val="140000"/>
-              </a:lnSpc>
-              <a:buNone/>
-            </a:pPr>
-            <a:endParaRPr lang="en-US" sz="1400" dirty="0"/>
-          </a:p>
-          <a:p>
-            <a:pPr indent="0" marL="0">
-              <a:lnSpc>
-                <a:spcPct val="140000"/>
-              </a:lnSpc>
-              <a:buNone/>
-            </a:pPr>
-            <a:r>
-              <a:rPr lang="en-US" sz="1400" dirty="0">
-                <a:solidFill>
-                  <a:srgbClr val="2D3748"/>
-                </a:solidFill>
-              </a:rPr>
-              <a:t>      </a:t>
-            </a:r>
-            <a:endParaRPr lang="en-US" sz="1400" dirty="0"/>
-          </a:p>
-          <a:p>
-            <a:pPr indent="0" marL="0">
-              <a:lnSpc>
-                <a:spcPct val="140000"/>
-              </a:lnSpc>
-              <a:buNone/>
-            </a:pPr>
-            <a:r>
-              <a:rPr lang="en-US" sz="1400" dirty="0">
-                <a:solidFill>
-                  <a:srgbClr val="2D3748"/>
-                </a:solidFill>
-              </a:rPr>
-              <a:t>EC/チケット連携</a:t>
-            </a:r>
-            <a:endParaRPr lang="en-US" sz="1400" dirty="0"/>
-          </a:p>
-          <a:p>
-            <a:pPr indent="0" marL="0">
-              <a:lnSpc>
-                <a:spcPct val="140000"/>
-              </a:lnSpc>
-              <a:buNone/>
-            </a:pPr>
-            <a:endParaRPr lang="en-US" sz="1400" dirty="0"/>
-          </a:p>
-          <a:p>
-            <a:pPr indent="0" marL="0">
-              <a:lnSpc>
-                <a:spcPct val="140000"/>
-              </a:lnSpc>
-              <a:buNone/>
-            </a:pPr>
-            <a:r>
-              <a:rPr lang="en-US" sz="1400" dirty="0">
-                <a:solidFill>
-                  <a:srgbClr val="2D3748"/>
-                </a:solidFill>
-              </a:rPr>
-              <a:t>      </a:t>
-            </a:r>
-            <a:endParaRPr lang="en-US" sz="1400" dirty="0"/>
-          </a:p>
-          <a:p>
-            <a:pPr indent="0" marL="0">
-              <a:lnSpc>
-                <a:spcPct val="140000"/>
-              </a:lnSpc>
-              <a:buNone/>
-            </a:pPr>
-            <a:r>
-              <a:rPr lang="en-US" sz="1400" dirty="0">
-                <a:solidFill>
-                  <a:srgbClr val="2D3748"/>
-                </a:solidFill>
-              </a:rPr>
-              <a:t>初期フェーズでは対象外</a:t>
-            </a:r>
-            <a:endParaRPr lang="en-US" sz="1400" dirty="0"/>
-          </a:p>
-          <a:p>
-            <a:pPr indent="0" marL="0">
-              <a:lnSpc>
-                <a:spcPct val="140000"/>
-              </a:lnSpc>
-              <a:buNone/>
-            </a:pPr>
-            <a:endParaRPr lang="en-US" sz="1400" dirty="0"/>
-          </a:p>
-          <a:p>
-            <a:pPr indent="0" marL="0">
-              <a:lnSpc>
-                <a:spcPct val="140000"/>
-              </a:lnSpc>
-              <a:buNone/>
-            </a:pPr>
-            <a:r>
-              <a:rPr lang="en-US" sz="1400" dirty="0">
-                <a:solidFill>
-                  <a:srgbClr val="2D3748"/>
-                </a:solidFill>
-              </a:rPr>
-              <a:t>    </a:t>
-            </a:r>
-            <a:endParaRPr lang="en-US" sz="1400" dirty="0"/>
-          </a:p>
-          <a:p>
-            <a:pPr indent="0" marL="0">
-              <a:lnSpc>
-                <a:spcPct val="140000"/>
-              </a:lnSpc>
-              <a:buNone/>
-            </a:pPr>
-            <a:endParaRPr lang="en-US" sz="1400" dirty="0"/>
-          </a:p>
-          <a:p>
-            <a:pPr indent="0" marL="0">
-              <a:lnSpc>
-                <a:spcPct val="140000"/>
-              </a:lnSpc>
-              <a:buNone/>
-            </a:pPr>
-            <a:r>
-              <a:rPr lang="en-US" sz="1400" dirty="0">
-                <a:solidFill>
-                  <a:srgbClr val="2D3748"/>
-                </a:solidFill>
-              </a:rPr>
-              <a:t>    </a:t>
-            </a:r>
-            <a:endParaRPr lang="en-US" sz="1400" dirty="0"/>
-          </a:p>
-          <a:p>
-            <a:pPr indent="0" marL="0">
-              <a:lnSpc>
-                <a:spcPct val="140000"/>
-              </a:lnSpc>
-              <a:buNone/>
-            </a:pPr>
-            <a:endParaRPr lang="en-US" sz="1400" dirty="0"/>
-          </a:p>
-          <a:p>
-            <a:pPr indent="0" marL="0">
-              <a:lnSpc>
-                <a:spcPct val="140000"/>
-              </a:lnSpc>
-              <a:buNone/>
-            </a:pPr>
-            <a:r>
-              <a:rPr lang="en-US" sz="1400" dirty="0">
-                <a:solidFill>
-                  <a:srgbClr val="2D3748"/>
-                </a:solidFill>
-              </a:rPr>
-              <a:t>      </a:t>
-            </a:r>
-            <a:endParaRPr lang="en-US" sz="1400" dirty="0"/>
-          </a:p>
-          <a:p>
-            <a:pPr indent="0" marL="0">
-              <a:lnSpc>
-                <a:spcPct val="140000"/>
-              </a:lnSpc>
-              <a:buNone/>
-            </a:pPr>
-            <a:r>
-              <a:rPr lang="en-US" sz="1400" dirty="0">
-                <a:solidFill>
-                  <a:srgbClr val="2D3748"/>
-                </a:solidFill>
-              </a:rPr>
-              <a:t>🧾</a:t>
-            </a:r>
-            <a:endParaRPr lang="en-US" sz="1400" dirty="0"/>
-          </a:p>
-          <a:p>
-            <a:pPr indent="0" marL="0">
-              <a:lnSpc>
-                <a:spcPct val="140000"/>
-              </a:lnSpc>
-              <a:buNone/>
-            </a:pPr>
-            <a:endParaRPr lang="en-US" sz="1400" dirty="0"/>
-          </a:p>
-          <a:p>
-            <a:pPr indent="0" marL="0">
-              <a:lnSpc>
-                <a:spcPct val="140000"/>
-              </a:lnSpc>
-              <a:buNone/>
-            </a:pPr>
-            <a:r>
-              <a:rPr lang="en-US" sz="1400" dirty="0">
-                <a:solidFill>
-                  <a:srgbClr val="2D3748"/>
-                </a:solidFill>
-              </a:rPr>
-              <a:t>      </a:t>
-            </a:r>
-            <a:endParaRPr lang="en-US" sz="1400" dirty="0"/>
-          </a:p>
-          <a:p>
-            <a:pPr indent="0" marL="0">
-              <a:lnSpc>
-                <a:spcPct val="140000"/>
-              </a:lnSpc>
-              <a:buNone/>
-            </a:pPr>
-            <a:r>
-              <a:rPr lang="en-US" sz="1400" dirty="0">
-                <a:solidFill>
-                  <a:srgbClr val="2D3748"/>
-                </a:solidFill>
-              </a:rPr>
-              <a:t>承認・権限・監査</a:t>
-            </a:r>
-            <a:endParaRPr lang="en-US" sz="1400" dirty="0"/>
-          </a:p>
-          <a:p>
-            <a:pPr indent="0" marL="0">
-              <a:lnSpc>
-                <a:spcPct val="140000"/>
-              </a:lnSpc>
-              <a:buNone/>
-            </a:pPr>
-            <a:endParaRPr lang="en-US" sz="1400" dirty="0"/>
-          </a:p>
-          <a:p>
-            <a:pPr indent="0" marL="0">
-              <a:lnSpc>
-                <a:spcPct val="140000"/>
-              </a:lnSpc>
-              <a:buNone/>
-            </a:pPr>
-            <a:r>
-              <a:rPr lang="en-US" sz="1400" dirty="0">
-                <a:solidFill>
-                  <a:srgbClr val="2D3748"/>
-                </a:solidFill>
-              </a:rPr>
-              <a:t>      </a:t>
-            </a:r>
-            <a:endParaRPr lang="en-US" sz="1400" dirty="0"/>
-          </a:p>
-          <a:p>
-            <a:pPr indent="0" marL="0">
-              <a:lnSpc>
-                <a:spcPct val="140000"/>
-              </a:lnSpc>
-              <a:buNone/>
-            </a:pPr>
-            <a:r>
-              <a:rPr lang="en-US" sz="1400" dirty="0">
-                <a:solidFill>
-                  <a:srgbClr val="2D3748"/>
-                </a:solidFill>
-              </a:rPr>
-              <a:t>運用統制は後続整備</a:t>
-            </a:r>
-            <a:endParaRPr lang="en-US" sz="1400" dirty="0"/>
-          </a:p>
-          <a:p>
-            <a:pPr indent="0" marL="0">
-              <a:lnSpc>
-                <a:spcPct val="140000"/>
-              </a:lnSpc>
-              <a:buNone/>
-            </a:pPr>
-            <a:endParaRPr lang="en-US" sz="1400" dirty="0"/>
-          </a:p>
-          <a:p>
-            <a:pPr indent="0" marL="0">
-              <a:lnSpc>
-                <a:spcPct val="140000"/>
-              </a:lnSpc>
-              <a:buNone/>
-            </a:pPr>
-            <a:r>
-              <a:rPr lang="en-US" sz="1400" dirty="0">
-                <a:solidFill>
-                  <a:srgbClr val="2D3748"/>
-                </a:solidFill>
-              </a:rPr>
-              <a:t>    </a:t>
-            </a:r>
-            <a:endParaRPr lang="en-US" sz="1400" dirty="0"/>
-          </a:p>
-          <a:p>
-            <a:pPr indent="0" marL="0">
-              <a:lnSpc>
-                <a:spcPct val="140000"/>
-              </a:lnSpc>
-              <a:buNone/>
-            </a:pPr>
-            <a:endParaRPr lang="en-US" sz="1400" dirty="0"/>
-          </a:p>
-          <a:p>
-            <a:pPr indent="0" marL="0">
-              <a:lnSpc>
-                <a:spcPct val="140000"/>
-              </a:lnSpc>
-              <a:buNone/>
-            </a:pPr>
-            <a:r>
-              <a:rPr lang="en-US" sz="1400" dirty="0">
-                <a:solidFill>
-                  <a:srgbClr val="2D3748"/>
-                </a:solidFill>
-              </a:rPr>
-              <a:t>    </a:t>
-            </a:r>
-            <a:endParaRPr lang="en-US" sz="1400" dirty="0"/>
-          </a:p>
-          <a:p>
-            <a:pPr indent="0" marL="0">
-              <a:lnSpc>
-                <a:spcPct val="140000"/>
-              </a:lnSpc>
-              <a:buNone/>
-            </a:pPr>
-            <a:endParaRPr lang="en-US" sz="1400" dirty="0"/>
-          </a:p>
-          <a:p>
-            <a:pPr indent="0" marL="0">
-              <a:lnSpc>
-                <a:spcPct val="140000"/>
-              </a:lnSpc>
-              <a:buNone/>
-            </a:pPr>
-            <a:r>
-              <a:rPr lang="en-US" sz="1400" dirty="0">
-                <a:solidFill>
-                  <a:srgbClr val="2D3748"/>
-                </a:solidFill>
-              </a:rPr>
-              <a:t>      </a:t>
-            </a:r>
-            <a:endParaRPr lang="en-US" sz="1400" dirty="0"/>
-          </a:p>
-          <a:p>
-            <a:pPr indent="0" marL="0">
-              <a:lnSpc>
-                <a:spcPct val="140000"/>
-              </a:lnSpc>
-              <a:buNone/>
-            </a:pPr>
-            <a:r>
-              <a:rPr lang="en-US" sz="1400" dirty="0">
-                <a:solidFill>
-                  <a:srgbClr val="2D3748"/>
-                </a:solidFill>
-              </a:rPr>
-              <a:t>📚</a:t>
-            </a:r>
-            <a:endParaRPr lang="en-US" sz="1400" dirty="0"/>
-          </a:p>
-          <a:p>
-            <a:pPr indent="0" marL="0">
-              <a:lnSpc>
-                <a:spcPct val="140000"/>
-              </a:lnSpc>
-              <a:buNone/>
-            </a:pPr>
-            <a:endParaRPr lang="en-US" sz="1400" dirty="0"/>
-          </a:p>
-          <a:p>
-            <a:pPr indent="0" marL="0">
-              <a:lnSpc>
-                <a:spcPct val="140000"/>
-              </a:lnSpc>
-              <a:buNone/>
-            </a:pPr>
-            <a:r>
-              <a:rPr lang="en-US" sz="1400" dirty="0">
-                <a:solidFill>
-                  <a:srgbClr val="2D3748"/>
-                </a:solidFill>
-              </a:rPr>
-              <a:t>      </a:t>
-            </a:r>
-            <a:endParaRPr lang="en-US" sz="1400" dirty="0"/>
-          </a:p>
-          <a:p>
-            <a:pPr indent="0" marL="0">
-              <a:lnSpc>
-                <a:spcPct val="140000"/>
-              </a:lnSpc>
-              <a:buNone/>
-            </a:pPr>
-            <a:r>
-              <a:rPr lang="en-US" sz="1400" dirty="0">
-                <a:solidFill>
-                  <a:srgbClr val="2D3748"/>
-                </a:solidFill>
-              </a:rPr>
-              <a:t>テンプレ運用体制</a:t>
-            </a:r>
-            <a:endParaRPr lang="en-US" sz="1400" dirty="0"/>
-          </a:p>
-          <a:p>
-            <a:pPr indent="0" marL="0">
-              <a:lnSpc>
-                <a:spcPct val="140000"/>
-              </a:lnSpc>
-              <a:buNone/>
-            </a:pPr>
-            <a:endParaRPr lang="en-US" sz="1400" dirty="0"/>
-          </a:p>
-          <a:p>
-            <a:pPr indent="0" marL="0">
-              <a:lnSpc>
-                <a:spcPct val="140000"/>
-              </a:lnSpc>
-              <a:buNone/>
-            </a:pPr>
-            <a:r>
-              <a:rPr lang="en-US" sz="1400" dirty="0">
-                <a:solidFill>
-                  <a:srgbClr val="2D3748"/>
-                </a:solidFill>
-              </a:rPr>
-              <a:t>      </a:t>
-            </a:r>
-            <a:endParaRPr lang="en-US" sz="1400" dirty="0"/>
-          </a:p>
-          <a:p>
-            <a:pPr indent="0" marL="0">
-              <a:lnSpc>
-                <a:spcPct val="140000"/>
-              </a:lnSpc>
-              <a:buNone/>
-            </a:pPr>
-            <a:r>
-              <a:rPr lang="en-US" sz="1400" dirty="0">
-                <a:solidFill>
-                  <a:srgbClr val="2D3748"/>
-                </a:solidFill>
-              </a:rPr>
-              <a:t>詳細策定は別トラック</a:t>
-            </a:r>
-            <a:endParaRPr lang="en-US" sz="1400" dirty="0"/>
+              <a:buNone/>
+            </a:pPr>
+            <a:r>
+              <a:rPr lang="en-US" sz="1300" b="1" dirty="0">
+                <a:solidFill>
+                  <a:srgbClr val="2D3748"/>
+                </a:solidFill>
+              </a:rPr>
+              <a:t>🧑‍💼</a:t>
+            </a:r>
+            <a:endParaRPr lang="en-US" sz="1300" dirty="0"/>
           </a:p>
         </p:txBody>
       </p:sp>
@@ -6936,1097 +5526,6 @@
 <file path=ppt/slides/slide18.xml><?xml version="1.0" encoding="utf-8"?>
 <p:sld xmlns:a="http://schemas.openxmlformats.org/drawingml/2006/main" xmlns:r="http://schemas.openxmlformats.org/officeDocument/2006/relationships" xmlns:p="http://schemas.openxmlformats.org/presentationml/2006/main">
   <p:cSld name="Slide 18">
-    <p:spTree>
-      <p:nvGrpSpPr>
-        <p:cNvPr id="1" name=""/>
-        <p:cNvGrpSpPr/>
-        <p:nvPr/>
-      </p:nvGrpSpPr>
-      <p:grpSpPr>
-        <a:xfrm>
-          <a:off x="0" y="0"/>
-          <a:ext cx="0" cy="0"/>
-          <a:chOff x="0" y="0"/>
-          <a:chExt cx="0" cy="0"/>
-        </a:xfrm>
-      </p:grpSpPr>
-      <p:sp>
-        <p:nvSpPr>
-          <p:cNvPr id="2" name="Text 0"/>
-          <p:cNvSpPr/>
-          <p:nvPr/>
-        </p:nvSpPr>
-        <p:spPr>
-          <a:xfrm>
-            <a:off x="457200" y="365760"/>
-            <a:ext cx="11274552" cy="731520"/>
-          </a:xfrm>
-          <a:prstGeom prst="rect">
-            <a:avLst/>
-          </a:prstGeom>
-          <a:noFill/>
-          <a:ln/>
-        </p:spPr>
-        <p:txBody>
-          <a:bodyPr wrap="square" rtlCol="0" anchor="ctr"/>
-          <a:lstStyle/>
-          <a:p>
-            <a:pPr algn="ctr" indent="0" marL="0">
-              <a:buNone/>
-            </a:pPr>
-            <a:r>
-              <a:rPr lang="en-US" sz="2800" b="1" dirty="0">
-                <a:solidFill>
-                  <a:srgbClr val="2D3748"/>
-                </a:solidFill>
-              </a:rPr>
-              <a:t>❓ 未解決論点</a:t>
-            </a:r>
-            <a:endParaRPr lang="en-US" sz="2800" dirty="0"/>
-          </a:p>
-        </p:txBody>
-      </p:sp>
-      <p:sp>
-        <p:nvSpPr>
-          <p:cNvPr id="3" name="Text 1"/>
-          <p:cNvSpPr/>
-          <p:nvPr/>
-        </p:nvSpPr>
-        <p:spPr>
-          <a:xfrm>
-            <a:off x="731520" y="1188720"/>
-            <a:ext cx="10725912" cy="3383280"/>
-          </a:xfrm>
-          <a:prstGeom prst="rect">
-            <a:avLst/>
-          </a:prstGeom>
-          <a:noFill/>
-          <a:ln/>
-        </p:spPr>
-        <p:txBody>
-          <a:bodyPr wrap="square" rtlCol="0" anchor="t"/>
-          <a:lstStyle/>
-          <a:p>
-            <a:pPr indent="0" marL="0">
-              <a:lnSpc>
-                <a:spcPct val="140000"/>
-              </a:lnSpc>
-              <a:buNone/>
-            </a:pPr>
-            <a:r>
-              <a:rPr lang="en-US" sz="1400" dirty="0">
-                <a:solidFill>
-                  <a:srgbClr val="2D3748"/>
-                </a:solidFill>
-              </a:rPr>
-              <a:t>💰</a:t>
-            </a:r>
-            <a:endParaRPr lang="en-US" sz="1400" dirty="0"/>
-          </a:p>
-          <a:p>
-            <a:pPr indent="0" marL="0">
-              <a:lnSpc>
-                <a:spcPct val="140000"/>
-              </a:lnSpc>
-              <a:buNone/>
-            </a:pPr>
-            <a:endParaRPr lang="en-US" sz="1400" dirty="0"/>
-          </a:p>
-          <a:p>
-            <a:pPr indent="0" marL="0">
-              <a:lnSpc>
-                <a:spcPct val="140000"/>
-              </a:lnSpc>
-              <a:buNone/>
-            </a:pPr>
-            <a:r>
-              <a:rPr lang="en-US" sz="1400" dirty="0">
-                <a:solidFill>
-                  <a:srgbClr val="2D3748"/>
-                </a:solidFill>
-              </a:rPr>
-              <a:t>      </a:t>
-            </a:r>
-            <a:endParaRPr lang="en-US" sz="1400" dirty="0"/>
-          </a:p>
-          <a:p>
-            <a:pPr indent="0" marL="0">
-              <a:lnSpc>
-                <a:spcPct val="140000"/>
-              </a:lnSpc>
-              <a:buNone/>
-            </a:pPr>
-            <a:r>
-              <a:rPr lang="en-US" sz="1400" dirty="0">
-                <a:solidFill>
-                  <a:srgbClr val="2D3748"/>
-                </a:solidFill>
-              </a:rPr>
-              <a:t>リアルタイムAPI費用</a:t>
-            </a:r>
-            <a:endParaRPr lang="en-US" sz="1400" dirty="0"/>
-          </a:p>
-          <a:p>
-            <a:pPr indent="0" marL="0">
-              <a:lnSpc>
-                <a:spcPct val="140000"/>
-              </a:lnSpc>
-              <a:buNone/>
-            </a:pPr>
-            <a:endParaRPr lang="en-US" sz="1400" dirty="0"/>
-          </a:p>
-          <a:p>
-            <a:pPr indent="0" marL="0">
-              <a:lnSpc>
-                <a:spcPct val="140000"/>
-              </a:lnSpc>
-              <a:buNone/>
-            </a:pPr>
-            <a:r>
-              <a:rPr lang="en-US" sz="1400" dirty="0">
-                <a:solidFill>
-                  <a:srgbClr val="2D3748"/>
-                </a:solidFill>
-              </a:rPr>
-              <a:t>      </a:t>
-            </a:r>
-            <a:endParaRPr lang="en-US" sz="1400" dirty="0"/>
-          </a:p>
-          <a:p>
-            <a:pPr indent="0" marL="0">
-              <a:lnSpc>
-                <a:spcPct val="140000"/>
-              </a:lnSpc>
-              <a:buNone/>
-            </a:pPr>
-            <a:r>
-              <a:rPr lang="en-US" sz="1400" dirty="0">
-                <a:solidFill>
-                  <a:srgbClr val="2D3748"/>
-                </a:solidFill>
-              </a:rPr>
-              <a:t>継続許容額の設定</a:t>
-            </a:r>
-            <a:endParaRPr lang="en-US" sz="1400" dirty="0"/>
-          </a:p>
-          <a:p>
-            <a:pPr indent="0" marL="0">
-              <a:lnSpc>
-                <a:spcPct val="140000"/>
-              </a:lnSpc>
-              <a:buNone/>
-            </a:pPr>
-            <a:endParaRPr lang="en-US" sz="1400" dirty="0"/>
-          </a:p>
-          <a:p>
-            <a:pPr indent="0" marL="0">
-              <a:lnSpc>
-                <a:spcPct val="140000"/>
-              </a:lnSpc>
-              <a:buNone/>
-            </a:pPr>
-            <a:r>
-              <a:rPr lang="en-US" sz="1400" dirty="0">
-                <a:solidFill>
-                  <a:srgbClr val="2D3748"/>
-                </a:solidFill>
-              </a:rPr>
-              <a:t>    </a:t>
-            </a:r>
-            <a:endParaRPr lang="en-US" sz="1400" dirty="0"/>
-          </a:p>
-          <a:p>
-            <a:pPr indent="0" marL="0">
-              <a:lnSpc>
-                <a:spcPct val="140000"/>
-              </a:lnSpc>
-              <a:buNone/>
-            </a:pPr>
-            <a:endParaRPr lang="en-US" sz="1400" dirty="0"/>
-          </a:p>
-          <a:p>
-            <a:pPr indent="0" marL="0">
-              <a:lnSpc>
-                <a:spcPct val="140000"/>
-              </a:lnSpc>
-              <a:buNone/>
-            </a:pPr>
-            <a:r>
-              <a:rPr lang="en-US" sz="1400" dirty="0">
-                <a:solidFill>
-                  <a:srgbClr val="2D3748"/>
-                </a:solidFill>
-              </a:rPr>
-              <a:t>    </a:t>
-            </a:r>
-            <a:endParaRPr lang="en-US" sz="1400" dirty="0"/>
-          </a:p>
-          <a:p>
-            <a:pPr indent="0" marL="0">
-              <a:lnSpc>
-                <a:spcPct val="140000"/>
-              </a:lnSpc>
-              <a:buNone/>
-            </a:pPr>
-            <a:endParaRPr lang="en-US" sz="1400" dirty="0"/>
-          </a:p>
-          <a:p>
-            <a:pPr indent="0" marL="0">
-              <a:lnSpc>
-                <a:spcPct val="140000"/>
-              </a:lnSpc>
-              <a:buNone/>
-            </a:pPr>
-            <a:r>
-              <a:rPr lang="en-US" sz="1400" dirty="0">
-                <a:solidFill>
-                  <a:srgbClr val="2D3748"/>
-                </a:solidFill>
-              </a:rPr>
-              <a:t>      </a:t>
-            </a:r>
-            <a:endParaRPr lang="en-US" sz="1400" dirty="0"/>
-          </a:p>
-          <a:p>
-            <a:pPr indent="0" marL="0">
-              <a:lnSpc>
-                <a:spcPct val="140000"/>
-              </a:lnSpc>
-              <a:buNone/>
-            </a:pPr>
-            <a:r>
-              <a:rPr lang="en-US" sz="1400" dirty="0">
-                <a:solidFill>
-                  <a:srgbClr val="2D3748"/>
-                </a:solidFill>
-              </a:rPr>
-              <a:t>🗂️</a:t>
-            </a:r>
-            <a:endParaRPr lang="en-US" sz="1400" dirty="0"/>
-          </a:p>
-          <a:p>
-            <a:pPr indent="0" marL="0">
-              <a:lnSpc>
-                <a:spcPct val="140000"/>
-              </a:lnSpc>
-              <a:buNone/>
-            </a:pPr>
-            <a:endParaRPr lang="en-US" sz="1400" dirty="0"/>
-          </a:p>
-          <a:p>
-            <a:pPr indent="0" marL="0">
-              <a:lnSpc>
-                <a:spcPct val="140000"/>
-              </a:lnSpc>
-              <a:buNone/>
-            </a:pPr>
-            <a:r>
-              <a:rPr lang="en-US" sz="1400" dirty="0">
-                <a:solidFill>
-                  <a:srgbClr val="2D3748"/>
-                </a:solidFill>
-              </a:rPr>
-              <a:t>      </a:t>
-            </a:r>
-            <a:endParaRPr lang="en-US" sz="1400" dirty="0"/>
-          </a:p>
-          <a:p>
-            <a:pPr indent="0" marL="0">
-              <a:lnSpc>
-                <a:spcPct val="140000"/>
-              </a:lnSpc>
-              <a:buNone/>
-            </a:pPr>
-            <a:r>
-              <a:rPr lang="en-US" sz="1400" dirty="0">
-                <a:solidFill>
-                  <a:srgbClr val="2D3748"/>
-                </a:solidFill>
-              </a:rPr>
-              <a:t>RAG保存先</a:t>
-            </a:r>
-            <a:endParaRPr lang="en-US" sz="1400" dirty="0"/>
-          </a:p>
-          <a:p>
-            <a:pPr indent="0" marL="0">
-              <a:lnSpc>
-                <a:spcPct val="140000"/>
-              </a:lnSpc>
-              <a:buNone/>
-            </a:pPr>
-            <a:endParaRPr lang="en-US" sz="1400" dirty="0"/>
-          </a:p>
-          <a:p>
-            <a:pPr indent="0" marL="0">
-              <a:lnSpc>
-                <a:spcPct val="140000"/>
-              </a:lnSpc>
-              <a:buNone/>
-            </a:pPr>
-            <a:r>
-              <a:rPr lang="en-US" sz="1400" dirty="0">
-                <a:solidFill>
-                  <a:srgbClr val="2D3748"/>
-                </a:solidFill>
-              </a:rPr>
-              <a:t>      </a:t>
-            </a:r>
-            <a:endParaRPr lang="en-US" sz="1400" dirty="0"/>
-          </a:p>
-          <a:p>
-            <a:pPr indent="0" marL="0">
-              <a:lnSpc>
-                <a:spcPct val="140000"/>
-              </a:lnSpc>
-              <a:buNone/>
-            </a:pPr>
-            <a:r>
-              <a:rPr lang="en-US" sz="1400" dirty="0">
-                <a:solidFill>
-                  <a:srgbClr val="2D3748"/>
-                </a:solidFill>
-              </a:rPr>
-              <a:t>クラウド/オンプレ比較</a:t>
-            </a:r>
-            <a:endParaRPr lang="en-US" sz="1400" dirty="0"/>
-          </a:p>
-          <a:p>
-            <a:pPr indent="0" marL="0">
-              <a:lnSpc>
-                <a:spcPct val="140000"/>
-              </a:lnSpc>
-              <a:buNone/>
-            </a:pPr>
-            <a:endParaRPr lang="en-US" sz="1400" dirty="0"/>
-          </a:p>
-          <a:p>
-            <a:pPr indent="0" marL="0">
-              <a:lnSpc>
-                <a:spcPct val="140000"/>
-              </a:lnSpc>
-              <a:buNone/>
-            </a:pPr>
-            <a:r>
-              <a:rPr lang="en-US" sz="1400" dirty="0">
-                <a:solidFill>
-                  <a:srgbClr val="2D3748"/>
-                </a:solidFill>
-              </a:rPr>
-              <a:t>    </a:t>
-            </a:r>
-            <a:endParaRPr lang="en-US" sz="1400" dirty="0"/>
-          </a:p>
-          <a:p>
-            <a:pPr indent="0" marL="0">
-              <a:lnSpc>
-                <a:spcPct val="140000"/>
-              </a:lnSpc>
-              <a:buNone/>
-            </a:pPr>
-            <a:endParaRPr lang="en-US" sz="1400" dirty="0"/>
-          </a:p>
-          <a:p>
-            <a:pPr indent="0" marL="0">
-              <a:lnSpc>
-                <a:spcPct val="140000"/>
-              </a:lnSpc>
-              <a:buNone/>
-            </a:pPr>
-            <a:r>
-              <a:rPr lang="en-US" sz="1400" dirty="0">
-                <a:solidFill>
-                  <a:srgbClr val="2D3748"/>
-                </a:solidFill>
-              </a:rPr>
-              <a:t>    </a:t>
-            </a:r>
-            <a:endParaRPr lang="en-US" sz="1400" dirty="0"/>
-          </a:p>
-          <a:p>
-            <a:pPr indent="0" marL="0">
-              <a:lnSpc>
-                <a:spcPct val="140000"/>
-              </a:lnSpc>
-              <a:buNone/>
-            </a:pPr>
-            <a:endParaRPr lang="en-US" sz="1400" dirty="0"/>
-          </a:p>
-          <a:p>
-            <a:pPr indent="0" marL="0">
-              <a:lnSpc>
-                <a:spcPct val="140000"/>
-              </a:lnSpc>
-              <a:buNone/>
-            </a:pPr>
-            <a:r>
-              <a:rPr lang="en-US" sz="1400" dirty="0">
-                <a:solidFill>
-                  <a:srgbClr val="2D3748"/>
-                </a:solidFill>
-              </a:rPr>
-              <a:t>      </a:t>
-            </a:r>
-            <a:endParaRPr lang="en-US" sz="1400" dirty="0"/>
-          </a:p>
-          <a:p>
-            <a:pPr indent="0" marL="0">
-              <a:lnSpc>
-                <a:spcPct val="140000"/>
-              </a:lnSpc>
-              <a:buNone/>
-            </a:pPr>
-            <a:r>
-              <a:rPr lang="en-US" sz="1400" dirty="0">
-                <a:solidFill>
-                  <a:srgbClr val="2D3748"/>
-                </a:solidFill>
-              </a:rPr>
-              <a:t>🧾</a:t>
-            </a:r>
-            <a:endParaRPr lang="en-US" sz="1400" dirty="0"/>
-          </a:p>
-          <a:p>
-            <a:pPr indent="0" marL="0">
-              <a:lnSpc>
-                <a:spcPct val="140000"/>
-              </a:lnSpc>
-              <a:buNone/>
-            </a:pPr>
-            <a:endParaRPr lang="en-US" sz="1400" dirty="0"/>
-          </a:p>
-          <a:p>
-            <a:pPr indent="0" marL="0">
-              <a:lnSpc>
-                <a:spcPct val="140000"/>
-              </a:lnSpc>
-              <a:buNone/>
-            </a:pPr>
-            <a:r>
-              <a:rPr lang="en-US" sz="1400" dirty="0">
-                <a:solidFill>
-                  <a:srgbClr val="2D3748"/>
-                </a:solidFill>
-              </a:rPr>
-              <a:t>      </a:t>
-            </a:r>
-            <a:endParaRPr lang="en-US" sz="1400" dirty="0"/>
-          </a:p>
-          <a:p>
-            <a:pPr indent="0" marL="0">
-              <a:lnSpc>
-                <a:spcPct val="140000"/>
-              </a:lnSpc>
-              <a:buNone/>
-            </a:pPr>
-            <a:r>
-              <a:rPr lang="en-US" sz="1400" dirty="0">
-                <a:solidFill>
-                  <a:srgbClr val="2D3748"/>
-                </a:solidFill>
-              </a:rPr>
-              <a:t>出力粒度・期間指定</a:t>
-            </a:r>
-            <a:endParaRPr lang="en-US" sz="1400" dirty="0"/>
-          </a:p>
-          <a:p>
-            <a:pPr indent="0" marL="0">
-              <a:lnSpc>
-                <a:spcPct val="140000"/>
-              </a:lnSpc>
-              <a:buNone/>
-            </a:pPr>
-            <a:endParaRPr lang="en-US" sz="1400" dirty="0"/>
-          </a:p>
-          <a:p>
-            <a:pPr indent="0" marL="0">
-              <a:lnSpc>
-                <a:spcPct val="140000"/>
-              </a:lnSpc>
-              <a:buNone/>
-            </a:pPr>
-            <a:r>
-              <a:rPr lang="en-US" sz="1400" dirty="0">
-                <a:solidFill>
-                  <a:srgbClr val="2D3748"/>
-                </a:solidFill>
-              </a:rPr>
-              <a:t>      </a:t>
-            </a:r>
-            <a:endParaRPr lang="en-US" sz="1400" dirty="0"/>
-          </a:p>
-          <a:p>
-            <a:pPr indent="0" marL="0">
-              <a:lnSpc>
-                <a:spcPct val="140000"/>
-              </a:lnSpc>
-              <a:buNone/>
-            </a:pPr>
-            <a:r>
-              <a:rPr lang="en-US" sz="1400" dirty="0">
-                <a:solidFill>
-                  <a:srgbClr val="2D3748"/>
-                </a:solidFill>
-              </a:rPr>
-              <a:t>統合サマリーの粒度定義</a:t>
-            </a:r>
-            <a:endParaRPr lang="en-US" sz="1400" dirty="0"/>
-          </a:p>
-          <a:p>
-            <a:pPr indent="0" marL="0">
-              <a:lnSpc>
-                <a:spcPct val="140000"/>
-              </a:lnSpc>
-              <a:buNone/>
-            </a:pPr>
-            <a:endParaRPr lang="en-US" sz="1400" dirty="0"/>
-          </a:p>
-          <a:p>
-            <a:pPr indent="0" marL="0">
-              <a:lnSpc>
-                <a:spcPct val="140000"/>
-              </a:lnSpc>
-              <a:buNone/>
-            </a:pPr>
-            <a:r>
-              <a:rPr lang="en-US" sz="1400" dirty="0">
-                <a:solidFill>
-                  <a:srgbClr val="2D3748"/>
-                </a:solidFill>
-              </a:rPr>
-              <a:t>    </a:t>
-            </a:r>
-            <a:endParaRPr lang="en-US" sz="1400" dirty="0"/>
-          </a:p>
-          <a:p>
-            <a:pPr indent="0" marL="0">
-              <a:lnSpc>
-                <a:spcPct val="140000"/>
-              </a:lnSpc>
-              <a:buNone/>
-            </a:pPr>
-            <a:endParaRPr lang="en-US" sz="1400" dirty="0"/>
-          </a:p>
-          <a:p>
-            <a:pPr indent="0" marL="0">
-              <a:lnSpc>
-                <a:spcPct val="140000"/>
-              </a:lnSpc>
-              <a:buNone/>
-            </a:pPr>
-            <a:r>
-              <a:rPr lang="en-US" sz="1400" dirty="0">
-                <a:solidFill>
-                  <a:srgbClr val="2D3748"/>
-                </a:solidFill>
-              </a:rPr>
-              <a:t>    </a:t>
-            </a:r>
-            <a:endParaRPr lang="en-US" sz="1400" dirty="0"/>
-          </a:p>
-          <a:p>
-            <a:pPr indent="0" marL="0">
-              <a:lnSpc>
-                <a:spcPct val="140000"/>
-              </a:lnSpc>
-              <a:buNone/>
-            </a:pPr>
-            <a:endParaRPr lang="en-US" sz="1400" dirty="0"/>
-          </a:p>
-          <a:p>
-            <a:pPr indent="0" marL="0">
-              <a:lnSpc>
-                <a:spcPct val="140000"/>
-              </a:lnSpc>
-              <a:buNone/>
-            </a:pPr>
-            <a:r>
-              <a:rPr lang="en-US" sz="1400" dirty="0">
-                <a:solidFill>
-                  <a:srgbClr val="2D3748"/>
-                </a:solidFill>
-              </a:rPr>
-              <a:t>      </a:t>
-            </a:r>
-            <a:endParaRPr lang="en-US" sz="1400" dirty="0"/>
-          </a:p>
-          <a:p>
-            <a:pPr indent="0" marL="0">
-              <a:lnSpc>
-                <a:spcPct val="140000"/>
-              </a:lnSpc>
-              <a:buNone/>
-            </a:pPr>
-            <a:r>
-              <a:rPr lang="en-US" sz="1400" dirty="0">
-                <a:solidFill>
-                  <a:srgbClr val="2D3748"/>
-                </a:solidFill>
-              </a:rPr>
-              <a:t>🌐</a:t>
-            </a:r>
-            <a:endParaRPr lang="en-US" sz="1400" dirty="0"/>
-          </a:p>
-          <a:p>
-            <a:pPr indent="0" marL="0">
-              <a:lnSpc>
-                <a:spcPct val="140000"/>
-              </a:lnSpc>
-              <a:buNone/>
-            </a:pPr>
-            <a:endParaRPr lang="en-US" sz="1400" dirty="0"/>
-          </a:p>
-          <a:p>
-            <a:pPr indent="0" marL="0">
-              <a:lnSpc>
-                <a:spcPct val="140000"/>
-              </a:lnSpc>
-              <a:buNone/>
-            </a:pPr>
-            <a:r>
-              <a:rPr lang="en-US" sz="1400" dirty="0">
-                <a:solidFill>
-                  <a:srgbClr val="2D3748"/>
-                </a:solidFill>
-              </a:rPr>
-              <a:t>      </a:t>
-            </a:r>
-            <a:endParaRPr lang="en-US" sz="1400" dirty="0"/>
-          </a:p>
-          <a:p>
-            <a:pPr indent="0" marL="0">
-              <a:lnSpc>
-                <a:spcPct val="140000"/>
-              </a:lnSpc>
-              <a:buNone/>
-            </a:pPr>
-            <a:r>
-              <a:rPr lang="en-US" sz="1400" dirty="0">
-                <a:solidFill>
-                  <a:srgbClr val="2D3748"/>
-                </a:solidFill>
-              </a:rPr>
-              <a:t>対応言語・用語辞書</a:t>
-            </a:r>
-            <a:endParaRPr lang="en-US" sz="1400" dirty="0"/>
-          </a:p>
-          <a:p>
-            <a:pPr indent="0" marL="0">
-              <a:lnSpc>
-                <a:spcPct val="140000"/>
-              </a:lnSpc>
-              <a:buNone/>
-            </a:pPr>
-            <a:endParaRPr lang="en-US" sz="1400" dirty="0"/>
-          </a:p>
-          <a:p>
-            <a:pPr indent="0" marL="0">
-              <a:lnSpc>
-                <a:spcPct val="140000"/>
-              </a:lnSpc>
-              <a:buNone/>
-            </a:pPr>
-            <a:r>
-              <a:rPr lang="en-US" sz="1400" dirty="0">
-                <a:solidFill>
-                  <a:srgbClr val="2D3748"/>
-                </a:solidFill>
-              </a:rPr>
-              <a:t>      </a:t>
-            </a:r>
-            <a:endParaRPr lang="en-US" sz="1400" dirty="0"/>
-          </a:p>
-          <a:p>
-            <a:pPr indent="0" marL="0">
-              <a:lnSpc>
-                <a:spcPct val="140000"/>
-              </a:lnSpc>
-              <a:buNone/>
-            </a:pPr>
-            <a:r>
-              <a:rPr lang="en-US" sz="1400" dirty="0">
-                <a:solidFill>
-                  <a:srgbClr val="2D3748"/>
-                </a:solidFill>
-              </a:rPr>
-              <a:t>専門用語対応の必要性</a:t>
-            </a:r>
-            <a:endParaRPr lang="en-US" sz="1400" dirty="0"/>
-          </a:p>
-          <a:p>
-            <a:pPr indent="0" marL="0">
-              <a:lnSpc>
-                <a:spcPct val="140000"/>
-              </a:lnSpc>
-              <a:buNone/>
-            </a:pPr>
-            <a:endParaRPr lang="en-US" sz="1400" dirty="0"/>
-          </a:p>
-          <a:p>
-            <a:pPr indent="0" marL="0">
-              <a:lnSpc>
-                <a:spcPct val="140000"/>
-              </a:lnSpc>
-              <a:buNone/>
-            </a:pPr>
-            <a:r>
-              <a:rPr lang="en-US" sz="1400" dirty="0">
-                <a:solidFill>
-                  <a:srgbClr val="2D3748"/>
-                </a:solidFill>
-              </a:rPr>
-              <a:t>    </a:t>
-            </a:r>
-            <a:endParaRPr lang="en-US" sz="1400" dirty="0"/>
-          </a:p>
-          <a:p>
-            <a:pPr indent="0" marL="0">
-              <a:lnSpc>
-                <a:spcPct val="140000"/>
-              </a:lnSpc>
-              <a:buNone/>
-            </a:pPr>
-            <a:endParaRPr lang="en-US" sz="1400" dirty="0"/>
-          </a:p>
-          <a:p>
-            <a:pPr indent="0" marL="0">
-              <a:lnSpc>
-                <a:spcPct val="140000"/>
-              </a:lnSpc>
-              <a:buNone/>
-            </a:pPr>
-            <a:r>
-              <a:rPr lang="en-US" sz="1400" dirty="0">
-                <a:solidFill>
-                  <a:srgbClr val="2D3748"/>
-                </a:solidFill>
-              </a:rPr>
-              <a:t>    </a:t>
-            </a:r>
-            <a:endParaRPr lang="en-US" sz="1400" dirty="0"/>
-          </a:p>
-          <a:p>
-            <a:pPr indent="0" marL="0">
-              <a:lnSpc>
-                <a:spcPct val="140000"/>
-              </a:lnSpc>
-              <a:buNone/>
-            </a:pPr>
-            <a:endParaRPr lang="en-US" sz="1400" dirty="0"/>
-          </a:p>
-          <a:p>
-            <a:pPr indent="0" marL="0">
-              <a:lnSpc>
-                <a:spcPct val="140000"/>
-              </a:lnSpc>
-              <a:buNone/>
-            </a:pPr>
-            <a:r>
-              <a:rPr lang="en-US" sz="1400" dirty="0">
-                <a:solidFill>
-                  <a:srgbClr val="2D3748"/>
-                </a:solidFill>
-              </a:rPr>
-              <a:t>      </a:t>
-            </a:r>
-            <a:endParaRPr lang="en-US" sz="1400" dirty="0"/>
-          </a:p>
-          <a:p>
-            <a:pPr indent="0" marL="0">
-              <a:lnSpc>
-                <a:spcPct val="140000"/>
-              </a:lnSpc>
-              <a:buNone/>
-            </a:pPr>
-            <a:r>
-              <a:rPr lang="en-US" sz="1400" dirty="0">
-                <a:solidFill>
-                  <a:srgbClr val="2D3748"/>
-                </a:solidFill>
-              </a:rPr>
-              <a:t>📐</a:t>
-            </a:r>
-            <a:endParaRPr lang="en-US" sz="1400" dirty="0"/>
-          </a:p>
-          <a:p>
-            <a:pPr indent="0" marL="0">
-              <a:lnSpc>
-                <a:spcPct val="140000"/>
-              </a:lnSpc>
-              <a:buNone/>
-            </a:pPr>
-            <a:endParaRPr lang="en-US" sz="1400" dirty="0"/>
-          </a:p>
-          <a:p>
-            <a:pPr indent="0" marL="0">
-              <a:lnSpc>
-                <a:spcPct val="140000"/>
-              </a:lnSpc>
-              <a:buNone/>
-            </a:pPr>
-            <a:r>
-              <a:rPr lang="en-US" sz="1400" dirty="0">
-                <a:solidFill>
-                  <a:srgbClr val="2D3748"/>
-                </a:solidFill>
-              </a:rPr>
-              <a:t>      </a:t>
-            </a:r>
-            <a:endParaRPr lang="en-US" sz="1400" dirty="0"/>
-          </a:p>
-          <a:p>
-            <a:pPr indent="0" marL="0">
-              <a:lnSpc>
-                <a:spcPct val="140000"/>
-              </a:lnSpc>
-              <a:buNone/>
-            </a:pPr>
-            <a:r>
-              <a:rPr lang="en-US" sz="1400" dirty="0">
-                <a:solidFill>
-                  <a:srgbClr val="2D3748"/>
-                </a:solidFill>
-              </a:rPr>
-              <a:t>既存テンプレート有無</a:t>
-            </a:r>
-            <a:endParaRPr lang="en-US" sz="1400" dirty="0"/>
-          </a:p>
-          <a:p>
-            <a:pPr indent="0" marL="0">
-              <a:lnSpc>
-                <a:spcPct val="140000"/>
-              </a:lnSpc>
-              <a:buNone/>
-            </a:pPr>
-            <a:endParaRPr lang="en-US" sz="1400" dirty="0"/>
-          </a:p>
-          <a:p>
-            <a:pPr indent="0" marL="0">
-              <a:lnSpc>
-                <a:spcPct val="140000"/>
-              </a:lnSpc>
-              <a:buNone/>
-            </a:pPr>
-            <a:r>
-              <a:rPr lang="en-US" sz="1400" dirty="0">
-                <a:solidFill>
-                  <a:srgbClr val="2D3748"/>
-                </a:solidFill>
-              </a:rPr>
-              <a:t>      </a:t>
-            </a:r>
-            <a:endParaRPr lang="en-US" sz="1400" dirty="0"/>
-          </a:p>
-          <a:p>
-            <a:pPr indent="0" marL="0">
-              <a:lnSpc>
-                <a:spcPct val="140000"/>
-              </a:lnSpc>
-              <a:buNone/>
-            </a:pPr>
-            <a:r>
-              <a:rPr lang="en-US" sz="1400" dirty="0">
-                <a:solidFill>
-                  <a:srgbClr val="2D3748"/>
-                </a:solidFill>
-              </a:rPr>
-              <a:t>資料フォーマットの棚卸し</a:t>
-            </a:r>
-            <a:endParaRPr lang="en-US" sz="1400" dirty="0"/>
-          </a:p>
-          <a:p>
-            <a:pPr indent="0" marL="0">
-              <a:lnSpc>
-                <a:spcPct val="140000"/>
-              </a:lnSpc>
-              <a:buNone/>
-            </a:pPr>
-            <a:endParaRPr lang="en-US" sz="1400" dirty="0"/>
-          </a:p>
-          <a:p>
-            <a:pPr indent="0" marL="0">
-              <a:lnSpc>
-                <a:spcPct val="140000"/>
-              </a:lnSpc>
-              <a:buNone/>
-            </a:pPr>
-            <a:r>
-              <a:rPr lang="en-US" sz="1400" dirty="0">
-                <a:solidFill>
-                  <a:srgbClr val="2D3748"/>
-                </a:solidFill>
-              </a:rPr>
-              <a:t>    </a:t>
-            </a:r>
-            <a:endParaRPr lang="en-US" sz="1400" dirty="0"/>
-          </a:p>
-          <a:p>
-            <a:pPr indent="0" marL="0">
-              <a:lnSpc>
-                <a:spcPct val="140000"/>
-              </a:lnSpc>
-              <a:buNone/>
-            </a:pPr>
-            <a:endParaRPr lang="en-US" sz="1400" dirty="0"/>
-          </a:p>
-          <a:p>
-            <a:pPr indent="0" marL="0">
-              <a:lnSpc>
-                <a:spcPct val="140000"/>
-              </a:lnSpc>
-              <a:buNone/>
-            </a:pPr>
-            <a:r>
-              <a:rPr lang="en-US" sz="1400" dirty="0">
-                <a:solidFill>
-                  <a:srgbClr val="2D3748"/>
-                </a:solidFill>
-              </a:rPr>
-              <a:t>    </a:t>
-            </a:r>
-            <a:endParaRPr lang="en-US" sz="1400" dirty="0"/>
-          </a:p>
-          <a:p>
-            <a:pPr indent="0" marL="0">
-              <a:lnSpc>
-                <a:spcPct val="140000"/>
-              </a:lnSpc>
-              <a:buNone/>
-            </a:pPr>
-            <a:endParaRPr lang="en-US" sz="1400" dirty="0"/>
-          </a:p>
-          <a:p>
-            <a:pPr indent="0" marL="0">
-              <a:lnSpc>
-                <a:spcPct val="140000"/>
-              </a:lnSpc>
-              <a:buNone/>
-            </a:pPr>
-            <a:r>
-              <a:rPr lang="en-US" sz="1400" dirty="0">
-                <a:solidFill>
-                  <a:srgbClr val="2D3748"/>
-                </a:solidFill>
-              </a:rPr>
-              <a:t>      </a:t>
-            </a:r>
-            <a:endParaRPr lang="en-US" sz="1400" dirty="0"/>
-          </a:p>
-          <a:p>
-            <a:pPr indent="0" marL="0">
-              <a:lnSpc>
-                <a:spcPct val="140000"/>
-              </a:lnSpc>
-              <a:buNone/>
-            </a:pPr>
-            <a:r>
-              <a:rPr lang="en-US" sz="1400" dirty="0">
-                <a:solidFill>
-                  <a:srgbClr val="2D3748"/>
-                </a:solidFill>
-              </a:rPr>
-              <a:t>📈</a:t>
-            </a:r>
-            <a:endParaRPr lang="en-US" sz="1400" dirty="0"/>
-          </a:p>
-          <a:p>
-            <a:pPr indent="0" marL="0">
-              <a:lnSpc>
-                <a:spcPct val="140000"/>
-              </a:lnSpc>
-              <a:buNone/>
-            </a:pPr>
-            <a:endParaRPr lang="en-US" sz="1400" dirty="0"/>
-          </a:p>
-          <a:p>
-            <a:pPr indent="0" marL="0">
-              <a:lnSpc>
-                <a:spcPct val="140000"/>
-              </a:lnSpc>
-              <a:buNone/>
-            </a:pPr>
-            <a:r>
-              <a:rPr lang="en-US" sz="1400" dirty="0">
-                <a:solidFill>
-                  <a:srgbClr val="2D3748"/>
-                </a:solidFill>
-              </a:rPr>
-              <a:t>      </a:t>
-            </a:r>
-            <a:endParaRPr lang="en-US" sz="1400" dirty="0"/>
-          </a:p>
-          <a:p>
-            <a:pPr indent="0" marL="0">
-              <a:lnSpc>
-                <a:spcPct val="140000"/>
-              </a:lnSpc>
-              <a:buNone/>
-            </a:pPr>
-            <a:r>
-              <a:rPr lang="en-US" sz="1400" dirty="0">
-                <a:solidFill>
-                  <a:srgbClr val="2D3748"/>
-                </a:solidFill>
-              </a:rPr>
-              <a:t>成功指標</a:t>
-            </a:r>
-            <a:endParaRPr lang="en-US" sz="1400" dirty="0"/>
-          </a:p>
-          <a:p>
-            <a:pPr indent="0" marL="0">
-              <a:lnSpc>
-                <a:spcPct val="140000"/>
-              </a:lnSpc>
-              <a:buNone/>
-            </a:pPr>
-            <a:endParaRPr lang="en-US" sz="1400" dirty="0"/>
-          </a:p>
-          <a:p>
-            <a:pPr indent="0" marL="0">
-              <a:lnSpc>
-                <a:spcPct val="140000"/>
-              </a:lnSpc>
-              <a:buNone/>
-            </a:pPr>
-            <a:r>
-              <a:rPr lang="en-US" sz="1400" dirty="0">
-                <a:solidFill>
-                  <a:srgbClr val="2D3748"/>
-                </a:solidFill>
-              </a:rPr>
-              <a:t>      </a:t>
-            </a:r>
-            <a:endParaRPr lang="en-US" sz="1400" dirty="0"/>
-          </a:p>
-          <a:p>
-            <a:pPr indent="0" marL="0">
-              <a:lnSpc>
-                <a:spcPct val="140000"/>
-              </a:lnSpc>
-              <a:buNone/>
-            </a:pPr>
-            <a:r>
-              <a:rPr lang="en-US" sz="1400" dirty="0">
-                <a:solidFill>
-                  <a:srgbClr val="2D3748"/>
-                </a:solidFill>
-              </a:rPr>
-              <a:t>工数削減・共有遅延の定量化</a:t>
-            </a:r>
-            <a:endParaRPr lang="en-US" sz="1400" dirty="0"/>
-          </a:p>
-        </p:txBody>
-      </p:sp>
-    </p:spTree>
-  </p:cSld>
-  <p:clrMapOvr>
-    <a:masterClrMapping/>
-  </p:clrMapOvr>
-</p:sld>
-</file>
-
-<file path=ppt/slides/slide19.xml><?xml version="1.0" encoding="utf-8"?>
-<p:sld xmlns:a="http://schemas.openxmlformats.org/drawingml/2006/main" xmlns:r="http://schemas.openxmlformats.org/officeDocument/2006/relationships" xmlns:p="http://schemas.openxmlformats.org/presentationml/2006/main">
-  <p:cSld name="Slide 19">
     <p:bg>
       <p:bgPr>
         <a:solidFill>
@@ -8078,7 +5577,7 @@
                   <a:srgbClr val="FFFFFF"/>
                 </a:solidFill>
               </a:rPr>
-              <a:t>🚀 Next Steps</a:t>
+              <a:t>🚀 次のアクション</a:t>
             </a:r>
             <a:endParaRPr lang="en-US" sz="2800" dirty="0"/>
           </a:p>
@@ -8160,7 +5659,7 @@
                   <a:srgbClr val="FFFFFF"/>
                 </a:solidFill>
               </a:rPr>
-              <a:t>Must機能でMVP確定：音声サマリー・資料生成・ローカル録音を先行実装</a:t>
+              <a:t>Must機能をMVP確定し、Should/Couldは段階導入に分離</a:t>
             </a:r>
             <a:endParaRPr lang="en-US" sz="1400" dirty="0"/>
           </a:p>
@@ -8298,7 +5797,7 @@
                   <a:srgbClr val="FFFFFF"/>
                 </a:solidFill>
               </a:rPr>
-              <a:t>未解決論点を短期調査：RT APIコスト、RAG保存先、テンプレート要件を決定</a:t>
+              <a:t>リアルタイムAPIコスト上限とRAG保存先を意思決定</a:t>
             </a:r>
             <a:endParaRPr lang="en-US" sz="1400" dirty="0"/>
           </a:p>
@@ -8436,7 +5935,7 @@
                   <a:srgbClr val="FFFFFF"/>
                 </a:solidFill>
               </a:rPr>
-              <a:t>受け入れ基準で実証：1分以内生成、3回統合、字幕90%以上を検証</a:t>
+              <a:t>テンプレート資産・成功指標・予算前提値を収集</a:t>
             </a:r>
             <a:endParaRPr lang="en-US" sz="1400" dirty="0"/>
           </a:p>
@@ -8574,7 +6073,7 @@
                   <a:srgbClr val="FFFFFF"/>
                 </a:solidFill>
               </a:rPr>
-              <a:t>Phase 2判定：外部連携・エクスポート・編集再生成の投資優先度を再評価</a:t>
+              <a:t>録音バックアップ込みでPoCを実施し、1分以内要約を検証</a:t>
             </a:r>
             <a:endParaRPr lang="en-US" sz="1400" dirty="0"/>
           </a:p>
@@ -8717,7 +6216,7 @@
                   <a:srgbClr val="2D3748"/>
                 </a:solidFill>
               </a:rPr>
-              <a:t>Goal</a:t>
+              <a:t>狙い</a:t>
             </a:r>
             <a:endParaRPr lang="en-US" sz="1400" dirty="0"/>
           </a:p>
@@ -8760,7 +6259,7 @@
                   <a:srgbClr val="2D3748"/>
                 </a:solidFill>
               </a:rPr>
-              <a:t>会議音声から要点・決定事項・次アクションを即時に構造化</a:t>
+              <a:t>会議音声から要点・決定・論点・次アクションを自動化</a:t>
             </a:r>
             <a:endParaRPr lang="en-US" sz="1400" dirty="0"/>
           </a:p>
@@ -8855,7 +6354,7 @@
                   <a:srgbClr val="2D3748"/>
                 </a:solidFill>
               </a:rPr>
-              <a:t>🏗️</a:t>
+              <a:t>⚙️</a:t>
             </a:r>
             <a:endParaRPr lang="en-US" sz="1400" dirty="0"/>
           </a:p>
@@ -8898,7 +6397,7 @@
                   <a:srgbClr val="2D3748"/>
                 </a:solidFill>
               </a:rPr>
-              <a:t>Solution</a:t>
+              <a:t>中核機能</a:t>
             </a:r>
             <a:endParaRPr lang="en-US" sz="1400" dirty="0"/>
           </a:p>
@@ -8941,7 +6440,7 @@
                   <a:srgbClr val="2D3748"/>
                 </a:solidFill>
               </a:rPr>
-              <a:t>文字起こし＋RAG＋テンプレート生成で会議と発足資料を一気通貫化</a:t>
+              <a:t>音声要約・資料生成・RAG統合・ローカル録音バックアップ</a:t>
             </a:r>
             <a:endParaRPr lang="en-US" sz="1400" dirty="0"/>
           </a:p>
@@ -9036,7 +6535,7 @@
                   <a:srgbClr val="2D3748"/>
                 </a:solidFill>
               </a:rPr>
-              <a:t>⚠️</a:t>
+              <a:t>🚀</a:t>
             </a:r>
             <a:endParaRPr lang="en-US" sz="1400" dirty="0"/>
           </a:p>
@@ -9079,7 +6578,7 @@
                   <a:srgbClr val="2D3748"/>
                 </a:solidFill>
               </a:rPr>
-              <a:t>Focus</a:t>
+              <a:t>MVP判断軸</a:t>
             </a:r>
             <a:endParaRPr lang="en-US" sz="1400" dirty="0"/>
           </a:p>
@@ -9122,7 +6621,7 @@
                   <a:srgbClr val="2D3748"/>
                 </a:solidFill>
               </a:rPr>
-              <a:t>MVPはMust中心。コスト・RAG基盤・運用設計が主要論点</a:t>
+              <a:t>1分以内要約、3回以上統合、字幕精度90%以上</a:t>
             </a:r>
             <a:endParaRPr lang="en-US" sz="1400" dirty="0"/>
           </a:p>
@@ -9812,7 +7311,7 @@
                   <a:srgbClr val="FFFFFF"/>
                 </a:solidFill>
               </a:rPr>
-              <a:t>1. 課題と狙い</a:t>
+              <a:t>課題と価値</a:t>
             </a:r>
             <a:endParaRPr lang="en-US" sz="2800" dirty="0"/>
           </a:p>
@@ -9851,7 +7350,7 @@
                   <a:srgbClr val="FFFFFF"/>
                 </a:solidFill>
               </a:rPr>
-              <a:t>会議記録・合意形成・資料作成の分断を解消する</a:t>
+              <a:t>会議の記録作成を自動化し、複数回会議の知見を再利用可能な資産へ変える</a:t>
             </a:r>
             <a:endParaRPr lang="en-US" sz="1400" dirty="0"/>
           </a:p>
@@ -9948,7 +7447,7 @@
                   <a:srgbClr val="718096"/>
                 </a:solidFill>
               </a:rPr>
-              <a:t>❌ 現状</a:t>
+              <a:t>❌ Before / 課題</a:t>
             </a:r>
             <a:endParaRPr lang="en-US" sz="1800" dirty="0"/>
           </a:p>
@@ -9991,7 +7490,7 @@
                   <a:srgbClr val="2D3748"/>
                 </a:solidFill>
               </a:rPr>
-              <a:t>会議ごとに議事録作成が手作業</a:t>
+              <a:t>議事録作成が手作業で遅い</a:t>
             </a:r>
             <a:endParaRPr lang="en-US" sz="1400" dirty="0"/>
           </a:p>
@@ -10012,7 +7511,7 @@
                   <a:srgbClr val="2D3748"/>
                 </a:solidFill>
               </a:rPr>
-              <a:t>複数回会議の文脈が分断</a:t>
+              <a:t>複数会議の論点が分断される</a:t>
             </a:r>
             <a:endParaRPr lang="en-US" sz="1400" dirty="0"/>
           </a:p>
@@ -10033,7 +7532,7 @@
                   <a:srgbClr val="2D3748"/>
                 </a:solidFill>
               </a:rPr>
-              <a:t>発足資料・提案書も別工程で作成</a:t>
+              <a:t>音声取得失敗で記録欠損リスク</a:t>
             </a:r>
             <a:endParaRPr lang="en-US" sz="1400" dirty="0"/>
           </a:p>
@@ -10054,7 +7553,7 @@
                   <a:srgbClr val="2D3748"/>
                 </a:solidFill>
               </a:rPr>
-              <a:t>音声から1分以内に構造化サマリー生成</a:t>
+              <a:t>1分以内の会議サマリー生成</a:t>
             </a:r>
             <a:endParaRPr lang="en-US" sz="1400" dirty="0"/>
           </a:p>
@@ -10075,7 +7574,7 @@
                   <a:srgbClr val="2D3748"/>
                 </a:solidFill>
               </a:rPr>
-              <a:t>RAGで複数会議を統合要約</a:t>
+              <a:t>RAGで横断統合・文脈保持</a:t>
             </a:r>
             <a:endParaRPr lang="en-US" sz="1400" dirty="0"/>
           </a:p>
@@ -10096,7 +7595,7 @@
                   <a:srgbClr val="2D3748"/>
                 </a:solidFill>
               </a:rPr>
-              <a:t>キックオフ資料・提案書まで自動生成</a:t>
+              <a:t>ローカル録音でデータロス回避</a:t>
             </a:r>
             <a:endParaRPr lang="en-US" sz="1400" dirty="0"/>
           </a:p>
@@ -10157,7 +7656,7 @@
                   <a:srgbClr val="2D3748"/>
                 </a:solidFill>
               </a:rPr>
-              <a:t>🔄 価値創出フロー</a:t>
+              <a:t>🔄 エンドツーエンド業務フロー</a:t>
             </a:r>
             <a:endParaRPr lang="en-US" sz="2800" dirty="0"/>
           </a:p>
@@ -10239,7 +7738,7 @@
                   <a:srgbClr val="2D3748"/>
                 </a:solidFill>
               </a:rPr>
-              <a:t>会議音声取得</a:t>
+              <a:t>音声取得</a:t>
             </a:r>
             <a:endParaRPr lang="en-US" sz="1400" dirty="0"/>
           </a:p>
@@ -10377,6 +7876,187 @@
                   <a:srgbClr val="2D3748"/>
                 </a:solidFill>
               </a:rPr>
+              <a:t>✍️</a:t>
+            </a:r>
+            <a:endParaRPr lang="en-US" sz="1400" dirty="0"/>
+          </a:p>
+          <a:p>
+            <a:pPr indent="0" marL="0">
+              <a:lnSpc>
+                <a:spcPct val="140000"/>
+              </a:lnSpc>
+              <a:buNone/>
+            </a:pPr>
+            <a:endParaRPr lang="en-US" sz="1400" dirty="0"/>
+          </a:p>
+          <a:p>
+            <a:pPr indent="0" marL="0">
+              <a:lnSpc>
+                <a:spcPct val="140000"/>
+              </a:lnSpc>
+              <a:buNone/>
+            </a:pPr>
+            <a:r>
+              <a:rPr lang="en-US" sz="1400" dirty="0">
+                <a:solidFill>
+                  <a:srgbClr val="2D3748"/>
+                </a:solidFill>
+              </a:rPr>
+              <a:t>      </a:t>
+            </a:r>
+            <a:endParaRPr lang="en-US" sz="1400" dirty="0"/>
+          </a:p>
+          <a:p>
+            <a:pPr indent="0" marL="0">
+              <a:lnSpc>
+                <a:spcPct val="140000"/>
+              </a:lnSpc>
+              <a:buNone/>
+            </a:pPr>
+            <a:r>
+              <a:rPr lang="en-US" sz="1400" dirty="0">
+                <a:solidFill>
+                  <a:srgbClr val="2D3748"/>
+                </a:solidFill>
+              </a:rPr>
+              <a:t>文字起こし</a:t>
+            </a:r>
+            <a:endParaRPr lang="en-US" sz="1400" dirty="0"/>
+          </a:p>
+          <a:p>
+            <a:pPr indent="0" marL="0">
+              <a:lnSpc>
+                <a:spcPct val="140000"/>
+              </a:lnSpc>
+              <a:buNone/>
+            </a:pPr>
+            <a:endParaRPr lang="en-US" sz="1400" dirty="0"/>
+          </a:p>
+          <a:p>
+            <a:pPr indent="0" marL="0">
+              <a:lnSpc>
+                <a:spcPct val="140000"/>
+              </a:lnSpc>
+              <a:buNone/>
+            </a:pPr>
+            <a:r>
+              <a:rPr lang="en-US" sz="1400" dirty="0">
+                <a:solidFill>
+                  <a:srgbClr val="2D3748"/>
+                </a:solidFill>
+              </a:rPr>
+              <a:t>    </a:t>
+            </a:r>
+            <a:endParaRPr lang="en-US" sz="1400" dirty="0"/>
+          </a:p>
+          <a:p>
+            <a:pPr indent="0" marL="0">
+              <a:lnSpc>
+                <a:spcPct val="140000"/>
+              </a:lnSpc>
+              <a:buNone/>
+            </a:pPr>
+            <a:endParaRPr lang="en-US" sz="1400" dirty="0"/>
+          </a:p>
+          <a:p>
+            <a:pPr indent="0" marL="0">
+              <a:lnSpc>
+                <a:spcPct val="140000"/>
+              </a:lnSpc>
+              <a:buNone/>
+            </a:pPr>
+            <a:r>
+              <a:rPr lang="en-US" sz="1400" dirty="0">
+                <a:solidFill>
+                  <a:srgbClr val="2D3748"/>
+                </a:solidFill>
+              </a:rPr>
+              <a:t>    </a:t>
+            </a:r>
+            <a:endParaRPr lang="en-US" sz="1400" dirty="0"/>
+          </a:p>
+          <a:p>
+            <a:pPr indent="0" marL="0">
+              <a:lnSpc>
+                <a:spcPct val="140000"/>
+              </a:lnSpc>
+              <a:buNone/>
+            </a:pPr>
+            <a:r>
+              <a:rPr lang="en-US" sz="1400" dirty="0">
+                <a:solidFill>
+                  <a:srgbClr val="2D3748"/>
+                </a:solidFill>
+              </a:rPr>
+              <a:t>→</a:t>
+            </a:r>
+            <a:endParaRPr lang="en-US" sz="1400" dirty="0"/>
+          </a:p>
+          <a:p>
+            <a:pPr indent="0" marL="0">
+              <a:lnSpc>
+                <a:spcPct val="140000"/>
+              </a:lnSpc>
+              <a:buNone/>
+            </a:pPr>
+            <a:endParaRPr lang="en-US" sz="1400" dirty="0"/>
+          </a:p>
+          <a:p>
+            <a:pPr indent="0" marL="0">
+              <a:lnSpc>
+                <a:spcPct val="140000"/>
+              </a:lnSpc>
+              <a:buNone/>
+            </a:pPr>
+            <a:r>
+              <a:rPr lang="en-US" sz="1400" dirty="0">
+                <a:solidFill>
+                  <a:srgbClr val="2D3748"/>
+                </a:solidFill>
+              </a:rPr>
+              <a:t>    </a:t>
+            </a:r>
+            <a:endParaRPr lang="en-US" sz="1400" dirty="0"/>
+          </a:p>
+          <a:p>
+            <a:pPr indent="0" marL="0">
+              <a:lnSpc>
+                <a:spcPct val="140000"/>
+              </a:lnSpc>
+              <a:buNone/>
+            </a:pPr>
+            <a:endParaRPr lang="en-US" sz="1400" dirty="0"/>
+          </a:p>
+          <a:p>
+            <a:pPr indent="0" marL="0">
+              <a:lnSpc>
+                <a:spcPct val="140000"/>
+              </a:lnSpc>
+              <a:buNone/>
+            </a:pPr>
+            <a:r>
+              <a:rPr lang="en-US" sz="1400" dirty="0">
+                <a:solidFill>
+                  <a:srgbClr val="2D3748"/>
+                </a:solidFill>
+              </a:rPr>
+              <a:t>      </a:t>
+            </a:r>
+            <a:endParaRPr lang="en-US" sz="1400" dirty="0"/>
+          </a:p>
+          <a:p>
+            <a:pPr indent="0" marL="0">
+              <a:lnSpc>
+                <a:spcPct val="140000"/>
+              </a:lnSpc>
+              <a:buNone/>
+            </a:pPr>
+            <a:r>
+              <a:rPr lang="en-US" sz="1400" dirty="0">
+                <a:solidFill>
+                  <a:srgbClr val="2D3748"/>
+                </a:solidFill>
+              </a:rPr>
               <a:t>📝</a:t>
             </a:r>
             <a:endParaRPr lang="en-US" sz="1400" dirty="0"/>
@@ -10420,7 +8100,7 @@
                   <a:srgbClr val="2D3748"/>
                 </a:solidFill>
               </a:rPr>
-              <a:t>文字起こし</a:t>
+              <a:t>要約生成</a:t>
             </a:r>
             <a:endParaRPr lang="en-US" sz="1400" dirty="0"/>
           </a:p>
@@ -10558,7 +8238,7 @@
                   <a:srgbClr val="2D3748"/>
                 </a:solidFill>
               </a:rPr>
-              <a:t>📌</a:t>
+              <a:t>🧩</a:t>
             </a:r>
             <a:endParaRPr lang="en-US" sz="1400" dirty="0"/>
           </a:p>
@@ -10601,7 +8281,7 @@
                   <a:srgbClr val="2D3748"/>
                 </a:solidFill>
               </a:rPr>
-              <a:t>要点・決定抽出</a:t>
+              <a:t>RAG統合</a:t>
             </a:r>
             <a:endParaRPr lang="en-US" sz="1400" dirty="0"/>
           </a:p>
@@ -10739,7 +8419,7 @@
                   <a:srgbClr val="2D3748"/>
                 </a:solidFill>
               </a:rPr>
-              <a:t>📚</a:t>
+              <a:t>📤</a:t>
             </a:r>
             <a:endParaRPr lang="en-US" sz="1400" dirty="0"/>
           </a:p>
@@ -10782,7 +8462,7 @@
                   <a:srgbClr val="2D3748"/>
                 </a:solidFill>
               </a:rPr>
-              <a:t>統合・資料生成</a:t>
+              <a:t>資料/共有</a:t>
             </a:r>
             <a:endParaRPr lang="en-US" sz="1400" dirty="0"/>
           </a:p>
@@ -10877,7 +8557,7 @@
                   <a:srgbClr val="2D3748"/>
                 </a:solidFill>
               </a:rPr>
-              <a:t>単発会議の議事録自動化から、継続会議の知識資産化まで拡張</a:t>
+              <a:t>会議中の記録から、会議後の統合ドキュメント・キックオフ資料までを一気通貫化</a:t>
             </a:r>
             <a:endParaRPr lang="en-US" sz="1400" dirty="0"/>
           </a:p>
@@ -10945,7 +8625,7 @@
                   <a:srgbClr val="FFFFFF"/>
                 </a:solidFill>
               </a:rPr>
-              <a:t>2. MVPスコープ</a:t>
+              <a:t>優先順位とMVPスコープ</a:t>
             </a:r>
             <a:endParaRPr lang="en-US" sz="2800" dirty="0"/>
           </a:p>
@@ -10984,7 +8664,7 @@
                   <a:srgbClr val="FFFFFF"/>
                 </a:solidFill>
               </a:rPr>
-              <a:t>Must / Should / Could を優先度で整理</a:t>
+              <a:t>Mustに集中しつつ、Shouldは制約条件付き、Couldは次フェーズ候補として扱う</a:t>
             </a:r>
             <a:endParaRPr lang="en-US" sz="1400" dirty="0"/>
           </a:p>
@@ -11045,7 +8725,7 @@
                   <a:srgbClr val="2D3748"/>
                 </a:solidFill>
               </a:rPr>
-              <a:t>🎯 優先度ポートフォリオ</a:t>
+              <a:t>📋 Must / Should / Could マップ</a:t>
             </a:r>
             <a:endParaRPr lang="en-US" sz="2800" dirty="0"/>
           </a:p>
@@ -11053,14 +8733,61 @@
       </p:sp>
       <p:sp>
         <p:nvSpPr>
-          <p:cNvPr id="3" name="Text 1"/>
-          <p:cNvSpPr/>
-          <p:nvPr/>
-        </p:nvSpPr>
-        <p:spPr>
-          <a:xfrm>
-            <a:off x="731520" y="1188720"/>
-            <a:ext cx="10725912" cy="3383280"/>
+          <p:cNvPr id="3" name="Shape 1"/>
+          <p:cNvSpPr/>
+          <p:nvPr/>
+        </p:nvSpPr>
+        <p:spPr>
+          <a:xfrm>
+            <a:off x="457200" y="1188720"/>
+            <a:ext cx="3575304" cy="1463040"/>
+          </a:xfrm>
+          <a:prstGeom prst="roundRect">
+            <a:avLst>
+              <a:gd name="adj" fmla="val 6250"/>
+            </a:avLst>
+          </a:prstGeom>
+          <a:solidFill>
+            <a:srgbClr val="F7FAFC"/>
+          </a:solidFill>
+          <a:ln w="12700">
+            <a:solidFill>
+              <a:srgbClr val="667EEA"/>
+            </a:solidFill>
+            <a:prstDash val="solid"/>
+          </a:ln>
+        </p:spPr>
+      </p:sp>
+      <p:sp>
+        <p:nvSpPr>
+          <p:cNvPr id="4" name="Shape 2"/>
+          <p:cNvSpPr/>
+          <p:nvPr/>
+        </p:nvSpPr>
+        <p:spPr>
+          <a:xfrm>
+            <a:off x="457200" y="1188720"/>
+            <a:ext cx="54864" cy="1463040"/>
+          </a:xfrm>
+          <a:prstGeom prst="rect">
+            <a:avLst/>
+          </a:prstGeom>
+          <a:solidFill>
+            <a:srgbClr val="667EEA"/>
+          </a:solidFill>
+          <a:ln/>
+        </p:spPr>
+      </p:sp>
+      <p:sp>
+        <p:nvSpPr>
+          <p:cNvPr id="5" name="Text 3"/>
+          <p:cNvSpPr/>
+          <p:nvPr/>
+        </p:nvSpPr>
+        <p:spPr>
+          <a:xfrm>
+            <a:off x="594360" y="1280160"/>
+            <a:ext cx="3300984" cy="365760"/>
           </a:xfrm>
           <a:prstGeom prst="rect">
             <a:avLst/>
@@ -11073,770 +8800,540 @@
           <a:lstStyle/>
           <a:p>
             <a:pPr indent="0" marL="0">
-              <a:lnSpc>
-                <a:spcPct val="140000"/>
-              </a:lnSpc>
-              <a:buNone/>
-            </a:pPr>
-            <a:r>
-              <a:rPr lang="en-US" sz="1400" dirty="0">
-                <a:solidFill>
-                  <a:srgbClr val="2D3748"/>
-                </a:solidFill>
-              </a:rPr>
-              <a:t>Could：将来拡張</a:t>
-            </a:r>
-            <a:endParaRPr lang="en-US" sz="1400" dirty="0"/>
-          </a:p>
-          <a:p>
-            <a:pPr indent="0" marL="0">
-              <a:lnSpc>
-                <a:spcPct val="140000"/>
-              </a:lnSpc>
-              <a:buNone/>
-            </a:pPr>
-            <a:endParaRPr lang="en-US" sz="1400" dirty="0"/>
-          </a:p>
-          <a:p>
-            <a:pPr indent="0" marL="0">
-              <a:lnSpc>
-                <a:spcPct val="140000"/>
-              </a:lnSpc>
-              <a:buNone/>
-            </a:pPr>
-            <a:r>
-              <a:rPr lang="en-US" sz="1400" dirty="0">
-                <a:solidFill>
-                  <a:srgbClr val="2D3748"/>
-                </a:solidFill>
-              </a:rPr>
-              <a:t>      </a:t>
-            </a:r>
-            <a:endParaRPr lang="en-US" sz="1400" dirty="0"/>
-          </a:p>
-          <a:p>
-            <a:pPr indent="0" marL="0">
-              <a:lnSpc>
-                <a:spcPct val="140000"/>
-              </a:lnSpc>
-              <a:buNone/>
-            </a:pPr>
-            <a:endParaRPr lang="en-US" sz="1400" dirty="0"/>
-          </a:p>
-          <a:p>
-            <a:pPr indent="0" marL="0">
-              <a:lnSpc>
-                <a:spcPct val="140000"/>
-              </a:lnSpc>
-              <a:buNone/>
-            </a:pPr>
-            <a:r>
-              <a:rPr lang="en-US" sz="1400" dirty="0">
-                <a:solidFill>
-                  <a:srgbClr val="2D3748"/>
-                </a:solidFill>
-              </a:rPr>
-              <a:t>        </a:t>
-            </a:r>
-            <a:endParaRPr lang="en-US" sz="1400" dirty="0"/>
-          </a:p>
-          <a:p>
-            <a:pPr indent="0" marL="0">
-              <a:lnSpc>
-                <a:spcPct val="140000"/>
-              </a:lnSpc>
-              <a:buNone/>
-            </a:pPr>
-            <a:r>
-              <a:rPr lang="en-US" sz="1400" dirty="0">
-                <a:solidFill>
-                  <a:srgbClr val="2D3748"/>
-                </a:solidFill>
-              </a:rPr>
-              <a:t>Should：利便性強化</a:t>
-            </a:r>
-            <a:endParaRPr lang="en-US" sz="1400" dirty="0"/>
-          </a:p>
-          <a:p>
-            <a:pPr indent="0" marL="0">
-              <a:lnSpc>
-                <a:spcPct val="140000"/>
-              </a:lnSpc>
-              <a:buNone/>
-            </a:pPr>
-            <a:endParaRPr lang="en-US" sz="1400" dirty="0"/>
-          </a:p>
-          <a:p>
-            <a:pPr indent="0" marL="0">
-              <a:lnSpc>
-                <a:spcPct val="140000"/>
-              </a:lnSpc>
-              <a:buNone/>
-            </a:pPr>
-            <a:r>
-              <a:rPr lang="en-US" sz="1400" dirty="0">
-                <a:solidFill>
-                  <a:srgbClr val="2D3748"/>
-                </a:solidFill>
-              </a:rPr>
-              <a:t>        </a:t>
-            </a:r>
-            <a:endParaRPr lang="en-US" sz="1400" dirty="0"/>
-          </a:p>
-          <a:p>
-            <a:pPr indent="0" marL="0">
-              <a:lnSpc>
-                <a:spcPct val="140000"/>
-              </a:lnSpc>
-              <a:buNone/>
-            </a:pPr>
-            <a:r>
-              <a:rPr lang="en-US" sz="1400" dirty="0">
-                <a:solidFill>
-                  <a:srgbClr val="2D3748"/>
-                </a:solidFill>
-              </a:rPr>
-              <a:t>Must</a:t>
-            </a:r>
-            <a:endParaRPr lang="en-US" sz="1400" dirty="0"/>
-          </a:p>
-          <a:p>
-            <a:pPr indent="0" marL="0">
-              <a:lnSpc>
-                <a:spcPct val="140000"/>
-              </a:lnSpc>
-              <a:buNone/>
-            </a:pPr>
-            <a:r>
-              <a:rPr lang="en-US" sz="1400" dirty="0">
-                <a:solidFill>
-                  <a:srgbClr val="2D3748"/>
-                </a:solidFill>
-              </a:rPr>
-              <a:t>中核機能</a:t>
-            </a:r>
-            <a:endParaRPr lang="en-US" sz="1400" dirty="0"/>
-          </a:p>
-          <a:p>
-            <a:pPr indent="0" marL="0">
-              <a:lnSpc>
-                <a:spcPct val="140000"/>
-              </a:lnSpc>
-              <a:buNone/>
-            </a:pPr>
-            <a:endParaRPr lang="en-US" sz="1400" dirty="0"/>
-          </a:p>
-          <a:p>
-            <a:pPr indent="0" marL="0">
-              <a:lnSpc>
-                <a:spcPct val="140000"/>
-              </a:lnSpc>
-              <a:buNone/>
-            </a:pPr>
-            <a:r>
-              <a:rPr lang="en-US" sz="1400" dirty="0">
-                <a:solidFill>
-                  <a:srgbClr val="2D3748"/>
-                </a:solidFill>
-              </a:rPr>
-              <a:t>      </a:t>
-            </a:r>
-            <a:endParaRPr lang="en-US" sz="1400" dirty="0"/>
-          </a:p>
-          <a:p>
-            <a:pPr indent="0" marL="0">
-              <a:lnSpc>
-                <a:spcPct val="140000"/>
-              </a:lnSpc>
-              <a:buNone/>
-            </a:pPr>
-            <a:endParaRPr lang="en-US" sz="1400" dirty="0"/>
-          </a:p>
-          <a:p>
-            <a:pPr indent="0" marL="0">
-              <a:lnSpc>
-                <a:spcPct val="140000"/>
-              </a:lnSpc>
-              <a:buNone/>
-            </a:pPr>
-            <a:r>
-              <a:rPr lang="en-US" sz="1400" dirty="0">
-                <a:solidFill>
-                  <a:srgbClr val="2D3748"/>
-                </a:solidFill>
-              </a:rPr>
-              <a:t>    </a:t>
-            </a:r>
-            <a:endParaRPr lang="en-US" sz="1400" dirty="0"/>
-          </a:p>
-          <a:p>
-            <a:pPr indent="0" marL="0">
-              <a:lnSpc>
-                <a:spcPct val="140000"/>
-              </a:lnSpc>
-              <a:buNone/>
-            </a:pPr>
-            <a:endParaRPr lang="en-US" sz="1400" dirty="0"/>
-          </a:p>
-          <a:p>
-            <a:pPr indent="0" marL="0">
-              <a:lnSpc>
-                <a:spcPct val="140000"/>
-              </a:lnSpc>
-              <a:buNone/>
-            </a:pPr>
-            <a:r>
-              <a:rPr lang="en-US" sz="1400" dirty="0">
-                <a:solidFill>
-                  <a:srgbClr val="2D3748"/>
-                </a:solidFill>
-              </a:rPr>
-              <a:t>  </a:t>
-            </a:r>
-            <a:endParaRPr lang="en-US" sz="1400" dirty="0"/>
-          </a:p>
-          <a:p>
-            <a:pPr indent="0" marL="0">
-              <a:lnSpc>
-                <a:spcPct val="140000"/>
-              </a:lnSpc>
-              <a:buNone/>
-            </a:pPr>
-            <a:endParaRPr lang="en-US" sz="1400" dirty="0"/>
-          </a:p>
-          <a:p>
-            <a:pPr indent="0" marL="0">
-              <a:lnSpc>
-                <a:spcPct val="140000"/>
-              </a:lnSpc>
-              <a:buNone/>
-            </a:pPr>
-            <a:r>
-              <a:rPr lang="en-US" sz="1400" dirty="0">
-                <a:solidFill>
-                  <a:srgbClr val="2D3748"/>
-                </a:solidFill>
-              </a:rPr>
-              <a:t>  </a:t>
-            </a:r>
-            <a:endParaRPr lang="en-US" sz="1400" dirty="0"/>
-          </a:p>
-          <a:p>
-            <a:pPr indent="0" marL="0">
-              <a:lnSpc>
-                <a:spcPct val="140000"/>
-              </a:lnSpc>
-              <a:buNone/>
-            </a:pPr>
-            <a:endParaRPr lang="en-US" sz="1400" dirty="0"/>
-          </a:p>
-          <a:p>
-            <a:pPr indent="0" marL="0">
-              <a:lnSpc>
-                <a:spcPct val="140000"/>
-              </a:lnSpc>
-              <a:buNone/>
-            </a:pPr>
-            <a:r>
-              <a:rPr lang="en-US" sz="1400" dirty="0">
-                <a:solidFill>
-                  <a:srgbClr val="2D3748"/>
-                </a:solidFill>
-              </a:rPr>
-              <a:t>    </a:t>
-            </a:r>
-            <a:endParaRPr lang="en-US" sz="1400" dirty="0"/>
-          </a:p>
-          <a:p>
-            <a:pPr indent="0" marL="0">
-              <a:lnSpc>
-                <a:spcPct val="140000"/>
-              </a:lnSpc>
-              <a:buNone/>
-            </a:pPr>
-            <a:endParaRPr lang="en-US" sz="1400" dirty="0"/>
-          </a:p>
-          <a:p>
-            <a:pPr indent="0" marL="0">
-              <a:lnSpc>
-                <a:spcPct val="140000"/>
-              </a:lnSpc>
-              <a:buNone/>
-            </a:pPr>
-            <a:r>
-              <a:rPr lang="en-US" sz="1400" dirty="0">
-                <a:solidFill>
-                  <a:srgbClr val="2D3748"/>
-                </a:solidFill>
-              </a:rPr>
-              <a:t>      </a:t>
-            </a:r>
-            <a:endParaRPr lang="en-US" sz="1400" dirty="0"/>
-          </a:p>
-          <a:p>
-            <a:pPr indent="0" marL="0">
-              <a:lnSpc>
-                <a:spcPct val="140000"/>
-              </a:lnSpc>
-              <a:buNone/>
-            </a:pPr>
-            <a:r>
-              <a:rPr lang="en-US" sz="1400" dirty="0">
-                <a:solidFill>
-                  <a:srgbClr val="2D3748"/>
-                </a:solidFill>
-              </a:rPr>
-              <a:t>🔥</a:t>
-            </a:r>
-            <a:endParaRPr lang="en-US" sz="1400" dirty="0"/>
-          </a:p>
-          <a:p>
-            <a:pPr indent="0" marL="0">
-              <a:lnSpc>
-                <a:spcPct val="140000"/>
-              </a:lnSpc>
-              <a:buNone/>
-            </a:pPr>
-            <a:endParaRPr lang="en-US" sz="1400" dirty="0"/>
-          </a:p>
-          <a:p>
-            <a:pPr indent="0" marL="0">
-              <a:lnSpc>
-                <a:spcPct val="140000"/>
-              </a:lnSpc>
-              <a:buNone/>
-            </a:pPr>
-            <a:r>
-              <a:rPr lang="en-US" sz="1400" dirty="0">
-                <a:solidFill>
-                  <a:srgbClr val="2D3748"/>
-                </a:solidFill>
-              </a:rPr>
-              <a:t>      </a:t>
-            </a:r>
-            <a:endParaRPr lang="en-US" sz="1400" dirty="0"/>
-          </a:p>
-          <a:p>
-            <a:pPr indent="0" marL="0">
-              <a:lnSpc>
-                <a:spcPct val="140000"/>
-              </a:lnSpc>
-              <a:buNone/>
-            </a:pPr>
-            <a:r>
-              <a:rPr lang="en-US" sz="1400" dirty="0">
-                <a:solidFill>
-                  <a:srgbClr val="2D3748"/>
-                </a:solidFill>
-              </a:rPr>
-              <a:t>Must 5件</a:t>
-            </a:r>
-            <a:endParaRPr lang="en-US" sz="1400" dirty="0"/>
-          </a:p>
-          <a:p>
-            <a:pPr indent="0" marL="0">
-              <a:lnSpc>
-                <a:spcPct val="140000"/>
-              </a:lnSpc>
-              <a:buNone/>
-            </a:pPr>
-            <a:endParaRPr lang="en-US" sz="1400" dirty="0"/>
-          </a:p>
-          <a:p>
-            <a:pPr indent="0" marL="0">
-              <a:lnSpc>
-                <a:spcPct val="140000"/>
-              </a:lnSpc>
-              <a:buNone/>
-            </a:pPr>
-            <a:r>
-              <a:rPr lang="en-US" sz="1400" dirty="0">
-                <a:solidFill>
-                  <a:srgbClr val="2D3748"/>
-                </a:solidFill>
-              </a:rPr>
-              <a:t>      </a:t>
-            </a:r>
-            <a:endParaRPr lang="en-US" sz="1400" dirty="0"/>
-          </a:p>
-          <a:p>
-            <a:pPr indent="0" marL="0">
-              <a:lnSpc>
-                <a:spcPct val="140000"/>
-              </a:lnSpc>
-              <a:buNone/>
-            </a:pPr>
-            <a:r>
-              <a:rPr lang="en-US" sz="1400" dirty="0">
-                <a:solidFill>
-                  <a:srgbClr val="2D3748"/>
-                </a:solidFill>
-              </a:rPr>
-              <a:t>サマリー / 資料作成 / RAG / 統合 / バックアップ</a:t>
-            </a:r>
-            <a:endParaRPr lang="en-US" sz="1400" dirty="0"/>
-          </a:p>
-          <a:p>
-            <a:pPr indent="0" marL="0">
-              <a:lnSpc>
-                <a:spcPct val="140000"/>
-              </a:lnSpc>
-              <a:buNone/>
-            </a:pPr>
-            <a:endParaRPr lang="en-US" sz="1400" dirty="0"/>
-          </a:p>
-          <a:p>
-            <a:pPr indent="0" marL="0">
-              <a:lnSpc>
-                <a:spcPct val="140000"/>
-              </a:lnSpc>
-              <a:buNone/>
-            </a:pPr>
-            <a:r>
-              <a:rPr lang="en-US" sz="1400" dirty="0">
-                <a:solidFill>
-                  <a:srgbClr val="2D3748"/>
-                </a:solidFill>
-              </a:rPr>
-              <a:t>    </a:t>
-            </a:r>
-            <a:endParaRPr lang="en-US" sz="1400" dirty="0"/>
-          </a:p>
-          <a:p>
-            <a:pPr indent="0" marL="0">
-              <a:lnSpc>
-                <a:spcPct val="140000"/>
-              </a:lnSpc>
-              <a:buNone/>
-            </a:pPr>
-            <a:endParaRPr lang="en-US" sz="1400" dirty="0"/>
-          </a:p>
-          <a:p>
-            <a:pPr indent="0" marL="0">
-              <a:lnSpc>
-                <a:spcPct val="140000"/>
-              </a:lnSpc>
-              <a:buNone/>
-            </a:pPr>
-            <a:r>
-              <a:rPr lang="en-US" sz="1400" dirty="0">
-                <a:solidFill>
-                  <a:srgbClr val="2D3748"/>
-                </a:solidFill>
-              </a:rPr>
-              <a:t>    </a:t>
-            </a:r>
-            <a:endParaRPr lang="en-US" sz="1400" dirty="0"/>
-          </a:p>
-          <a:p>
-            <a:pPr indent="0" marL="0">
-              <a:lnSpc>
-                <a:spcPct val="140000"/>
-              </a:lnSpc>
-              <a:buNone/>
-            </a:pPr>
-            <a:endParaRPr lang="en-US" sz="1400" dirty="0"/>
-          </a:p>
-          <a:p>
-            <a:pPr indent="0" marL="0">
-              <a:lnSpc>
-                <a:spcPct val="140000"/>
-              </a:lnSpc>
-              <a:buNone/>
-            </a:pPr>
-            <a:r>
-              <a:rPr lang="en-US" sz="1400" dirty="0">
-                <a:solidFill>
-                  <a:srgbClr val="2D3748"/>
-                </a:solidFill>
-              </a:rPr>
-              <a:t>      </a:t>
-            </a:r>
-            <a:endParaRPr lang="en-US" sz="1400" dirty="0"/>
-          </a:p>
-          <a:p>
-            <a:pPr indent="0" marL="0">
-              <a:lnSpc>
-                <a:spcPct val="140000"/>
-              </a:lnSpc>
-              <a:buNone/>
-            </a:pPr>
-            <a:r>
-              <a:rPr lang="en-US" sz="1400" dirty="0">
-                <a:solidFill>
-                  <a:srgbClr val="2D3748"/>
-                </a:solidFill>
-              </a:rPr>
-              <a:t>✨</a:t>
-            </a:r>
-            <a:endParaRPr lang="en-US" sz="1400" dirty="0"/>
-          </a:p>
-          <a:p>
-            <a:pPr indent="0" marL="0">
-              <a:lnSpc>
-                <a:spcPct val="140000"/>
-              </a:lnSpc>
-              <a:buNone/>
-            </a:pPr>
-            <a:endParaRPr lang="en-US" sz="1400" dirty="0"/>
-          </a:p>
-          <a:p>
-            <a:pPr indent="0" marL="0">
-              <a:lnSpc>
-                <a:spcPct val="140000"/>
-              </a:lnSpc>
-              <a:buNone/>
-            </a:pPr>
-            <a:r>
-              <a:rPr lang="en-US" sz="1400" dirty="0">
-                <a:solidFill>
-                  <a:srgbClr val="2D3748"/>
-                </a:solidFill>
-              </a:rPr>
-              <a:t>      </a:t>
-            </a:r>
-            <a:endParaRPr lang="en-US" sz="1400" dirty="0"/>
-          </a:p>
-          <a:p>
-            <a:pPr indent="0" marL="0">
-              <a:lnSpc>
-                <a:spcPct val="140000"/>
-              </a:lnSpc>
-              <a:buNone/>
-            </a:pPr>
-            <a:r>
-              <a:rPr lang="en-US" sz="1400" dirty="0">
-                <a:solidFill>
-                  <a:srgbClr val="2D3748"/>
-                </a:solidFill>
-              </a:rPr>
-              <a:t>Should 2件</a:t>
-            </a:r>
-            <a:endParaRPr lang="en-US" sz="1400" dirty="0"/>
-          </a:p>
-          <a:p>
-            <a:pPr indent="0" marL="0">
-              <a:lnSpc>
-                <a:spcPct val="140000"/>
-              </a:lnSpc>
-              <a:buNone/>
-            </a:pPr>
-            <a:endParaRPr lang="en-US" sz="1400" dirty="0"/>
-          </a:p>
-          <a:p>
-            <a:pPr indent="0" marL="0">
-              <a:lnSpc>
-                <a:spcPct val="140000"/>
-              </a:lnSpc>
-              <a:buNone/>
-            </a:pPr>
-            <a:r>
-              <a:rPr lang="en-US" sz="1400" dirty="0">
-                <a:solidFill>
-                  <a:srgbClr val="2D3748"/>
-                </a:solidFill>
-              </a:rPr>
-              <a:t>      </a:t>
-            </a:r>
-            <a:endParaRPr lang="en-US" sz="1400" dirty="0"/>
-          </a:p>
-          <a:p>
-            <a:pPr indent="0" marL="0">
-              <a:lnSpc>
-                <a:spcPct val="140000"/>
-              </a:lnSpc>
-              <a:buNone/>
-            </a:pPr>
-            <a:r>
-              <a:rPr lang="en-US" sz="1400" dirty="0">
-                <a:solidFill>
-                  <a:srgbClr val="2D3748"/>
-                </a:solidFill>
-              </a:rPr>
-              <a:t>ライブ字幕 / 文字起こし方式選択</a:t>
-            </a:r>
-            <a:endParaRPr lang="en-US" sz="1400" dirty="0"/>
-          </a:p>
-          <a:p>
-            <a:pPr indent="0" marL="0">
-              <a:lnSpc>
-                <a:spcPct val="140000"/>
-              </a:lnSpc>
-              <a:buNone/>
-            </a:pPr>
-            <a:endParaRPr lang="en-US" sz="1400" dirty="0"/>
-          </a:p>
-          <a:p>
-            <a:pPr indent="0" marL="0">
-              <a:lnSpc>
-                <a:spcPct val="140000"/>
-              </a:lnSpc>
-              <a:buNone/>
-            </a:pPr>
-            <a:r>
-              <a:rPr lang="en-US" sz="1400" dirty="0">
-                <a:solidFill>
-                  <a:srgbClr val="2D3748"/>
-                </a:solidFill>
-              </a:rPr>
-              <a:t>    </a:t>
-            </a:r>
-            <a:endParaRPr lang="en-US" sz="1400" dirty="0"/>
-          </a:p>
-          <a:p>
-            <a:pPr indent="0" marL="0">
-              <a:lnSpc>
-                <a:spcPct val="140000"/>
-              </a:lnSpc>
-              <a:buNone/>
-            </a:pPr>
-            <a:endParaRPr lang="en-US" sz="1400" dirty="0"/>
-          </a:p>
-          <a:p>
-            <a:pPr indent="0" marL="0">
-              <a:lnSpc>
-                <a:spcPct val="140000"/>
-              </a:lnSpc>
-              <a:buNone/>
-            </a:pPr>
-            <a:r>
-              <a:rPr lang="en-US" sz="1400" dirty="0">
-                <a:solidFill>
-                  <a:srgbClr val="2D3748"/>
-                </a:solidFill>
-              </a:rPr>
-              <a:t>    </a:t>
-            </a:r>
-            <a:endParaRPr lang="en-US" sz="1400" dirty="0"/>
-          </a:p>
-          <a:p>
-            <a:pPr indent="0" marL="0">
-              <a:lnSpc>
-                <a:spcPct val="140000"/>
-              </a:lnSpc>
-              <a:buNone/>
-            </a:pPr>
-            <a:endParaRPr lang="en-US" sz="1400" dirty="0"/>
-          </a:p>
-          <a:p>
-            <a:pPr indent="0" marL="0">
-              <a:lnSpc>
-                <a:spcPct val="140000"/>
-              </a:lnSpc>
-              <a:buNone/>
-            </a:pPr>
-            <a:r>
-              <a:rPr lang="en-US" sz="1400" dirty="0">
-                <a:solidFill>
-                  <a:srgbClr val="2D3748"/>
-                </a:solidFill>
-              </a:rPr>
-              <a:t>      </a:t>
-            </a:r>
-            <a:endParaRPr lang="en-US" sz="1400" dirty="0"/>
-          </a:p>
-          <a:p>
-            <a:pPr indent="0" marL="0">
-              <a:lnSpc>
-                <a:spcPct val="140000"/>
-              </a:lnSpc>
-              <a:buNone/>
-            </a:pPr>
-            <a:r>
-              <a:rPr lang="en-US" sz="1400" dirty="0">
-                <a:solidFill>
-                  <a:srgbClr val="2D3748"/>
-                </a:solidFill>
-              </a:rPr>
-              <a:t>🌱</a:t>
-            </a:r>
-            <a:endParaRPr lang="en-US" sz="1400" dirty="0"/>
-          </a:p>
-          <a:p>
-            <a:pPr indent="0" marL="0">
-              <a:lnSpc>
-                <a:spcPct val="140000"/>
-              </a:lnSpc>
-              <a:buNone/>
-            </a:pPr>
-            <a:endParaRPr lang="en-US" sz="1400" dirty="0"/>
-          </a:p>
-          <a:p>
-            <a:pPr indent="0" marL="0">
-              <a:lnSpc>
-                <a:spcPct val="140000"/>
-              </a:lnSpc>
-              <a:buNone/>
-            </a:pPr>
-            <a:r>
-              <a:rPr lang="en-US" sz="1400" dirty="0">
-                <a:solidFill>
-                  <a:srgbClr val="2D3748"/>
-                </a:solidFill>
-              </a:rPr>
-              <a:t>      </a:t>
-            </a:r>
-            <a:endParaRPr lang="en-US" sz="1400" dirty="0"/>
-          </a:p>
-          <a:p>
-            <a:pPr indent="0" marL="0">
-              <a:lnSpc>
-                <a:spcPct val="140000"/>
-              </a:lnSpc>
-              <a:buNone/>
-            </a:pPr>
-            <a:r>
-              <a:rPr lang="en-US" sz="1400" dirty="0">
-                <a:solidFill>
-                  <a:srgbClr val="2D3748"/>
-                </a:solidFill>
-              </a:rPr>
-              <a:t>Could 3件</a:t>
-            </a:r>
-            <a:endParaRPr lang="en-US" sz="1400" dirty="0"/>
-          </a:p>
-          <a:p>
-            <a:pPr indent="0" marL="0">
-              <a:lnSpc>
-                <a:spcPct val="140000"/>
-              </a:lnSpc>
-              <a:buNone/>
-            </a:pPr>
-            <a:endParaRPr lang="en-US" sz="1400" dirty="0"/>
-          </a:p>
-          <a:p>
-            <a:pPr indent="0" marL="0">
-              <a:lnSpc>
-                <a:spcPct val="140000"/>
-              </a:lnSpc>
-              <a:buNone/>
-            </a:pPr>
-            <a:r>
-              <a:rPr lang="en-US" sz="1400" dirty="0">
-                <a:solidFill>
-                  <a:srgbClr val="2D3748"/>
-                </a:solidFill>
-              </a:rPr>
-              <a:t>      </a:t>
-            </a:r>
-            <a:endParaRPr lang="en-US" sz="1400" dirty="0"/>
-          </a:p>
-          <a:p>
-            <a:pPr indent="0" marL="0">
-              <a:lnSpc>
-                <a:spcPct val="140000"/>
-              </a:lnSpc>
-              <a:buNone/>
-            </a:pPr>
-            <a:r>
-              <a:rPr lang="en-US" sz="1400" dirty="0">
-                <a:solidFill>
-                  <a:srgbClr val="2D3748"/>
-                </a:solidFill>
-              </a:rPr>
-              <a:t>外部連携 / エクスポート / 編集再生成</a:t>
-            </a:r>
-            <a:endParaRPr lang="en-US" sz="1400" dirty="0"/>
+              <a:buNone/>
+            </a:pPr>
+            <a:r>
+              <a:rPr lang="en-US" sz="1300" b="1" dirty="0">
+                <a:solidFill>
+                  <a:srgbClr val="2D3748"/>
+                </a:solidFill>
+              </a:rPr>
+              <a:t>🔥 Must</a:t>
+            </a:r>
+            <a:endParaRPr lang="en-US" sz="1300" dirty="0"/>
+          </a:p>
+        </p:txBody>
+      </p:sp>
+      <p:sp>
+        <p:nvSpPr>
+          <p:cNvPr id="6" name="Text 4"/>
+          <p:cNvSpPr/>
+          <p:nvPr/>
+        </p:nvSpPr>
+        <p:spPr>
+          <a:xfrm>
+            <a:off x="594360" y="1645920"/>
+            <a:ext cx="3300984" cy="914400"/>
+          </a:xfrm>
+          <a:prstGeom prst="rect">
+            <a:avLst/>
+          </a:prstGeom>
+          <a:noFill/>
+          <a:ln/>
+        </p:spPr>
+        <p:txBody>
+          <a:bodyPr wrap="square" rtlCol="0" anchor="t"/>
+          <a:lstStyle/>
+          <a:p>
+            <a:pPr indent="0" marL="0">
+              <a:buNone/>
+            </a:pPr>
+            <a:r>
+              <a:rPr lang="en-US" sz="1000" dirty="0">
+                <a:solidFill>
+                  <a:srgbClr val="4A5568"/>
+                </a:solidFill>
+              </a:rPr>
+              <a:t>🎙️ 会議サマリー自動生成</a:t>
+            </a:r>
+            <a:endParaRPr lang="en-US" sz="1000" dirty="0"/>
+          </a:p>
+        </p:txBody>
+      </p:sp>
+      <p:sp>
+        <p:nvSpPr>
+          <p:cNvPr id="7" name="Shape 5"/>
+          <p:cNvSpPr/>
+          <p:nvPr/>
+        </p:nvSpPr>
+        <p:spPr>
+          <a:xfrm>
+            <a:off x="4306824" y="1188720"/>
+            <a:ext cx="3575304" cy="1463040"/>
+          </a:xfrm>
+          <a:prstGeom prst="roundRect">
+            <a:avLst>
+              <a:gd name="adj" fmla="val 6250"/>
+            </a:avLst>
+          </a:prstGeom>
+          <a:solidFill>
+            <a:srgbClr val="F7FAFC"/>
+          </a:solidFill>
+          <a:ln w="12700">
+            <a:solidFill>
+              <a:srgbClr val="48BB78"/>
+            </a:solidFill>
+            <a:prstDash val="solid"/>
+          </a:ln>
+        </p:spPr>
+      </p:sp>
+      <p:sp>
+        <p:nvSpPr>
+          <p:cNvPr id="8" name="Shape 6"/>
+          <p:cNvSpPr/>
+          <p:nvPr/>
+        </p:nvSpPr>
+        <p:spPr>
+          <a:xfrm>
+            <a:off x="4306824" y="1188720"/>
+            <a:ext cx="54864" cy="1463040"/>
+          </a:xfrm>
+          <a:prstGeom prst="rect">
+            <a:avLst/>
+          </a:prstGeom>
+          <a:solidFill>
+            <a:srgbClr val="48BB78"/>
+          </a:solidFill>
+          <a:ln/>
+        </p:spPr>
+      </p:sp>
+      <p:sp>
+        <p:nvSpPr>
+          <p:cNvPr id="9" name="Text 7"/>
+          <p:cNvSpPr/>
+          <p:nvPr/>
+        </p:nvSpPr>
+        <p:spPr>
+          <a:xfrm>
+            <a:off x="4443984" y="1280160"/>
+            <a:ext cx="3300984" cy="365760"/>
+          </a:xfrm>
+          <a:prstGeom prst="rect">
+            <a:avLst/>
+          </a:prstGeom>
+          <a:noFill/>
+          <a:ln/>
+        </p:spPr>
+        <p:txBody>
+          <a:bodyPr wrap="square" rtlCol="0" anchor="t"/>
+          <a:lstStyle/>
+          <a:p>
+            <a:pPr indent="0" marL="0">
+              <a:buNone/>
+            </a:pPr>
+            <a:r>
+              <a:rPr lang="en-US" sz="1300" b="1" dirty="0">
+                <a:solidFill>
+                  <a:srgbClr val="2D3748"/>
+                </a:solidFill>
+              </a:rPr>
+              <a:t>MVP主対象</a:t>
+            </a:r>
+            <a:endParaRPr lang="en-US" sz="1300" dirty="0"/>
+          </a:p>
+        </p:txBody>
+      </p:sp>
+      <p:sp>
+        <p:nvSpPr>
+          <p:cNvPr id="10" name="Shape 8"/>
+          <p:cNvSpPr/>
+          <p:nvPr/>
+        </p:nvSpPr>
+        <p:spPr>
+          <a:xfrm>
+            <a:off x="8156448" y="1188720"/>
+            <a:ext cx="3575304" cy="1463040"/>
+          </a:xfrm>
+          <a:prstGeom prst="roundRect">
+            <a:avLst>
+              <a:gd name="adj" fmla="val 6250"/>
+            </a:avLst>
+          </a:prstGeom>
+          <a:solidFill>
+            <a:srgbClr val="F7FAFC"/>
+          </a:solidFill>
+          <a:ln w="12700">
+            <a:solidFill>
+              <a:srgbClr val="ED8936"/>
+            </a:solidFill>
+            <a:prstDash val="solid"/>
+          </a:ln>
+        </p:spPr>
+      </p:sp>
+      <p:sp>
+        <p:nvSpPr>
+          <p:cNvPr id="11" name="Shape 9"/>
+          <p:cNvSpPr/>
+          <p:nvPr/>
+        </p:nvSpPr>
+        <p:spPr>
+          <a:xfrm>
+            <a:off x="8156448" y="1188720"/>
+            <a:ext cx="54864" cy="1463040"/>
+          </a:xfrm>
+          <a:prstGeom prst="rect">
+            <a:avLst/>
+          </a:prstGeom>
+          <a:solidFill>
+            <a:srgbClr val="ED8936"/>
+          </a:solidFill>
+          <a:ln/>
+        </p:spPr>
+      </p:sp>
+      <p:sp>
+        <p:nvSpPr>
+          <p:cNvPr id="12" name="Text 10"/>
+          <p:cNvSpPr/>
+          <p:nvPr/>
+        </p:nvSpPr>
+        <p:spPr>
+          <a:xfrm>
+            <a:off x="8293608" y="1280160"/>
+            <a:ext cx="3300984" cy="365760"/>
+          </a:xfrm>
+          <a:prstGeom prst="rect">
+            <a:avLst/>
+          </a:prstGeom>
+          <a:noFill/>
+          <a:ln/>
+        </p:spPr>
+        <p:txBody>
+          <a:bodyPr wrap="square" rtlCol="0" anchor="t"/>
+          <a:lstStyle/>
+          <a:p>
+            <a:pPr indent="0" marL="0">
+              <a:buNone/>
+            </a:pPr>
+            <a:r>
+              <a:rPr lang="en-US" sz="1300" b="1" dirty="0">
+                <a:solidFill>
+                  <a:srgbClr val="2D3748"/>
+                </a:solidFill>
+              </a:rPr>
+              <a:t>✨ Should</a:t>
+            </a:r>
+            <a:endParaRPr lang="en-US" sz="1300" dirty="0"/>
+          </a:p>
+        </p:txBody>
+      </p:sp>
+      <p:sp>
+        <p:nvSpPr>
+          <p:cNvPr id="13" name="Text 11"/>
+          <p:cNvSpPr/>
+          <p:nvPr/>
+        </p:nvSpPr>
+        <p:spPr>
+          <a:xfrm>
+            <a:off x="8293608" y="1645920"/>
+            <a:ext cx="3300984" cy="914400"/>
+          </a:xfrm>
+          <a:prstGeom prst="rect">
+            <a:avLst/>
+          </a:prstGeom>
+          <a:noFill/>
+          <a:ln/>
+        </p:spPr>
+        <p:txBody>
+          <a:bodyPr wrap="square" rtlCol="0" anchor="t"/>
+          <a:lstStyle/>
+          <a:p>
+            <a:pPr indent="0" marL="0">
+              <a:buNone/>
+            </a:pPr>
+            <a:r>
+              <a:rPr lang="en-US" sz="1000" dirty="0">
+                <a:solidFill>
+                  <a:srgbClr val="4A5568"/>
+                </a:solidFill>
+              </a:rPr>
+              <a:t>💬 ライブ字幕表示</a:t>
+            </a:r>
+            <a:endParaRPr lang="en-US" sz="1000" dirty="0"/>
+          </a:p>
+        </p:txBody>
+      </p:sp>
+      <p:sp>
+        <p:nvSpPr>
+          <p:cNvPr id="14" name="Shape 12"/>
+          <p:cNvSpPr/>
+          <p:nvPr/>
+        </p:nvSpPr>
+        <p:spPr>
+          <a:xfrm>
+            <a:off x="457200" y="2834640"/>
+            <a:ext cx="3575304" cy="1463040"/>
+          </a:xfrm>
+          <a:prstGeom prst="roundRect">
+            <a:avLst>
+              <a:gd name="adj" fmla="val 6250"/>
+            </a:avLst>
+          </a:prstGeom>
+          <a:solidFill>
+            <a:srgbClr val="F7FAFC"/>
+          </a:solidFill>
+          <a:ln w="12700">
+            <a:solidFill>
+              <a:srgbClr val="E53E3E"/>
+            </a:solidFill>
+            <a:prstDash val="solid"/>
+          </a:ln>
+        </p:spPr>
+      </p:sp>
+      <p:sp>
+        <p:nvSpPr>
+          <p:cNvPr id="15" name="Shape 13"/>
+          <p:cNvSpPr/>
+          <p:nvPr/>
+        </p:nvSpPr>
+        <p:spPr>
+          <a:xfrm>
+            <a:off x="457200" y="2834640"/>
+            <a:ext cx="54864" cy="1463040"/>
+          </a:xfrm>
+          <a:prstGeom prst="rect">
+            <a:avLst/>
+          </a:prstGeom>
+          <a:solidFill>
+            <a:srgbClr val="E53E3E"/>
+          </a:solidFill>
+          <a:ln/>
+        </p:spPr>
+      </p:sp>
+      <p:sp>
+        <p:nvSpPr>
+          <p:cNvPr id="16" name="Text 14"/>
+          <p:cNvSpPr/>
+          <p:nvPr/>
+        </p:nvSpPr>
+        <p:spPr>
+          <a:xfrm>
+            <a:off x="594360" y="2926080"/>
+            <a:ext cx="3300984" cy="365760"/>
+          </a:xfrm>
+          <a:prstGeom prst="rect">
+            <a:avLst/>
+          </a:prstGeom>
+          <a:noFill/>
+          <a:ln/>
+        </p:spPr>
+        <p:txBody>
+          <a:bodyPr wrap="square" rtlCol="0" anchor="t"/>
+          <a:lstStyle/>
+          <a:p>
+            <a:pPr indent="0" marL="0">
+              <a:buNone/>
+            </a:pPr>
+            <a:r>
+              <a:rPr lang="en-US" sz="1300" b="1" dirty="0">
+                <a:solidFill>
+                  <a:srgbClr val="2D3748"/>
+                </a:solidFill>
+              </a:rPr>
+              <a:t>条件付き</a:t>
+            </a:r>
+            <a:endParaRPr lang="en-US" sz="1300" dirty="0"/>
+          </a:p>
+        </p:txBody>
+      </p:sp>
+      <p:sp>
+        <p:nvSpPr>
+          <p:cNvPr id="17" name="Shape 15"/>
+          <p:cNvSpPr/>
+          <p:nvPr/>
+        </p:nvSpPr>
+        <p:spPr>
+          <a:xfrm>
+            <a:off x="4306824" y="2834640"/>
+            <a:ext cx="3575304" cy="1463040"/>
+          </a:xfrm>
+          <a:prstGeom prst="roundRect">
+            <a:avLst>
+              <a:gd name="adj" fmla="val 6250"/>
+            </a:avLst>
+          </a:prstGeom>
+          <a:solidFill>
+            <a:srgbClr val="F7FAFC"/>
+          </a:solidFill>
+          <a:ln w="12700">
+            <a:solidFill>
+              <a:srgbClr val="764BA2"/>
+            </a:solidFill>
+            <a:prstDash val="solid"/>
+          </a:ln>
+        </p:spPr>
+      </p:sp>
+      <p:sp>
+        <p:nvSpPr>
+          <p:cNvPr id="18" name="Shape 16"/>
+          <p:cNvSpPr/>
+          <p:nvPr/>
+        </p:nvSpPr>
+        <p:spPr>
+          <a:xfrm>
+            <a:off x="4306824" y="2834640"/>
+            <a:ext cx="54864" cy="1463040"/>
+          </a:xfrm>
+          <a:prstGeom prst="rect">
+            <a:avLst/>
+          </a:prstGeom>
+          <a:solidFill>
+            <a:srgbClr val="764BA2"/>
+          </a:solidFill>
+          <a:ln/>
+        </p:spPr>
+      </p:sp>
+      <p:sp>
+        <p:nvSpPr>
+          <p:cNvPr id="19" name="Text 17"/>
+          <p:cNvSpPr/>
+          <p:nvPr/>
+        </p:nvSpPr>
+        <p:spPr>
+          <a:xfrm>
+            <a:off x="4443984" y="2926080"/>
+            <a:ext cx="3300984" cy="365760"/>
+          </a:xfrm>
+          <a:prstGeom prst="rect">
+            <a:avLst/>
+          </a:prstGeom>
+          <a:noFill/>
+          <a:ln/>
+        </p:spPr>
+        <p:txBody>
+          <a:bodyPr wrap="square" rtlCol="0" anchor="t"/>
+          <a:lstStyle/>
+          <a:p>
+            <a:pPr indent="0" marL="0">
+              <a:buNone/>
+            </a:pPr>
+            <a:r>
+              <a:rPr lang="en-US" sz="1300" b="1" dirty="0">
+                <a:solidFill>
+                  <a:srgbClr val="2D3748"/>
+                </a:solidFill>
+              </a:rPr>
+              <a:t>🌱 Could</a:t>
+            </a:r>
+            <a:endParaRPr lang="en-US" sz="1300" dirty="0"/>
+          </a:p>
+        </p:txBody>
+      </p:sp>
+      <p:sp>
+        <p:nvSpPr>
+          <p:cNvPr id="20" name="Text 18"/>
+          <p:cNvSpPr/>
+          <p:nvPr/>
+        </p:nvSpPr>
+        <p:spPr>
+          <a:xfrm>
+            <a:off x="4443984" y="3291840"/>
+            <a:ext cx="3300984" cy="914400"/>
+          </a:xfrm>
+          <a:prstGeom prst="rect">
+            <a:avLst/>
+          </a:prstGeom>
+          <a:noFill/>
+          <a:ln/>
+        </p:spPr>
+        <p:txBody>
+          <a:bodyPr wrap="square" rtlCol="0" anchor="t"/>
+          <a:lstStyle/>
+          <a:p>
+            <a:pPr indent="0" marL="0">
+              <a:buNone/>
+            </a:pPr>
+            <a:r>
+              <a:rPr lang="en-US" sz="1000" dirty="0">
+                <a:solidFill>
+                  <a:srgbClr val="4A5568"/>
+                </a:solidFill>
+              </a:rPr>
+              <a:t>🔌 外部連携</a:t>
+            </a:r>
+            <a:endParaRPr lang="en-US" sz="1000" dirty="0"/>
+          </a:p>
+        </p:txBody>
+      </p:sp>
+      <p:sp>
+        <p:nvSpPr>
+          <p:cNvPr id="21" name="Shape 19"/>
+          <p:cNvSpPr/>
+          <p:nvPr/>
+        </p:nvSpPr>
+        <p:spPr>
+          <a:xfrm>
+            <a:off x="8156448" y="2834640"/>
+            <a:ext cx="3575304" cy="1463040"/>
+          </a:xfrm>
+          <a:prstGeom prst="roundRect">
+            <a:avLst>
+              <a:gd name="adj" fmla="val 6250"/>
+            </a:avLst>
+          </a:prstGeom>
+          <a:solidFill>
+            <a:srgbClr val="F7FAFC"/>
+          </a:solidFill>
+          <a:ln w="12700">
+            <a:solidFill>
+              <a:srgbClr val="38A169"/>
+            </a:solidFill>
+            <a:prstDash val="solid"/>
+          </a:ln>
+        </p:spPr>
+      </p:sp>
+      <p:sp>
+        <p:nvSpPr>
+          <p:cNvPr id="22" name="Shape 20"/>
+          <p:cNvSpPr/>
+          <p:nvPr/>
+        </p:nvSpPr>
+        <p:spPr>
+          <a:xfrm>
+            <a:off x="8156448" y="2834640"/>
+            <a:ext cx="54864" cy="1463040"/>
+          </a:xfrm>
+          <a:prstGeom prst="rect">
+            <a:avLst/>
+          </a:prstGeom>
+          <a:solidFill>
+            <a:srgbClr val="38A169"/>
+          </a:solidFill>
+          <a:ln/>
+        </p:spPr>
+      </p:sp>
+      <p:sp>
+        <p:nvSpPr>
+          <p:cNvPr id="23" name="Text 21"/>
+          <p:cNvSpPr/>
+          <p:nvPr/>
+        </p:nvSpPr>
+        <p:spPr>
+          <a:xfrm>
+            <a:off x="8293608" y="2926080"/>
+            <a:ext cx="3300984" cy="365760"/>
+          </a:xfrm>
+          <a:prstGeom prst="rect">
+            <a:avLst/>
+          </a:prstGeom>
+          <a:noFill/>
+          <a:ln/>
+        </p:spPr>
+        <p:txBody>
+          <a:bodyPr wrap="square" rtlCol="0" anchor="t"/>
+          <a:lstStyle/>
+          <a:p>
+            <a:pPr indent="0" marL="0">
+              <a:buNone/>
+            </a:pPr>
+            <a:r>
+              <a:rPr lang="en-US" sz="1300" b="1" dirty="0">
+                <a:solidFill>
+                  <a:srgbClr val="2D3748"/>
+                </a:solidFill>
+              </a:rPr>
+              <a:t>次フェーズ</a:t>
+            </a:r>
+            <a:endParaRPr lang="en-US" sz="1300" dirty="0"/>
           </a:p>
         </p:txBody>
       </p:sp>
@@ -11895,7 +9392,7 @@
                   <a:srgbClr val="2D3748"/>
                 </a:solidFill>
               </a:rPr>
-              <a:t>📋 Must機能の中核価値</a:t>
+              <a:t>🏗️ 提案アーキテクチャ</a:t>
             </a:r>
             <a:endParaRPr lang="en-US" sz="2800" dirty="0"/>
           </a:p>
@@ -11978,7 +9475,7 @@
                   <a:srgbClr val="2D3748"/>
                 </a:solidFill>
               </a:rPr>
-              <a:t>🎙️ 音声入力サマリー</a:t>
+              <a:t>👥 会議参加者</a:t>
             </a:r>
             <a:endParaRPr lang="en-US" sz="1300" dirty="0"/>
           </a:p>
@@ -11986,43 +9483,7 @@
       </p:sp>
       <p:sp>
         <p:nvSpPr>
-          <p:cNvPr id="6" name="Text 4"/>
-          <p:cNvSpPr/>
-          <p:nvPr/>
-        </p:nvSpPr>
-        <p:spPr>
-          <a:xfrm>
-            <a:off x="594360" y="1645920"/>
-            <a:ext cx="3300984" cy="914400"/>
-          </a:xfrm>
-          <a:prstGeom prst="rect">
-            <a:avLst/>
-          </a:prstGeom>
-          <a:noFill/>
-          <a:ln/>
-        </p:spPr>
-        <p:txBody>
-          <a:bodyPr wrap="square" rtlCol="0" anchor="t"/>
-          <a:lstStyle/>
-          <a:p>
-            <a:pPr indent="0" marL="0">
-              <a:buNone/>
-            </a:pPr>
-            <a:r>
-              <a:rPr lang="en-US" sz="1000" dirty="0">
-                <a:solidFill>
-                  <a:srgbClr val="4A5568"/>
-                </a:solidFill>
-              </a:rPr>
-              <a:t>要点・決定事項・論点・次アクションを自動生成</a:t>
-            </a:r>
-            <a:endParaRPr lang="en-US" sz="1000" dirty="0"/>
-          </a:p>
-        </p:txBody>
-      </p:sp>
-      <p:sp>
-        <p:nvSpPr>
-          <p:cNvPr id="7" name="Shape 5"/>
+          <p:cNvPr id="6" name="Shape 4"/>
           <p:cNvSpPr/>
           <p:nvPr/>
         </p:nvSpPr>
@@ -12049,7 +9510,7 @@
       </p:sp>
       <p:sp>
         <p:nvSpPr>
-          <p:cNvPr id="8" name="Shape 6"/>
+          <p:cNvPr id="7" name="Shape 5"/>
           <p:cNvSpPr/>
           <p:nvPr/>
         </p:nvSpPr>
@@ -12069,7 +9530,7 @@
       </p:sp>
       <p:sp>
         <p:nvSpPr>
-          <p:cNvPr id="9" name="Text 7"/>
+          <p:cNvPr id="8" name="Text 6"/>
           <p:cNvSpPr/>
           <p:nvPr/>
         </p:nvSpPr>
@@ -12097,7 +9558,7 @@
                   <a:srgbClr val="2D3748"/>
                 </a:solidFill>
               </a:rPr>
-              <a:t>🚀 発足資料自動生成</a:t>
+              <a:t>🖥️ 管理/閲覧UI</a:t>
             </a:r>
             <a:endParaRPr lang="en-US" sz="1300" dirty="0"/>
           </a:p>
@@ -12105,43 +9566,7 @@
       </p:sp>
       <p:sp>
         <p:nvSpPr>
-          <p:cNvPr id="10" name="Text 8"/>
-          <p:cNvSpPr/>
-          <p:nvPr/>
-        </p:nvSpPr>
-        <p:spPr>
-          <a:xfrm>
-            <a:off x="4443984" y="1645920"/>
-            <a:ext cx="3300984" cy="914400"/>
-          </a:xfrm>
-          <a:prstGeom prst="rect">
-            <a:avLst/>
-          </a:prstGeom>
-          <a:noFill/>
-          <a:ln/>
-        </p:spPr>
-        <p:txBody>
-          <a:bodyPr wrap="square" rtlCol="0" anchor="t"/>
-          <a:lstStyle/>
-          <a:p>
-            <a:pPr indent="0" marL="0">
-              <a:buNone/>
-            </a:pPr>
-            <a:r>
-              <a:rPr lang="en-US" sz="1000" dirty="0">
-                <a:solidFill>
-                  <a:srgbClr val="4A5568"/>
-                </a:solidFill>
-              </a:rPr>
-              <a:t>キックオフ資料・機能提案書をテンプレート準拠で出力</a:t>
-            </a:r>
-            <a:endParaRPr lang="en-US" sz="1000" dirty="0"/>
-          </a:p>
-        </p:txBody>
-      </p:sp>
-      <p:sp>
-        <p:nvSpPr>
-          <p:cNvPr id="11" name="Shape 9"/>
+          <p:cNvPr id="9" name="Shape 7"/>
           <p:cNvSpPr/>
           <p:nvPr/>
         </p:nvSpPr>
@@ -12168,7 +9593,7 @@
       </p:sp>
       <p:sp>
         <p:nvSpPr>
-          <p:cNvPr id="12" name="Shape 10"/>
+          <p:cNvPr id="10" name="Shape 8"/>
           <p:cNvSpPr/>
           <p:nvPr/>
         </p:nvSpPr>
@@ -12188,7 +9613,7 @@
       </p:sp>
       <p:sp>
         <p:nvSpPr>
-          <p:cNvPr id="13" name="Text 11"/>
+          <p:cNvPr id="11" name="Text 9"/>
           <p:cNvSpPr/>
           <p:nvPr/>
         </p:nvSpPr>
@@ -12216,7 +9641,7 @@
                   <a:srgbClr val="2D3748"/>
                 </a:solidFill>
               </a:rPr>
-              <a:t>🧠 RAG導入</a:t>
+              <a:t>🎙️ 音声入力/アップロード</a:t>
             </a:r>
             <a:endParaRPr lang="en-US" sz="1300" dirty="0"/>
           </a:p>
@@ -12224,43 +9649,7 @@
       </p:sp>
       <p:sp>
         <p:nvSpPr>
-          <p:cNvPr id="14" name="Text 12"/>
-          <p:cNvSpPr/>
-          <p:nvPr/>
-        </p:nvSpPr>
-        <p:spPr>
-          <a:xfrm>
-            <a:off x="8293608" y="1645920"/>
-            <a:ext cx="3300984" cy="914400"/>
-          </a:xfrm>
-          <a:prstGeom prst="rect">
-            <a:avLst/>
-          </a:prstGeom>
-          <a:noFill/>
-          <a:ln/>
-        </p:spPr>
-        <p:txBody>
-          <a:bodyPr wrap="square" rtlCol="0" anchor="t"/>
-          <a:lstStyle/>
-          <a:p>
-            <a:pPr indent="0" marL="0">
-              <a:buNone/>
-            </a:pPr>
-            <a:r>
-              <a:rPr lang="en-US" sz="1000" dirty="0">
-                <a:solidFill>
-                  <a:srgbClr val="4A5568"/>
-                </a:solidFill>
-              </a:rPr>
-              <a:t>複数会議サマリーを検索・参照しながら統合要約</a:t>
-            </a:r>
-            <a:endParaRPr lang="en-US" sz="1000" dirty="0"/>
-          </a:p>
-        </p:txBody>
-      </p:sp>
-      <p:sp>
-        <p:nvSpPr>
-          <p:cNvPr id="15" name="Shape 13"/>
+          <p:cNvPr id="12" name="Shape 10"/>
           <p:cNvSpPr/>
           <p:nvPr/>
         </p:nvSpPr>
@@ -12287,7 +9676,7 @@
       </p:sp>
       <p:sp>
         <p:nvSpPr>
-          <p:cNvPr id="16" name="Shape 14"/>
+          <p:cNvPr id="13" name="Shape 11"/>
           <p:cNvSpPr/>
           <p:nvPr/>
         </p:nvSpPr>
@@ -12307,7 +9696,7 @@
       </p:sp>
       <p:sp>
         <p:nvSpPr>
-          <p:cNvPr id="17" name="Text 15"/>
+          <p:cNvPr id="14" name="Text 12"/>
           <p:cNvSpPr/>
           <p:nvPr/>
         </p:nvSpPr>
@@ -12335,7 +9724,7 @@
                   <a:srgbClr val="2D3748"/>
                 </a:solidFill>
               </a:rPr>
-              <a:t>🛡️ ローカル録音</a:t>
+              <a:t>⚙️ リアルタイムAPI</a:t>
             </a:r>
             <a:endParaRPr lang="en-US" sz="1300" dirty="0"/>
           </a:p>
@@ -12343,14 +9732,61 @@
       </p:sp>
       <p:sp>
         <p:nvSpPr>
-          <p:cNvPr id="18" name="Text 16"/>
-          <p:cNvSpPr/>
-          <p:nvPr/>
-        </p:nvSpPr>
-        <p:spPr>
-          <a:xfrm>
-            <a:off x="594360" y="3291840"/>
-            <a:ext cx="3300984" cy="914400"/>
+          <p:cNvPr id="15" name="Shape 13"/>
+          <p:cNvSpPr/>
+          <p:nvPr/>
+        </p:nvSpPr>
+        <p:spPr>
+          <a:xfrm>
+            <a:off x="4306824" y="2834640"/>
+            <a:ext cx="3575304" cy="1463040"/>
+          </a:xfrm>
+          <a:prstGeom prst="roundRect">
+            <a:avLst>
+              <a:gd name="adj" fmla="val 6250"/>
+            </a:avLst>
+          </a:prstGeom>
+          <a:solidFill>
+            <a:srgbClr val="F7FAFC"/>
+          </a:solidFill>
+          <a:ln w="12700">
+            <a:solidFill>
+              <a:srgbClr val="764BA2"/>
+            </a:solidFill>
+            <a:prstDash val="solid"/>
+          </a:ln>
+        </p:spPr>
+      </p:sp>
+      <p:sp>
+        <p:nvSpPr>
+          <p:cNvPr id="16" name="Shape 14"/>
+          <p:cNvSpPr/>
+          <p:nvPr/>
+        </p:nvSpPr>
+        <p:spPr>
+          <a:xfrm>
+            <a:off x="4306824" y="2834640"/>
+            <a:ext cx="54864" cy="1463040"/>
+          </a:xfrm>
+          <a:prstGeom prst="rect">
+            <a:avLst/>
+          </a:prstGeom>
+          <a:solidFill>
+            <a:srgbClr val="764BA2"/>
+          </a:solidFill>
+          <a:ln/>
+        </p:spPr>
+      </p:sp>
+      <p:sp>
+        <p:nvSpPr>
+          <p:cNvPr id="17" name="Text 15"/>
+          <p:cNvSpPr/>
+          <p:nvPr/>
+        </p:nvSpPr>
+        <p:spPr>
+          <a:xfrm>
+            <a:off x="4443984" y="2926080"/>
+            <a:ext cx="3300984" cy="365760"/>
           </a:xfrm>
           <a:prstGeom prst="rect">
             <a:avLst/>
@@ -12366,14 +9802,97 @@
               <a:buNone/>
             </a:pPr>
             <a:r>
-              <a:rPr lang="en-US" sz="1000" dirty="0">
-                <a:solidFill>
-                  <a:srgbClr val="4A5568"/>
-                </a:solidFill>
-              </a:rPr>
-              <a:t>音声取得失敗時も復元可能なバックアップを全会議で確保</a:t>
-            </a:r>
-            <a:endParaRPr lang="en-US" sz="1000" dirty="0"/>
+              <a:rPr lang="en-US" sz="1300" b="1" dirty="0">
+                <a:solidFill>
+                  <a:srgbClr val="2D3748"/>
+                </a:solidFill>
+              </a:rPr>
+              <a:t>🧠 要約/生成AI</a:t>
+            </a:r>
+            <a:endParaRPr lang="en-US" sz="1300" dirty="0"/>
+          </a:p>
+        </p:txBody>
+      </p:sp>
+      <p:sp>
+        <p:nvSpPr>
+          <p:cNvPr id="18" name="Shape 16"/>
+          <p:cNvSpPr/>
+          <p:nvPr/>
+        </p:nvSpPr>
+        <p:spPr>
+          <a:xfrm>
+            <a:off x="8156448" y="2834640"/>
+            <a:ext cx="3575304" cy="1463040"/>
+          </a:xfrm>
+          <a:prstGeom prst="roundRect">
+            <a:avLst>
+              <a:gd name="adj" fmla="val 6250"/>
+            </a:avLst>
+          </a:prstGeom>
+          <a:solidFill>
+            <a:srgbClr val="F7FAFC"/>
+          </a:solidFill>
+          <a:ln w="12700">
+            <a:solidFill>
+              <a:srgbClr val="38A169"/>
+            </a:solidFill>
+            <a:prstDash val="solid"/>
+          </a:ln>
+        </p:spPr>
+      </p:sp>
+      <p:sp>
+        <p:nvSpPr>
+          <p:cNvPr id="19" name="Shape 17"/>
+          <p:cNvSpPr/>
+          <p:nvPr/>
+        </p:nvSpPr>
+        <p:spPr>
+          <a:xfrm>
+            <a:off x="8156448" y="2834640"/>
+            <a:ext cx="54864" cy="1463040"/>
+          </a:xfrm>
+          <a:prstGeom prst="rect">
+            <a:avLst/>
+          </a:prstGeom>
+          <a:solidFill>
+            <a:srgbClr val="38A169"/>
+          </a:solidFill>
+          <a:ln/>
+        </p:spPr>
+      </p:sp>
+      <p:sp>
+        <p:nvSpPr>
+          <p:cNvPr id="20" name="Text 18"/>
+          <p:cNvSpPr/>
+          <p:nvPr/>
+        </p:nvSpPr>
+        <p:spPr>
+          <a:xfrm>
+            <a:off x="8293608" y="2926080"/>
+            <a:ext cx="3300984" cy="365760"/>
+          </a:xfrm>
+          <a:prstGeom prst="rect">
+            <a:avLst/>
+          </a:prstGeom>
+          <a:noFill/>
+          <a:ln/>
+        </p:spPr>
+        <p:txBody>
+          <a:bodyPr wrap="square" rtlCol="0" anchor="t"/>
+          <a:lstStyle/>
+          <a:p>
+            <a:pPr indent="0" marL="0">
+              <a:buNone/>
+            </a:pPr>
+            <a:r>
+              <a:rPr lang="en-US" sz="1300" b="1" dirty="0">
+                <a:solidFill>
+                  <a:srgbClr val="2D3748"/>
+                </a:solidFill>
+              </a:rPr>
+              <a:t>📚 RAGインデックス</a:t>
+            </a:r>
+            <a:endParaRPr lang="en-US" sz="1300" dirty="0"/>
           </a:p>
         </p:txBody>
       </p:sp>
@@ -12432,7 +9951,7 @@
                   <a:srgbClr val="2D3748"/>
                 </a:solidFill>
               </a:rPr>
-              <a:t>🏗️ 想定アーキテクチャ</a:t>
+              <a:t>🔀 文字起こし方式の選択設計</a:t>
             </a:r>
             <a:endParaRPr lang="en-US" sz="2800" dirty="0"/>
           </a:p>
@@ -12440,61 +9959,14 @@
       </p:sp>
       <p:sp>
         <p:nvSpPr>
-          <p:cNvPr id="3" name="Shape 1"/>
-          <p:cNvSpPr/>
-          <p:nvPr/>
-        </p:nvSpPr>
-        <p:spPr>
-          <a:xfrm>
-            <a:off x="457200" y="1188720"/>
-            <a:ext cx="3575304" cy="1463040"/>
-          </a:xfrm>
-          <a:prstGeom prst="roundRect">
-            <a:avLst>
-              <a:gd name="adj" fmla="val 6250"/>
-            </a:avLst>
-          </a:prstGeom>
-          <a:solidFill>
-            <a:srgbClr val="F7FAFC"/>
-          </a:solidFill>
-          <a:ln w="12700">
-            <a:solidFill>
-              <a:srgbClr val="667EEA"/>
-            </a:solidFill>
-            <a:prstDash val="solid"/>
-          </a:ln>
-        </p:spPr>
-      </p:sp>
-      <p:sp>
-        <p:nvSpPr>
-          <p:cNvPr id="4" name="Shape 2"/>
-          <p:cNvSpPr/>
-          <p:nvPr/>
-        </p:nvSpPr>
-        <p:spPr>
-          <a:xfrm>
-            <a:off x="457200" y="1188720"/>
-            <a:ext cx="54864" cy="1463040"/>
-          </a:xfrm>
-          <a:prstGeom prst="rect">
-            <a:avLst/>
-          </a:prstGeom>
-          <a:solidFill>
-            <a:srgbClr val="667EEA"/>
-          </a:solidFill>
-          <a:ln/>
-        </p:spPr>
-      </p:sp>
-      <p:sp>
-        <p:nvSpPr>
-          <p:cNvPr id="5" name="Text 3"/>
-          <p:cNvSpPr/>
-          <p:nvPr/>
-        </p:nvSpPr>
-        <p:spPr>
-          <a:xfrm>
-            <a:off x="594360" y="1280160"/>
-            <a:ext cx="3300984" cy="365760"/>
+          <p:cNvPr id="3" name="Text 1"/>
+          <p:cNvSpPr/>
+          <p:nvPr/>
+        </p:nvSpPr>
+        <p:spPr>
+          <a:xfrm>
+            <a:off x="731520" y="1188720"/>
+            <a:ext cx="10725912" cy="3383280"/>
           </a:xfrm>
           <a:prstGeom prst="rect">
             <a:avLst/>
@@ -12507,432 +9979,1185 @@
           <a:lstStyle/>
           <a:p>
             <a:pPr indent="0" marL="0">
-              <a:buNone/>
-            </a:pPr>
-            <a:r>
-              <a:rPr lang="en-US" sz="1300" b="1" dirty="0">
-                <a:solidFill>
-                  <a:srgbClr val="2D3748"/>
-                </a:solidFill>
-              </a:rPr>
-              <a:t>👥 会議参加者</a:t>
-            </a:r>
-            <a:endParaRPr lang="en-US" sz="1300" dirty="0"/>
-          </a:p>
-        </p:txBody>
-      </p:sp>
-      <p:sp>
-        <p:nvSpPr>
-          <p:cNvPr id="6" name="Shape 4"/>
-          <p:cNvSpPr/>
-          <p:nvPr/>
-        </p:nvSpPr>
-        <p:spPr>
-          <a:xfrm>
-            <a:off x="4306824" y="1188720"/>
-            <a:ext cx="3575304" cy="1463040"/>
-          </a:xfrm>
-          <a:prstGeom prst="roundRect">
-            <a:avLst>
-              <a:gd name="adj" fmla="val 6250"/>
-            </a:avLst>
-          </a:prstGeom>
-          <a:solidFill>
-            <a:srgbClr val="F7FAFC"/>
-          </a:solidFill>
-          <a:ln w="12700">
-            <a:solidFill>
-              <a:srgbClr val="48BB78"/>
-            </a:solidFill>
-            <a:prstDash val="solid"/>
-          </a:ln>
-        </p:spPr>
-      </p:sp>
-      <p:sp>
-        <p:nvSpPr>
-          <p:cNvPr id="7" name="Shape 5"/>
-          <p:cNvSpPr/>
-          <p:nvPr/>
-        </p:nvSpPr>
-        <p:spPr>
-          <a:xfrm>
-            <a:off x="4306824" y="1188720"/>
-            <a:ext cx="54864" cy="1463040"/>
-          </a:xfrm>
-          <a:prstGeom prst="rect">
-            <a:avLst/>
-          </a:prstGeom>
-          <a:solidFill>
-            <a:srgbClr val="48BB78"/>
-          </a:solidFill>
-          <a:ln/>
-        </p:spPr>
-      </p:sp>
-      <p:sp>
-        <p:nvSpPr>
-          <p:cNvPr id="8" name="Text 6"/>
-          <p:cNvSpPr/>
-          <p:nvPr/>
-        </p:nvSpPr>
-        <p:spPr>
-          <a:xfrm>
-            <a:off x="4443984" y="1280160"/>
-            <a:ext cx="3300984" cy="365760"/>
-          </a:xfrm>
-          <a:prstGeom prst="rect">
-            <a:avLst/>
-          </a:prstGeom>
-          <a:noFill/>
-          <a:ln/>
-        </p:spPr>
-        <p:txBody>
-          <a:bodyPr wrap="square" rtlCol="0" anchor="t"/>
-          <a:lstStyle/>
-          <a:p>
-            <a:pPr indent="0" marL="0">
-              <a:buNone/>
-            </a:pPr>
-            <a:r>
-              <a:rPr lang="en-US" sz="1300" b="1" dirty="0">
-                <a:solidFill>
-                  <a:srgbClr val="2D3748"/>
-                </a:solidFill>
-              </a:rPr>
-              <a:t>🎤 マイク/録音端末</a:t>
-            </a:r>
-            <a:endParaRPr lang="en-US" sz="1300" dirty="0"/>
-          </a:p>
-        </p:txBody>
-      </p:sp>
-      <p:sp>
-        <p:nvSpPr>
-          <p:cNvPr id="9" name="Shape 7"/>
-          <p:cNvSpPr/>
-          <p:nvPr/>
-        </p:nvSpPr>
-        <p:spPr>
-          <a:xfrm>
-            <a:off x="8156448" y="1188720"/>
-            <a:ext cx="3575304" cy="1463040"/>
-          </a:xfrm>
-          <a:prstGeom prst="roundRect">
-            <a:avLst>
-              <a:gd name="adj" fmla="val 6250"/>
-            </a:avLst>
-          </a:prstGeom>
-          <a:solidFill>
-            <a:srgbClr val="F7FAFC"/>
-          </a:solidFill>
-          <a:ln w="12700">
-            <a:solidFill>
-              <a:srgbClr val="ED8936"/>
-            </a:solidFill>
-            <a:prstDash val="solid"/>
-          </a:ln>
-        </p:spPr>
-      </p:sp>
-      <p:sp>
-        <p:nvSpPr>
-          <p:cNvPr id="10" name="Shape 8"/>
-          <p:cNvSpPr/>
-          <p:nvPr/>
-        </p:nvSpPr>
-        <p:spPr>
-          <a:xfrm>
-            <a:off x="8156448" y="1188720"/>
-            <a:ext cx="54864" cy="1463040"/>
-          </a:xfrm>
-          <a:prstGeom prst="rect">
-            <a:avLst/>
-          </a:prstGeom>
-          <a:solidFill>
-            <a:srgbClr val="ED8936"/>
-          </a:solidFill>
-          <a:ln/>
-        </p:spPr>
-      </p:sp>
-      <p:sp>
-        <p:nvSpPr>
-          <p:cNvPr id="11" name="Text 9"/>
-          <p:cNvSpPr/>
-          <p:nvPr/>
-        </p:nvSpPr>
-        <p:spPr>
-          <a:xfrm>
-            <a:off x="8293608" y="1280160"/>
-            <a:ext cx="3300984" cy="365760"/>
-          </a:xfrm>
-          <a:prstGeom prst="rect">
-            <a:avLst/>
-          </a:prstGeom>
-          <a:noFill/>
-          <a:ln/>
-        </p:spPr>
-        <p:txBody>
-          <a:bodyPr wrap="square" rtlCol="0" anchor="t"/>
-          <a:lstStyle/>
-          <a:p>
-            <a:pPr indent="0" marL="0">
-              <a:buNone/>
-            </a:pPr>
-            <a:r>
-              <a:rPr lang="en-US" sz="1300" b="1" dirty="0">
-                <a:solidFill>
-                  <a:srgbClr val="2D3748"/>
-                </a:solidFill>
-              </a:rPr>
-              <a:t>📝 Whisperアップロード</a:t>
-            </a:r>
-            <a:endParaRPr lang="en-US" sz="1300" dirty="0"/>
-          </a:p>
-        </p:txBody>
-      </p:sp>
-      <p:sp>
-        <p:nvSpPr>
-          <p:cNvPr id="12" name="Shape 10"/>
-          <p:cNvSpPr/>
-          <p:nvPr/>
-        </p:nvSpPr>
-        <p:spPr>
-          <a:xfrm>
-            <a:off x="457200" y="2834640"/>
-            <a:ext cx="3575304" cy="1463040"/>
-          </a:xfrm>
-          <a:prstGeom prst="roundRect">
-            <a:avLst>
-              <a:gd name="adj" fmla="val 6250"/>
-            </a:avLst>
-          </a:prstGeom>
-          <a:solidFill>
-            <a:srgbClr val="F7FAFC"/>
-          </a:solidFill>
-          <a:ln w="12700">
-            <a:solidFill>
-              <a:srgbClr val="E53E3E"/>
-            </a:solidFill>
-            <a:prstDash val="solid"/>
-          </a:ln>
-        </p:spPr>
-      </p:sp>
-      <p:sp>
-        <p:nvSpPr>
-          <p:cNvPr id="13" name="Shape 11"/>
-          <p:cNvSpPr/>
-          <p:nvPr/>
-        </p:nvSpPr>
-        <p:spPr>
-          <a:xfrm>
-            <a:off x="457200" y="2834640"/>
-            <a:ext cx="54864" cy="1463040"/>
-          </a:xfrm>
-          <a:prstGeom prst="rect">
-            <a:avLst/>
-          </a:prstGeom>
-          <a:solidFill>
-            <a:srgbClr val="E53E3E"/>
-          </a:solidFill>
-          <a:ln/>
-        </p:spPr>
-      </p:sp>
-      <p:sp>
-        <p:nvSpPr>
-          <p:cNvPr id="14" name="Text 12"/>
-          <p:cNvSpPr/>
-          <p:nvPr/>
-        </p:nvSpPr>
-        <p:spPr>
-          <a:xfrm>
-            <a:off x="594360" y="2926080"/>
-            <a:ext cx="3300984" cy="365760"/>
-          </a:xfrm>
-          <a:prstGeom prst="rect">
-            <a:avLst/>
-          </a:prstGeom>
-          <a:noFill/>
-          <a:ln/>
-        </p:spPr>
-        <p:txBody>
-          <a:bodyPr wrap="square" rtlCol="0" anchor="t"/>
-          <a:lstStyle/>
-          <a:p>
-            <a:pPr indent="0" marL="0">
-              <a:buNone/>
-            </a:pPr>
-            <a:r>
-              <a:rPr lang="en-US" sz="1300" b="1" dirty="0">
-                <a:solidFill>
-                  <a:srgbClr val="2D3748"/>
-                </a:solidFill>
-              </a:rPr>
-              <a:t>⚡ リアルタイムAPI</a:t>
-            </a:r>
-            <a:endParaRPr lang="en-US" sz="1300" dirty="0"/>
-          </a:p>
-        </p:txBody>
-      </p:sp>
-      <p:sp>
-        <p:nvSpPr>
-          <p:cNvPr id="15" name="Shape 13"/>
-          <p:cNvSpPr/>
-          <p:nvPr/>
-        </p:nvSpPr>
-        <p:spPr>
-          <a:xfrm>
-            <a:off x="4306824" y="2834640"/>
-            <a:ext cx="3575304" cy="1463040"/>
-          </a:xfrm>
-          <a:prstGeom prst="roundRect">
-            <a:avLst>
-              <a:gd name="adj" fmla="val 6250"/>
-            </a:avLst>
-          </a:prstGeom>
-          <a:solidFill>
-            <a:srgbClr val="F7FAFC"/>
-          </a:solidFill>
-          <a:ln w="12700">
-            <a:solidFill>
-              <a:srgbClr val="764BA2"/>
-            </a:solidFill>
-            <a:prstDash val="solid"/>
-          </a:ln>
-        </p:spPr>
-      </p:sp>
-      <p:sp>
-        <p:nvSpPr>
-          <p:cNvPr id="16" name="Shape 14"/>
-          <p:cNvSpPr/>
-          <p:nvPr/>
-        </p:nvSpPr>
-        <p:spPr>
-          <a:xfrm>
-            <a:off x="4306824" y="2834640"/>
-            <a:ext cx="54864" cy="1463040"/>
-          </a:xfrm>
-          <a:prstGeom prst="rect">
-            <a:avLst/>
-          </a:prstGeom>
-          <a:solidFill>
-            <a:srgbClr val="764BA2"/>
-          </a:solidFill>
-          <a:ln/>
-        </p:spPr>
-      </p:sp>
-      <p:sp>
-        <p:nvSpPr>
-          <p:cNvPr id="17" name="Text 15"/>
-          <p:cNvSpPr/>
-          <p:nvPr/>
-        </p:nvSpPr>
-        <p:spPr>
-          <a:xfrm>
-            <a:off x="4443984" y="2926080"/>
-            <a:ext cx="3300984" cy="365760"/>
-          </a:xfrm>
-          <a:prstGeom prst="rect">
-            <a:avLst/>
-          </a:prstGeom>
-          <a:noFill/>
-          <a:ln/>
-        </p:spPr>
-        <p:txBody>
-          <a:bodyPr wrap="square" rtlCol="0" anchor="t"/>
-          <a:lstStyle/>
-          <a:p>
-            <a:pPr indent="0" marL="0">
-              <a:buNone/>
-            </a:pPr>
-            <a:r>
-              <a:rPr lang="en-US" sz="1300" b="1" dirty="0">
-                <a:solidFill>
-                  <a:srgbClr val="2D3748"/>
-                </a:solidFill>
-              </a:rPr>
-              <a:t>💾 ローカル録音バックアップ</a:t>
-            </a:r>
-            <a:endParaRPr lang="en-US" sz="1300" dirty="0"/>
-          </a:p>
-        </p:txBody>
-      </p:sp>
-      <p:sp>
-        <p:nvSpPr>
-          <p:cNvPr id="18" name="Shape 16"/>
-          <p:cNvSpPr/>
-          <p:nvPr/>
-        </p:nvSpPr>
-        <p:spPr>
-          <a:xfrm>
-            <a:off x="8156448" y="2834640"/>
-            <a:ext cx="3575304" cy="1463040"/>
-          </a:xfrm>
-          <a:prstGeom prst="roundRect">
-            <a:avLst>
-              <a:gd name="adj" fmla="val 6250"/>
-            </a:avLst>
-          </a:prstGeom>
-          <a:solidFill>
-            <a:srgbClr val="F7FAFC"/>
-          </a:solidFill>
-          <a:ln w="12700">
-            <a:solidFill>
-              <a:srgbClr val="38A169"/>
-            </a:solidFill>
-            <a:prstDash val="solid"/>
-          </a:ln>
-        </p:spPr>
-      </p:sp>
-      <p:sp>
-        <p:nvSpPr>
-          <p:cNvPr id="19" name="Shape 17"/>
-          <p:cNvSpPr/>
-          <p:nvPr/>
-        </p:nvSpPr>
-        <p:spPr>
-          <a:xfrm>
-            <a:off x="8156448" y="2834640"/>
-            <a:ext cx="54864" cy="1463040"/>
-          </a:xfrm>
-          <a:prstGeom prst="rect">
-            <a:avLst/>
-          </a:prstGeom>
-          <a:solidFill>
-            <a:srgbClr val="38A169"/>
-          </a:solidFill>
-          <a:ln/>
-        </p:spPr>
-      </p:sp>
-      <p:sp>
-        <p:nvSpPr>
-          <p:cNvPr id="20" name="Text 18"/>
-          <p:cNvSpPr/>
-          <p:nvPr/>
-        </p:nvSpPr>
-        <p:spPr>
-          <a:xfrm>
-            <a:off x="8293608" y="2926080"/>
-            <a:ext cx="3300984" cy="365760"/>
-          </a:xfrm>
-          <a:prstGeom prst="rect">
-            <a:avLst/>
-          </a:prstGeom>
-          <a:noFill/>
-          <a:ln/>
-        </p:spPr>
-        <p:txBody>
-          <a:bodyPr wrap="square" rtlCol="0" anchor="t"/>
-          <a:lstStyle/>
-          <a:p>
-            <a:pPr indent="0" marL="0">
-              <a:buNone/>
-            </a:pPr>
-            <a:r>
-              <a:rPr lang="en-US" sz="1300" b="1" dirty="0">
-                <a:solidFill>
-                  <a:srgbClr val="2D3748"/>
-                </a:solidFill>
-              </a:rPr>
-              <a:t>🤖 サマリー生成エンジン</a:t>
-            </a:r>
-            <a:endParaRPr lang="en-US" sz="1300" dirty="0"/>
+              <a:lnSpc>
+                <a:spcPct val="140000"/>
+              </a:lnSpc>
+              <a:buNone/>
+            </a:pPr>
+            <a:r>
+              <a:rPr lang="en-US" sz="1400" dirty="0">
+                <a:solidFill>
+                  <a:srgbClr val="2D3748"/>
+                </a:solidFill>
+              </a:rPr>
+              <a:t>📤</a:t>
+            </a:r>
+            <a:endParaRPr lang="en-US" sz="1400" dirty="0"/>
+          </a:p>
+          <a:p>
+            <a:pPr indent="0" marL="0">
+              <a:lnSpc>
+                <a:spcPct val="140000"/>
+              </a:lnSpc>
+              <a:buNone/>
+            </a:pPr>
+            <a:endParaRPr lang="en-US" sz="1400" dirty="0"/>
+          </a:p>
+          <a:p>
+            <a:pPr indent="0" marL="0">
+              <a:lnSpc>
+                <a:spcPct val="140000"/>
+              </a:lnSpc>
+              <a:buNone/>
+            </a:pPr>
+            <a:r>
+              <a:rPr lang="en-US" sz="1400" dirty="0">
+                <a:solidFill>
+                  <a:srgbClr val="2D3748"/>
+                </a:solidFill>
+              </a:rPr>
+              <a:t>      </a:t>
+            </a:r>
+            <a:endParaRPr lang="en-US" sz="1400" dirty="0"/>
+          </a:p>
+          <a:p>
+            <a:pPr indent="0" marL="0">
+              <a:lnSpc>
+                <a:spcPct val="140000"/>
+              </a:lnSpc>
+              <a:buNone/>
+            </a:pPr>
+            <a:r>
+              <a:rPr lang="en-US" sz="1400" dirty="0">
+                <a:solidFill>
+                  <a:srgbClr val="2D3748"/>
+                </a:solidFill>
+              </a:rPr>
+              <a:t>Whisperアップロード</a:t>
+            </a:r>
+            <a:endParaRPr lang="en-US" sz="1400" dirty="0"/>
+          </a:p>
+          <a:p>
+            <a:pPr indent="0" marL="0">
+              <a:lnSpc>
+                <a:spcPct val="140000"/>
+              </a:lnSpc>
+              <a:buNone/>
+            </a:pPr>
+            <a:endParaRPr lang="en-US" sz="1400" dirty="0"/>
+          </a:p>
+          <a:p>
+            <a:pPr indent="0" marL="0">
+              <a:lnSpc>
+                <a:spcPct val="140000"/>
+              </a:lnSpc>
+              <a:buNone/>
+            </a:pPr>
+            <a:r>
+              <a:rPr lang="en-US" sz="1400" dirty="0">
+                <a:solidFill>
+                  <a:srgbClr val="2D3748"/>
+                </a:solidFill>
+              </a:rPr>
+              <a:t>      </a:t>
+            </a:r>
+            <a:endParaRPr lang="en-US" sz="1400" dirty="0"/>
+          </a:p>
+          <a:p>
+            <a:pPr indent="0" marL="0">
+              <a:lnSpc>
+                <a:spcPct val="140000"/>
+              </a:lnSpc>
+              <a:buNone/>
+            </a:pPr>
+            <a:r>
+              <a:rPr lang="en-US" sz="1400" dirty="0">
+                <a:solidFill>
+                  <a:srgbClr val="2D3748"/>
+                </a:solidFill>
+              </a:rPr>
+              <a:t>高信頼・会議後処理向き</a:t>
+            </a:r>
+            <a:endParaRPr lang="en-US" sz="1400" dirty="0"/>
+          </a:p>
+          <a:p>
+            <a:pPr indent="0" marL="0">
+              <a:lnSpc>
+                <a:spcPct val="140000"/>
+              </a:lnSpc>
+              <a:buNone/>
+            </a:pPr>
+            <a:endParaRPr lang="en-US" sz="1400" dirty="0"/>
+          </a:p>
+          <a:p>
+            <a:pPr indent="0" marL="0">
+              <a:lnSpc>
+                <a:spcPct val="140000"/>
+              </a:lnSpc>
+              <a:buNone/>
+            </a:pPr>
+            <a:r>
+              <a:rPr lang="en-US" sz="1400" dirty="0">
+                <a:solidFill>
+                  <a:srgbClr val="2D3748"/>
+                </a:solidFill>
+              </a:rPr>
+              <a:t>      </a:t>
+            </a:r>
+            <a:endParaRPr lang="en-US" sz="1400" dirty="0"/>
+          </a:p>
+          <a:p>
+            <a:pPr indent="0" marL="0">
+              <a:lnSpc>
+                <a:spcPct val="140000"/>
+              </a:lnSpc>
+              <a:buNone/>
+            </a:pPr>
+            <a:endParaRPr lang="en-US" sz="1400" dirty="0"/>
+          </a:p>
+          <a:p>
+            <a:pPr indent="0" marL="0">
+              <a:lnSpc>
+                <a:spcPct val="140000"/>
+              </a:lnSpc>
+              <a:buNone/>
+            </a:pPr>
+            <a:r>
+              <a:rPr lang="en-US" sz="1400" dirty="0">
+                <a:solidFill>
+                  <a:srgbClr val="2D3748"/>
+                </a:solidFill>
+              </a:rPr>
+              <a:t>        </a:t>
+            </a:r>
+            <a:endParaRPr lang="en-US" sz="1400" dirty="0"/>
+          </a:p>
+          <a:p>
+            <a:pPr indent="0" marL="0">
+              <a:lnSpc>
+                <a:spcPct val="140000"/>
+              </a:lnSpc>
+              <a:buNone/>
+            </a:pPr>
+            <a:endParaRPr lang="en-US" sz="1400" dirty="0"/>
+          </a:p>
+          <a:p>
+            <a:pPr indent="0" marL="0">
+              <a:lnSpc>
+                <a:spcPct val="140000"/>
+              </a:lnSpc>
+              <a:buNone/>
+            </a:pPr>
+            <a:r>
+              <a:rPr lang="en-US" sz="1400" dirty="0">
+                <a:solidFill>
+                  <a:srgbClr val="2D3748"/>
+                </a:solidFill>
+              </a:rPr>
+              <a:t>          </a:t>
+            </a:r>
+            <a:endParaRPr lang="en-US" sz="1400" dirty="0"/>
+          </a:p>
+          <a:p>
+            <a:pPr indent="0" marL="0">
+              <a:lnSpc>
+                <a:spcPct val="140000"/>
+              </a:lnSpc>
+              <a:buNone/>
+            </a:pPr>
+            <a:r>
+              <a:rPr lang="en-US" sz="1400" dirty="0">
+                <a:solidFill>
+                  <a:srgbClr val="2D3748"/>
+                </a:solidFill>
+              </a:rPr>
+              <a:t>信頼性</a:t>
+            </a:r>
+            <a:endParaRPr lang="en-US" sz="1400" dirty="0"/>
+          </a:p>
+          <a:p>
+            <a:pPr indent="0" marL="0">
+              <a:lnSpc>
+                <a:spcPct val="140000"/>
+              </a:lnSpc>
+              <a:buNone/>
+            </a:pPr>
+            <a:endParaRPr lang="en-US" sz="1400" dirty="0"/>
+          </a:p>
+          <a:p>
+            <a:pPr indent="0" marL="0">
+              <a:lnSpc>
+                <a:spcPct val="140000"/>
+              </a:lnSpc>
+              <a:buNone/>
+            </a:pPr>
+            <a:r>
+              <a:rPr lang="en-US" sz="1400" dirty="0">
+                <a:solidFill>
+                  <a:srgbClr val="2D3748"/>
+                </a:solidFill>
+              </a:rPr>
+              <a:t>          </a:t>
+            </a:r>
+            <a:endParaRPr lang="en-US" sz="1400" dirty="0"/>
+          </a:p>
+          <a:p>
+            <a:pPr indent="0" marL="0">
+              <a:lnSpc>
+                <a:spcPct val="140000"/>
+              </a:lnSpc>
+              <a:buNone/>
+            </a:pPr>
+            <a:endParaRPr lang="en-US" sz="1400" dirty="0"/>
+          </a:p>
+          <a:p>
+            <a:pPr indent="0" marL="0">
+              <a:lnSpc>
+                <a:spcPct val="140000"/>
+              </a:lnSpc>
+              <a:buNone/>
+            </a:pPr>
+            <a:r>
+              <a:rPr lang="en-US" sz="1400" dirty="0">
+                <a:solidFill>
+                  <a:srgbClr val="2D3748"/>
+                </a:solidFill>
+              </a:rPr>
+              <a:t>          </a:t>
+            </a:r>
+            <a:endParaRPr lang="en-US" sz="1400" dirty="0"/>
+          </a:p>
+          <a:p>
+            <a:pPr indent="0" marL="0">
+              <a:lnSpc>
+                <a:spcPct val="140000"/>
+              </a:lnSpc>
+              <a:buNone/>
+            </a:pPr>
+            <a:r>
+              <a:rPr lang="en-US" sz="1400" dirty="0">
+                <a:solidFill>
+                  <a:srgbClr val="2D3748"/>
+                </a:solidFill>
+              </a:rPr>
+              <a:t>高</a:t>
+            </a:r>
+            <a:endParaRPr lang="en-US" sz="1400" dirty="0"/>
+          </a:p>
+          <a:p>
+            <a:pPr indent="0" marL="0">
+              <a:lnSpc>
+                <a:spcPct val="140000"/>
+              </a:lnSpc>
+              <a:buNone/>
+            </a:pPr>
+            <a:endParaRPr lang="en-US" sz="1400" dirty="0"/>
+          </a:p>
+          <a:p>
+            <a:pPr indent="0" marL="0">
+              <a:lnSpc>
+                <a:spcPct val="140000"/>
+              </a:lnSpc>
+              <a:buNone/>
+            </a:pPr>
+            <a:r>
+              <a:rPr lang="en-US" sz="1400" dirty="0">
+                <a:solidFill>
+                  <a:srgbClr val="2D3748"/>
+                </a:solidFill>
+              </a:rPr>
+              <a:t>        </a:t>
+            </a:r>
+            <a:endParaRPr lang="en-US" sz="1400" dirty="0"/>
+          </a:p>
+          <a:p>
+            <a:pPr indent="0" marL="0">
+              <a:lnSpc>
+                <a:spcPct val="140000"/>
+              </a:lnSpc>
+              <a:buNone/>
+            </a:pPr>
+            <a:endParaRPr lang="en-US" sz="1400" dirty="0"/>
+          </a:p>
+          <a:p>
+            <a:pPr indent="0" marL="0">
+              <a:lnSpc>
+                <a:spcPct val="140000"/>
+              </a:lnSpc>
+              <a:buNone/>
+            </a:pPr>
+            <a:r>
+              <a:rPr lang="en-US" sz="1400" dirty="0">
+                <a:solidFill>
+                  <a:srgbClr val="2D3748"/>
+                </a:solidFill>
+              </a:rPr>
+              <a:t>        </a:t>
+            </a:r>
+            <a:endParaRPr lang="en-US" sz="1400" dirty="0"/>
+          </a:p>
+          <a:p>
+            <a:pPr indent="0" marL="0">
+              <a:lnSpc>
+                <a:spcPct val="140000"/>
+              </a:lnSpc>
+              <a:buNone/>
+            </a:pPr>
+            <a:endParaRPr lang="en-US" sz="1400" dirty="0"/>
+          </a:p>
+          <a:p>
+            <a:pPr indent="0" marL="0">
+              <a:lnSpc>
+                <a:spcPct val="140000"/>
+              </a:lnSpc>
+              <a:buNone/>
+            </a:pPr>
+            <a:r>
+              <a:rPr lang="en-US" sz="1400" dirty="0">
+                <a:solidFill>
+                  <a:srgbClr val="2D3748"/>
+                </a:solidFill>
+              </a:rPr>
+              <a:t>          </a:t>
+            </a:r>
+            <a:endParaRPr lang="en-US" sz="1400" dirty="0"/>
+          </a:p>
+          <a:p>
+            <a:pPr indent="0" marL="0">
+              <a:lnSpc>
+                <a:spcPct val="140000"/>
+              </a:lnSpc>
+              <a:buNone/>
+            </a:pPr>
+            <a:r>
+              <a:rPr lang="en-US" sz="1400" dirty="0">
+                <a:solidFill>
+                  <a:srgbClr val="2D3748"/>
+                </a:solidFill>
+              </a:rPr>
+              <a:t>即時性</a:t>
+            </a:r>
+            <a:endParaRPr lang="en-US" sz="1400" dirty="0"/>
+          </a:p>
+          <a:p>
+            <a:pPr indent="0" marL="0">
+              <a:lnSpc>
+                <a:spcPct val="140000"/>
+              </a:lnSpc>
+              <a:buNone/>
+            </a:pPr>
+            <a:endParaRPr lang="en-US" sz="1400" dirty="0"/>
+          </a:p>
+          <a:p>
+            <a:pPr indent="0" marL="0">
+              <a:lnSpc>
+                <a:spcPct val="140000"/>
+              </a:lnSpc>
+              <a:buNone/>
+            </a:pPr>
+            <a:r>
+              <a:rPr lang="en-US" sz="1400" dirty="0">
+                <a:solidFill>
+                  <a:srgbClr val="2D3748"/>
+                </a:solidFill>
+              </a:rPr>
+              <a:t>          </a:t>
+            </a:r>
+            <a:endParaRPr lang="en-US" sz="1400" dirty="0"/>
+          </a:p>
+          <a:p>
+            <a:pPr indent="0" marL="0">
+              <a:lnSpc>
+                <a:spcPct val="140000"/>
+              </a:lnSpc>
+              <a:buNone/>
+            </a:pPr>
+            <a:endParaRPr lang="en-US" sz="1400" dirty="0"/>
+          </a:p>
+          <a:p>
+            <a:pPr indent="0" marL="0">
+              <a:lnSpc>
+                <a:spcPct val="140000"/>
+              </a:lnSpc>
+              <a:buNone/>
+            </a:pPr>
+            <a:r>
+              <a:rPr lang="en-US" sz="1400" dirty="0">
+                <a:solidFill>
+                  <a:srgbClr val="2D3748"/>
+                </a:solidFill>
+              </a:rPr>
+              <a:t>          </a:t>
+            </a:r>
+            <a:endParaRPr lang="en-US" sz="1400" dirty="0"/>
+          </a:p>
+          <a:p>
+            <a:pPr indent="0" marL="0">
+              <a:lnSpc>
+                <a:spcPct val="140000"/>
+              </a:lnSpc>
+              <a:buNone/>
+            </a:pPr>
+            <a:r>
+              <a:rPr lang="en-US" sz="1400" dirty="0">
+                <a:solidFill>
+                  <a:srgbClr val="2D3748"/>
+                </a:solidFill>
+              </a:rPr>
+              <a:t>中</a:t>
+            </a:r>
+            <a:endParaRPr lang="en-US" sz="1400" dirty="0"/>
+          </a:p>
+          <a:p>
+            <a:pPr indent="0" marL="0">
+              <a:lnSpc>
+                <a:spcPct val="140000"/>
+              </a:lnSpc>
+              <a:buNone/>
+            </a:pPr>
+            <a:endParaRPr lang="en-US" sz="1400" dirty="0"/>
+          </a:p>
+          <a:p>
+            <a:pPr indent="0" marL="0">
+              <a:lnSpc>
+                <a:spcPct val="140000"/>
+              </a:lnSpc>
+              <a:buNone/>
+            </a:pPr>
+            <a:r>
+              <a:rPr lang="en-US" sz="1400" dirty="0">
+                <a:solidFill>
+                  <a:srgbClr val="2D3748"/>
+                </a:solidFill>
+              </a:rPr>
+              <a:t>        </a:t>
+            </a:r>
+            <a:endParaRPr lang="en-US" sz="1400" dirty="0"/>
+          </a:p>
+          <a:p>
+            <a:pPr indent="0" marL="0">
+              <a:lnSpc>
+                <a:spcPct val="140000"/>
+              </a:lnSpc>
+              <a:buNone/>
+            </a:pPr>
+            <a:endParaRPr lang="en-US" sz="1400" dirty="0"/>
+          </a:p>
+          <a:p>
+            <a:pPr indent="0" marL="0">
+              <a:lnSpc>
+                <a:spcPct val="140000"/>
+              </a:lnSpc>
+              <a:buNone/>
+            </a:pPr>
+            <a:r>
+              <a:rPr lang="en-US" sz="1400" dirty="0">
+                <a:solidFill>
+                  <a:srgbClr val="2D3748"/>
+                </a:solidFill>
+              </a:rPr>
+              <a:t>      </a:t>
+            </a:r>
+            <a:endParaRPr lang="en-US" sz="1400" dirty="0"/>
+          </a:p>
+          <a:p>
+            <a:pPr indent="0" marL="0">
+              <a:lnSpc>
+                <a:spcPct val="140000"/>
+              </a:lnSpc>
+              <a:buNone/>
+            </a:pPr>
+            <a:endParaRPr lang="en-US" sz="1400" dirty="0"/>
+          </a:p>
+          <a:p>
+            <a:pPr indent="0" marL="0">
+              <a:lnSpc>
+                <a:spcPct val="140000"/>
+              </a:lnSpc>
+              <a:buNone/>
+            </a:pPr>
+            <a:r>
+              <a:rPr lang="en-US" sz="1400" dirty="0">
+                <a:solidFill>
+                  <a:srgbClr val="2D3748"/>
+                </a:solidFill>
+              </a:rPr>
+              <a:t>    </a:t>
+            </a:r>
+            <a:endParaRPr lang="en-US" sz="1400" dirty="0"/>
+          </a:p>
+          <a:p>
+            <a:pPr indent="0" marL="0">
+              <a:lnSpc>
+                <a:spcPct val="140000"/>
+              </a:lnSpc>
+              <a:buNone/>
+            </a:pPr>
+            <a:endParaRPr lang="en-US" sz="1400" dirty="0"/>
+          </a:p>
+          <a:p>
+            <a:pPr indent="0" marL="0">
+              <a:lnSpc>
+                <a:spcPct val="140000"/>
+              </a:lnSpc>
+              <a:buNone/>
+            </a:pPr>
+            <a:r>
+              <a:rPr lang="en-US" sz="1400" dirty="0">
+                <a:solidFill>
+                  <a:srgbClr val="2D3748"/>
+                </a:solidFill>
+              </a:rPr>
+              <a:t>    </a:t>
+            </a:r>
+            <a:endParaRPr lang="en-US" sz="1400" dirty="0"/>
+          </a:p>
+          <a:p>
+            <a:pPr indent="0" marL="0">
+              <a:lnSpc>
+                <a:spcPct val="140000"/>
+              </a:lnSpc>
+              <a:buNone/>
+            </a:pPr>
+            <a:r>
+              <a:rPr lang="en-US" sz="1400" dirty="0">
+                <a:solidFill>
+                  <a:srgbClr val="2D3748"/>
+                </a:solidFill>
+              </a:rPr>
+              <a:t>⇄</a:t>
+            </a:r>
+            <a:endParaRPr lang="en-US" sz="1400" dirty="0"/>
+          </a:p>
+          <a:p>
+            <a:pPr indent="0" marL="0">
+              <a:lnSpc>
+                <a:spcPct val="140000"/>
+              </a:lnSpc>
+              <a:buNone/>
+            </a:pPr>
+            <a:endParaRPr lang="en-US" sz="1400" dirty="0"/>
+          </a:p>
+          <a:p>
+            <a:pPr indent="0" marL="0">
+              <a:lnSpc>
+                <a:spcPct val="140000"/>
+              </a:lnSpc>
+              <a:buNone/>
+            </a:pPr>
+            <a:r>
+              <a:rPr lang="en-US" sz="1400" dirty="0">
+                <a:solidFill>
+                  <a:srgbClr val="2D3748"/>
+                </a:solidFill>
+              </a:rPr>
+              <a:t>    </a:t>
+            </a:r>
+            <a:endParaRPr lang="en-US" sz="1400" dirty="0"/>
+          </a:p>
+          <a:p>
+            <a:pPr indent="0" marL="0">
+              <a:lnSpc>
+                <a:spcPct val="140000"/>
+              </a:lnSpc>
+              <a:buNone/>
+            </a:pPr>
+            <a:endParaRPr lang="en-US" sz="1400" dirty="0"/>
+          </a:p>
+          <a:p>
+            <a:pPr indent="0" marL="0">
+              <a:lnSpc>
+                <a:spcPct val="140000"/>
+              </a:lnSpc>
+              <a:buNone/>
+            </a:pPr>
+            <a:r>
+              <a:rPr lang="en-US" sz="1400" dirty="0">
+                <a:solidFill>
+                  <a:srgbClr val="2D3748"/>
+                </a:solidFill>
+              </a:rPr>
+              <a:t>      </a:t>
+            </a:r>
+            <a:endParaRPr lang="en-US" sz="1400" dirty="0"/>
+          </a:p>
+          <a:p>
+            <a:pPr indent="0" marL="0">
+              <a:lnSpc>
+                <a:spcPct val="140000"/>
+              </a:lnSpc>
+              <a:buNone/>
+            </a:pPr>
+            <a:r>
+              <a:rPr lang="en-US" sz="1400" dirty="0">
+                <a:solidFill>
+                  <a:srgbClr val="2D3748"/>
+                </a:solidFill>
+              </a:rPr>
+              <a:t>💬</a:t>
+            </a:r>
+            <a:endParaRPr lang="en-US" sz="1400" dirty="0"/>
+          </a:p>
+          <a:p>
+            <a:pPr indent="0" marL="0">
+              <a:lnSpc>
+                <a:spcPct val="140000"/>
+              </a:lnSpc>
+              <a:buNone/>
+            </a:pPr>
+            <a:endParaRPr lang="en-US" sz="1400" dirty="0"/>
+          </a:p>
+          <a:p>
+            <a:pPr indent="0" marL="0">
+              <a:lnSpc>
+                <a:spcPct val="140000"/>
+              </a:lnSpc>
+              <a:buNone/>
+            </a:pPr>
+            <a:r>
+              <a:rPr lang="en-US" sz="1400" dirty="0">
+                <a:solidFill>
+                  <a:srgbClr val="2D3748"/>
+                </a:solidFill>
+              </a:rPr>
+              <a:t>      </a:t>
+            </a:r>
+            <a:endParaRPr lang="en-US" sz="1400" dirty="0"/>
+          </a:p>
+          <a:p>
+            <a:pPr indent="0" marL="0">
+              <a:lnSpc>
+                <a:spcPct val="140000"/>
+              </a:lnSpc>
+              <a:buNone/>
+            </a:pPr>
+            <a:r>
+              <a:rPr lang="en-US" sz="1400" dirty="0">
+                <a:solidFill>
+                  <a:srgbClr val="2D3748"/>
+                </a:solidFill>
+              </a:rPr>
+              <a:t>リアルタイムAPI</a:t>
+            </a:r>
+            <a:endParaRPr lang="en-US" sz="1400" dirty="0"/>
+          </a:p>
+          <a:p>
+            <a:pPr indent="0" marL="0">
+              <a:lnSpc>
+                <a:spcPct val="140000"/>
+              </a:lnSpc>
+              <a:buNone/>
+            </a:pPr>
+            <a:endParaRPr lang="en-US" sz="1400" dirty="0"/>
+          </a:p>
+          <a:p>
+            <a:pPr indent="0" marL="0">
+              <a:lnSpc>
+                <a:spcPct val="140000"/>
+              </a:lnSpc>
+              <a:buNone/>
+            </a:pPr>
+            <a:r>
+              <a:rPr lang="en-US" sz="1400" dirty="0">
+                <a:solidFill>
+                  <a:srgbClr val="2D3748"/>
+                </a:solidFill>
+              </a:rPr>
+              <a:t>      </a:t>
+            </a:r>
+            <a:endParaRPr lang="en-US" sz="1400" dirty="0"/>
+          </a:p>
+          <a:p>
+            <a:pPr indent="0" marL="0">
+              <a:lnSpc>
+                <a:spcPct val="140000"/>
+              </a:lnSpc>
+              <a:buNone/>
+            </a:pPr>
+            <a:r>
+              <a:rPr lang="en-US" sz="1400" dirty="0">
+                <a:solidFill>
+                  <a:srgbClr val="2D3748"/>
+                </a:solidFill>
+              </a:rPr>
+              <a:t>ライブ字幕・会議中支援向き</a:t>
+            </a:r>
+            <a:endParaRPr lang="en-US" sz="1400" dirty="0"/>
+          </a:p>
+          <a:p>
+            <a:pPr indent="0" marL="0">
+              <a:lnSpc>
+                <a:spcPct val="140000"/>
+              </a:lnSpc>
+              <a:buNone/>
+            </a:pPr>
+            <a:endParaRPr lang="en-US" sz="1400" dirty="0"/>
+          </a:p>
+          <a:p>
+            <a:pPr indent="0" marL="0">
+              <a:lnSpc>
+                <a:spcPct val="140000"/>
+              </a:lnSpc>
+              <a:buNone/>
+            </a:pPr>
+            <a:r>
+              <a:rPr lang="en-US" sz="1400" dirty="0">
+                <a:solidFill>
+                  <a:srgbClr val="2D3748"/>
+                </a:solidFill>
+              </a:rPr>
+              <a:t>      </a:t>
+            </a:r>
+            <a:endParaRPr lang="en-US" sz="1400" dirty="0"/>
+          </a:p>
+          <a:p>
+            <a:pPr indent="0" marL="0">
+              <a:lnSpc>
+                <a:spcPct val="140000"/>
+              </a:lnSpc>
+              <a:buNone/>
+            </a:pPr>
+            <a:endParaRPr lang="en-US" sz="1400" dirty="0"/>
+          </a:p>
+          <a:p>
+            <a:pPr indent="0" marL="0">
+              <a:lnSpc>
+                <a:spcPct val="140000"/>
+              </a:lnSpc>
+              <a:buNone/>
+            </a:pPr>
+            <a:r>
+              <a:rPr lang="en-US" sz="1400" dirty="0">
+                <a:solidFill>
+                  <a:srgbClr val="2D3748"/>
+                </a:solidFill>
+              </a:rPr>
+              <a:t>        </a:t>
+            </a:r>
+            <a:endParaRPr lang="en-US" sz="1400" dirty="0"/>
+          </a:p>
+          <a:p>
+            <a:pPr indent="0" marL="0">
+              <a:lnSpc>
+                <a:spcPct val="140000"/>
+              </a:lnSpc>
+              <a:buNone/>
+            </a:pPr>
+            <a:endParaRPr lang="en-US" sz="1400" dirty="0"/>
+          </a:p>
+          <a:p>
+            <a:pPr indent="0" marL="0">
+              <a:lnSpc>
+                <a:spcPct val="140000"/>
+              </a:lnSpc>
+              <a:buNone/>
+            </a:pPr>
+            <a:r>
+              <a:rPr lang="en-US" sz="1400" dirty="0">
+                <a:solidFill>
+                  <a:srgbClr val="2D3748"/>
+                </a:solidFill>
+              </a:rPr>
+              <a:t>          </a:t>
+            </a:r>
+            <a:endParaRPr lang="en-US" sz="1400" dirty="0"/>
+          </a:p>
+          <a:p>
+            <a:pPr indent="0" marL="0">
+              <a:lnSpc>
+                <a:spcPct val="140000"/>
+              </a:lnSpc>
+              <a:buNone/>
+            </a:pPr>
+            <a:r>
+              <a:rPr lang="en-US" sz="1400" dirty="0">
+                <a:solidFill>
+                  <a:srgbClr val="2D3748"/>
+                </a:solidFill>
+              </a:rPr>
+              <a:t>即時性</a:t>
+            </a:r>
+            <a:endParaRPr lang="en-US" sz="1400" dirty="0"/>
+          </a:p>
+          <a:p>
+            <a:pPr indent="0" marL="0">
+              <a:lnSpc>
+                <a:spcPct val="140000"/>
+              </a:lnSpc>
+              <a:buNone/>
+            </a:pPr>
+            <a:endParaRPr lang="en-US" sz="1400" dirty="0"/>
+          </a:p>
+          <a:p>
+            <a:pPr indent="0" marL="0">
+              <a:lnSpc>
+                <a:spcPct val="140000"/>
+              </a:lnSpc>
+              <a:buNone/>
+            </a:pPr>
+            <a:r>
+              <a:rPr lang="en-US" sz="1400" dirty="0">
+                <a:solidFill>
+                  <a:srgbClr val="2D3748"/>
+                </a:solidFill>
+              </a:rPr>
+              <a:t>          </a:t>
+            </a:r>
+            <a:endParaRPr lang="en-US" sz="1400" dirty="0"/>
+          </a:p>
+          <a:p>
+            <a:pPr indent="0" marL="0">
+              <a:lnSpc>
+                <a:spcPct val="140000"/>
+              </a:lnSpc>
+              <a:buNone/>
+            </a:pPr>
+            <a:endParaRPr lang="en-US" sz="1400" dirty="0"/>
+          </a:p>
+          <a:p>
+            <a:pPr indent="0" marL="0">
+              <a:lnSpc>
+                <a:spcPct val="140000"/>
+              </a:lnSpc>
+              <a:buNone/>
+            </a:pPr>
+            <a:r>
+              <a:rPr lang="en-US" sz="1400" dirty="0">
+                <a:solidFill>
+                  <a:srgbClr val="2D3748"/>
+                </a:solidFill>
+              </a:rPr>
+              <a:t>          </a:t>
+            </a:r>
+            <a:endParaRPr lang="en-US" sz="1400" dirty="0"/>
+          </a:p>
+          <a:p>
+            <a:pPr indent="0" marL="0">
+              <a:lnSpc>
+                <a:spcPct val="140000"/>
+              </a:lnSpc>
+              <a:buNone/>
+            </a:pPr>
+            <a:r>
+              <a:rPr lang="en-US" sz="1400" dirty="0">
+                <a:solidFill>
+                  <a:srgbClr val="2D3748"/>
+                </a:solidFill>
+              </a:rPr>
+              <a:t>高</a:t>
+            </a:r>
+            <a:endParaRPr lang="en-US" sz="1400" dirty="0"/>
+          </a:p>
+          <a:p>
+            <a:pPr indent="0" marL="0">
+              <a:lnSpc>
+                <a:spcPct val="140000"/>
+              </a:lnSpc>
+              <a:buNone/>
+            </a:pPr>
+            <a:endParaRPr lang="en-US" sz="1400" dirty="0"/>
+          </a:p>
+          <a:p>
+            <a:pPr indent="0" marL="0">
+              <a:lnSpc>
+                <a:spcPct val="140000"/>
+              </a:lnSpc>
+              <a:buNone/>
+            </a:pPr>
+            <a:r>
+              <a:rPr lang="en-US" sz="1400" dirty="0">
+                <a:solidFill>
+                  <a:srgbClr val="2D3748"/>
+                </a:solidFill>
+              </a:rPr>
+              <a:t>        </a:t>
+            </a:r>
+            <a:endParaRPr lang="en-US" sz="1400" dirty="0"/>
+          </a:p>
+          <a:p>
+            <a:pPr indent="0" marL="0">
+              <a:lnSpc>
+                <a:spcPct val="140000"/>
+              </a:lnSpc>
+              <a:buNone/>
+            </a:pPr>
+            <a:endParaRPr lang="en-US" sz="1400" dirty="0"/>
+          </a:p>
+          <a:p>
+            <a:pPr indent="0" marL="0">
+              <a:lnSpc>
+                <a:spcPct val="140000"/>
+              </a:lnSpc>
+              <a:buNone/>
+            </a:pPr>
+            <a:r>
+              <a:rPr lang="en-US" sz="1400" dirty="0">
+                <a:solidFill>
+                  <a:srgbClr val="2D3748"/>
+                </a:solidFill>
+              </a:rPr>
+              <a:t>        </a:t>
+            </a:r>
+            <a:endParaRPr lang="en-US" sz="1400" dirty="0"/>
+          </a:p>
+          <a:p>
+            <a:pPr indent="0" marL="0">
+              <a:lnSpc>
+                <a:spcPct val="140000"/>
+              </a:lnSpc>
+              <a:buNone/>
+            </a:pPr>
+            <a:endParaRPr lang="en-US" sz="1400" dirty="0"/>
+          </a:p>
+          <a:p>
+            <a:pPr indent="0" marL="0">
+              <a:lnSpc>
+                <a:spcPct val="140000"/>
+              </a:lnSpc>
+              <a:buNone/>
+            </a:pPr>
+            <a:r>
+              <a:rPr lang="en-US" sz="1400" dirty="0">
+                <a:solidFill>
+                  <a:srgbClr val="2D3748"/>
+                </a:solidFill>
+              </a:rPr>
+              <a:t>          </a:t>
+            </a:r>
+            <a:endParaRPr lang="en-US" sz="1400" dirty="0"/>
+          </a:p>
+          <a:p>
+            <a:pPr indent="0" marL="0">
+              <a:lnSpc>
+                <a:spcPct val="140000"/>
+              </a:lnSpc>
+              <a:buNone/>
+            </a:pPr>
+            <a:r>
+              <a:rPr lang="en-US" sz="1400" dirty="0">
+                <a:solidFill>
+                  <a:srgbClr val="2D3748"/>
+                </a:solidFill>
+              </a:rPr>
+              <a:t>コスト</a:t>
+            </a:r>
+            <a:endParaRPr lang="en-US" sz="1400" dirty="0"/>
+          </a:p>
+          <a:p>
+            <a:pPr indent="0" marL="0">
+              <a:lnSpc>
+                <a:spcPct val="140000"/>
+              </a:lnSpc>
+              <a:buNone/>
+            </a:pPr>
+            <a:endParaRPr lang="en-US" sz="1400" dirty="0"/>
+          </a:p>
+          <a:p>
+            <a:pPr indent="0" marL="0">
+              <a:lnSpc>
+                <a:spcPct val="140000"/>
+              </a:lnSpc>
+              <a:buNone/>
+            </a:pPr>
+            <a:r>
+              <a:rPr lang="en-US" sz="1400" dirty="0">
+                <a:solidFill>
+                  <a:srgbClr val="2D3748"/>
+                </a:solidFill>
+              </a:rPr>
+              <a:t>          </a:t>
+            </a:r>
+            <a:endParaRPr lang="en-US" sz="1400" dirty="0"/>
+          </a:p>
+          <a:p>
+            <a:pPr indent="0" marL="0">
+              <a:lnSpc>
+                <a:spcPct val="140000"/>
+              </a:lnSpc>
+              <a:buNone/>
+            </a:pPr>
+            <a:endParaRPr lang="en-US" sz="1400" dirty="0"/>
+          </a:p>
+          <a:p>
+            <a:pPr indent="0" marL="0">
+              <a:lnSpc>
+                <a:spcPct val="140000"/>
+              </a:lnSpc>
+              <a:buNone/>
+            </a:pPr>
+            <a:r>
+              <a:rPr lang="en-US" sz="1400" dirty="0">
+                <a:solidFill>
+                  <a:srgbClr val="2D3748"/>
+                </a:solidFill>
+              </a:rPr>
+              <a:t>          </a:t>
+            </a:r>
+            <a:endParaRPr lang="en-US" sz="1400" dirty="0"/>
+          </a:p>
+          <a:p>
+            <a:pPr indent="0" marL="0">
+              <a:lnSpc>
+                <a:spcPct val="140000"/>
+              </a:lnSpc>
+              <a:buNone/>
+            </a:pPr>
+            <a:r>
+              <a:rPr lang="en-US" sz="1400" dirty="0">
+                <a:solidFill>
+                  <a:srgbClr val="2D3748"/>
+                </a:solidFill>
+              </a:rPr>
+              <a:t>高</a:t>
+            </a:r>
+            <a:endParaRPr lang="en-US" sz="1400" dirty="0"/>
+          </a:p>
+          <a:p>
+            <a:pPr indent="0" marL="0">
+              <a:lnSpc>
+                <a:spcPct val="140000"/>
+              </a:lnSpc>
+              <a:buNone/>
+            </a:pPr>
+            <a:endParaRPr lang="en-US" sz="1400" dirty="0"/>
+          </a:p>
+          <a:p>
+            <a:pPr indent="0" marL="0">
+              <a:lnSpc>
+                <a:spcPct val="140000"/>
+              </a:lnSpc>
+              <a:buNone/>
+            </a:pPr>
+            <a:r>
+              <a:rPr lang="en-US" sz="1400" dirty="0">
+                <a:solidFill>
+                  <a:srgbClr val="2D3748"/>
+                </a:solidFill>
+              </a:rPr>
+              <a:t>        </a:t>
+            </a:r>
+            <a:endParaRPr lang="en-US" sz="1400" dirty="0"/>
+          </a:p>
+          <a:p>
+            <a:pPr indent="0" marL="0">
+              <a:lnSpc>
+                <a:spcPct val="140000"/>
+              </a:lnSpc>
+              <a:buNone/>
+            </a:pPr>
+            <a:endParaRPr lang="en-US" sz="1400" dirty="0"/>
+          </a:p>
+          <a:p>
+            <a:pPr indent="0" marL="0">
+              <a:lnSpc>
+                <a:spcPct val="140000"/>
+              </a:lnSpc>
+              <a:buNone/>
+            </a:pPr>
+            <a:r>
+              <a:rPr lang="en-US" sz="1400" dirty="0">
+                <a:solidFill>
+                  <a:srgbClr val="2D3748"/>
+                </a:solidFill>
+              </a:rPr>
+              <a:t>      </a:t>
+            </a:r>
+            <a:endParaRPr lang="en-US" sz="1400" dirty="0"/>
+          </a:p>
+          <a:p>
+            <a:pPr indent="0" marL="0">
+              <a:lnSpc>
+                <a:spcPct val="140000"/>
+              </a:lnSpc>
+              <a:buNone/>
+            </a:pPr>
+            <a:endParaRPr lang="en-US" sz="1400" dirty="0"/>
+          </a:p>
+          <a:p>
+            <a:pPr indent="0" marL="0">
+              <a:lnSpc>
+                <a:spcPct val="140000"/>
+              </a:lnSpc>
+              <a:buNone/>
+            </a:pPr>
+            <a:r>
+              <a:rPr lang="en-US" sz="1400" dirty="0">
+                <a:solidFill>
+                  <a:srgbClr val="2D3748"/>
+                </a:solidFill>
+              </a:rPr>
+              <a:t>    </a:t>
+            </a:r>
+            <a:endParaRPr lang="en-US" sz="1400" dirty="0"/>
+          </a:p>
+          <a:p>
+            <a:pPr indent="0" marL="0">
+              <a:lnSpc>
+                <a:spcPct val="140000"/>
+              </a:lnSpc>
+              <a:buNone/>
+            </a:pPr>
+            <a:endParaRPr lang="en-US" sz="1400" dirty="0"/>
+          </a:p>
+          <a:p>
+            <a:pPr indent="0" marL="0">
+              <a:lnSpc>
+                <a:spcPct val="140000"/>
+              </a:lnSpc>
+              <a:buNone/>
+            </a:pPr>
+            <a:r>
+              <a:rPr lang="en-US" sz="1400" dirty="0">
+                <a:solidFill>
+                  <a:srgbClr val="2D3748"/>
+                </a:solidFill>
+              </a:rPr>
+              <a:t>  </a:t>
+            </a:r>
+            <a:endParaRPr lang="en-US" sz="1400" dirty="0"/>
+          </a:p>
+          <a:p>
+            <a:pPr indent="0" marL="0">
+              <a:lnSpc>
+                <a:spcPct val="140000"/>
+              </a:lnSpc>
+              <a:buNone/>
+            </a:pPr>
+            <a:endParaRPr lang="en-US" sz="1400" dirty="0"/>
+          </a:p>
+          <a:p>
+            <a:pPr indent="0" marL="0">
+              <a:lnSpc>
+                <a:spcPct val="140000"/>
+              </a:lnSpc>
+              <a:buNone/>
+            </a:pPr>
+            <a:r>
+              <a:rPr lang="en-US" sz="1400" dirty="0">
+                <a:solidFill>
+                  <a:srgbClr val="2D3748"/>
+                </a:solidFill>
+              </a:rPr>
+              <a:t>  </a:t>
+            </a:r>
+            <a:endParaRPr lang="en-US" sz="1400" dirty="0"/>
+          </a:p>
+          <a:p>
+            <a:pPr indent="0" marL="0">
+              <a:lnSpc>
+                <a:spcPct val="140000"/>
+              </a:lnSpc>
+              <a:buNone/>
+            </a:pPr>
+            <a:r>
+              <a:rPr lang="en-US" sz="1400" dirty="0">
+                <a:solidFill>
+                  <a:srgbClr val="2D3748"/>
+                </a:solidFill>
+              </a:rPr>
+              <a:t>管理者が用途に応じて「信頼性」と「即時性」を選択</a:t>
+            </a:r>
+            <a:endParaRPr lang="en-US" sz="1400" dirty="0"/>
           </a:p>
         </p:txBody>
       </p:sp>
